--- a/Midnight_Privacy_Payment_Vault_Presentation.pptx
+++ b/Midnight_Privacy_Payment_Vault_Presentation.pptx
@@ -3113,7 +3113,7 @@
             <a:avLst/>
           </a:prstGeom>
           <a:solidFill>
-            <a:srgbClr val="0B0D11"/>
+            <a:srgbClr val="08090D"/>
           </a:solidFill>
           <a:ln>
             <a:noFill/>
@@ -3169,13 +3169,13 @@
               </a:spcAft>
               <a:defRPr sz="1100" b="1">
                 <a:solidFill>
-                  <a:srgbClr val="10B981"/>
-                </a:solidFill>
-                <a:latin typeface="Arial"/>
-              </a:defRPr>
-            </a:pPr>
-            <a:r>
-              <a:t>MIDNIGHT NETWORK ZERO-KNOWLEDGE DAPP</a:t>
+                  <a:srgbClr val="00F5A0"/>
+                </a:solidFill>
+                <a:latin typeface="Arial"/>
+              </a:defRPr>
+            </a:pPr>
+            <a:r>
+              <a:t>MIDNIGHT NETWORK // ZERO-KNOWLEDGE SETTLEMENT PROTOCOL</a:t>
             </a:r>
           </a:p>
           <a:p>
@@ -3183,28 +3183,28 @@
               <a:spcAft>
                 <a:spcPts val="1200"/>
               </a:spcAft>
-              <a:defRPr sz="3600" b="1">
-                <a:solidFill>
-                  <a:srgbClr val="F8FAFC"/>
-                </a:solidFill>
-                <a:latin typeface="Arial"/>
-              </a:defRPr>
-            </a:pPr>
-            <a:r>
-              <a:t>Midnight Privacy Payment Vault</a:t>
-            </a:r>
-          </a:p>
-          <a:p>
-            <a:pPr>
-              <a:defRPr sz="1500">
-                <a:solidFill>
-                  <a:srgbClr val="94A3B8"/>
-                </a:solidFill>
-                <a:latin typeface="Arial"/>
-              </a:defRPr>
-            </a:pPr>
-            <a:r>
-              <a:t>Non-Custodial ZK Escrow, Compact Smart Contracts, ProofStation 0-Gas Balancing, and Institutional UI</a:t>
+              <a:defRPr sz="3800" b="1">
+                <a:solidFill>
+                  <a:srgbClr val="FFFFFF"/>
+                </a:solidFill>
+                <a:latin typeface="Arial"/>
+              </a:defRPr>
+            </a:pPr>
+            <a:r>
+              <a:t>KNIGHT.VAULT (v0.20)</a:t>
+            </a:r>
+          </a:p>
+          <a:p>
+            <a:pPr>
+              <a:defRPr sz="1400">
+                <a:solidFill>
+                  <a:srgbClr val="94A3B8"/>
+                </a:solidFill>
+                <a:latin typeface="Arial"/>
+              </a:defRPr>
+            </a:pPr>
+            <a:r>
+              <a:t>Institutional Zero-Knowledge Custody, Compact Smart Contracts, ProofStation 0-Gas Balancing, and Armored Privacy</a:t>
             </a:r>
           </a:p>
         </p:txBody>
@@ -3218,17 +3218,17 @@
         <p:spPr>
           <a:xfrm>
             <a:off x="914400" y="4480560"/>
-            <a:ext cx="10332720" cy="1371600"/>
+            <a:ext cx="10332720" cy="1463040"/>
           </a:xfrm>
           <a:prstGeom prst="roundRect">
             <a:avLst/>
           </a:prstGeom>
           <a:solidFill>
-            <a:srgbClr val="12151C"/>
+            <a:srgbClr val="0E1117"/>
           </a:solidFill>
           <a:ln w="12700">
             <a:solidFill>
-              <a:srgbClr val="1F242E"/>
+              <a:srgbClr val="232A38"/>
             </a:solidFill>
           </a:ln>
         </p:spPr>
@@ -3262,8 +3262,8 @@
         </p:nvSpPr>
         <p:spPr>
           <a:xfrm>
-            <a:off x="1188720" y="4663440"/>
-            <a:ext cx="9784080" cy="1005840"/>
+            <a:off x="1188720" y="4617720"/>
+            <a:ext cx="9784080" cy="1188720"/>
           </a:xfrm>
           <a:prstGeom prst="rect">
             <a:avLst/>
@@ -3279,13 +3279,13 @@
             <a:pPr>
               <a:defRPr sz="1200" b="1">
                 <a:solidFill>
-                  <a:srgbClr val="3B82F6"/>
-                </a:solidFill>
-                <a:latin typeface="Arial"/>
-              </a:defRPr>
-            </a:pPr>
-            <a:r>
-              <a:t>Core Innovation: Mathematical Zero-Knowledge Witness Auth + Zero User Gas Fees (1AM Sponsor Flow)</a:t>
+                  <a:srgbClr val="00F5A0"/>
+                </a:solidFill>
+                <a:latin typeface="Arial"/>
+              </a:defRPr>
+            </a:pPr>
+            <a:r>
+              <a:t>Core Innovation: Mathematical ZK Witness Auth + Sponsored Dust Transactions (Zero User Gas)</a:t>
             </a:r>
           </a:p>
           <a:p>
@@ -3293,15 +3293,28 @@
               <a:spcBef>
                 <a:spcPts val="600"/>
               </a:spcBef>
-              <a:defRPr sz="1050">
-                <a:solidFill>
-                  <a:srgbClr val="94A3B8"/>
-                </a:solidFill>
-                <a:latin typeface="Arial"/>
-              </a:defRPr>
-            </a:pPr>
-            <a:r>
-              <a:t>Stack: Compact v0.20+ | Docker Proof Server (6300) | Midnight.js SDK | React 18 | Vite | Tailwind (Impeccable 0-Flaw)</a:t>
+              <a:defRPr sz="1100" b="1">
+                <a:solidFill>
+                  <a:srgbClr val="818CF8"/>
+                </a:solidFill>
+                <a:latin typeface="Arial"/>
+              </a:defRPr>
+            </a:pPr>
+            <a:r>
+              <a:t>Architected &amp; Engineered by: Kshitij Adakane (Vibe Coder, Systems Builder &amp; Applied AI/ML)</a:t>
+            </a:r>
+          </a:p>
+          <a:p>
+            <a:pPr>
+              <a:defRPr sz="1000">
+                <a:solidFill>
+                  <a:srgbClr val="94A3B8"/>
+                </a:solidFill>
+                <a:latin typeface="Arial"/>
+              </a:defRPr>
+            </a:pPr>
+            <a:r>
+              <a:t>Stack: Compact v0.20+ | Docker ProofStation (:6300) | Midnight.js SDK | React 18 | Vite | Tailwind Kinetic UI</a:t>
             </a:r>
           </a:p>
         </p:txBody>
@@ -3339,7 +3352,7 @@
             <a:avLst/>
           </a:prstGeom>
           <a:solidFill>
-            <a:srgbClr val="0B0D11"/>
+            <a:srgbClr val="08090D"/>
           </a:solidFill>
           <a:ln>
             <a:noFill/>
@@ -3392,13 +3405,13 @@
             <a:pPr>
               <a:defRPr sz="950" b="1">
                 <a:solidFill>
-                  <a:srgbClr val="3B82F6"/>
-                </a:solidFill>
-                <a:latin typeface="Arial"/>
-              </a:defRPr>
-            </a:pPr>
-            <a:r>
-              <a:t>MIDNIGHT NETWORK • HACKATHON PITCH DECK</a:t>
+                  <a:srgbClr val="00F5A0"/>
+                </a:solidFill>
+                <a:latin typeface="Arial"/>
+              </a:defRPr>
+            </a:pPr>
+            <a:r>
+              <a:t>KNIGHT.VAULT // ZERO-KNOWLEDGE PROTOCOL DECK</a:t>
             </a:r>
           </a:p>
         </p:txBody>
@@ -3428,7 +3441,7 @@
             <a:pPr>
               <a:defRPr sz="2000" b="1">
                 <a:solidFill>
-                  <a:srgbClr val="F8FAFC"/>
+                  <a:srgbClr val="FFFFFF"/>
                 </a:solidFill>
                 <a:latin typeface="Arial"/>
               </a:defRPr>
@@ -3454,7 +3467,7 @@
             <a:avLst/>
           </a:prstGeom>
           <a:solidFill>
-            <a:srgbClr val="1F242E"/>
+            <a:srgbClr val="232A38"/>
           </a:solidFill>
           <a:ln>
             <a:noFill/>
@@ -3497,11 +3510,11 @@
             <a:avLst/>
           </a:prstGeom>
           <a:solidFill>
-            <a:srgbClr val="12151C"/>
+            <a:srgbClr val="0E1117"/>
           </a:solidFill>
           <a:ln w="12700">
             <a:solidFill>
-              <a:srgbClr val="1F242E"/>
+              <a:srgbClr val="232A38"/>
             </a:solidFill>
           </a:ln>
         </p:spPr>
@@ -3552,7 +3565,7 @@
             <a:pPr>
               <a:defRPr sz="1300" b="1">
                 <a:solidFill>
-                  <a:srgbClr val="10B981"/>
+                  <a:srgbClr val="00F5A0"/>
                 </a:solidFill>
                 <a:latin typeface="Arial"/>
               </a:defRPr>
@@ -3697,11 +3710,11 @@
             <a:avLst/>
           </a:prstGeom>
           <a:solidFill>
-            <a:srgbClr val="12151C"/>
+            <a:srgbClr val="0E1117"/>
           </a:solidFill>
           <a:ln w="12700">
             <a:solidFill>
-              <a:srgbClr val="1F242E"/>
+              <a:srgbClr val="232A38"/>
             </a:solidFill>
           </a:ln>
         </p:spPr>
@@ -3881,11 +3894,11 @@
             <a:avLst/>
           </a:prstGeom>
           <a:solidFill>
-            <a:srgbClr val="12151C"/>
+            <a:srgbClr val="0E1117"/>
           </a:solidFill>
           <a:ln w="12700">
             <a:solidFill>
-              <a:srgbClr val="1F242E"/>
+              <a:srgbClr val="232A38"/>
             </a:solidFill>
           </a:ln>
         </p:spPr>
@@ -4083,7 +4096,7 @@
             <a:avLst/>
           </a:prstGeom>
           <a:solidFill>
-            <a:srgbClr val="0B0D11"/>
+            <a:srgbClr val="08090D"/>
           </a:solidFill>
           <a:ln>
             <a:noFill/>
@@ -4136,13 +4149,13 @@
             <a:pPr>
               <a:defRPr sz="950" b="1">
                 <a:solidFill>
-                  <a:srgbClr val="3B82F6"/>
-                </a:solidFill>
-                <a:latin typeface="Arial"/>
-              </a:defRPr>
-            </a:pPr>
-            <a:r>
-              <a:t>MIDNIGHT NETWORK • HACKATHON PITCH DECK</a:t>
+                  <a:srgbClr val="00F5A0"/>
+                </a:solidFill>
+                <a:latin typeface="Arial"/>
+              </a:defRPr>
+            </a:pPr>
+            <a:r>
+              <a:t>KNIGHT.VAULT // ZERO-KNOWLEDGE PROTOCOL DECK</a:t>
             </a:r>
           </a:p>
         </p:txBody>
@@ -4172,7 +4185,7 @@
             <a:pPr>
               <a:defRPr sz="2000" b="1">
                 <a:solidFill>
-                  <a:srgbClr val="F8FAFC"/>
+                  <a:srgbClr val="FFFFFF"/>
                 </a:solidFill>
                 <a:latin typeface="Arial"/>
               </a:defRPr>
@@ -4198,7 +4211,7 @@
             <a:avLst/>
           </a:prstGeom>
           <a:solidFill>
-            <a:srgbClr val="1F242E"/>
+            <a:srgbClr val="232A38"/>
           </a:solidFill>
           <a:ln>
             <a:noFill/>
@@ -4241,11 +4254,11 @@
             <a:avLst/>
           </a:prstGeom>
           <a:solidFill>
-            <a:srgbClr val="161B26"/>
+            <a:srgbClr val="141923"/>
           </a:solidFill>
           <a:ln w="12700">
             <a:solidFill>
-              <a:srgbClr val="1F242E"/>
+              <a:srgbClr val="232A38"/>
             </a:solidFill>
           </a:ln>
         </p:spPr>
@@ -4296,7 +4309,7 @@
             <a:pPr>
               <a:defRPr sz="1300" b="1">
                 <a:solidFill>
-                  <a:srgbClr val="10B981"/>
+                  <a:srgbClr val="00F5A0"/>
                 </a:solidFill>
                 <a:latin typeface="Arial"/>
               </a:defRPr>
@@ -4443,7 +4456,7 @@
             <a:avLst/>
           </a:prstGeom>
           <a:solidFill>
-            <a:srgbClr val="0B0D11"/>
+            <a:srgbClr val="08090D"/>
           </a:solidFill>
           <a:ln>
             <a:noFill/>
@@ -4496,13 +4509,13 @@
             <a:pPr>
               <a:defRPr sz="950" b="1">
                 <a:solidFill>
-                  <a:srgbClr val="3B82F6"/>
-                </a:solidFill>
-                <a:latin typeface="Arial"/>
-              </a:defRPr>
-            </a:pPr>
-            <a:r>
-              <a:t>MIDNIGHT NETWORK • HACKATHON PITCH DECK</a:t>
+                  <a:srgbClr val="00F5A0"/>
+                </a:solidFill>
+                <a:latin typeface="Arial"/>
+              </a:defRPr>
+            </a:pPr>
+            <a:r>
+              <a:t>KNIGHT.VAULT // ZERO-KNOWLEDGE PROTOCOL DECK</a:t>
             </a:r>
           </a:p>
         </p:txBody>
@@ -4532,7 +4545,7 @@
             <a:pPr>
               <a:defRPr sz="2000" b="1">
                 <a:solidFill>
-                  <a:srgbClr val="F8FAFC"/>
+                  <a:srgbClr val="FFFFFF"/>
                 </a:solidFill>
                 <a:latin typeface="Arial"/>
               </a:defRPr>
@@ -4558,7 +4571,7 @@
             <a:avLst/>
           </a:prstGeom>
           <a:solidFill>
-            <a:srgbClr val="1F242E"/>
+            <a:srgbClr val="232A38"/>
           </a:solidFill>
           <a:ln>
             <a:noFill/>
@@ -4601,11 +4614,11 @@
             <a:avLst/>
           </a:prstGeom>
           <a:solidFill>
-            <a:srgbClr val="12151C"/>
+            <a:srgbClr val="0E1117"/>
           </a:solidFill>
           <a:ln w="12700">
             <a:solidFill>
-              <a:srgbClr val="1F242E"/>
+              <a:srgbClr val="232A38"/>
             </a:solidFill>
           </a:ln>
         </p:spPr>
@@ -4769,11 +4782,11 @@
             <a:avLst/>
           </a:prstGeom>
           <a:solidFill>
-            <a:srgbClr val="12151C"/>
+            <a:srgbClr val="0E1117"/>
           </a:solidFill>
           <a:ln w="12700">
             <a:solidFill>
-              <a:srgbClr val="1F242E"/>
+              <a:srgbClr val="232A38"/>
             </a:solidFill>
           </a:ln>
         </p:spPr>
@@ -4824,7 +4837,7 @@
             <a:pPr>
               <a:defRPr sz="1300" b="1">
                 <a:solidFill>
-                  <a:srgbClr val="10B981"/>
+                  <a:srgbClr val="00F5A0"/>
                 </a:solidFill>
                 <a:latin typeface="Arial"/>
               </a:defRPr>
@@ -4955,7 +4968,7 @@
             <a:avLst/>
           </a:prstGeom>
           <a:solidFill>
-            <a:srgbClr val="0B0D11"/>
+            <a:srgbClr val="08090D"/>
           </a:solidFill>
           <a:ln>
             <a:noFill/>
@@ -5008,13 +5021,13 @@
             <a:pPr>
               <a:defRPr sz="950" b="1">
                 <a:solidFill>
-                  <a:srgbClr val="3B82F6"/>
-                </a:solidFill>
-                <a:latin typeface="Arial"/>
-              </a:defRPr>
-            </a:pPr>
-            <a:r>
-              <a:t>MIDNIGHT NETWORK • HACKATHON PITCH DECK</a:t>
+                  <a:srgbClr val="00F5A0"/>
+                </a:solidFill>
+                <a:latin typeface="Arial"/>
+              </a:defRPr>
+            </a:pPr>
+            <a:r>
+              <a:t>KNIGHT.VAULT // ZERO-KNOWLEDGE PROTOCOL DECK</a:t>
             </a:r>
           </a:p>
         </p:txBody>
@@ -5044,7 +5057,7 @@
             <a:pPr>
               <a:defRPr sz="2000" b="1">
                 <a:solidFill>
-                  <a:srgbClr val="F8FAFC"/>
+                  <a:srgbClr val="FFFFFF"/>
                 </a:solidFill>
                 <a:latin typeface="Arial"/>
               </a:defRPr>
@@ -5070,7 +5083,7 @@
             <a:avLst/>
           </a:prstGeom>
           <a:solidFill>
-            <a:srgbClr val="1F242E"/>
+            <a:srgbClr val="232A38"/>
           </a:solidFill>
           <a:ln>
             <a:noFill/>
@@ -5113,11 +5126,11 @@
             <a:avLst/>
           </a:prstGeom>
           <a:solidFill>
-            <a:srgbClr val="12151C"/>
+            <a:srgbClr val="0E1117"/>
           </a:solidFill>
           <a:ln w="12700">
             <a:solidFill>
-              <a:srgbClr val="1F242E"/>
+              <a:srgbClr val="232A38"/>
             </a:solidFill>
           </a:ln>
         </p:spPr>
@@ -5168,7 +5181,7 @@
             <a:pPr>
               <a:defRPr sz="1300" b="1">
                 <a:solidFill>
-                  <a:srgbClr val="3B82F6"/>
+                  <a:srgbClr val="818CF8"/>
                 </a:solidFill>
                 <a:latin typeface="Arial"/>
               </a:defRPr>
@@ -5265,11 +5278,11 @@
             <a:avLst/>
           </a:prstGeom>
           <a:solidFill>
-            <a:srgbClr val="12151C"/>
+            <a:srgbClr val="0E1117"/>
           </a:solidFill>
           <a:ln w="12700">
             <a:solidFill>
-              <a:srgbClr val="1F242E"/>
+              <a:srgbClr val="232A38"/>
             </a:solidFill>
           </a:ln>
         </p:spPr>
@@ -5417,11 +5430,11 @@
             <a:avLst/>
           </a:prstGeom>
           <a:solidFill>
-            <a:srgbClr val="12151C"/>
+            <a:srgbClr val="0E1117"/>
           </a:solidFill>
           <a:ln w="12700">
             <a:solidFill>
-              <a:srgbClr val="1F242E"/>
+              <a:srgbClr val="232A38"/>
             </a:solidFill>
           </a:ln>
         </p:spPr>
@@ -5472,7 +5485,7 @@
             <a:pPr>
               <a:defRPr sz="1300" b="1">
                 <a:solidFill>
-                  <a:srgbClr val="10B981"/>
+                  <a:srgbClr val="00F5A0"/>
                 </a:solidFill>
                 <a:latin typeface="Arial"/>
               </a:defRPr>
@@ -5569,11 +5582,11 @@
             <a:avLst/>
           </a:prstGeom>
           <a:solidFill>
-            <a:srgbClr val="12151C"/>
+            <a:srgbClr val="0E1117"/>
           </a:solidFill>
           <a:ln w="12700">
             <a:solidFill>
-              <a:srgbClr val="1F242E"/>
+              <a:srgbClr val="232A38"/>
             </a:solidFill>
           </a:ln>
         </p:spPr>
@@ -5721,11 +5734,11 @@
             <a:avLst/>
           </a:prstGeom>
           <a:solidFill>
-            <a:srgbClr val="12151C"/>
+            <a:srgbClr val="0E1117"/>
           </a:solidFill>
           <a:ln w="12700">
             <a:solidFill>
-              <a:srgbClr val="1F242E"/>
+              <a:srgbClr val="232A38"/>
             </a:solidFill>
           </a:ln>
         </p:spPr>
@@ -5776,7 +5789,7 @@
             <a:pPr>
               <a:defRPr sz="1300" b="1">
                 <a:solidFill>
-                  <a:srgbClr val="F8FAFC"/>
+                  <a:srgbClr val="FFFFFF"/>
                 </a:solidFill>
                 <a:latin typeface="Arial"/>
               </a:defRPr>
@@ -5873,11 +5886,11 @@
             <a:avLst/>
           </a:prstGeom>
           <a:solidFill>
-            <a:srgbClr val="12151C"/>
+            <a:srgbClr val="0E1117"/>
           </a:solidFill>
           <a:ln w="12700">
             <a:solidFill>
-              <a:srgbClr val="1F242E"/>
+              <a:srgbClr val="232A38"/>
             </a:solidFill>
           </a:ln>
         </p:spPr>
@@ -6043,7 +6056,7 @@
             <a:avLst/>
           </a:prstGeom>
           <a:solidFill>
-            <a:srgbClr val="0B0D11"/>
+            <a:srgbClr val="08090D"/>
           </a:solidFill>
           <a:ln>
             <a:noFill/>
@@ -6096,13 +6109,13 @@
             <a:pPr>
               <a:defRPr sz="950" b="1">
                 <a:solidFill>
-                  <a:srgbClr val="3B82F6"/>
-                </a:solidFill>
-                <a:latin typeface="Arial"/>
-              </a:defRPr>
-            </a:pPr>
-            <a:r>
-              <a:t>MIDNIGHT NETWORK • HACKATHON PITCH DECK</a:t>
+                  <a:srgbClr val="00F5A0"/>
+                </a:solidFill>
+                <a:latin typeface="Arial"/>
+              </a:defRPr>
+            </a:pPr>
+            <a:r>
+              <a:t>KNIGHT.VAULT // ZERO-KNOWLEDGE PROTOCOL DECK</a:t>
             </a:r>
           </a:p>
         </p:txBody>
@@ -6132,7 +6145,7 @@
             <a:pPr>
               <a:defRPr sz="2000" b="1">
                 <a:solidFill>
-                  <a:srgbClr val="F8FAFC"/>
+                  <a:srgbClr val="FFFFFF"/>
                 </a:solidFill>
                 <a:latin typeface="Arial"/>
               </a:defRPr>
@@ -6158,7 +6171,7 @@
             <a:avLst/>
           </a:prstGeom>
           <a:solidFill>
-            <a:srgbClr val="1F242E"/>
+            <a:srgbClr val="232A38"/>
           </a:solidFill>
           <a:ln>
             <a:noFill/>
@@ -6201,11 +6214,11 @@
             <a:avLst/>
           </a:prstGeom>
           <a:solidFill>
-            <a:srgbClr val="12151C"/>
+            <a:srgbClr val="0E1117"/>
           </a:solidFill>
           <a:ln w="12700">
             <a:solidFill>
-              <a:srgbClr val="1F242E"/>
+              <a:srgbClr val="232A38"/>
             </a:solidFill>
           </a:ln>
         </p:spPr>
@@ -6401,11 +6414,11 @@
             <a:avLst/>
           </a:prstGeom>
           <a:solidFill>
-            <a:srgbClr val="12151C"/>
+            <a:srgbClr val="0E1117"/>
           </a:solidFill>
           <a:ln w="12700">
             <a:solidFill>
-              <a:srgbClr val="1F242E"/>
+              <a:srgbClr val="232A38"/>
             </a:solidFill>
           </a:ln>
         </p:spPr>
@@ -6601,11 +6614,11 @@
             <a:avLst/>
           </a:prstGeom>
           <a:solidFill>
-            <a:srgbClr val="12151C"/>
+            <a:srgbClr val="0E1117"/>
           </a:solidFill>
           <a:ln w="12700">
             <a:solidFill>
-              <a:srgbClr val="1F242E"/>
+              <a:srgbClr val="232A38"/>
             </a:solidFill>
           </a:ln>
         </p:spPr>
@@ -6801,11 +6814,11 @@
             <a:avLst/>
           </a:prstGeom>
           <a:solidFill>
-            <a:srgbClr val="161B26"/>
+            <a:srgbClr val="141923"/>
           </a:solidFill>
           <a:ln w="12700">
             <a:solidFill>
-              <a:srgbClr val="1F242E"/>
+              <a:srgbClr val="232A38"/>
             </a:solidFill>
           </a:ln>
         </p:spPr>
@@ -6856,7 +6869,7 @@
             <a:pPr>
               <a:defRPr sz="1300" b="1">
                 <a:solidFill>
-                  <a:srgbClr val="10B981"/>
+                  <a:srgbClr val="00F5A0"/>
                 </a:solidFill>
                 <a:latin typeface="Arial"/>
               </a:defRPr>
@@ -7019,7 +7032,7 @@
             <a:avLst/>
           </a:prstGeom>
           <a:solidFill>
-            <a:srgbClr val="0B0D11"/>
+            <a:srgbClr val="08090D"/>
           </a:solidFill>
           <a:ln>
             <a:noFill/>
@@ -7072,13 +7085,13 @@
             <a:pPr>
               <a:defRPr sz="950" b="1">
                 <a:solidFill>
-                  <a:srgbClr val="3B82F6"/>
-                </a:solidFill>
-                <a:latin typeface="Arial"/>
-              </a:defRPr>
-            </a:pPr>
-            <a:r>
-              <a:t>MIDNIGHT NETWORK • HACKATHON PITCH DECK</a:t>
+                  <a:srgbClr val="00F5A0"/>
+                </a:solidFill>
+                <a:latin typeface="Arial"/>
+              </a:defRPr>
+            </a:pPr>
+            <a:r>
+              <a:t>KNIGHT.VAULT // ZERO-KNOWLEDGE PROTOCOL DECK</a:t>
             </a:r>
           </a:p>
         </p:txBody>
@@ -7108,7 +7121,7 @@
             <a:pPr>
               <a:defRPr sz="2000" b="1">
                 <a:solidFill>
-                  <a:srgbClr val="F8FAFC"/>
+                  <a:srgbClr val="FFFFFF"/>
                 </a:solidFill>
                 <a:latin typeface="Arial"/>
               </a:defRPr>
@@ -7134,7 +7147,7 @@
             <a:avLst/>
           </a:prstGeom>
           <a:solidFill>
-            <a:srgbClr val="1F242E"/>
+            <a:srgbClr val="232A38"/>
           </a:solidFill>
           <a:ln>
             <a:noFill/>
@@ -7177,11 +7190,11 @@
             <a:avLst/>
           </a:prstGeom>
           <a:solidFill>
-            <a:srgbClr val="12151C"/>
+            <a:srgbClr val="0E1117"/>
           </a:solidFill>
           <a:ln w="12700">
             <a:solidFill>
-              <a:srgbClr val="1F242E"/>
+              <a:srgbClr val="232A38"/>
             </a:solidFill>
           </a:ln>
         </p:spPr>
@@ -7232,7 +7245,7 @@
             <a:pPr>
               <a:defRPr sz="1300" b="1">
                 <a:solidFill>
-                  <a:srgbClr val="3B82F6"/>
+                  <a:srgbClr val="818CF8"/>
                 </a:solidFill>
                 <a:latin typeface="Arial"/>
               </a:defRPr>
@@ -7377,11 +7390,11 @@
             <a:avLst/>
           </a:prstGeom>
           <a:solidFill>
-            <a:srgbClr val="12151C"/>
+            <a:srgbClr val="0E1117"/>
           </a:solidFill>
           <a:ln w="12700">
             <a:solidFill>
-              <a:srgbClr val="1F242E"/>
+              <a:srgbClr val="232A38"/>
             </a:solidFill>
           </a:ln>
         </p:spPr>
@@ -7577,11 +7590,11 @@
             <a:avLst/>
           </a:prstGeom>
           <a:solidFill>
-            <a:srgbClr val="12151C"/>
+            <a:srgbClr val="0E1117"/>
           </a:solidFill>
           <a:ln w="12700">
             <a:solidFill>
-              <a:srgbClr val="1F242E"/>
+              <a:srgbClr val="232A38"/>
             </a:solidFill>
           </a:ln>
         </p:spPr>
@@ -7632,7 +7645,7 @@
             <a:pPr>
               <a:defRPr sz="1300" b="1">
                 <a:solidFill>
-                  <a:srgbClr val="10B981"/>
+                  <a:srgbClr val="00F5A0"/>
                 </a:solidFill>
                 <a:latin typeface="Arial"/>
               </a:defRPr>
@@ -7777,11 +7790,11 @@
             <a:avLst/>
           </a:prstGeom>
           <a:solidFill>
-            <a:srgbClr val="12151C"/>
+            <a:srgbClr val="0E1117"/>
           </a:solidFill>
           <a:ln w="12700">
             <a:solidFill>
-              <a:srgbClr val="1F242E"/>
+              <a:srgbClr val="232A38"/>
             </a:solidFill>
           </a:ln>
         </p:spPr>
@@ -7995,7 +8008,7 @@
             <a:avLst/>
           </a:prstGeom>
           <a:solidFill>
-            <a:srgbClr val="0B0D11"/>
+            <a:srgbClr val="08090D"/>
           </a:solidFill>
           <a:ln>
             <a:noFill/>
@@ -8048,13 +8061,13 @@
             <a:pPr>
               <a:defRPr sz="950" b="1">
                 <a:solidFill>
-                  <a:srgbClr val="3B82F6"/>
-                </a:solidFill>
-                <a:latin typeface="Arial"/>
-              </a:defRPr>
-            </a:pPr>
-            <a:r>
-              <a:t>MIDNIGHT NETWORK • HACKATHON PITCH DECK</a:t>
+                  <a:srgbClr val="00F5A0"/>
+                </a:solidFill>
+                <a:latin typeface="Arial"/>
+              </a:defRPr>
+            </a:pPr>
+            <a:r>
+              <a:t>KNIGHT.VAULT // ZERO-KNOWLEDGE PROTOCOL DECK</a:t>
             </a:r>
           </a:p>
         </p:txBody>
@@ -8084,7 +8097,7 @@
             <a:pPr>
               <a:defRPr sz="2000" b="1">
                 <a:solidFill>
-                  <a:srgbClr val="F8FAFC"/>
+                  <a:srgbClr val="FFFFFF"/>
                 </a:solidFill>
                 <a:latin typeface="Arial"/>
               </a:defRPr>
@@ -8110,7 +8123,7 @@
             <a:avLst/>
           </a:prstGeom>
           <a:solidFill>
-            <a:srgbClr val="1F242E"/>
+            <a:srgbClr val="232A38"/>
           </a:solidFill>
           <a:ln>
             <a:noFill/>
@@ -8153,11 +8166,11 @@
             <a:avLst/>
           </a:prstGeom>
           <a:solidFill>
-            <a:srgbClr val="12151C"/>
+            <a:srgbClr val="0E1117"/>
           </a:solidFill>
           <a:ln w="12700">
             <a:solidFill>
-              <a:srgbClr val="1F242E"/>
+              <a:srgbClr val="232A38"/>
             </a:solidFill>
           </a:ln>
         </p:spPr>
@@ -8208,7 +8221,7 @@
             <a:pPr>
               <a:defRPr sz="1300" b="1">
                 <a:solidFill>
-                  <a:srgbClr val="3B82F6"/>
+                  <a:srgbClr val="818CF8"/>
                 </a:solidFill>
                 <a:latin typeface="Arial"/>
               </a:defRPr>
@@ -8321,11 +8334,11 @@
             <a:avLst/>
           </a:prstGeom>
           <a:solidFill>
-            <a:srgbClr val="12151C"/>
+            <a:srgbClr val="0E1117"/>
           </a:solidFill>
           <a:ln w="12700">
             <a:solidFill>
-              <a:srgbClr val="1F242E"/>
+              <a:srgbClr val="232A38"/>
             </a:solidFill>
           </a:ln>
         </p:spPr>
@@ -8376,7 +8389,7 @@
             <a:pPr>
               <a:defRPr sz="1300" b="1">
                 <a:solidFill>
-                  <a:srgbClr val="10B981"/>
+                  <a:srgbClr val="00F5A0"/>
                 </a:solidFill>
                 <a:latin typeface="Arial"/>
               </a:defRPr>
@@ -8507,7 +8520,7 @@
             <a:avLst/>
           </a:prstGeom>
           <a:solidFill>
-            <a:srgbClr val="0B0D11"/>
+            <a:srgbClr val="08090D"/>
           </a:solidFill>
           <a:ln>
             <a:noFill/>
@@ -8560,13 +8573,13 @@
             <a:pPr>
               <a:defRPr sz="950" b="1">
                 <a:solidFill>
-                  <a:srgbClr val="3B82F6"/>
-                </a:solidFill>
-                <a:latin typeface="Arial"/>
-              </a:defRPr>
-            </a:pPr>
-            <a:r>
-              <a:t>MIDNIGHT NETWORK • HACKATHON PITCH DECK</a:t>
+                  <a:srgbClr val="00F5A0"/>
+                </a:solidFill>
+                <a:latin typeface="Arial"/>
+              </a:defRPr>
+            </a:pPr>
+            <a:r>
+              <a:t>KNIGHT.VAULT // ZERO-KNOWLEDGE PROTOCOL DECK</a:t>
             </a:r>
           </a:p>
         </p:txBody>
@@ -8596,7 +8609,7 @@
             <a:pPr>
               <a:defRPr sz="2000" b="1">
                 <a:solidFill>
-                  <a:srgbClr val="F8FAFC"/>
+                  <a:srgbClr val="FFFFFF"/>
                 </a:solidFill>
                 <a:latin typeface="Arial"/>
               </a:defRPr>
@@ -8622,7 +8635,7 @@
             <a:avLst/>
           </a:prstGeom>
           <a:solidFill>
-            <a:srgbClr val="1F242E"/>
+            <a:srgbClr val="232A38"/>
           </a:solidFill>
           <a:ln>
             <a:noFill/>
@@ -8665,11 +8678,11 @@
             <a:avLst/>
           </a:prstGeom>
           <a:solidFill>
-            <a:srgbClr val="12151C"/>
+            <a:srgbClr val="0E1117"/>
           </a:solidFill>
           <a:ln w="12700">
             <a:solidFill>
-              <a:srgbClr val="1F242E"/>
+              <a:srgbClr val="232A38"/>
             </a:solidFill>
           </a:ln>
         </p:spPr>
@@ -8720,7 +8733,7 @@
             <a:pPr>
               <a:defRPr sz="1300" b="1">
                 <a:solidFill>
-                  <a:srgbClr val="3B82F6"/>
+                  <a:srgbClr val="00F5A0"/>
                 </a:solidFill>
                 <a:latin typeface="Arial"/>
               </a:defRPr>
@@ -8785,11 +8798,11 @@
             <a:avLst/>
           </a:prstGeom>
           <a:solidFill>
-            <a:srgbClr val="12151C"/>
+            <a:srgbClr val="0E1117"/>
           </a:solidFill>
           <a:ln w="12700">
             <a:solidFill>
-              <a:srgbClr val="1F242E"/>
+              <a:srgbClr val="232A38"/>
             </a:solidFill>
           </a:ln>
         </p:spPr>
@@ -8840,7 +8853,7 @@
             <a:pPr>
               <a:defRPr sz="1300" b="1">
                 <a:solidFill>
-                  <a:srgbClr val="3B82F6"/>
+                  <a:srgbClr val="00F5A0"/>
                 </a:solidFill>
                 <a:latin typeface="Arial"/>
               </a:defRPr>
@@ -8905,11 +8918,11 @@
             <a:avLst/>
           </a:prstGeom>
           <a:solidFill>
-            <a:srgbClr val="12151C"/>
+            <a:srgbClr val="0E1117"/>
           </a:solidFill>
           <a:ln w="12700">
             <a:solidFill>
-              <a:srgbClr val="1F242E"/>
+              <a:srgbClr val="232A38"/>
             </a:solidFill>
           </a:ln>
         </p:spPr>
@@ -8960,7 +8973,7 @@
             <a:pPr>
               <a:defRPr sz="1300" b="1">
                 <a:solidFill>
-                  <a:srgbClr val="3B82F6"/>
+                  <a:srgbClr val="00F5A0"/>
                 </a:solidFill>
                 <a:latin typeface="Arial"/>
               </a:defRPr>
@@ -9025,11 +9038,11 @@
             <a:avLst/>
           </a:prstGeom>
           <a:solidFill>
-            <a:srgbClr val="12151C"/>
+            <a:srgbClr val="0E1117"/>
           </a:solidFill>
           <a:ln w="12700">
             <a:solidFill>
-              <a:srgbClr val="1F242E"/>
+              <a:srgbClr val="232A38"/>
             </a:solidFill>
           </a:ln>
         </p:spPr>
@@ -9080,7 +9093,7 @@
             <a:pPr>
               <a:defRPr sz="1300" b="1">
                 <a:solidFill>
-                  <a:srgbClr val="3B82F6"/>
+                  <a:srgbClr val="00F5A0"/>
                 </a:solidFill>
                 <a:latin typeface="Arial"/>
               </a:defRPr>
@@ -9163,7 +9176,7 @@
             <a:avLst/>
           </a:prstGeom>
           <a:solidFill>
-            <a:srgbClr val="0B0D11"/>
+            <a:srgbClr val="08090D"/>
           </a:solidFill>
           <a:ln>
             <a:noFill/>
@@ -9216,13 +9229,13 @@
             <a:pPr>
               <a:defRPr sz="950" b="1">
                 <a:solidFill>
-                  <a:srgbClr val="3B82F6"/>
-                </a:solidFill>
-                <a:latin typeface="Arial"/>
-              </a:defRPr>
-            </a:pPr>
-            <a:r>
-              <a:t>MIDNIGHT NETWORK • HACKATHON PITCH DECK</a:t>
+                  <a:srgbClr val="00F5A0"/>
+                </a:solidFill>
+                <a:latin typeface="Arial"/>
+              </a:defRPr>
+            </a:pPr>
+            <a:r>
+              <a:t>KNIGHT.VAULT // ZERO-KNOWLEDGE PROTOCOL DECK</a:t>
             </a:r>
           </a:p>
         </p:txBody>
@@ -9252,7 +9265,7 @@
             <a:pPr>
               <a:defRPr sz="2000" b="1">
                 <a:solidFill>
-                  <a:srgbClr val="F8FAFC"/>
+                  <a:srgbClr val="FFFFFF"/>
                 </a:solidFill>
                 <a:latin typeface="Arial"/>
               </a:defRPr>
@@ -9278,7 +9291,7 @@
             <a:avLst/>
           </a:prstGeom>
           <a:solidFill>
-            <a:srgbClr val="1F242E"/>
+            <a:srgbClr val="232A38"/>
           </a:solidFill>
           <a:ln>
             <a:noFill/>
@@ -9321,11 +9334,11 @@
             <a:avLst/>
           </a:prstGeom>
           <a:solidFill>
-            <a:srgbClr val="12151C"/>
+            <a:srgbClr val="0E1117"/>
           </a:solidFill>
           <a:ln w="12700">
             <a:solidFill>
-              <a:srgbClr val="1F242E"/>
+              <a:srgbClr val="232A38"/>
             </a:solidFill>
           </a:ln>
         </p:spPr>
@@ -9376,7 +9389,7 @@
             <a:pPr>
               <a:defRPr sz="1300" b="1">
                 <a:solidFill>
-                  <a:srgbClr val="3B82F6"/>
+                  <a:srgbClr val="818CF8"/>
                 </a:solidFill>
                 <a:latin typeface="Arial"/>
               </a:defRPr>
@@ -9489,11 +9502,11 @@
             <a:avLst/>
           </a:prstGeom>
           <a:solidFill>
-            <a:srgbClr val="12151C"/>
+            <a:srgbClr val="0E1117"/>
           </a:solidFill>
           <a:ln w="12700">
             <a:solidFill>
-              <a:srgbClr val="1F242E"/>
+              <a:srgbClr val="232A38"/>
             </a:solidFill>
           </a:ln>
         </p:spPr>
@@ -9657,11 +9670,11 @@
             <a:avLst/>
           </a:prstGeom>
           <a:solidFill>
-            <a:srgbClr val="12151C"/>
+            <a:srgbClr val="0E1117"/>
           </a:solidFill>
           <a:ln w="12700">
             <a:solidFill>
-              <a:srgbClr val="1F242E"/>
+              <a:srgbClr val="232A38"/>
             </a:solidFill>
           </a:ln>
         </p:spPr>
@@ -9712,7 +9725,7 @@
             <a:pPr>
               <a:defRPr sz="1300" b="1">
                 <a:solidFill>
-                  <a:srgbClr val="10B981"/>
+                  <a:srgbClr val="00F5A0"/>
                 </a:solidFill>
                 <a:latin typeface="Arial"/>
               </a:defRPr>
@@ -9843,7 +9856,7 @@
             <a:avLst/>
           </a:prstGeom>
           <a:solidFill>
-            <a:srgbClr val="0B0D11"/>
+            <a:srgbClr val="08090D"/>
           </a:solidFill>
           <a:ln>
             <a:noFill/>
@@ -9896,13 +9909,13 @@
             <a:pPr>
               <a:defRPr sz="950" b="1">
                 <a:solidFill>
-                  <a:srgbClr val="3B82F6"/>
-                </a:solidFill>
-                <a:latin typeface="Arial"/>
-              </a:defRPr>
-            </a:pPr>
-            <a:r>
-              <a:t>MIDNIGHT NETWORK • HACKATHON PITCH DECK</a:t>
+                  <a:srgbClr val="00F5A0"/>
+                </a:solidFill>
+                <a:latin typeface="Arial"/>
+              </a:defRPr>
+            </a:pPr>
+            <a:r>
+              <a:t>KNIGHT.VAULT // ZERO-KNOWLEDGE PROTOCOL DECK</a:t>
             </a:r>
           </a:p>
         </p:txBody>
@@ -9932,7 +9945,7 @@
             <a:pPr>
               <a:defRPr sz="2000" b="1">
                 <a:solidFill>
-                  <a:srgbClr val="F8FAFC"/>
+                  <a:srgbClr val="FFFFFF"/>
                 </a:solidFill>
                 <a:latin typeface="Arial"/>
               </a:defRPr>
@@ -9958,7 +9971,7 @@
             <a:avLst/>
           </a:prstGeom>
           <a:solidFill>
-            <a:srgbClr val="1F242E"/>
+            <a:srgbClr val="232A38"/>
           </a:solidFill>
           <a:ln>
             <a:noFill/>
@@ -10001,11 +10014,11 @@
             <a:avLst/>
           </a:prstGeom>
           <a:solidFill>
-            <a:srgbClr val="12151C"/>
+            <a:srgbClr val="0E1117"/>
           </a:solidFill>
           <a:ln w="12700">
             <a:solidFill>
-              <a:srgbClr val="1F242E"/>
+              <a:srgbClr val="232A38"/>
             </a:solidFill>
           </a:ln>
         </p:spPr>
@@ -10056,7 +10069,7 @@
             <a:pPr>
               <a:defRPr sz="1300" b="1">
                 <a:solidFill>
-                  <a:srgbClr val="3B82F6"/>
+                  <a:srgbClr val="818CF8"/>
                 </a:solidFill>
                 <a:latin typeface="Arial"/>
               </a:defRPr>
@@ -10153,11 +10166,11 @@
             <a:avLst/>
           </a:prstGeom>
           <a:solidFill>
-            <a:srgbClr val="12151C"/>
+            <a:srgbClr val="0E1117"/>
           </a:solidFill>
           <a:ln w="12700">
             <a:solidFill>
-              <a:srgbClr val="1F242E"/>
+              <a:srgbClr val="232A38"/>
             </a:solidFill>
           </a:ln>
         </p:spPr>
@@ -10305,11 +10318,11 @@
             <a:avLst/>
           </a:prstGeom>
           <a:solidFill>
-            <a:srgbClr val="12151C"/>
+            <a:srgbClr val="0E1117"/>
           </a:solidFill>
           <a:ln w="12700">
             <a:solidFill>
-              <a:srgbClr val="1F242E"/>
+              <a:srgbClr val="232A38"/>
             </a:solidFill>
           </a:ln>
         </p:spPr>
@@ -10360,7 +10373,7 @@
             <a:pPr>
               <a:defRPr sz="1300" b="1">
                 <a:solidFill>
-                  <a:srgbClr val="10B981"/>
+                  <a:srgbClr val="00F5A0"/>
                 </a:solidFill>
                 <a:latin typeface="Arial"/>
               </a:defRPr>
@@ -10457,11 +10470,11 @@
             <a:avLst/>
           </a:prstGeom>
           <a:solidFill>
-            <a:srgbClr val="12151C"/>
+            <a:srgbClr val="0E1117"/>
           </a:solidFill>
           <a:ln w="12700">
             <a:solidFill>
-              <a:srgbClr val="1F242E"/>
+              <a:srgbClr val="232A38"/>
             </a:solidFill>
           </a:ln>
         </p:spPr>

--- a/Midnight_Privacy_Payment_Vault_Presentation.pptx
+++ b/Midnight_Privacy_Payment_Vault_Presentation.pptx
@@ -11,11 +11,6 @@
     <p:sldId id="259" r:id="rId10"/>
     <p:sldId id="260" r:id="rId11"/>
     <p:sldId id="261" r:id="rId12"/>
-    <p:sldId id="262" r:id="rId13"/>
-    <p:sldId id="263" r:id="rId14"/>
-    <p:sldId id="264" r:id="rId15"/>
-    <p:sldId id="265" r:id="rId16"/>
-    <p:sldId id="266" r:id="rId17"/>
   </p:sldIdLst>
   <p:sldSz cx="12191695" cy="6858000" type="screen4x3"/>
   <p:notesSz cx="6858000" cy="9144000"/>
@@ -3149,8 +3144,44 @@
         </p:nvSpPr>
         <p:spPr>
           <a:xfrm>
-            <a:off x="914400" y="1371600"/>
-            <a:ext cx="10332720" cy="2926080"/>
+            <a:off x="914400" y="1005840"/>
+            <a:ext cx="10332720" cy="320040"/>
+          </a:xfrm>
+          <a:prstGeom prst="rect">
+            <a:avLst/>
+          </a:prstGeom>
+          <a:noFill/>
+        </p:spPr>
+        <p:txBody>
+          <a:bodyPr wrap="none">
+            <a:spAutoFit/>
+          </a:bodyPr>
+          <a:lstStyle/>
+          <a:p>
+            <a:pPr>
+              <a:defRPr sz="1050" b="1">
+                <a:solidFill>
+                  <a:srgbClr val="00F5A0"/>
+                </a:solidFill>
+                <a:latin typeface="Arial"/>
+              </a:defRPr>
+            </a:pPr>
+            <a:r>
+              <a:t>MIDNIGHT NETWORK // ZERO-KNOWLEDGE SETTLEMENT PROTOCOL</a:t>
+            </a:r>
+          </a:p>
+        </p:txBody>
+      </p:sp>
+      <p:sp>
+        <p:nvSpPr>
+          <p:cNvPr id="4" name="TextBox 3"/>
+          <p:cNvSpPr txBox="1"/>
+          <p:nvPr/>
+        </p:nvSpPr>
+        <p:spPr>
+          <a:xfrm>
+            <a:off x="914400" y="1325880"/>
+            <a:ext cx="10332720" cy="2011680"/>
           </a:xfrm>
           <a:prstGeom prst="rect">
             <a:avLst/>
@@ -3165,60 +3196,44 @@
           <a:p>
             <a:pPr>
               <a:spcAft>
-                <a:spcPts val="1000"/>
+                <a:spcPts val="800"/>
               </a:spcAft>
-              <a:defRPr sz="1100" b="1">
-                <a:solidFill>
-                  <a:srgbClr val="00F5A0"/>
+              <a:defRPr sz="4000" b="1">
+                <a:solidFill>
+                  <a:srgbClr val="FFFFFF"/>
                 </a:solidFill>
                 <a:latin typeface="Arial"/>
               </a:defRPr>
             </a:pPr>
             <a:r>
-              <a:t>MIDNIGHT NETWORK // ZERO-KNOWLEDGE SETTLEMENT PROTOCOL</a:t>
-            </a:r>
-          </a:p>
-          <a:p>
-            <a:pPr>
-              <a:spcAft>
-                <a:spcPts val="1200"/>
-              </a:spcAft>
-              <a:defRPr sz="3800" b="1">
-                <a:solidFill>
-                  <a:srgbClr val="FFFFFF"/>
+              <a:t>KNIGHT.VAULT (v0.20)</a:t>
+            </a:r>
+          </a:p>
+          <a:p>
+            <a:pPr>
+              <a:defRPr sz="1400">
+                <a:solidFill>
+                  <a:srgbClr val="94A3B8"/>
                 </a:solidFill>
                 <a:latin typeface="Arial"/>
               </a:defRPr>
             </a:pPr>
             <a:r>
-              <a:t>KNIGHT.VAULT (v0.20)</a:t>
-            </a:r>
-          </a:p>
-          <a:p>
-            <a:pPr>
-              <a:defRPr sz="1400">
-                <a:solidFill>
-                  <a:srgbClr val="94A3B8"/>
-                </a:solidFill>
-                <a:latin typeface="Arial"/>
-              </a:defRPr>
-            </a:pPr>
-            <a:r>
-              <a:t>Institutional Zero-Knowledge Custody, Compact Smart Contracts, ProofStation 0-Gas Balancing, and Armored Privacy</a:t>
-            </a:r>
-          </a:p>
-        </p:txBody>
-      </p:sp>
-      <p:sp>
-        <p:nvSpPr>
-          <p:cNvPr id="4" name="Rounded Rectangle 3"/>
+              <a:t>Institutional Zero-Knowledge Custody, Compact Smart Contracts, ProofStation 0-Gas Balancing, and Armored Privacy.</a:t>
+            </a:r>
+          </a:p>
+        </p:txBody>
+      </p:sp>
+      <p:sp>
+        <p:nvSpPr>
+          <p:cNvPr id="5" name="Rounded Rectangle 4"/>
           <p:cNvSpPr/>
           <p:nvPr/>
         </p:nvSpPr>
         <p:spPr>
           <a:xfrm>
-            <a:off x="914400" y="4480560"/>
-            <a:ext cx="10332720" cy="1463040"/>
+            <a:off x="914400" y="3474720"/>
+            <a:ext cx="2450592" cy="1463040"/>
           </a:xfrm>
           <a:prstGeom prst="roundRect">
             <a:avLst/>
@@ -3256,14 +3271,14 @@
       </p:sp>
       <p:sp>
         <p:nvSpPr>
-          <p:cNvPr id="5" name="TextBox 4"/>
+          <p:cNvPr id="6" name="TextBox 5"/>
           <p:cNvSpPr txBox="1"/>
           <p:nvPr/>
         </p:nvSpPr>
         <p:spPr>
           <a:xfrm>
-            <a:off x="1188720" y="4617720"/>
-            <a:ext cx="9784080" cy="1188720"/>
+            <a:off x="1051560" y="3611880"/>
+            <a:ext cx="2176272" cy="1188720"/>
           </a:xfrm>
           <a:prstGeom prst="rect">
             <a:avLst/>
@@ -3277,7 +3292,26 @@
           <a:lstStyle/>
           <a:p>
             <a:pPr>
-              <a:defRPr sz="1200" b="1">
+              <a:spcAft>
+                <a:spcPts val="400"/>
+              </a:spcAft>
+              <a:defRPr sz="850" b="1">
+                <a:solidFill>
+                  <a:srgbClr val="64748B"/>
+                </a:solidFill>
+                <a:latin typeface="Arial"/>
+              </a:defRPr>
+            </a:pPr>
+            <a:r>
+              <a:t>TARGET CHAIN</a:t>
+            </a:r>
+          </a:p>
+          <a:p>
+            <a:pPr>
+              <a:spcAft>
+                <a:spcPts val="200"/>
+              </a:spcAft>
+              <a:defRPr sz="1300" b="1">
                 <a:solidFill>
                   <a:srgbClr val="00F5A0"/>
                 </a:solidFill>
@@ -3285,226 +3319,34 @@
               </a:defRPr>
             </a:pPr>
             <a:r>
-              <a:t>Core Innovation: Mathematical ZK Witness Auth + Sponsored Dust Transactions (Zero User Gas)</a:t>
-            </a:r>
-          </a:p>
-          <a:p>
-            <a:pPr>
-              <a:spcBef>
-                <a:spcPts val="600"/>
-              </a:spcBef>
-              <a:defRPr sz="1100" b="1">
-                <a:solidFill>
-                  <a:srgbClr val="818CF8"/>
+              <a:t>Midnight Preprod</a:t>
+            </a:r>
+          </a:p>
+          <a:p>
+            <a:pPr>
+              <a:defRPr sz="900">
+                <a:solidFill>
+                  <a:srgbClr val="94A3B8"/>
                 </a:solidFill>
                 <a:latin typeface="Arial"/>
               </a:defRPr>
             </a:pPr>
             <a:r>
-              <a:t>Architected &amp; Engineered by: Kshitij Adakane (Vibe Coder, Systems Builder &amp; Applied AI/ML)</a:t>
-            </a:r>
-          </a:p>
-          <a:p>
-            <a:pPr>
-              <a:defRPr sz="1000">
-                <a:solidFill>
-                  <a:srgbClr val="94A3B8"/>
-                </a:solidFill>
-                <a:latin typeface="Arial"/>
-              </a:defRPr>
-            </a:pPr>
-            <a:r>
-              <a:t>Stack: Compact v0.20+ | Docker ProofStation (:6300) | Midnight.js SDK | React 18 | Vite | Tailwind Kinetic UI</a:t>
-            </a:r>
-          </a:p>
-        </p:txBody>
-      </p:sp>
-    </p:spTree>
-  </p:cSld>
-  <p:clrMapOvr>
-    <a:masterClrMapping/>
-  </p:clrMapOvr>
-</p:sld>
-</file>
-
-<file path=ppt/slides/slide10.xml><?xml version="1.0" encoding="utf-8"?>
-<p:sld xmlns:a="http://schemas.openxmlformats.org/drawingml/2006/main" xmlns:p="http://schemas.openxmlformats.org/presentationml/2006/main" xmlns:r="http://schemas.openxmlformats.org/officeDocument/2006/relationships">
-  <p:cSld>
-    <p:spTree>
-      <p:nvGrpSpPr>
-        <p:cNvPr id="1" name=""/>
-        <p:cNvGrpSpPr/>
-        <p:nvPr/>
-      </p:nvGrpSpPr>
-      <p:grpSpPr/>
-      <p:sp>
-        <p:nvSpPr>
-          <p:cNvPr id="2" name="Rectangle 1"/>
+              <a:t>Live Partnerchain v0.20</a:t>
+            </a:r>
+          </a:p>
+        </p:txBody>
+      </p:sp>
+      <p:sp>
+        <p:nvSpPr>
+          <p:cNvPr id="7" name="Rounded Rectangle 6"/>
           <p:cNvSpPr/>
           <p:nvPr/>
         </p:nvSpPr>
         <p:spPr>
           <a:xfrm>
-            <a:off x="0" y="0"/>
-            <a:ext cx="12191695" cy="6858000"/>
-          </a:xfrm>
-          <a:prstGeom prst="rect">
-            <a:avLst/>
-          </a:prstGeom>
-          <a:solidFill>
-            <a:srgbClr val="08090D"/>
-          </a:solidFill>
-          <a:ln>
-            <a:noFill/>
-          </a:ln>
-        </p:spPr>
-        <p:style>
-          <a:lnRef idx="1">
-            <a:schemeClr val="accent1"/>
-          </a:lnRef>
-          <a:fillRef idx="3">
-            <a:schemeClr val="accent1"/>
-          </a:fillRef>
-          <a:effectRef idx="2">
-            <a:schemeClr val="accent1"/>
-          </a:effectRef>
-          <a:fontRef idx="minor">
-            <a:schemeClr val="lt1"/>
-          </a:fontRef>
-        </p:style>
-        <p:txBody>
-          <a:bodyPr rtlCol="0" anchor="ctr"/>
-          <a:lstStyle/>
-          <a:p>
-            <a:pPr algn="ctr"/>
-          </a:p>
-        </p:txBody>
-      </p:sp>
-      <p:sp>
-        <p:nvSpPr>
-          <p:cNvPr id="3" name="TextBox 2"/>
-          <p:cNvSpPr txBox="1"/>
-          <p:nvPr/>
-        </p:nvSpPr>
-        <p:spPr>
-          <a:xfrm>
-            <a:off x="731520" y="365760"/>
-            <a:ext cx="10698480" cy="320040"/>
-          </a:xfrm>
-          <a:prstGeom prst="rect">
-            <a:avLst/>
-          </a:prstGeom>
-          <a:noFill/>
-        </p:spPr>
-        <p:txBody>
-          <a:bodyPr wrap="square">
-            <a:spAutoFit/>
-          </a:bodyPr>
-          <a:lstStyle/>
-          <a:p>
-            <a:pPr>
-              <a:defRPr sz="950" b="1">
-                <a:solidFill>
-                  <a:srgbClr val="00F5A0"/>
-                </a:solidFill>
-                <a:latin typeface="Arial"/>
-              </a:defRPr>
-            </a:pPr>
-            <a:r>
-              <a:t>KNIGHT.VAULT // ZERO-KNOWLEDGE PROTOCOL DECK</a:t>
-            </a:r>
-          </a:p>
-        </p:txBody>
-      </p:sp>
-      <p:sp>
-        <p:nvSpPr>
-          <p:cNvPr id="4" name="TextBox 3"/>
-          <p:cNvSpPr txBox="1"/>
-          <p:nvPr/>
-        </p:nvSpPr>
-        <p:spPr>
-          <a:xfrm>
-            <a:off x="731520" y="658368"/>
-            <a:ext cx="10698480" cy="640080"/>
-          </a:xfrm>
-          <a:prstGeom prst="rect">
-            <a:avLst/>
-          </a:prstGeom>
-          <a:noFill/>
-        </p:spPr>
-        <p:txBody>
-          <a:bodyPr wrap="square">
-            <a:spAutoFit/>
-          </a:bodyPr>
-          <a:lstStyle/>
-          <a:p>
-            <a:pPr>
-              <a:defRPr sz="2000" b="1">
-                <a:solidFill>
-                  <a:srgbClr val="FFFFFF"/>
-                </a:solidFill>
-                <a:latin typeface="Arial"/>
-              </a:defRPr>
-            </a:pPr>
-            <a:r>
-              <a:t>Technical Roadmap &amp; Scaling Horizons</a:t>
-            </a:r>
-          </a:p>
-        </p:txBody>
-      </p:sp>
-      <p:sp>
-        <p:nvSpPr>
-          <p:cNvPr id="5" name="Rectangle 4"/>
-          <p:cNvSpPr/>
-          <p:nvPr/>
-        </p:nvSpPr>
-        <p:spPr>
-          <a:xfrm>
-            <a:off x="731520" y="1353312"/>
-            <a:ext cx="10728655" cy="18288"/>
-          </a:xfrm>
-          <a:prstGeom prst="rect">
-            <a:avLst/>
-          </a:prstGeom>
-          <a:solidFill>
-            <a:srgbClr val="232A38"/>
-          </a:solidFill>
-          <a:ln>
-            <a:noFill/>
-          </a:ln>
-        </p:spPr>
-        <p:style>
-          <a:lnRef idx="1">
-            <a:schemeClr val="accent1"/>
-          </a:lnRef>
-          <a:fillRef idx="3">
-            <a:schemeClr val="accent1"/>
-          </a:fillRef>
-          <a:effectRef idx="2">
-            <a:schemeClr val="accent1"/>
-          </a:effectRef>
-          <a:fontRef idx="minor">
-            <a:schemeClr val="lt1"/>
-          </a:fontRef>
-        </p:style>
-        <p:txBody>
-          <a:bodyPr rtlCol="0" anchor="ctr"/>
-          <a:lstStyle/>
-          <a:p>
-            <a:pPr algn="ctr"/>
-          </a:p>
-        </p:txBody>
-      </p:sp>
-      <p:sp>
-        <p:nvSpPr>
-          <p:cNvPr id="6" name="Rounded Rectangle 5"/>
-          <p:cNvSpPr/>
-          <p:nvPr/>
-        </p:nvSpPr>
-        <p:spPr>
-          <a:xfrm>
-            <a:off x="731520" y="1554480"/>
-            <a:ext cx="3291840" cy="4754880"/>
+            <a:off x="3566160" y="3474720"/>
+            <a:ext cx="2450592" cy="1463040"/>
           </a:xfrm>
           <a:prstGeom prst="roundRect">
             <a:avLst/>
@@ -3542,14 +3384,14 @@
       </p:sp>
       <p:sp>
         <p:nvSpPr>
-          <p:cNvPr id="7" name="TextBox 6"/>
+          <p:cNvPr id="8" name="TextBox 7"/>
           <p:cNvSpPr txBox="1"/>
           <p:nvPr/>
         </p:nvSpPr>
         <p:spPr>
           <a:xfrm>
-            <a:off x="960120" y="1719072"/>
-            <a:ext cx="2834640" cy="365760"/>
+            <a:off x="3703320" y="3611880"/>
+            <a:ext cx="2176272" cy="1188720"/>
           </a:xfrm>
           <a:prstGeom prst="rect">
             <a:avLst/>
@@ -3557,52 +3399,45 @@
           <a:noFill/>
         </p:spPr>
         <p:txBody>
-          <a:bodyPr wrap="square">
+          <a:bodyPr wrap="none">
             <a:spAutoFit/>
           </a:bodyPr>
           <a:lstStyle/>
           <a:p>
             <a:pPr>
+              <a:spcAft>
+                <a:spcPts val="400"/>
+              </a:spcAft>
+              <a:defRPr sz="850" b="1">
+                <a:solidFill>
+                  <a:srgbClr val="64748B"/>
+                </a:solidFill>
+                <a:latin typeface="Arial"/>
+              </a:defRPr>
+            </a:pPr>
+            <a:r>
+              <a:t>CIRCUIT ENGINE</a:t>
+            </a:r>
+          </a:p>
+          <a:p>
+            <a:pPr>
+              <a:spcAft>
+                <a:spcPts val="200"/>
+              </a:spcAft>
               <a:defRPr sz="1300" b="1">
                 <a:solidFill>
-                  <a:srgbClr val="00F5A0"/>
+                  <a:srgbClr val="818CF8"/>
                 </a:solidFill>
                 <a:latin typeface="Arial"/>
               </a:defRPr>
             </a:pPr>
             <a:r>
-              <a:t>Phase 1: Present (Complete)</a:t>
-            </a:r>
-          </a:p>
-        </p:txBody>
-      </p:sp>
-      <p:sp>
-        <p:nvSpPr>
-          <p:cNvPr id="8" name="TextBox 7"/>
-          <p:cNvSpPr txBox="1"/>
-          <p:nvPr/>
-        </p:nvSpPr>
-        <p:spPr>
-          <a:xfrm>
-            <a:off x="960120" y="2121408"/>
-            <a:ext cx="2834640" cy="4069080"/>
-          </a:xfrm>
-          <a:prstGeom prst="rect">
-            <a:avLst/>
-          </a:prstGeom>
-          <a:noFill/>
-        </p:spPr>
-        <p:txBody>
-          <a:bodyPr wrap="square">
-            <a:spAutoFit/>
-          </a:bodyPr>
-          <a:lstStyle/>
-          <a:p>
-            <a:pPr>
-              <a:spcAft>
-                <a:spcPts val="600"/>
-              </a:spcAft>
-              <a:defRPr sz="1000">
+              <a:t>Compact v0.20+</a:t>
+            </a:r>
+          </a:p>
+          <a:p>
+            <a:pPr>
+              <a:defRPr sz="900">
                 <a:solidFill>
                   <a:srgbClr val="94A3B8"/>
                 </a:solidFill>
@@ -3610,87 +3445,7 @@
               </a:defRPr>
             </a:pPr>
             <a:r>
-              <a:t>• ✅ Compact v0.20+ contract authoring.</a:t>
-            </a:r>
-          </a:p>
-          <a:p>
-            <a:pPr>
-              <a:spcAft>
-                <a:spcPts val="600"/>
-              </a:spcAft>
-              <a:defRPr sz="1000">
-                <a:solidFill>
-                  <a:srgbClr val="94A3B8"/>
-                </a:solidFill>
-                <a:latin typeface="Arial"/>
-              </a:defRPr>
-            </a:pPr>
-            <a:r>
-              <a:t>• ✅ Docker Proof Server integration.</a:t>
-            </a:r>
-          </a:p>
-          <a:p>
-            <a:pPr>
-              <a:spcAft>
-                <a:spcPts val="600"/>
-              </a:spcAft>
-              <a:defRPr sz="1000">
-                <a:solidFill>
-                  <a:srgbClr val="94A3B8"/>
-                </a:solidFill>
-                <a:latin typeface="Arial"/>
-              </a:defRPr>
-            </a:pPr>
-            <a:r>
-              <a:t>• ✅ 1AM Wallet DApp connector.</a:t>
-            </a:r>
-          </a:p>
-          <a:p>
-            <a:pPr>
-              <a:spcAft>
-                <a:spcPts val="600"/>
-              </a:spcAft>
-              <a:defRPr sz="1000">
-                <a:solidFill>
-                  <a:srgbClr val="94A3B8"/>
-                </a:solidFill>
-                <a:latin typeface="Arial"/>
-              </a:defRPr>
-            </a:pPr>
-            <a:r>
-              <a:t>• ✅ Patched GraphQL Indexer client.</a:t>
-            </a:r>
-          </a:p>
-          <a:p>
-            <a:pPr>
-              <a:spcAft>
-                <a:spcPts val="600"/>
-              </a:spcAft>
-              <a:defRPr sz="1000">
-                <a:solidFill>
-                  <a:srgbClr val="94A3B8"/>
-                </a:solidFill>
-                <a:latin typeface="Arial"/>
-              </a:defRPr>
-            </a:pPr>
-            <a:r>
-              <a:t>• ✅ 0-Anti-Pattern Impeccable UI.</a:t>
-            </a:r>
-          </a:p>
-          <a:p>
-            <a:pPr>
-              <a:spcAft>
-                <a:spcPts val="600"/>
-              </a:spcAft>
-              <a:defRPr sz="1000">
-                <a:solidFill>
-                  <a:srgbClr val="94A3B8"/>
-                </a:solidFill>
-                <a:latin typeface="Arial"/>
-              </a:defRPr>
-            </a:pPr>
-            <a:r>
-              <a:t>• ✅ Full live testnet deployment.</a:t>
+              <a:t>Halo2 SNARK Synthesizer</a:t>
             </a:r>
           </a:p>
         </p:txBody>
@@ -3703,8 +3458,8 @@
         </p:nvSpPr>
         <p:spPr>
           <a:xfrm>
-            <a:off x="4434840" y="1554480"/>
-            <a:ext cx="3291840" cy="4754880"/>
+            <a:off x="6217920" y="3474720"/>
+            <a:ext cx="2450592" cy="1463040"/>
           </a:xfrm>
           <a:prstGeom prst="roundRect">
             <a:avLst/>
@@ -3748,8 +3503,8 @@
         </p:nvSpPr>
         <p:spPr>
           <a:xfrm>
-            <a:off x="4663440" y="1719072"/>
-            <a:ext cx="2834640" cy="365760"/>
+            <a:off x="6355080" y="3611880"/>
+            <a:ext cx="2176272" cy="1188720"/>
           </a:xfrm>
           <a:prstGeom prst="rect">
             <a:avLst/>
@@ -3757,52 +3512,45 @@
           <a:noFill/>
         </p:spPr>
         <p:txBody>
-          <a:bodyPr wrap="square">
+          <a:bodyPr wrap="none">
             <a:spAutoFit/>
           </a:bodyPr>
           <a:lstStyle/>
           <a:p>
             <a:pPr>
+              <a:spcAft>
+                <a:spcPts val="400"/>
+              </a:spcAft>
+              <a:defRPr sz="850" b="1">
+                <a:solidFill>
+                  <a:srgbClr val="64748B"/>
+                </a:solidFill>
+                <a:latin typeface="Arial"/>
+              </a:defRPr>
+            </a:pPr>
+            <a:r>
+              <a:t>PROOF SERVER</a:t>
+            </a:r>
+          </a:p>
+          <a:p>
+            <a:pPr>
+              <a:spcAft>
+                <a:spcPts val="200"/>
+              </a:spcAft>
               <a:defRPr sz="1300" b="1">
                 <a:solidFill>
-                  <a:srgbClr val="F59E0B"/>
+                  <a:srgbClr val="38BDF8"/>
                 </a:solidFill>
                 <a:latin typeface="Arial"/>
               </a:defRPr>
             </a:pPr>
             <a:r>
-              <a:t>Phase 2: Advanced Circuits</a:t>
-            </a:r>
-          </a:p>
-        </p:txBody>
-      </p:sp>
-      <p:sp>
-        <p:nvSpPr>
-          <p:cNvPr id="11" name="TextBox 10"/>
-          <p:cNvSpPr txBox="1"/>
-          <p:nvPr/>
-        </p:nvSpPr>
-        <p:spPr>
-          <a:xfrm>
-            <a:off x="4663440" y="2121408"/>
-            <a:ext cx="2834640" cy="4069080"/>
-          </a:xfrm>
-          <a:prstGeom prst="rect">
-            <a:avLst/>
-          </a:prstGeom>
-          <a:noFill/>
-        </p:spPr>
-        <p:txBody>
-          <a:bodyPr wrap="square">
-            <a:spAutoFit/>
-          </a:bodyPr>
-          <a:lstStyle/>
-          <a:p>
-            <a:pPr>
-              <a:spcAft>
-                <a:spcPts val="600"/>
-              </a:spcAft>
-              <a:defRPr sz="1000">
+              <a:t>Docker :6300</a:t>
+            </a:r>
+          </a:p>
+          <a:p>
+            <a:pPr>
+              <a:defRPr sz="900">
                 <a:solidFill>
                   <a:srgbClr val="94A3B8"/>
                 </a:solidFill>
@@ -3810,85 +3558,21 @@
               </a:defRPr>
             </a:pPr>
             <a:r>
-              <a:t>• ⏳ Time-Lock Vesting (blockTimeGte).</a:t>
-            </a:r>
-          </a:p>
-          <a:p>
-            <a:pPr>
-              <a:spcAft>
-                <a:spcPts val="600"/>
-              </a:spcAft>
-              <a:defRPr sz="1000">
-                <a:solidFill>
-                  <a:srgbClr val="94A3B8"/>
-                </a:solidFill>
-                <a:latin typeface="Arial"/>
-              </a:defRPr>
-            </a:pPr>
-            <a:r>
-              <a:t>• ⏳ Multi-Signer Threshold Approval.</a:t>
-            </a:r>
-          </a:p>
-          <a:p>
-            <a:pPr>
-              <a:spcAft>
-                <a:spcPts val="600"/>
-              </a:spcAft>
-              <a:defRPr sz="1000">
-                <a:solidFill>
-                  <a:srgbClr val="94A3B8"/>
-                </a:solidFill>
-                <a:latin typeface="Arial"/>
-              </a:defRPr>
-            </a:pPr>
-            <a:r>
-              <a:t>• ⏳ Shielded ZSwap Token Transfer integration.</a:t>
-            </a:r>
-          </a:p>
-          <a:p>
-            <a:pPr>
-              <a:spcAft>
-                <a:spcPts val="600"/>
-              </a:spcAft>
-              <a:defRPr sz="1000">
-                <a:solidFill>
-                  <a:srgbClr val="94A3B8"/>
-                </a:solidFill>
-                <a:latin typeface="Arial"/>
-              </a:defRPr>
-            </a:pPr>
-            <a:r>
-              <a:t>• ⏳ Whitelist Merkle Tree membership proofs.</a:t>
-            </a:r>
-          </a:p>
-          <a:p>
-            <a:pPr>
-              <a:spcAft>
-                <a:spcPts val="600"/>
-              </a:spcAft>
-              <a:defRPr sz="1000">
-                <a:solidFill>
-                  <a:srgbClr val="94A3B8"/>
-                </a:solidFill>
-                <a:latin typeface="Arial"/>
-              </a:defRPr>
-            </a:pPr>
-            <a:r>
-              <a:t>• ⏳ Multi-Token Native Fungible support.</a:t>
-            </a:r>
-          </a:p>
-        </p:txBody>
-      </p:sp>
-      <p:sp>
-        <p:nvSpPr>
-          <p:cNvPr id="12" name="Rounded Rectangle 11"/>
+              <a:t>100% Client-Side Proving</a:t>
+            </a:r>
+          </a:p>
+        </p:txBody>
+      </p:sp>
+      <p:sp>
+        <p:nvSpPr>
+          <p:cNvPr id="11" name="Rounded Rectangle 10"/>
           <p:cNvSpPr/>
           <p:nvPr/>
         </p:nvSpPr>
         <p:spPr>
           <a:xfrm>
-            <a:off x="8138160" y="1554480"/>
-            <a:ext cx="3291840" cy="4754880"/>
+            <a:off x="8869680" y="3474720"/>
+            <a:ext cx="2450592" cy="1463040"/>
           </a:xfrm>
           <a:prstGeom prst="roundRect">
             <a:avLst/>
@@ -3926,14 +3610,14 @@
       </p:sp>
       <p:sp>
         <p:nvSpPr>
-          <p:cNvPr id="13" name="TextBox 12"/>
+          <p:cNvPr id="12" name="TextBox 11"/>
           <p:cNvSpPr txBox="1"/>
           <p:nvPr/>
         </p:nvSpPr>
         <p:spPr>
           <a:xfrm>
-            <a:off x="8366760" y="1719072"/>
-            <a:ext cx="2834640" cy="365760"/>
+            <a:off x="9006840" y="3611880"/>
+            <a:ext cx="2176272" cy="1188720"/>
           </a:xfrm>
           <a:prstGeom prst="rect">
             <a:avLst/>
@@ -3941,52 +3625,45 @@
           <a:noFill/>
         </p:spPr>
         <p:txBody>
-          <a:bodyPr wrap="square">
+          <a:bodyPr wrap="none">
             <a:spAutoFit/>
           </a:bodyPr>
           <a:lstStyle/>
           <a:p>
             <a:pPr>
+              <a:spcAft>
+                <a:spcPts val="400"/>
+              </a:spcAft>
+              <a:defRPr sz="850" b="1">
+                <a:solidFill>
+                  <a:srgbClr val="64748B"/>
+                </a:solidFill>
+                <a:latin typeface="Arial"/>
+              </a:defRPr>
+            </a:pPr>
+            <a:r>
+              <a:t>USER GAS COST</a:t>
+            </a:r>
+          </a:p>
+          <a:p>
+            <a:pPr>
+              <a:spcAft>
+                <a:spcPts val="200"/>
+              </a:spcAft>
               <a:defRPr sz="1300" b="1">
                 <a:solidFill>
-                  <a:srgbClr val="06B6D4"/>
+                  <a:srgbClr val="10B981"/>
                 </a:solidFill>
                 <a:latin typeface="Arial"/>
               </a:defRPr>
             </a:pPr>
             <a:r>
-              <a:t>Phase 3: Production Mainnet</a:t>
-            </a:r>
-          </a:p>
-        </p:txBody>
-      </p:sp>
-      <p:sp>
-        <p:nvSpPr>
-          <p:cNvPr id="14" name="TextBox 13"/>
-          <p:cNvSpPr txBox="1"/>
-          <p:nvPr/>
-        </p:nvSpPr>
-        <p:spPr>
-          <a:xfrm>
-            <a:off x="8366760" y="2121408"/>
-            <a:ext cx="2834640" cy="4069080"/>
-          </a:xfrm>
-          <a:prstGeom prst="rect">
-            <a:avLst/>
-          </a:prstGeom>
-          <a:noFill/>
-        </p:spPr>
-        <p:txBody>
-          <a:bodyPr wrap="square">
-            <a:spAutoFit/>
-          </a:bodyPr>
-          <a:lstStyle/>
-          <a:p>
-            <a:pPr>
-              <a:spcAft>
-                <a:spcPts val="600"/>
-              </a:spcAft>
-              <a:defRPr sz="1000">
+              <a:t>0.00 NIGHT</a:t>
+            </a:r>
+          </a:p>
+          <a:p>
+            <a:pPr>
+              <a:defRPr sz="900">
                 <a:solidFill>
                   <a:srgbClr val="94A3B8"/>
                 </a:solidFill>
@@ -3994,267 +3671,27 @@
               </a:defRPr>
             </a:pPr>
             <a:r>
-              <a:t>• 🔮 Midnight Mainnet readiness.</a:t>
-            </a:r>
-          </a:p>
-          <a:p>
-            <a:pPr>
-              <a:spcAft>
-                <a:spcPts val="600"/>
-              </a:spcAft>
-              <a:defRPr sz="1000">
-                <a:solidFill>
-                  <a:srgbClr val="94A3B8"/>
-                </a:solidFill>
-                <a:latin typeface="Arial"/>
-              </a:defRPr>
-            </a:pPr>
-            <a:r>
-              <a:t>• 🔮 Mobile SDK &amp; Android Passkey proving.</a:t>
-            </a:r>
-          </a:p>
-          <a:p>
-            <a:pPr>
-              <a:spcAft>
-                <a:spcPts val="600"/>
-              </a:spcAft>
-              <a:defRPr sz="1000">
-                <a:solidFill>
-                  <a:srgbClr val="94A3B8"/>
-                </a:solidFill>
-                <a:latin typeface="Arial"/>
-              </a:defRPr>
-            </a:pPr>
-            <a:r>
-              <a:t>• 🔮 Hardware wallet (Ledger) ZK signing.</a:t>
-            </a:r>
-          </a:p>
-          <a:p>
-            <a:pPr>
-              <a:spcAft>
-                <a:spcPts val="600"/>
-              </a:spcAft>
-              <a:defRPr sz="1000">
-                <a:solidFill>
-                  <a:srgbClr val="94A3B8"/>
-                </a:solidFill>
-                <a:latin typeface="Arial"/>
-              </a:defRPr>
-            </a:pPr>
-            <a:r>
-              <a:t>• 🔮 SDK Package publish to NPM.</a:t>
-            </a:r>
-          </a:p>
-          <a:p>
-            <a:pPr>
-              <a:spcAft>
-                <a:spcPts val="600"/>
-              </a:spcAft>
-              <a:defRPr sz="1000">
-                <a:solidFill>
-                  <a:srgbClr val="94A3B8"/>
-                </a:solidFill>
-                <a:latin typeface="Arial"/>
-              </a:defRPr>
-            </a:pPr>
-            <a:r>
-              <a:t>• 🔮 Institutional Auditor viewing keys.</a:t>
-            </a:r>
-          </a:p>
-        </p:txBody>
-      </p:sp>
-    </p:spTree>
-  </p:cSld>
-  <p:clrMapOvr>
-    <a:masterClrMapping/>
-  </p:clrMapOvr>
-</p:sld>
-</file>
-
-<file path=ppt/slides/slide11.xml><?xml version="1.0" encoding="utf-8"?>
-<p:sld xmlns:a="http://schemas.openxmlformats.org/drawingml/2006/main" xmlns:p="http://schemas.openxmlformats.org/presentationml/2006/main" xmlns:r="http://schemas.openxmlformats.org/officeDocument/2006/relationships">
-  <p:cSld>
-    <p:spTree>
-      <p:nvGrpSpPr>
-        <p:cNvPr id="1" name=""/>
-        <p:cNvGrpSpPr/>
-        <p:nvPr/>
-      </p:nvGrpSpPr>
-      <p:grpSpPr/>
-      <p:sp>
-        <p:nvSpPr>
-          <p:cNvPr id="2" name="Rectangle 1"/>
+              <a:t>Sponsored Dust Relay Flow</a:t>
+            </a:r>
+          </a:p>
+        </p:txBody>
+      </p:sp>
+      <p:sp>
+        <p:nvSpPr>
+          <p:cNvPr id="13" name="Rounded Rectangle 12"/>
           <p:cNvSpPr/>
           <p:nvPr/>
         </p:nvSpPr>
         <p:spPr>
           <a:xfrm>
-            <a:off x="0" y="0"/>
-            <a:ext cx="12191695" cy="6858000"/>
-          </a:xfrm>
-          <a:prstGeom prst="rect">
+            <a:off x="914400" y="5166360"/>
+            <a:ext cx="10362895" cy="1097280"/>
+          </a:xfrm>
+          <a:prstGeom prst="roundRect">
             <a:avLst/>
           </a:prstGeom>
           <a:solidFill>
-            <a:srgbClr val="08090D"/>
-          </a:solidFill>
-          <a:ln>
-            <a:noFill/>
-          </a:ln>
-        </p:spPr>
-        <p:style>
-          <a:lnRef idx="1">
-            <a:schemeClr val="accent1"/>
-          </a:lnRef>
-          <a:fillRef idx="3">
-            <a:schemeClr val="accent1"/>
-          </a:fillRef>
-          <a:effectRef idx="2">
-            <a:schemeClr val="accent1"/>
-          </a:effectRef>
-          <a:fontRef idx="minor">
-            <a:schemeClr val="lt1"/>
-          </a:fontRef>
-        </p:style>
-        <p:txBody>
-          <a:bodyPr rtlCol="0" anchor="ctr"/>
-          <a:lstStyle/>
-          <a:p>
-            <a:pPr algn="ctr"/>
-          </a:p>
-        </p:txBody>
-      </p:sp>
-      <p:sp>
-        <p:nvSpPr>
-          <p:cNvPr id="3" name="TextBox 2"/>
-          <p:cNvSpPr txBox="1"/>
-          <p:nvPr/>
-        </p:nvSpPr>
-        <p:spPr>
-          <a:xfrm>
-            <a:off x="731520" y="365760"/>
-            <a:ext cx="10698480" cy="320040"/>
-          </a:xfrm>
-          <a:prstGeom prst="rect">
-            <a:avLst/>
-          </a:prstGeom>
-          <a:noFill/>
-        </p:spPr>
-        <p:txBody>
-          <a:bodyPr wrap="square">
-            <a:spAutoFit/>
-          </a:bodyPr>
-          <a:lstStyle/>
-          <a:p>
-            <a:pPr>
-              <a:defRPr sz="950" b="1">
-                <a:solidFill>
-                  <a:srgbClr val="00F5A0"/>
-                </a:solidFill>
-                <a:latin typeface="Arial"/>
-              </a:defRPr>
-            </a:pPr>
-            <a:r>
-              <a:t>KNIGHT.VAULT // ZERO-KNOWLEDGE PROTOCOL DECK</a:t>
-            </a:r>
-          </a:p>
-        </p:txBody>
-      </p:sp>
-      <p:sp>
-        <p:nvSpPr>
-          <p:cNvPr id="4" name="TextBox 3"/>
-          <p:cNvSpPr txBox="1"/>
-          <p:nvPr/>
-        </p:nvSpPr>
-        <p:spPr>
-          <a:xfrm>
-            <a:off x="731520" y="658368"/>
-            <a:ext cx="10698480" cy="640080"/>
-          </a:xfrm>
-          <a:prstGeom prst="rect">
-            <a:avLst/>
-          </a:prstGeom>
-          <a:noFill/>
-        </p:spPr>
-        <p:txBody>
-          <a:bodyPr wrap="square">
-            <a:spAutoFit/>
-          </a:bodyPr>
-          <a:lstStyle/>
-          <a:p>
-            <a:pPr>
-              <a:defRPr sz="2000" b="1">
-                <a:solidFill>
-                  <a:srgbClr val="FFFFFF"/>
-                </a:solidFill>
-                <a:latin typeface="Arial"/>
-              </a:defRPr>
-            </a:pPr>
-            <a:r>
-              <a:t>Summary: Why Midnight Vault Wins 1st Place</a:t>
-            </a:r>
-          </a:p>
-        </p:txBody>
-      </p:sp>
-      <p:sp>
-        <p:nvSpPr>
-          <p:cNvPr id="5" name="Rectangle 4"/>
-          <p:cNvSpPr/>
-          <p:nvPr/>
-        </p:nvSpPr>
-        <p:spPr>
-          <a:xfrm>
-            <a:off x="731520" y="1353312"/>
-            <a:ext cx="10728655" cy="18288"/>
-          </a:xfrm>
-          <a:prstGeom prst="rect">
-            <a:avLst/>
-          </a:prstGeom>
-          <a:solidFill>
-            <a:srgbClr val="232A38"/>
-          </a:solidFill>
-          <a:ln>
-            <a:noFill/>
-          </a:ln>
-        </p:spPr>
-        <p:style>
-          <a:lnRef idx="1">
-            <a:schemeClr val="accent1"/>
-          </a:lnRef>
-          <a:fillRef idx="3">
-            <a:schemeClr val="accent1"/>
-          </a:fillRef>
-          <a:effectRef idx="2">
-            <a:schemeClr val="accent1"/>
-          </a:effectRef>
-          <a:fontRef idx="minor">
-            <a:schemeClr val="lt1"/>
-          </a:fontRef>
-        </p:style>
-        <p:txBody>
-          <a:bodyPr rtlCol="0" anchor="ctr"/>
-          <a:lstStyle/>
-          <a:p>
-            <a:pPr algn="ctr"/>
-          </a:p>
-        </p:txBody>
-      </p:sp>
-      <p:sp>
-        <p:nvSpPr>
-          <p:cNvPr id="6" name="Rounded Rectangle 5"/>
-          <p:cNvSpPr/>
-          <p:nvPr/>
-        </p:nvSpPr>
-        <p:spPr>
-          <a:xfrm>
-            <a:off x="731520" y="1554480"/>
-            <a:ext cx="10728655" cy="4754880"/>
-          </a:xfrm>
-          <a:prstGeom prst="roundRect">
-            <a:avLst/>
-          </a:prstGeom>
-          <a:solidFill>
-            <a:srgbClr val="141923"/>
+            <a:srgbClr val="12161E"/>
           </a:solidFill>
           <a:ln w="12700">
             <a:solidFill>
@@ -4286,14 +3723,14 @@
       </p:sp>
       <p:sp>
         <p:nvSpPr>
-          <p:cNvPr id="7" name="TextBox 6"/>
+          <p:cNvPr id="14" name="TextBox 13"/>
           <p:cNvSpPr txBox="1"/>
           <p:nvPr/>
         </p:nvSpPr>
         <p:spPr>
           <a:xfrm>
-            <a:off x="960120" y="1719072"/>
-            <a:ext cx="10271455" cy="365760"/>
+            <a:off x="1143000" y="5257800"/>
+            <a:ext cx="9875520" cy="868680"/>
           </a:xfrm>
           <a:prstGeom prst="rect">
             <a:avLst/>
@@ -4301,13 +3738,16 @@
           <a:noFill/>
         </p:spPr>
         <p:txBody>
-          <a:bodyPr wrap="square">
+          <a:bodyPr wrap="none">
             <a:spAutoFit/>
           </a:bodyPr>
           <a:lstStyle/>
           <a:p>
             <a:pPr>
-              <a:defRPr sz="1300" b="1">
+              <a:spcAft>
+                <a:spcPts val="300"/>
+              </a:spcAft>
+              <a:defRPr sz="1100" b="1">
                 <a:solidFill>
                   <a:srgbClr val="00F5A0"/>
                 </a:solidFill>
@@ -4315,38 +3755,12 @@
               </a:defRPr>
             </a:pPr>
             <a:r>
-              <a:t>🏆 The Winning Edge</a:t>
-            </a:r>
-          </a:p>
-        </p:txBody>
-      </p:sp>
-      <p:sp>
-        <p:nvSpPr>
-          <p:cNvPr id="8" name="TextBox 7"/>
-          <p:cNvSpPr txBox="1"/>
-          <p:nvPr/>
-        </p:nvSpPr>
-        <p:spPr>
-          <a:xfrm>
-            <a:off x="960120" y="2121408"/>
-            <a:ext cx="10271455" cy="4069080"/>
-          </a:xfrm>
-          <a:prstGeom prst="rect">
-            <a:avLst/>
-          </a:prstGeom>
-          <a:noFill/>
-        </p:spPr>
-        <p:txBody>
-          <a:bodyPr wrap="square">
-            <a:spAutoFit/>
-          </a:bodyPr>
-          <a:lstStyle/>
-          <a:p>
-            <a:pPr>
-              <a:spcAft>
-                <a:spcPts val="600"/>
-              </a:spcAft>
-              <a:defRPr sz="1000">
+              <a:t>Architected &amp; Engineered by: Kshitij Adakane (Vibe Coder, Systems Builder &amp; Applied AI/ML)</a:t>
+            </a:r>
+          </a:p>
+          <a:p>
+            <a:pPr>
+              <a:defRPr sz="950">
                 <a:solidFill>
                   <a:srgbClr val="94A3B8"/>
                 </a:solidFill>
@@ -4354,71 +3768,7 @@
               </a:defRPr>
             </a:pPr>
             <a:r>
-              <a:t>• 1. Complete End-to-End Implementation: Not a mock or prototype — a fully compiling, provable, and functional DApp on Midnight Preprod.</a:t>
-            </a:r>
-          </a:p>
-          <a:p>
-            <a:pPr>
-              <a:spcAft>
-                <a:spcPts val="600"/>
-              </a:spcAft>
-              <a:defRPr sz="1000">
-                <a:solidFill>
-                  <a:srgbClr val="94A3B8"/>
-                </a:solidFill>
-                <a:latin typeface="Arial"/>
-              </a:defRPr>
-            </a:pPr>
-            <a:r>
-              <a:t>• 2. Frictionless User Experience: Sponsoring gas fees via 1AM ProofStation creates an experience indistinguishable from Web2 speed.</a:t>
-            </a:r>
-          </a:p>
-          <a:p>
-            <a:pPr>
-              <a:spcAft>
-                <a:spcPts val="600"/>
-              </a:spcAft>
-              <a:defRPr sz="1000">
-                <a:solidFill>
-                  <a:srgbClr val="94A3B8"/>
-                </a:solidFill>
-                <a:latin typeface="Arial"/>
-              </a:defRPr>
-            </a:pPr>
-            <a:r>
-              <a:t>• 3. Cryptographic Privacy by Design: Private witness architecture ensures secrets never leave user memory.</a:t>
-            </a:r>
-          </a:p>
-          <a:p>
-            <a:pPr>
-              <a:spcAft>
-                <a:spcPts val="600"/>
-              </a:spcAft>
-              <a:defRPr sz="1000">
-                <a:solidFill>
-                  <a:srgbClr val="94A3B8"/>
-                </a:solidFill>
-                <a:latin typeface="Arial"/>
-              </a:defRPr>
-            </a:pPr>
-            <a:r>
-              <a:t>• 4. Institutional Craft Floor UI: Clean, data-dense, matte dark aesthetic built with zero AI slop or generic tropes.</a:t>
-            </a:r>
-          </a:p>
-          <a:p>
-            <a:pPr>
-              <a:spcAft>
-                <a:spcPts val="600"/>
-              </a:spcAft>
-              <a:defRPr sz="1000">
-                <a:solidFill>
-                  <a:srgbClr val="94A3B8"/>
-                </a:solidFill>
-                <a:latin typeface="Arial"/>
-              </a:defRPr>
-            </a:pPr>
-            <a:r>
-              <a:t>• 5. Scalable Foundation: Ready for corporate payroll, escrow, DAO grants, and enterprise settlement.</a:t>
+              <a:t>Stack: Compact Circuits • Halo2 Proofs • Midnight.js SDK • 1AM Wallet • React 18 • Vite • Tailwind Kinetic UI</a:t>
             </a:r>
           </a:p>
         </p:txBody>
@@ -4493,7 +3843,7 @@
         <p:spPr>
           <a:xfrm>
             <a:off x="731520" y="365760"/>
-            <a:ext cx="10698480" cy="320040"/>
+            <a:ext cx="10698480" cy="292608"/>
           </a:xfrm>
           <a:prstGeom prst="rect">
             <a:avLst/>
@@ -4515,7 +3865,7 @@
               </a:defRPr>
             </a:pPr>
             <a:r>
-              <a:t>KNIGHT.VAULT // ZERO-KNOWLEDGE PROTOCOL DECK</a:t>
+              <a:t>01 / MARKET CONTEXT &amp; PROBLEM</a:t>
             </a:r>
           </a:p>
         </p:txBody>
@@ -4529,7 +3879,7 @@
         <p:spPr>
           <a:xfrm>
             <a:off x="731520" y="658368"/>
-            <a:ext cx="10698480" cy="640080"/>
+            <a:ext cx="10698480" cy="594360"/>
           </a:xfrm>
           <a:prstGeom prst="rect">
             <a:avLst/>
@@ -4543,7 +3893,7 @@
           <a:lstStyle/>
           <a:p>
             <a:pPr>
-              <a:defRPr sz="2000" b="1">
+              <a:defRPr sz="2200" b="1">
                 <a:solidFill>
                   <a:srgbClr val="FFFFFF"/>
                 </a:solidFill>
@@ -4551,7 +3901,7 @@
               </a:defRPr>
             </a:pPr>
             <a:r>
-              <a:t>Executive Summary: The Trillion-Dollar Web3 Privacy Gap</a:t>
+              <a:t>The Trillion-Dollar Web3 Privacy Gap</a:t>
             </a:r>
           </a:p>
         </p:txBody>
@@ -4564,8 +3914,8 @@
         </p:nvSpPr>
         <p:spPr>
           <a:xfrm>
-            <a:off x="731520" y="1353312"/>
-            <a:ext cx="10728655" cy="18288"/>
+            <a:off x="731520" y="1298448"/>
+            <a:ext cx="10728655" cy="13716"/>
           </a:xfrm>
           <a:prstGeom prst="rect">
             <a:avLst/>
@@ -4601,14 +3951,57 @@
       </p:sp>
       <p:sp>
         <p:nvSpPr>
-          <p:cNvPr id="6" name="Rounded Rectangle 5"/>
+          <p:cNvPr id="6" name="Rectangle 5"/>
           <p:cNvSpPr/>
           <p:nvPr/>
         </p:nvSpPr>
         <p:spPr>
           <a:xfrm>
-            <a:off x="731520" y="1554480"/>
-            <a:ext cx="5120640" cy="4754880"/>
+            <a:off x="731520" y="1298448"/>
+            <a:ext cx="1097280" cy="22860"/>
+          </a:xfrm>
+          <a:prstGeom prst="rect">
+            <a:avLst/>
+          </a:prstGeom>
+          <a:solidFill>
+            <a:srgbClr val="00F5A0"/>
+          </a:solidFill>
+          <a:ln>
+            <a:noFill/>
+          </a:ln>
+        </p:spPr>
+        <p:style>
+          <a:lnRef idx="1">
+            <a:schemeClr val="accent1"/>
+          </a:lnRef>
+          <a:fillRef idx="3">
+            <a:schemeClr val="accent1"/>
+          </a:fillRef>
+          <a:effectRef idx="2">
+            <a:schemeClr val="accent1"/>
+          </a:effectRef>
+          <a:fontRef idx="minor">
+            <a:schemeClr val="lt1"/>
+          </a:fontRef>
+        </p:style>
+        <p:txBody>
+          <a:bodyPr rtlCol="0" anchor="ctr"/>
+          <a:lstStyle/>
+          <a:p>
+            <a:pPr algn="ctr"/>
+          </a:p>
+        </p:txBody>
+      </p:sp>
+      <p:sp>
+        <p:nvSpPr>
+          <p:cNvPr id="7" name="Rounded Rectangle 6"/>
+          <p:cNvSpPr/>
+          <p:nvPr/>
+        </p:nvSpPr>
+        <p:spPr>
+          <a:xfrm>
+            <a:off x="731520" y="1645920"/>
+            <a:ext cx="5212080" cy="4572000"/>
           </a:xfrm>
           <a:prstGeom prst="roundRect">
             <a:avLst/>
@@ -4646,14 +4039,93 @@
       </p:sp>
       <p:sp>
         <p:nvSpPr>
-          <p:cNvPr id="7" name="TextBox 6"/>
+          <p:cNvPr id="8" name="Rounded Rectangle 7"/>
+          <p:cNvSpPr/>
+          <p:nvPr/>
+        </p:nvSpPr>
+        <p:spPr>
+          <a:xfrm>
+            <a:off x="960120" y="1645920"/>
+            <a:ext cx="1645920" cy="36576"/>
+          </a:xfrm>
+          <a:prstGeom prst="roundRect">
+            <a:avLst/>
+          </a:prstGeom>
+          <a:solidFill>
+            <a:srgbClr val="F43F5E"/>
+          </a:solidFill>
+          <a:ln>
+            <a:noFill/>
+          </a:ln>
+        </p:spPr>
+        <p:style>
+          <a:lnRef idx="1">
+            <a:schemeClr val="accent1"/>
+          </a:lnRef>
+          <a:fillRef idx="3">
+            <a:schemeClr val="accent1"/>
+          </a:fillRef>
+          <a:effectRef idx="2">
+            <a:schemeClr val="accent1"/>
+          </a:effectRef>
+          <a:fontRef idx="minor">
+            <a:schemeClr val="lt1"/>
+          </a:fontRef>
+        </p:style>
+        <p:txBody>
+          <a:bodyPr rtlCol="0" anchor="ctr"/>
+          <a:lstStyle/>
+          <a:p>
+            <a:pPr algn="ctr"/>
+          </a:p>
+        </p:txBody>
+      </p:sp>
+      <p:sp>
+        <p:nvSpPr>
+          <p:cNvPr id="9" name="TextBox 8"/>
           <p:cNvSpPr txBox="1"/>
           <p:nvPr/>
         </p:nvSpPr>
         <p:spPr>
           <a:xfrm>
-            <a:off x="960120" y="1719072"/>
-            <a:ext cx="4663440" cy="365760"/>
+            <a:off x="960120" y="1828800"/>
+            <a:ext cx="4754880" cy="256032"/>
+          </a:xfrm>
+          <a:prstGeom prst="rect">
+            <a:avLst/>
+          </a:prstGeom>
+          <a:noFill/>
+        </p:spPr>
+        <p:txBody>
+          <a:bodyPr wrap="none">
+            <a:spAutoFit/>
+          </a:bodyPr>
+          <a:lstStyle/>
+          <a:p>
+            <a:pPr>
+              <a:defRPr sz="850" b="1">
+                <a:solidFill>
+                  <a:srgbClr val="F43F5E"/>
+                </a:solidFill>
+                <a:latin typeface="Arial"/>
+              </a:defRPr>
+            </a:pPr>
+            <a:r>
+              <a:t>THE TRANSPARENCY TRAP</a:t>
+            </a:r>
+          </a:p>
+        </p:txBody>
+      </p:sp>
+      <p:sp>
+        <p:nvSpPr>
+          <p:cNvPr id="10" name="TextBox 9"/>
+          <p:cNvSpPr txBox="1"/>
+          <p:nvPr/>
+        </p:nvSpPr>
+        <p:spPr>
+          <a:xfrm>
+            <a:off x="960120" y="2084832"/>
+            <a:ext cx="4754880" cy="411480"/>
           </a:xfrm>
           <a:prstGeom prst="rect">
             <a:avLst/>
@@ -4669,27 +4141,27 @@
             <a:pPr>
               <a:defRPr sz="1300" b="1">
                 <a:solidFill>
-                  <a:srgbClr val="F43F5E"/>
+                  <a:srgbClr val="FFFFFF"/>
                 </a:solidFill>
                 <a:latin typeface="Arial"/>
               </a:defRPr>
             </a:pPr>
             <a:r>
-              <a:t>⚠️ The Critical Market Problem</a:t>
-            </a:r>
-          </a:p>
-        </p:txBody>
-      </p:sp>
-      <p:sp>
-        <p:nvSpPr>
-          <p:cNvPr id="8" name="TextBox 7"/>
+              <a:t>⚠️ Transparent Chains (ETH, BTC, Solana)</a:t>
+            </a:r>
+          </a:p>
+        </p:txBody>
+      </p:sp>
+      <p:sp>
+        <p:nvSpPr>
+          <p:cNvPr id="11" name="TextBox 10"/>
           <p:cNvSpPr txBox="1"/>
           <p:nvPr/>
         </p:nvSpPr>
         <p:spPr>
           <a:xfrm>
-            <a:off x="960120" y="2121408"/>
-            <a:ext cx="4663440" cy="4069080"/>
+            <a:off x="960120" y="2496312"/>
+            <a:ext cx="4754880" cy="3584448"/>
           </a:xfrm>
           <a:prstGeom prst="rect">
             <a:avLst/>
@@ -4704,7 +4176,7 @@
           <a:p>
             <a:pPr>
               <a:spcAft>
-                <a:spcPts val="600"/>
+                <a:spcPts val="500"/>
               </a:spcAft>
               <a:defRPr sz="1000">
                 <a:solidFill>
@@ -4714,13 +4186,13 @@
               </a:defRPr>
             </a:pPr>
             <a:r>
-              <a:t>• Total Public Exposure: Ethereum &amp; Bitcoin broadcast every transaction, balance, sender, and recipient to the world.</a:t>
+              <a:t>•  Total Financial Exposure: All balances, employee payrolls, treasury movements, and vendor invoices are publicly browsable forever.</a:t>
             </a:r>
           </a:p>
           <a:p>
             <a:pPr>
               <a:spcAft>
-                <a:spcPts val="600"/>
+                <a:spcPts val="500"/>
               </a:spcAft>
               <a:defRPr sz="1000">
                 <a:solidFill>
@@ -4730,13 +4202,13 @@
               </a:defRPr>
             </a:pPr>
             <a:r>
-              <a:t>• Enterprise Adoption Blocked: Corporations cannot use public blockchains for payroll, vendor invoices, or supply chains without leaking competitive secrets.</a:t>
+              <a:t>•  Gas-Trail De-Anonymization: Purchasing native gas tokens creates an irreversible KYC link to every on-chain activity.</a:t>
             </a:r>
           </a:p>
           <a:p>
             <a:pPr>
               <a:spcAft>
-                <a:spcPts val="600"/>
+                <a:spcPts val="500"/>
               </a:spcAft>
               <a:defRPr sz="1000">
                 <a:solidFill>
@@ -4746,13 +4218,13 @@
               </a:defRPr>
             </a:pPr>
             <a:r>
-              <a:t>• Gas-Trail De-Anonymization: Buying native gas tokens (ETH, SOL) links off-chain KYC to every subsequent on-chain interaction.</a:t>
+              <a:t>•  Regulatory Backlash on Mixers: Legacy mixing pools lack selective compliance disclosures and face universal government bans.</a:t>
             </a:r>
           </a:p>
           <a:p>
             <a:pPr>
               <a:spcAft>
-                <a:spcPts val="600"/>
+                <a:spcPts val="500"/>
               </a:spcAft>
               <a:defRPr sz="1000">
                 <a:solidFill>
@@ -4762,21 +4234,21 @@
               </a:defRPr>
             </a:pPr>
             <a:r>
-              <a:t>• Illicit Mixers vs True Compliance: Legacy privacy coins (Monero) or mixing pools face regulatory bans because they lack selective disclosure mechanisms.</a:t>
-            </a:r>
-          </a:p>
-        </p:txBody>
-      </p:sp>
-      <p:sp>
-        <p:nvSpPr>
-          <p:cNvPr id="9" name="Rounded Rectangle 8"/>
+              <a:t>•  Enterprise Blockade: Fortune 500 companies cannot execute business settlements on public blockchains without leaking corporate secrets.</a:t>
+            </a:r>
+          </a:p>
+        </p:txBody>
+      </p:sp>
+      <p:sp>
+        <p:nvSpPr>
+          <p:cNvPr id="12" name="Rounded Rectangle 11"/>
           <p:cNvSpPr/>
           <p:nvPr/>
         </p:nvSpPr>
         <p:spPr>
           <a:xfrm>
-            <a:off x="6309360" y="1554480"/>
-            <a:ext cx="5120640" cy="4754880"/>
+            <a:off x="6248095" y="1645920"/>
+            <a:ext cx="5212080" cy="4572000"/>
           </a:xfrm>
           <a:prstGeom prst="roundRect">
             <a:avLst/>
@@ -4814,14 +4286,93 @@
       </p:sp>
       <p:sp>
         <p:nvSpPr>
-          <p:cNvPr id="10" name="TextBox 9"/>
+          <p:cNvPr id="13" name="Rounded Rectangle 12"/>
+          <p:cNvSpPr/>
+          <p:nvPr/>
+        </p:nvSpPr>
+        <p:spPr>
+          <a:xfrm>
+            <a:off x="6476695" y="1645920"/>
+            <a:ext cx="1645920" cy="36576"/>
+          </a:xfrm>
+          <a:prstGeom prst="roundRect">
+            <a:avLst/>
+          </a:prstGeom>
+          <a:solidFill>
+            <a:srgbClr val="00F5A0"/>
+          </a:solidFill>
+          <a:ln>
+            <a:noFill/>
+          </a:ln>
+        </p:spPr>
+        <p:style>
+          <a:lnRef idx="1">
+            <a:schemeClr val="accent1"/>
+          </a:lnRef>
+          <a:fillRef idx="3">
+            <a:schemeClr val="accent1"/>
+          </a:fillRef>
+          <a:effectRef idx="2">
+            <a:schemeClr val="accent1"/>
+          </a:effectRef>
+          <a:fontRef idx="minor">
+            <a:schemeClr val="lt1"/>
+          </a:fontRef>
+        </p:style>
+        <p:txBody>
+          <a:bodyPr rtlCol="0" anchor="ctr"/>
+          <a:lstStyle/>
+          <a:p>
+            <a:pPr algn="ctr"/>
+          </a:p>
+        </p:txBody>
+      </p:sp>
+      <p:sp>
+        <p:nvSpPr>
+          <p:cNvPr id="14" name="TextBox 13"/>
           <p:cNvSpPr txBox="1"/>
           <p:nvPr/>
         </p:nvSpPr>
         <p:spPr>
           <a:xfrm>
-            <a:off x="6537960" y="1719072"/>
-            <a:ext cx="4663440" cy="365760"/>
+            <a:off x="6476695" y="1828800"/>
+            <a:ext cx="4754880" cy="256032"/>
+          </a:xfrm>
+          <a:prstGeom prst="rect">
+            <a:avLst/>
+          </a:prstGeom>
+          <a:noFill/>
+        </p:spPr>
+        <p:txBody>
+          <a:bodyPr wrap="none">
+            <a:spAutoFit/>
+          </a:bodyPr>
+          <a:lstStyle/>
+          <a:p>
+            <a:pPr>
+              <a:defRPr sz="850" b="1">
+                <a:solidFill>
+                  <a:srgbClr val="00F5A0"/>
+                </a:solidFill>
+                <a:latin typeface="Arial"/>
+              </a:defRPr>
+            </a:pPr>
+            <a:r>
+              <a:t>THE ZERO-KNOWLEDGE SHIELD</a:t>
+            </a:r>
+          </a:p>
+        </p:txBody>
+      </p:sp>
+      <p:sp>
+        <p:nvSpPr>
+          <p:cNvPr id="15" name="TextBox 14"/>
+          <p:cNvSpPr txBox="1"/>
+          <p:nvPr/>
+        </p:nvSpPr>
+        <p:spPr>
+          <a:xfrm>
+            <a:off x="6476695" y="2084832"/>
+            <a:ext cx="4754880" cy="411480"/>
           </a:xfrm>
           <a:prstGeom prst="rect">
             <a:avLst/>
@@ -4837,27 +4388,27 @@
             <a:pPr>
               <a:defRPr sz="1300" b="1">
                 <a:solidFill>
-                  <a:srgbClr val="00F5A0"/>
+                  <a:srgbClr val="FFFFFF"/>
                 </a:solidFill>
                 <a:latin typeface="Arial"/>
               </a:defRPr>
             </a:pPr>
             <a:r>
-              <a:t>🛡️ How Midnight Vault Solves This</a:t>
-            </a:r>
-          </a:p>
-        </p:txBody>
-      </p:sp>
-      <p:sp>
-        <p:nvSpPr>
-          <p:cNvPr id="11" name="TextBox 10"/>
+              <a:t>🛡️ KNIGHT.VAULT Solution</a:t>
+            </a:r>
+          </a:p>
+        </p:txBody>
+      </p:sp>
+      <p:sp>
+        <p:nvSpPr>
+          <p:cNvPr id="16" name="TextBox 15"/>
           <p:cNvSpPr txBox="1"/>
           <p:nvPr/>
         </p:nvSpPr>
         <p:spPr>
           <a:xfrm>
-            <a:off x="6537960" y="2121408"/>
-            <a:ext cx="4663440" cy="4069080"/>
+            <a:off x="6476695" y="2496312"/>
+            <a:ext cx="4754880" cy="3584448"/>
           </a:xfrm>
           <a:prstGeom prst="rect">
             <a:avLst/>
@@ -4872,7 +4423,7 @@
           <a:p>
             <a:pPr>
               <a:spcAft>
-                <a:spcPts val="600"/>
+                <a:spcPts val="500"/>
               </a:spcAft>
               <a:defRPr sz="1000">
                 <a:solidFill>
@@ -4882,13 +4433,13 @@
               </a:defRPr>
             </a:pPr>
             <a:r>
-              <a:t>• Dual State Architecture: Retains public verifiable accounting while keeping secrets 100% private in client memory.</a:t>
+              <a:t>•  Witness Isolation: Owner secret keys and withdrawal authorizations remain isolated in local client memory. Only succinct ZK proofs touch chain state.</a:t>
             </a:r>
           </a:p>
           <a:p>
             <a:pPr>
               <a:spcAft>
-                <a:spcPts val="600"/>
+                <a:spcPts val="500"/>
               </a:spcAft>
               <a:defRPr sz="1000">
                 <a:solidFill>
@@ -4898,13 +4449,13 @@
               </a:defRPr>
             </a:pPr>
             <a:r>
-              <a:t>• Zero-Knowledge Authorization: Prove ownership of contract payout rights without ever disclosing the underlying private key.</a:t>
+              <a:t>•  Sponsored Dust Relay: Payers check out seamlessly without acquiring testnet gas tokens or solving faucet captchas.</a:t>
             </a:r>
           </a:p>
           <a:p>
             <a:pPr>
               <a:spcAft>
-                <a:spcPts val="600"/>
+                <a:spcPts val="500"/>
               </a:spcAft>
               <a:defRPr sz="1000">
                 <a:solidFill>
@@ -4914,13 +4465,13 @@
               </a:defRPr>
             </a:pPr>
             <a:r>
-              <a:t>• Sponsored Zero-Gas Relay: ProofStation and 1AM wallet balance fees in DUST — end users pay 0 NIGHT for gas.</a:t>
+              <a:t>•  Deterministic Ledger Accounting: Public counters track verified settlement totals while protecting individual transactor identities.</a:t>
             </a:r>
           </a:p>
           <a:p>
             <a:pPr>
               <a:spcAft>
-                <a:spcPts val="600"/>
+                <a:spcPts val="500"/>
               </a:spcAft>
               <a:defRPr sz="1000">
                 <a:solidFill>
@@ -4930,7 +4481,7 @@
               </a:defRPr>
             </a:pPr>
             <a:r>
-              <a:t>• Enterprise-Grade Compliance Ready: Selective disclosure (disclose()) architecture allows audit trails for approved parties without global leak.</a:t>
+              <a:t>•  Selective Verifiable Receipts: QR cryptographic receipts allow instant auditability without deanonymizing balances.</a:t>
             </a:r>
           </a:p>
         </p:txBody>
@@ -5005,7 +4556,7 @@
         <p:spPr>
           <a:xfrm>
             <a:off x="731520" y="365760"/>
-            <a:ext cx="10698480" cy="320040"/>
+            <a:ext cx="10698480" cy="292608"/>
           </a:xfrm>
           <a:prstGeom prst="rect">
             <a:avLst/>
@@ -5027,7 +4578,7 @@
               </a:defRPr>
             </a:pPr>
             <a:r>
-              <a:t>KNIGHT.VAULT // ZERO-KNOWLEDGE PROTOCOL DECK</a:t>
+              <a:t>02 / ZERO-KNOWLEDGE CIRCUITS</a:t>
             </a:r>
           </a:p>
         </p:txBody>
@@ -5041,7 +4592,7 @@
         <p:spPr>
           <a:xfrm>
             <a:off x="731520" y="658368"/>
-            <a:ext cx="10698480" cy="640080"/>
+            <a:ext cx="10698480" cy="594360"/>
           </a:xfrm>
           <a:prstGeom prst="rect">
             <a:avLst/>
@@ -5055,7 +4606,7 @@
           <a:lstStyle/>
           <a:p>
             <a:pPr>
-              <a:defRPr sz="2000" b="1">
+              <a:defRPr sz="2200" b="1">
                 <a:solidFill>
                   <a:srgbClr val="FFFFFF"/>
                 </a:solidFill>
@@ -5063,7 +4614,7 @@
               </a:defRPr>
             </a:pPr>
             <a:r>
-              <a:t>Key Features: What Makes Midnight Vault Exceptional</a:t>
+              <a:t>Compact v0.20 Smart Contract Architecture</a:t>
             </a:r>
           </a:p>
         </p:txBody>
@@ -5076,8 +4627,8 @@
         </p:nvSpPr>
         <p:spPr>
           <a:xfrm>
-            <a:off x="731520" y="1353312"/>
-            <a:ext cx="10728655" cy="18288"/>
+            <a:off x="731520" y="1298448"/>
+            <a:ext cx="10728655" cy="13716"/>
           </a:xfrm>
           <a:prstGeom prst="rect">
             <a:avLst/>
@@ -5113,14 +4664,57 @@
       </p:sp>
       <p:sp>
         <p:nvSpPr>
-          <p:cNvPr id="6" name="Rounded Rectangle 5"/>
+          <p:cNvPr id="6" name="Rectangle 5"/>
           <p:cNvSpPr/>
           <p:nvPr/>
         </p:nvSpPr>
         <p:spPr>
           <a:xfrm>
-            <a:off x="731520" y="1554480"/>
-            <a:ext cx="3291840" cy="2286000"/>
+            <a:off x="731520" y="1298448"/>
+            <a:ext cx="1097280" cy="22860"/>
+          </a:xfrm>
+          <a:prstGeom prst="rect">
+            <a:avLst/>
+          </a:prstGeom>
+          <a:solidFill>
+            <a:srgbClr val="00F5A0"/>
+          </a:solidFill>
+          <a:ln>
+            <a:noFill/>
+          </a:ln>
+        </p:spPr>
+        <p:style>
+          <a:lnRef idx="1">
+            <a:schemeClr val="accent1"/>
+          </a:lnRef>
+          <a:fillRef idx="3">
+            <a:schemeClr val="accent1"/>
+          </a:fillRef>
+          <a:effectRef idx="2">
+            <a:schemeClr val="accent1"/>
+          </a:effectRef>
+          <a:fontRef idx="minor">
+            <a:schemeClr val="lt1"/>
+          </a:fontRef>
+        </p:style>
+        <p:txBody>
+          <a:bodyPr rtlCol="0" anchor="ctr"/>
+          <a:lstStyle/>
+          <a:p>
+            <a:pPr algn="ctr"/>
+          </a:p>
+        </p:txBody>
+      </p:sp>
+      <p:sp>
+        <p:nvSpPr>
+          <p:cNvPr id="7" name="Rounded Rectangle 6"/>
+          <p:cNvSpPr/>
+          <p:nvPr/>
+        </p:nvSpPr>
+        <p:spPr>
+          <a:xfrm>
+            <a:off x="731520" y="1645920"/>
+            <a:ext cx="6217920" cy="4572000"/>
           </a:xfrm>
           <a:prstGeom prst="roundRect">
             <a:avLst/>
@@ -5158,14 +4752,14 @@
       </p:sp>
       <p:sp>
         <p:nvSpPr>
-          <p:cNvPr id="7" name="TextBox 6"/>
+          <p:cNvPr id="8" name="TextBox 7"/>
           <p:cNvSpPr txBox="1"/>
           <p:nvPr/>
         </p:nvSpPr>
         <p:spPr>
           <a:xfrm>
-            <a:off x="960120" y="1719072"/>
-            <a:ext cx="2834640" cy="365760"/>
+            <a:off x="914400" y="1783080"/>
+            <a:ext cx="5852160" cy="4297680"/>
           </a:xfrm>
           <a:prstGeom prst="rect">
             <a:avLst/>
@@ -5179,86 +4773,316 @@
           <a:lstStyle/>
           <a:p>
             <a:pPr>
-              <a:defRPr sz="1300" b="1">
+              <a:spcAft>
+                <a:spcPts val="150"/>
+              </a:spcAft>
+              <a:defRPr sz="850">
+                <a:solidFill>
+                  <a:srgbClr val="64748B"/>
+                </a:solidFill>
+                <a:latin typeface="Consolas"/>
+              </a:defRPr>
+            </a:pPr>
+            <a:r>
+              <a:t>// payment.compact (Midnight Network stdlib v0.20)</a:t>
+            </a:r>
+          </a:p>
+          <a:p>
+            <a:pPr>
+              <a:spcAft>
+                <a:spcPts val="150"/>
+              </a:spcAft>
+              <a:defRPr sz="850">
+                <a:solidFill>
+                  <a:srgbClr val="FFFFFF"/>
+                </a:solidFill>
+                <a:latin typeface="Consolas"/>
+              </a:defRPr>
+            </a:pPr>
+            <a:r>
+              <a:t>contract PaymentVault {</a:t>
+            </a:r>
+          </a:p>
+          <a:p>
+            <a:pPr>
+              <a:spcAft>
+                <a:spcPts val="150"/>
+              </a:spcAft>
+              <a:defRPr sz="850">
+                <a:solidFill>
+                  <a:srgbClr val="00F5A0"/>
+                </a:solidFill>
+                <a:latin typeface="Consolas"/>
+              </a:defRPr>
+            </a:pPr>
+            <a:r>
+              <a:t>  ledger balance: Counter;</a:t>
+            </a:r>
+          </a:p>
+          <a:p>
+            <a:pPr>
+              <a:spcAft>
+                <a:spcPts val="150"/>
+              </a:spcAft>
+              <a:defRPr sz="850">
+                <a:solidFill>
+                  <a:srgbClr val="00F5A0"/>
+                </a:solidFill>
+                <a:latin typeface="Consolas"/>
+              </a:defRPr>
+            </a:pPr>
+            <a:r>
+              <a:t>  ledger totalDeposited: Counter;</a:t>
+            </a:r>
+          </a:p>
+          <a:p>
+            <a:pPr>
+              <a:spcAft>
+                <a:spcPts val="150"/>
+              </a:spcAft>
+              <a:defRPr sz="850">
+                <a:solidFill>
+                  <a:srgbClr val="00F5A0"/>
+                </a:solidFill>
+                <a:latin typeface="Consolas"/>
+              </a:defRPr>
+            </a:pPr>
+            <a:r>
+              <a:t>  ledger ownerCommitment: Bytes&lt;32&gt;;</a:t>
+            </a:r>
+          </a:p>
+          <a:p>
+            <a:pPr>
+              <a:spcAft>
+                <a:spcPts val="150"/>
+              </a:spcAft>
+              <a:defRPr sz="850">
+                <a:solidFill>
+                  <a:srgbClr val="FFFFFF"/>
+                </a:solidFill>
+                <a:latin typeface="Consolas"/>
+              </a:defRPr>
+            </a:pPr>
+          </a:p>
+          <a:p>
+            <a:pPr>
+              <a:spcAft>
+                <a:spcPts val="150"/>
+              </a:spcAft>
+              <a:defRPr sz="850">
+                <a:solidFill>
+                  <a:srgbClr val="64748B"/>
+                </a:solidFill>
+                <a:latin typeface="Consolas"/>
+              </a:defRPr>
+            </a:pPr>
+            <a:r>
+              <a:t>  // Public Payer Inflow (Zero User Gas)</a:t>
+            </a:r>
+          </a:p>
+          <a:p>
+            <a:pPr>
+              <a:spcAft>
+                <a:spcPts val="150"/>
+              </a:spcAft>
+              <a:defRPr sz="850">
+                <a:solidFill>
+                  <a:srgbClr val="38BDF8"/>
+                </a:solidFill>
+                <a:latin typeface="Consolas"/>
+              </a:defRPr>
+            </a:pPr>
+            <a:r>
+              <a:t>  export circuit receiveUnshielded(amount: Uint&lt;64&gt;): Void {</a:t>
+            </a:r>
+          </a:p>
+          <a:p>
+            <a:pPr>
+              <a:spcAft>
+                <a:spcPts val="150"/>
+              </a:spcAft>
+              <a:defRPr sz="850">
+                <a:solidFill>
+                  <a:srgbClr val="F1F5F9"/>
+                </a:solidFill>
+                <a:latin typeface="Consolas"/>
+              </a:defRPr>
+            </a:pPr>
+            <a:r>
+              <a:t>    balance.increment(amount);</a:t>
+            </a:r>
+          </a:p>
+          <a:p>
+            <a:pPr>
+              <a:spcAft>
+                <a:spcPts val="150"/>
+              </a:spcAft>
+              <a:defRPr sz="850">
+                <a:solidFill>
+                  <a:srgbClr val="F1F5F9"/>
+                </a:solidFill>
+                <a:latin typeface="Consolas"/>
+              </a:defRPr>
+            </a:pPr>
+            <a:r>
+              <a:t>    totalDeposited.increment(amount);</a:t>
+            </a:r>
+          </a:p>
+          <a:p>
+            <a:pPr>
+              <a:spcAft>
+                <a:spcPts val="150"/>
+              </a:spcAft>
+              <a:defRPr sz="850">
+                <a:solidFill>
+                  <a:srgbClr val="38BDF8"/>
+                </a:solidFill>
+                <a:latin typeface="Consolas"/>
+              </a:defRPr>
+            </a:pPr>
+            <a:r>
+              <a:t>  }</a:t>
+            </a:r>
+          </a:p>
+          <a:p>
+            <a:pPr>
+              <a:spcAft>
+                <a:spcPts val="150"/>
+              </a:spcAft>
+              <a:defRPr sz="850">
+                <a:solidFill>
+                  <a:srgbClr val="FFFFFF"/>
+                </a:solidFill>
+                <a:latin typeface="Consolas"/>
+              </a:defRPr>
+            </a:pPr>
+          </a:p>
+          <a:p>
+            <a:pPr>
+              <a:spcAft>
+                <a:spcPts val="150"/>
+              </a:spcAft>
+              <a:defRPr sz="850">
+                <a:solidFill>
+                  <a:srgbClr val="64748B"/>
+                </a:solidFill>
+                <a:latin typeface="Consolas"/>
+              </a:defRPr>
+            </a:pPr>
+            <a:r>
+              <a:t>  // Confidential Withdrawal (ZK Owner Auth)</a:t>
+            </a:r>
+          </a:p>
+          <a:p>
+            <a:pPr>
+              <a:spcAft>
+                <a:spcPts val="150"/>
+              </a:spcAft>
+              <a:defRPr sz="850">
                 <a:solidFill>
                   <a:srgbClr val="818CF8"/>
                 </a:solidFill>
-                <a:latin typeface="Arial"/>
-              </a:defRPr>
-            </a:pPr>
-            <a:r>
-              <a:t>🔐 Non-Custodial ZK Vault</a:t>
-            </a:r>
-          </a:p>
-        </p:txBody>
-      </p:sp>
-      <p:sp>
-        <p:nvSpPr>
-          <p:cNvPr id="8" name="TextBox 7"/>
-          <p:cNvSpPr txBox="1"/>
-          <p:nvPr/>
-        </p:nvSpPr>
-        <p:spPr>
-          <a:xfrm>
-            <a:off x="960120" y="2121408"/>
-            <a:ext cx="2834640" cy="1600200"/>
-          </a:xfrm>
-          <a:prstGeom prst="rect">
-            <a:avLst/>
-          </a:prstGeom>
-          <a:noFill/>
-        </p:spPr>
-        <p:txBody>
-          <a:bodyPr wrap="square">
-            <a:spAutoFit/>
-          </a:bodyPr>
-          <a:lstStyle/>
+                <a:latin typeface="Consolas"/>
+              </a:defRPr>
+            </a:pPr>
+            <a:r>
+              <a:t>  export circuit withdraw(amount: Uint&lt;64&gt;, recipient: ...): Void {</a:t>
+            </a:r>
+          </a:p>
           <a:p>
             <a:pPr>
               <a:spcAft>
-                <a:spcPts val="600"/>
+                <a:spcPts val="150"/>
               </a:spcAft>
-              <a:defRPr sz="1000">
-                <a:solidFill>
-                  <a:srgbClr val="94A3B8"/>
-                </a:solidFill>
-                <a:latin typeface="Arial"/>
-              </a:defRPr>
-            </a:pPr>
-            <a:r>
-              <a:t>• 1-Click Deploy of autonomous smart contracts on Midnight Preprod.</a:t>
+              <a:defRPr sz="850">
+                <a:solidFill>
+                  <a:srgbClr val="00F5A0"/>
+                </a:solidFill>
+                <a:latin typeface="Consolas"/>
+              </a:defRPr>
+            </a:pPr>
+            <a:r>
+              <a:t>    witness ownerSecretKey: Bytes&lt;32&gt;;</a:t>
             </a:r>
           </a:p>
           <a:p>
             <a:pPr>
               <a:spcAft>
-                <a:spcPts val="600"/>
+                <a:spcPts val="150"/>
               </a:spcAft>
-              <a:defRPr sz="1000">
-                <a:solidFill>
-                  <a:srgbClr val="94A3B8"/>
-                </a:solidFill>
-                <a:latin typeface="Arial"/>
-              </a:defRPr>
-            </a:pPr>
-            <a:r>
-              <a:t>• Contract owner generated via client-side cryptographic randomness.</a:t>
+              <a:defRPr sz="850">
+                <a:solidFill>
+                  <a:srgbClr val="00F5A0"/>
+                </a:solidFill>
+                <a:latin typeface="Consolas"/>
+              </a:defRPr>
+            </a:pPr>
+            <a:r>
+              <a:t>    assert persistentCommit(ownerSecretKey) == ownerCommitment;</a:t>
             </a:r>
           </a:p>
           <a:p>
             <a:pPr>
               <a:spcAft>
-                <a:spcPts val="600"/>
+                <a:spcPts val="150"/>
               </a:spcAft>
-              <a:defRPr sz="1000">
-                <a:solidFill>
-                  <a:srgbClr val="94A3B8"/>
-                </a:solidFill>
-                <a:latin typeface="Arial"/>
-              </a:defRPr>
-            </a:pPr>
-            <a:r>
-              <a:t>• Secret witness never touches any server or network packet.</a:t>
+              <a:defRPr sz="850">
+                <a:solidFill>
+                  <a:srgbClr val="F1F5F9"/>
+                </a:solidFill>
+                <a:latin typeface="Consolas"/>
+              </a:defRPr>
+            </a:pPr>
+            <a:r>
+              <a:t>    balance.decrement(amount);</a:t>
+            </a:r>
+          </a:p>
+          <a:p>
+            <a:pPr>
+              <a:spcAft>
+                <a:spcPts val="150"/>
+              </a:spcAft>
+              <a:defRPr sz="850">
+                <a:solidFill>
+                  <a:srgbClr val="F1F5F9"/>
+                </a:solidFill>
+                <a:latin typeface="Consolas"/>
+              </a:defRPr>
+            </a:pPr>
+            <a:r>
+              <a:t>    sendUnshielded(amount, recipient);</a:t>
+            </a:r>
+          </a:p>
+          <a:p>
+            <a:pPr>
+              <a:spcAft>
+                <a:spcPts val="150"/>
+              </a:spcAft>
+              <a:defRPr sz="850">
+                <a:solidFill>
+                  <a:srgbClr val="818CF8"/>
+                </a:solidFill>
+                <a:latin typeface="Consolas"/>
+              </a:defRPr>
+            </a:pPr>
+            <a:r>
+              <a:t>  }</a:t>
+            </a:r>
+          </a:p>
+          <a:p>
+            <a:pPr>
+              <a:spcAft>
+                <a:spcPts val="150"/>
+              </a:spcAft>
+              <a:defRPr sz="850">
+                <a:solidFill>
+                  <a:srgbClr val="FFFFFF"/>
+                </a:solidFill>
+                <a:latin typeface="Consolas"/>
+              </a:defRPr>
+            </a:pPr>
+            <a:r>
+              <a:t>}</a:t>
             </a:r>
           </a:p>
         </p:txBody>
@@ -5271,8 +5095,8 @@
         </p:nvSpPr>
         <p:spPr>
           <a:xfrm>
-            <a:off x="4434840" y="1554480"/>
-            <a:ext cx="3291840" cy="2286000"/>
+            <a:off x="7132320" y="1645920"/>
+            <a:ext cx="4327855" cy="1417320"/>
           </a:xfrm>
           <a:prstGeom prst="roundRect">
             <a:avLst/>
@@ -5310,14 +5134,93 @@
       </p:sp>
       <p:sp>
         <p:nvSpPr>
-          <p:cNvPr id="10" name="TextBox 9"/>
+          <p:cNvPr id="10" name="Rounded Rectangle 9"/>
+          <p:cNvSpPr/>
+          <p:nvPr/>
+        </p:nvSpPr>
+        <p:spPr>
+          <a:xfrm>
+            <a:off x="7360920" y="1645920"/>
+            <a:ext cx="1645920" cy="36576"/>
+          </a:xfrm>
+          <a:prstGeom prst="roundRect">
+            <a:avLst/>
+          </a:prstGeom>
+          <a:solidFill>
+            <a:srgbClr val="38BDF8"/>
+          </a:solidFill>
+          <a:ln>
+            <a:noFill/>
+          </a:ln>
+        </p:spPr>
+        <p:style>
+          <a:lnRef idx="1">
+            <a:schemeClr val="accent1"/>
+          </a:lnRef>
+          <a:fillRef idx="3">
+            <a:schemeClr val="accent1"/>
+          </a:fillRef>
+          <a:effectRef idx="2">
+            <a:schemeClr val="accent1"/>
+          </a:effectRef>
+          <a:fontRef idx="minor">
+            <a:schemeClr val="lt1"/>
+          </a:fontRef>
+        </p:style>
+        <p:txBody>
+          <a:bodyPr rtlCol="0" anchor="ctr"/>
+          <a:lstStyle/>
+          <a:p>
+            <a:pPr algn="ctr"/>
+          </a:p>
+        </p:txBody>
+      </p:sp>
+      <p:sp>
+        <p:nvSpPr>
+          <p:cNvPr id="11" name="TextBox 10"/>
           <p:cNvSpPr txBox="1"/>
           <p:nvPr/>
         </p:nvSpPr>
         <p:spPr>
           <a:xfrm>
-            <a:off x="4663440" y="1719072"/>
-            <a:ext cx="2834640" cy="365760"/>
+            <a:off x="7360920" y="1828800"/>
+            <a:ext cx="3870655" cy="256032"/>
+          </a:xfrm>
+          <a:prstGeom prst="rect">
+            <a:avLst/>
+          </a:prstGeom>
+          <a:noFill/>
+        </p:spPr>
+        <p:txBody>
+          <a:bodyPr wrap="none">
+            <a:spAutoFit/>
+          </a:bodyPr>
+          <a:lstStyle/>
+          <a:p>
+            <a:pPr>
+              <a:defRPr sz="850" b="1">
+                <a:solidFill>
+                  <a:srgbClr val="38BDF8"/>
+                </a:solidFill>
+                <a:latin typeface="Arial"/>
+              </a:defRPr>
+            </a:pPr>
+            <a:r>
+              <a:t>INFLOW CIRCUIT</a:t>
+            </a:r>
+          </a:p>
+        </p:txBody>
+      </p:sp>
+      <p:sp>
+        <p:nvSpPr>
+          <p:cNvPr id="12" name="TextBox 11"/>
+          <p:cNvSpPr txBox="1"/>
+          <p:nvPr/>
+        </p:nvSpPr>
+        <p:spPr>
+          <a:xfrm>
+            <a:off x="7360920" y="2084832"/>
+            <a:ext cx="3870655" cy="411480"/>
           </a:xfrm>
           <a:prstGeom prst="rect">
             <a:avLst/>
@@ -5333,27 +5236,27 @@
             <a:pPr>
               <a:defRPr sz="1300" b="1">
                 <a:solidFill>
-                  <a:srgbClr val="F59E0B"/>
+                  <a:srgbClr val="FFFFFF"/>
                 </a:solidFill>
                 <a:latin typeface="Arial"/>
               </a:defRPr>
             </a:pPr>
             <a:r>
-              <a:t>⚡ Zero Gas (Sponsorship Flow)</a:t>
-            </a:r>
-          </a:p>
-        </p:txBody>
-      </p:sp>
-      <p:sp>
-        <p:nvSpPr>
-          <p:cNvPr id="11" name="TextBox 10"/>
+              <a:t>1. receiveUnshielded()</a:t>
+            </a:r>
+          </a:p>
+        </p:txBody>
+      </p:sp>
+      <p:sp>
+        <p:nvSpPr>
+          <p:cNvPr id="13" name="TextBox 12"/>
           <p:cNvSpPr txBox="1"/>
           <p:nvPr/>
         </p:nvSpPr>
         <p:spPr>
           <a:xfrm>
-            <a:off x="4663440" y="2121408"/>
-            <a:ext cx="2834640" cy="1600200"/>
+            <a:off x="7360920" y="2496312"/>
+            <a:ext cx="3870655" cy="429768"/>
           </a:xfrm>
           <a:prstGeom prst="rect">
             <a:avLst/>
@@ -5368,7 +5271,7 @@
           <a:p>
             <a:pPr>
               <a:spcAft>
-                <a:spcPts val="600"/>
+                <a:spcPts val="500"/>
               </a:spcAft>
               <a:defRPr sz="1000">
                 <a:solidFill>
@@ -5378,13 +5281,13 @@
               </a:defRPr>
             </a:pPr>
             <a:r>
-              <a:t>• Integrated with 1AM Wallet DApp Connector API.</a:t>
+              <a:t>•  Inflow entrypoint. Increments public ledger balance.</a:t>
             </a:r>
           </a:p>
           <a:p>
             <a:pPr>
               <a:spcAft>
-                <a:spcPts val="600"/>
+                <a:spcPts val="500"/>
               </a:spcAft>
               <a:defRPr sz="1000">
                 <a:solidFill>
@@ -5394,37 +5297,21 @@
               </a:defRPr>
             </a:pPr>
             <a:r>
-              <a:t>• balanceUnsealedTransaction injects DUST sponsor fees automatically.</a:t>
-            </a:r>
-          </a:p>
-          <a:p>
-            <a:pPr>
-              <a:spcAft>
-                <a:spcPts val="600"/>
-              </a:spcAft>
-              <a:defRPr sz="1000">
-                <a:solidFill>
-                  <a:srgbClr val="94A3B8"/>
-                </a:solidFill>
-                <a:latin typeface="Arial"/>
-              </a:defRPr>
-            </a:pPr>
-            <a:r>
-              <a:t>• Frictionless onboarding with 0 token prerequisites.</a:t>
-            </a:r>
-          </a:p>
-        </p:txBody>
-      </p:sp>
-      <p:sp>
-        <p:nvSpPr>
-          <p:cNvPr id="12" name="Rounded Rectangle 11"/>
+              <a:t>•  Compatible with sponsored dust transactions for zero-gas checkouts.</a:t>
+            </a:r>
+          </a:p>
+        </p:txBody>
+      </p:sp>
+      <p:sp>
+        <p:nvSpPr>
+          <p:cNvPr id="14" name="Rounded Rectangle 13"/>
           <p:cNvSpPr/>
           <p:nvPr/>
         </p:nvSpPr>
         <p:spPr>
           <a:xfrm>
-            <a:off x="8138160" y="1554480"/>
-            <a:ext cx="3291840" cy="2286000"/>
+            <a:off x="7132320" y="3218688"/>
+            <a:ext cx="4327855" cy="1417320"/>
           </a:xfrm>
           <a:prstGeom prst="roundRect">
             <a:avLst/>
@@ -5462,14 +5349,93 @@
       </p:sp>
       <p:sp>
         <p:nvSpPr>
-          <p:cNvPr id="13" name="TextBox 12"/>
+          <p:cNvPr id="15" name="Rounded Rectangle 14"/>
+          <p:cNvSpPr/>
+          <p:nvPr/>
+        </p:nvSpPr>
+        <p:spPr>
+          <a:xfrm>
+            <a:off x="7360920" y="3218688"/>
+            <a:ext cx="1645920" cy="36576"/>
+          </a:xfrm>
+          <a:prstGeom prst="roundRect">
+            <a:avLst/>
+          </a:prstGeom>
+          <a:solidFill>
+            <a:srgbClr val="818CF8"/>
+          </a:solidFill>
+          <a:ln>
+            <a:noFill/>
+          </a:ln>
+        </p:spPr>
+        <p:style>
+          <a:lnRef idx="1">
+            <a:schemeClr val="accent1"/>
+          </a:lnRef>
+          <a:fillRef idx="3">
+            <a:schemeClr val="accent1"/>
+          </a:fillRef>
+          <a:effectRef idx="2">
+            <a:schemeClr val="accent1"/>
+          </a:effectRef>
+          <a:fontRef idx="minor">
+            <a:schemeClr val="lt1"/>
+          </a:fontRef>
+        </p:style>
+        <p:txBody>
+          <a:bodyPr rtlCol="0" anchor="ctr"/>
+          <a:lstStyle/>
+          <a:p>
+            <a:pPr algn="ctr"/>
+          </a:p>
+        </p:txBody>
+      </p:sp>
+      <p:sp>
+        <p:nvSpPr>
+          <p:cNvPr id="16" name="TextBox 15"/>
           <p:cNvSpPr txBox="1"/>
           <p:nvPr/>
         </p:nvSpPr>
         <p:spPr>
           <a:xfrm>
-            <a:off x="8366760" y="1719072"/>
-            <a:ext cx="2834640" cy="365760"/>
+            <a:off x="7360920" y="3401568"/>
+            <a:ext cx="3870655" cy="256032"/>
+          </a:xfrm>
+          <a:prstGeom prst="rect">
+            <a:avLst/>
+          </a:prstGeom>
+          <a:noFill/>
+        </p:spPr>
+        <p:txBody>
+          <a:bodyPr wrap="none">
+            <a:spAutoFit/>
+          </a:bodyPr>
+          <a:lstStyle/>
+          <a:p>
+            <a:pPr>
+              <a:defRPr sz="850" b="1">
+                <a:solidFill>
+                  <a:srgbClr val="818CF8"/>
+                </a:solidFill>
+                <a:latin typeface="Arial"/>
+              </a:defRPr>
+            </a:pPr>
+            <a:r>
+              <a:t>OUTFLOW CIRCUIT</a:t>
+            </a:r>
+          </a:p>
+        </p:txBody>
+      </p:sp>
+      <p:sp>
+        <p:nvSpPr>
+          <p:cNvPr id="17" name="TextBox 16"/>
+          <p:cNvSpPr txBox="1"/>
+          <p:nvPr/>
+        </p:nvSpPr>
+        <p:spPr>
+          <a:xfrm>
+            <a:off x="7360920" y="3657600"/>
+            <a:ext cx="3870655" cy="411480"/>
           </a:xfrm>
           <a:prstGeom prst="rect">
             <a:avLst/>
@@ -5485,27 +5451,27 @@
             <a:pPr>
               <a:defRPr sz="1300" b="1">
                 <a:solidFill>
-                  <a:srgbClr val="00F5A0"/>
+                  <a:srgbClr val="FFFFFF"/>
                 </a:solidFill>
                 <a:latin typeface="Arial"/>
               </a:defRPr>
             </a:pPr>
             <a:r>
-              <a:t>💻 On-Device Proof Engine</a:t>
-            </a:r>
-          </a:p>
-        </p:txBody>
-      </p:sp>
-      <p:sp>
-        <p:nvSpPr>
-          <p:cNvPr id="14" name="TextBox 13"/>
+              <a:t>2. withdraw()</a:t>
+            </a:r>
+          </a:p>
+        </p:txBody>
+      </p:sp>
+      <p:sp>
+        <p:nvSpPr>
+          <p:cNvPr id="18" name="TextBox 17"/>
           <p:cNvSpPr txBox="1"/>
           <p:nvPr/>
         </p:nvSpPr>
         <p:spPr>
           <a:xfrm>
-            <a:off x="8366760" y="2121408"/>
-            <a:ext cx="2834640" cy="1600200"/>
+            <a:off x="7360920" y="4069080"/>
+            <a:ext cx="3870655" cy="429768"/>
           </a:xfrm>
           <a:prstGeom prst="rect">
             <a:avLst/>
@@ -5520,7 +5486,7 @@
           <a:p>
             <a:pPr>
               <a:spcAft>
-                <a:spcPts val="600"/>
+                <a:spcPts val="500"/>
               </a:spcAft>
               <a:defRPr sz="1000">
                 <a:solidFill>
@@ -5530,13 +5496,13 @@
               </a:defRPr>
             </a:pPr>
             <a:r>
-              <a:t>• Connects to Docker Proof Server on localhost:6300.</a:t>
+              <a:t>•  Outflow entrypoint. Verifies secret key via private witness proof.</a:t>
             </a:r>
           </a:p>
           <a:p>
             <a:pPr>
               <a:spcAft>
-                <a:spcPts val="600"/>
+                <a:spcPts val="500"/>
               </a:spcAft>
               <a:defRPr sz="1000">
                 <a:solidFill>
@@ -5546,37 +5512,21 @@
               </a:defRPr>
             </a:pPr>
             <a:r>
-              <a:t>• Generates Groth16 / ZK-SNARK polynomial proofs in 2-4 seconds.</a:t>
-            </a:r>
-          </a:p>
-          <a:p>
-            <a:pPr>
-              <a:spcAft>
-                <a:spcPts val="600"/>
-              </a:spcAft>
-              <a:defRPr sz="1000">
-                <a:solidFill>
-                  <a:srgbClr val="94A3B8"/>
-                </a:solidFill>
-                <a:latin typeface="Arial"/>
-              </a:defRPr>
-            </a:pPr>
-            <a:r>
-              <a:t>• 100% cryptographic sovereignty for end users.</a:t>
-            </a:r>
-          </a:p>
-        </p:txBody>
-      </p:sp>
-      <p:sp>
-        <p:nvSpPr>
-          <p:cNvPr id="15" name="Rounded Rectangle 14"/>
+              <a:t>•  Funds transferred unshielded to designated recipient address.</a:t>
+            </a:r>
+          </a:p>
+        </p:txBody>
+      </p:sp>
+      <p:sp>
+        <p:nvSpPr>
+          <p:cNvPr id="19" name="Rounded Rectangle 18"/>
           <p:cNvSpPr/>
           <p:nvPr/>
         </p:nvSpPr>
         <p:spPr>
           <a:xfrm>
-            <a:off x="731520" y="4023360"/>
-            <a:ext cx="3291840" cy="2286000"/>
+            <a:off x="7132320" y="4800600"/>
+            <a:ext cx="4327855" cy="1417320"/>
           </a:xfrm>
           <a:prstGeom prst="roundRect">
             <a:avLst/>
@@ -5614,132 +5564,23 @@
       </p:sp>
       <p:sp>
         <p:nvSpPr>
-          <p:cNvPr id="16" name="TextBox 15"/>
-          <p:cNvSpPr txBox="1"/>
-          <p:nvPr/>
-        </p:nvSpPr>
-        <p:spPr>
-          <a:xfrm>
-            <a:off x="960120" y="4187952"/>
-            <a:ext cx="2834640" cy="365760"/>
-          </a:xfrm>
-          <a:prstGeom prst="rect">
-            <a:avLst/>
-          </a:prstGeom>
-          <a:noFill/>
-        </p:spPr>
-        <p:txBody>
-          <a:bodyPr wrap="square">
-            <a:spAutoFit/>
-          </a:bodyPr>
-          <a:lstStyle/>
-          <a:p>
-            <a:pPr>
-              <a:defRPr sz="1300" b="1">
-                <a:solidFill>
-                  <a:srgbClr val="06B6D4"/>
-                </a:solidFill>
-                <a:latin typeface="Arial"/>
-              </a:defRPr>
-            </a:pPr>
-            <a:r>
-              <a:t>📡 Patched Indexer v4</a:t>
-            </a:r>
-          </a:p>
-        </p:txBody>
-      </p:sp>
-      <p:sp>
-        <p:nvSpPr>
-          <p:cNvPr id="17" name="TextBox 16"/>
-          <p:cNvSpPr txBox="1"/>
-          <p:nvPr/>
-        </p:nvSpPr>
-        <p:spPr>
-          <a:xfrm>
-            <a:off x="960120" y="4590288"/>
-            <a:ext cx="2834640" cy="1600200"/>
-          </a:xfrm>
-          <a:prstGeom prst="rect">
-            <a:avLst/>
-          </a:prstGeom>
-          <a:noFill/>
-        </p:spPr>
-        <p:txBody>
-          <a:bodyPr wrap="square">
-            <a:spAutoFit/>
-          </a:bodyPr>
-          <a:lstStyle/>
-          <a:p>
-            <a:pPr>
-              <a:spcAft>
-                <a:spcPts val="600"/>
-              </a:spcAft>
-              <a:defRPr sz="1000">
-                <a:solidFill>
-                  <a:srgbClr val="94A3B8"/>
-                </a:solidFill>
-                <a:latin typeface="Arial"/>
-              </a:defRPr>
-            </a:pPr>
-            <a:r>
-              <a:t>• GraphQL Indexer client patched to eliminate Preprod null-offset bugs.</a:t>
-            </a:r>
-          </a:p>
-          <a:p>
-            <a:pPr>
-              <a:spcAft>
-                <a:spcPts val="600"/>
-              </a:spcAft>
-              <a:defRPr sz="1000">
-                <a:solidFill>
-                  <a:srgbClr val="94A3B8"/>
-                </a:solidFill>
-                <a:latin typeface="Arial"/>
-              </a:defRPr>
-            </a:pPr>
-            <a:r>
-              <a:t>• Real-time state polling and instant UI reactive updates.</a:t>
-            </a:r>
-          </a:p>
-          <a:p>
-            <a:pPr>
-              <a:spcAft>
-                <a:spcPts val="600"/>
-              </a:spcAft>
-              <a:defRPr sz="1000">
-                <a:solidFill>
-                  <a:srgbClr val="94A3B8"/>
-                </a:solidFill>
-                <a:latin typeface="Arial"/>
-              </a:defRPr>
-            </a:pPr>
-            <a:r>
-              <a:t>• Comprehensive settlement session audit log.</a:t>
-            </a:r>
-          </a:p>
-        </p:txBody>
-      </p:sp>
-      <p:sp>
-        <p:nvSpPr>
-          <p:cNvPr id="18" name="Rounded Rectangle 17"/>
+          <p:cNvPr id="20" name="Rounded Rectangle 19"/>
           <p:cNvSpPr/>
           <p:nvPr/>
         </p:nvSpPr>
         <p:spPr>
           <a:xfrm>
-            <a:off x="4434840" y="4023360"/>
-            <a:ext cx="3291840" cy="2286000"/>
+            <a:off x="7360920" y="4800600"/>
+            <a:ext cx="1645920" cy="36576"/>
           </a:xfrm>
           <a:prstGeom prst="roundRect">
             <a:avLst/>
           </a:prstGeom>
           <a:solidFill>
-            <a:srgbClr val="0E1117"/>
+            <a:srgbClr val="00F5A0"/>
           </a:solidFill>
-          <a:ln w="12700">
-            <a:solidFill>
-              <a:srgbClr val="232A38"/>
-            </a:solidFill>
+          <a:ln>
+            <a:noFill/>
           </a:ln>
         </p:spPr>
         <p:style>
@@ -5766,14 +5607,50 @@
       </p:sp>
       <p:sp>
         <p:nvSpPr>
-          <p:cNvPr id="19" name="TextBox 18"/>
+          <p:cNvPr id="21" name="TextBox 20"/>
           <p:cNvSpPr txBox="1"/>
           <p:nvPr/>
         </p:nvSpPr>
         <p:spPr>
           <a:xfrm>
-            <a:off x="4663440" y="4187952"/>
-            <a:ext cx="2834640" cy="365760"/>
+            <a:off x="7360920" y="4983480"/>
+            <a:ext cx="3870655" cy="256032"/>
+          </a:xfrm>
+          <a:prstGeom prst="rect">
+            <a:avLst/>
+          </a:prstGeom>
+          <a:noFill/>
+        </p:spPr>
+        <p:txBody>
+          <a:bodyPr wrap="none">
+            <a:spAutoFit/>
+          </a:bodyPr>
+          <a:lstStyle/>
+          <a:p>
+            <a:pPr>
+              <a:defRPr sz="850" b="1">
+                <a:solidFill>
+                  <a:srgbClr val="00F5A0"/>
+                </a:solidFill>
+                <a:latin typeface="Arial"/>
+              </a:defRPr>
+            </a:pPr>
+            <a:r>
+              <a:t>PUBLIC STATE</a:t>
+            </a:r>
+          </a:p>
+        </p:txBody>
+      </p:sp>
+      <p:sp>
+        <p:nvSpPr>
+          <p:cNvPr id="22" name="TextBox 21"/>
+          <p:cNvSpPr txBox="1"/>
+          <p:nvPr/>
+        </p:nvSpPr>
+        <p:spPr>
+          <a:xfrm>
+            <a:off x="7360920" y="5239512"/>
+            <a:ext cx="3870655" cy="411480"/>
           </a:xfrm>
           <a:prstGeom prst="rect">
             <a:avLst/>
@@ -5795,21 +5672,21 @@
               </a:defRPr>
             </a:pPr>
             <a:r>
-              <a:t>🎨 Institutional Craft UI</a:t>
-            </a:r>
-          </a:p>
-        </p:txBody>
-      </p:sp>
-      <p:sp>
-        <p:nvSpPr>
-          <p:cNvPr id="20" name="TextBox 19"/>
+              <a:t>3. Deterministic Ledger</a:t>
+            </a:r>
+          </a:p>
+        </p:txBody>
+      </p:sp>
+      <p:sp>
+        <p:nvSpPr>
+          <p:cNvPr id="23" name="TextBox 22"/>
           <p:cNvSpPr txBox="1"/>
           <p:nvPr/>
         </p:nvSpPr>
         <p:spPr>
           <a:xfrm>
-            <a:off x="4663440" y="4590288"/>
-            <a:ext cx="2834640" cy="1600200"/>
+            <a:off x="7360920" y="5650992"/>
+            <a:ext cx="3870655" cy="429768"/>
           </a:xfrm>
           <a:prstGeom prst="rect">
             <a:avLst/>
@@ -5824,7 +5701,7 @@
           <a:p>
             <a:pPr>
               <a:spcAft>
-                <a:spcPts val="600"/>
+                <a:spcPts val="500"/>
               </a:spcAft>
               <a:defRPr sz="1000">
                 <a:solidFill>
@@ -5834,13 +5711,13 @@
               </a:defRPr>
             </a:pPr>
             <a:r>
-              <a:t>• Audited with Impeccable Design System (0 anti-patterns).</a:t>
+              <a:t>•  On-chain Counter types provide clean state isolation.</a:t>
             </a:r>
           </a:p>
           <a:p>
             <a:pPr>
               <a:spcAft>
-                <a:spcPts val="600"/>
+                <a:spcPts val="500"/>
               </a:spcAft>
               <a:defRPr sz="1000">
                 <a:solidFill>
@@ -5850,175 +5727,7 @@
               </a:defRPr>
             </a:pPr>
             <a:r>
-              <a:t>• Deep matte slate aesthetic (#0b0d11) with crisp structural borders.</a:t>
-            </a:r>
-          </a:p>
-          <a:p>
-            <a:pPr>
-              <a:spcAft>
-                <a:spcPts val="600"/>
-              </a:spcAft>
-              <a:defRPr sz="1000">
-                <a:solidFill>
-                  <a:srgbClr val="94A3B8"/>
-                </a:solidFill>
-                <a:latin typeface="Arial"/>
-              </a:defRPr>
-            </a:pPr>
-            <a:r>
-              <a:t>• Tabular numerals (tnum) for precision financial readability.</a:t>
-            </a:r>
-          </a:p>
-        </p:txBody>
-      </p:sp>
-      <p:sp>
-        <p:nvSpPr>
-          <p:cNvPr id="21" name="Rounded Rectangle 20"/>
-          <p:cNvSpPr/>
-          <p:nvPr/>
-        </p:nvSpPr>
-        <p:spPr>
-          <a:xfrm>
-            <a:off x="8138160" y="4023360"/>
-            <a:ext cx="3291840" cy="2286000"/>
-          </a:xfrm>
-          <a:prstGeom prst="roundRect">
-            <a:avLst/>
-          </a:prstGeom>
-          <a:solidFill>
-            <a:srgbClr val="0E1117"/>
-          </a:solidFill>
-          <a:ln w="12700">
-            <a:solidFill>
-              <a:srgbClr val="232A38"/>
-            </a:solidFill>
-          </a:ln>
-        </p:spPr>
-        <p:style>
-          <a:lnRef idx="1">
-            <a:schemeClr val="accent1"/>
-          </a:lnRef>
-          <a:fillRef idx="3">
-            <a:schemeClr val="accent1"/>
-          </a:fillRef>
-          <a:effectRef idx="2">
-            <a:schemeClr val="accent1"/>
-          </a:effectRef>
-          <a:fontRef idx="minor">
-            <a:schemeClr val="lt1"/>
-          </a:fontRef>
-        </p:style>
-        <p:txBody>
-          <a:bodyPr rtlCol="0" anchor="ctr"/>
-          <a:lstStyle/>
-          <a:p>
-            <a:pPr algn="ctr"/>
-          </a:p>
-        </p:txBody>
-      </p:sp>
-      <p:sp>
-        <p:nvSpPr>
-          <p:cNvPr id="22" name="TextBox 21"/>
-          <p:cNvSpPr txBox="1"/>
-          <p:nvPr/>
-        </p:nvSpPr>
-        <p:spPr>
-          <a:xfrm>
-            <a:off x="8366760" y="4187952"/>
-            <a:ext cx="2834640" cy="365760"/>
-          </a:xfrm>
-          <a:prstGeom prst="rect">
-            <a:avLst/>
-          </a:prstGeom>
-          <a:noFill/>
-        </p:spPr>
-        <p:txBody>
-          <a:bodyPr wrap="square">
-            <a:spAutoFit/>
-          </a:bodyPr>
-          <a:lstStyle/>
-          <a:p>
-            <a:pPr>
-              <a:defRPr sz="1300" b="1">
-                <a:solidFill>
-                  <a:srgbClr val="F43F5E"/>
-                </a:solidFill>
-                <a:latin typeface="Arial"/>
-              </a:defRPr>
-            </a:pPr>
-            <a:r>
-              <a:t>🛡️ Domain-Separated Key</a:t>
-            </a:r>
-          </a:p>
-        </p:txBody>
-      </p:sp>
-      <p:sp>
-        <p:nvSpPr>
-          <p:cNvPr id="23" name="TextBox 22"/>
-          <p:cNvSpPr txBox="1"/>
-          <p:nvPr/>
-        </p:nvSpPr>
-        <p:spPr>
-          <a:xfrm>
-            <a:off x="8366760" y="4590288"/>
-            <a:ext cx="2834640" cy="1600200"/>
-          </a:xfrm>
-          <a:prstGeom prst="rect">
-            <a:avLst/>
-          </a:prstGeom>
-          <a:noFill/>
-        </p:spPr>
-        <p:txBody>
-          <a:bodyPr wrap="square">
-            <a:spAutoFit/>
-          </a:bodyPr>
-          <a:lstStyle/>
-          <a:p>
-            <a:pPr>
-              <a:spcAft>
-                <a:spcPts val="600"/>
-              </a:spcAft>
-              <a:defRPr sz="1000">
-                <a:solidFill>
-                  <a:srgbClr val="94A3B8"/>
-                </a:solidFill>
-                <a:latin typeface="Arial"/>
-              </a:defRPr>
-            </a:pPr>
-            <a:r>
-              <a:t>• persistentHash([pad(32, 'payment:owner:v1'), sk])</a:t>
-            </a:r>
-          </a:p>
-          <a:p>
-            <a:pPr>
-              <a:spcAft>
-                <a:spcPts val="600"/>
-              </a:spcAft>
-              <a:defRPr sz="1000">
-                <a:solidFill>
-                  <a:srgbClr val="94A3B8"/>
-                </a:solidFill>
-                <a:latin typeface="Arial"/>
-              </a:defRPr>
-            </a:pPr>
-            <a:r>
-              <a:t>• Prevents cross-contract signature and witness replay attacks.</a:t>
-            </a:r>
-          </a:p>
-          <a:p>
-            <a:pPr>
-              <a:spcAft>
-                <a:spcPts val="600"/>
-              </a:spcAft>
-              <a:defRPr sz="1000">
-                <a:solidFill>
-                  <a:srgbClr val="94A3B8"/>
-                </a:solidFill>
-                <a:latin typeface="Arial"/>
-              </a:defRPr>
-            </a:pPr>
-            <a:r>
-              <a:t>• Cryptographic domain isolation by design.</a:t>
+              <a:t>•  Live indexing via Midnight GraphQL v4 websocket subscriptions.</a:t>
             </a:r>
           </a:p>
         </p:txBody>
@@ -6093,7 +5802,7 @@
         <p:spPr>
           <a:xfrm>
             <a:off x="731520" y="365760"/>
-            <a:ext cx="10698480" cy="320040"/>
+            <a:ext cx="10698480" cy="292608"/>
           </a:xfrm>
           <a:prstGeom prst="rect">
             <a:avLst/>
@@ -6115,7 +5824,7 @@
               </a:defRPr>
             </a:pPr>
             <a:r>
-              <a:t>KNIGHT.VAULT // ZERO-KNOWLEDGE PROTOCOL DECK</a:t>
+              <a:t>03 / RUNTIME EXECUTION LIFECYCLE</a:t>
             </a:r>
           </a:p>
         </p:txBody>
@@ -6129,7 +5838,7 @@
         <p:spPr>
           <a:xfrm>
             <a:off x="731520" y="658368"/>
-            <a:ext cx="10698480" cy="640080"/>
+            <a:ext cx="10698480" cy="594360"/>
           </a:xfrm>
           <a:prstGeom prst="rect">
             <a:avLst/>
@@ -6143,7 +5852,7 @@
           <a:lstStyle/>
           <a:p>
             <a:pPr>
-              <a:defRPr sz="2000" b="1">
+              <a:defRPr sz="2200" b="1">
                 <a:solidFill>
                   <a:srgbClr val="FFFFFF"/>
                 </a:solidFill>
@@ -6151,7 +5860,7 @@
               </a:defRPr>
             </a:pPr>
             <a:r>
-              <a:t>Competitive Matrix: Why Midnight Vault Wins</a:t>
+              <a:t>4-Stage Zero-Knowledge Settlement Pipeline</a:t>
             </a:r>
           </a:p>
         </p:txBody>
@@ -6164,8 +5873,8 @@
         </p:nvSpPr>
         <p:spPr>
           <a:xfrm>
-            <a:off x="731520" y="1353312"/>
-            <a:ext cx="10728655" cy="18288"/>
+            <a:off x="731520" y="1298448"/>
+            <a:ext cx="10728655" cy="13716"/>
           </a:xfrm>
           <a:prstGeom prst="rect">
             <a:avLst/>
@@ -6201,14 +5910,57 @@
       </p:sp>
       <p:sp>
         <p:nvSpPr>
-          <p:cNvPr id="6" name="Rounded Rectangle 5"/>
+          <p:cNvPr id="6" name="Rectangle 5"/>
           <p:cNvSpPr/>
           <p:nvPr/>
         </p:nvSpPr>
         <p:spPr>
           <a:xfrm>
-            <a:off x="731520" y="1554480"/>
-            <a:ext cx="2468880" cy="4754880"/>
+            <a:off x="731520" y="1298448"/>
+            <a:ext cx="1097280" cy="22860"/>
+          </a:xfrm>
+          <a:prstGeom prst="rect">
+            <a:avLst/>
+          </a:prstGeom>
+          <a:solidFill>
+            <a:srgbClr val="00F5A0"/>
+          </a:solidFill>
+          <a:ln>
+            <a:noFill/>
+          </a:ln>
+        </p:spPr>
+        <p:style>
+          <a:lnRef idx="1">
+            <a:schemeClr val="accent1"/>
+          </a:lnRef>
+          <a:fillRef idx="3">
+            <a:schemeClr val="accent1"/>
+          </a:fillRef>
+          <a:effectRef idx="2">
+            <a:schemeClr val="accent1"/>
+          </a:effectRef>
+          <a:fontRef idx="minor">
+            <a:schemeClr val="lt1"/>
+          </a:fontRef>
+        </p:style>
+        <p:txBody>
+          <a:bodyPr rtlCol="0" anchor="ctr"/>
+          <a:lstStyle/>
+          <a:p>
+            <a:pPr algn="ctr"/>
+          </a:p>
+        </p:txBody>
+      </p:sp>
+      <p:sp>
+        <p:nvSpPr>
+          <p:cNvPr id="7" name="Rounded Rectangle 6"/>
+          <p:cNvSpPr/>
+          <p:nvPr/>
+        </p:nvSpPr>
+        <p:spPr>
+          <a:xfrm>
+            <a:off x="731520" y="1645920"/>
+            <a:ext cx="2542032" cy="4572000"/>
           </a:xfrm>
           <a:prstGeom prst="roundRect">
             <a:avLst/>
@@ -6246,14 +5998,93 @@
       </p:sp>
       <p:sp>
         <p:nvSpPr>
-          <p:cNvPr id="7" name="TextBox 6"/>
+          <p:cNvPr id="8" name="Rounded Rectangle 7"/>
+          <p:cNvSpPr/>
+          <p:nvPr/>
+        </p:nvSpPr>
+        <p:spPr>
+          <a:xfrm>
+            <a:off x="960120" y="1645920"/>
+            <a:ext cx="1645920" cy="36576"/>
+          </a:xfrm>
+          <a:prstGeom prst="roundRect">
+            <a:avLst/>
+          </a:prstGeom>
+          <a:solidFill>
+            <a:srgbClr val="00F5A0"/>
+          </a:solidFill>
+          <a:ln>
+            <a:noFill/>
+          </a:ln>
+        </p:spPr>
+        <p:style>
+          <a:lnRef idx="1">
+            <a:schemeClr val="accent1"/>
+          </a:lnRef>
+          <a:fillRef idx="3">
+            <a:schemeClr val="accent1"/>
+          </a:fillRef>
+          <a:effectRef idx="2">
+            <a:schemeClr val="accent1"/>
+          </a:effectRef>
+          <a:fontRef idx="minor">
+            <a:schemeClr val="lt1"/>
+          </a:fontRef>
+        </p:style>
+        <p:txBody>
+          <a:bodyPr rtlCol="0" anchor="ctr"/>
+          <a:lstStyle/>
+          <a:p>
+            <a:pPr algn="ctr"/>
+          </a:p>
+        </p:txBody>
+      </p:sp>
+      <p:sp>
+        <p:nvSpPr>
+          <p:cNvPr id="9" name="TextBox 8"/>
           <p:cNvSpPr txBox="1"/>
           <p:nvPr/>
         </p:nvSpPr>
         <p:spPr>
           <a:xfrm>
-            <a:off x="960120" y="1719072"/>
-            <a:ext cx="2011680" cy="365760"/>
+            <a:off x="960120" y="1828800"/>
+            <a:ext cx="2084831" cy="256032"/>
+          </a:xfrm>
+          <a:prstGeom prst="rect">
+            <a:avLst/>
+          </a:prstGeom>
+          <a:noFill/>
+        </p:spPr>
+        <p:txBody>
+          <a:bodyPr wrap="none">
+            <a:spAutoFit/>
+          </a:bodyPr>
+          <a:lstStyle/>
+          <a:p>
+            <a:pPr>
+              <a:defRPr sz="850" b="1">
+                <a:solidFill>
+                  <a:srgbClr val="00F5A0"/>
+                </a:solidFill>
+                <a:latin typeface="Arial"/>
+              </a:defRPr>
+            </a:pPr>
+            <a:r>
+              <a:t>STAGE 01</a:t>
+            </a:r>
+          </a:p>
+        </p:txBody>
+      </p:sp>
+      <p:sp>
+        <p:nvSpPr>
+          <p:cNvPr id="10" name="TextBox 9"/>
+          <p:cNvSpPr txBox="1"/>
+          <p:nvPr/>
+        </p:nvSpPr>
+        <p:spPr>
+          <a:xfrm>
+            <a:off x="960120" y="2084832"/>
+            <a:ext cx="2084831" cy="411480"/>
           </a:xfrm>
           <a:prstGeom prst="rect">
             <a:avLst/>
@@ -6269,27 +6100,27 @@
             <a:pPr>
               <a:defRPr sz="1300" b="1">
                 <a:solidFill>
-                  <a:srgbClr val="F43F5E"/>
+                  <a:srgbClr val="FFFFFF"/>
                 </a:solidFill>
                 <a:latin typeface="Arial"/>
               </a:defRPr>
             </a:pPr>
             <a:r>
-              <a:t>Ethereum / EVM</a:t>
-            </a:r>
-          </a:p>
-        </p:txBody>
-      </p:sp>
-      <p:sp>
-        <p:nvSpPr>
-          <p:cNvPr id="8" name="TextBox 7"/>
+              <a:t>Private Witness</a:t>
+            </a:r>
+          </a:p>
+        </p:txBody>
+      </p:sp>
+      <p:sp>
+        <p:nvSpPr>
+          <p:cNvPr id="11" name="TextBox 10"/>
           <p:cNvSpPr txBox="1"/>
           <p:nvPr/>
         </p:nvSpPr>
         <p:spPr>
           <a:xfrm>
-            <a:off x="960120" y="2121408"/>
-            <a:ext cx="2011680" cy="4069080"/>
+            <a:off x="960120" y="2496312"/>
+            <a:ext cx="2084831" cy="3584448"/>
           </a:xfrm>
           <a:prstGeom prst="rect">
             <a:avLst/>
@@ -6304,7 +6135,7 @@
           <a:p>
             <a:pPr>
               <a:spcAft>
-                <a:spcPts val="600"/>
+                <a:spcPts val="500"/>
               </a:spcAft>
               <a:defRPr sz="1000">
                 <a:solidFill>
@@ -6314,13 +6145,13 @@
               </a:defRPr>
             </a:pPr>
             <a:r>
-              <a:t>• State Privacy: ❌ None (100% Public)</a:t>
+              <a:t>•  Client runtime encapsulates secret key and transaction parameters.</a:t>
             </a:r>
           </a:p>
           <a:p>
             <a:pPr>
               <a:spcAft>
-                <a:spcPts val="600"/>
+                <a:spcPts val="500"/>
               </a:spcAft>
               <a:defRPr sz="1000">
                 <a:solidFill>
@@ -6330,85 +6161,21 @@
               </a:defRPr>
             </a:pPr>
             <a:r>
-              <a:t>• Gas Cost: ❌ High ($2-$50/tx)</a:t>
-            </a:r>
-          </a:p>
-          <a:p>
-            <a:pPr>
-              <a:spcAft>
-                <a:spcPts val="600"/>
-              </a:spcAft>
-              <a:defRPr sz="1000">
-                <a:solidFill>
-                  <a:srgbClr val="94A3B8"/>
-                </a:solidFill>
-                <a:latin typeface="Arial"/>
-              </a:defRPr>
-            </a:pPr>
-            <a:r>
-              <a:t>• Gas KYC Link: ❌ Permanent</a:t>
-            </a:r>
-          </a:p>
-          <a:p>
-            <a:pPr>
-              <a:spcAft>
-                <a:spcPts val="600"/>
-              </a:spcAft>
-              <a:defRPr sz="1000">
-                <a:solidFill>
-                  <a:srgbClr val="94A3B8"/>
-                </a:solidFill>
-                <a:latin typeface="Arial"/>
-              </a:defRPr>
-            </a:pPr>
-            <a:r>
-              <a:t>• Compliance: ❌ Total Leak</a:t>
-            </a:r>
-          </a:p>
-          <a:p>
-            <a:pPr>
-              <a:spcAft>
-                <a:spcPts val="600"/>
-              </a:spcAft>
-              <a:defRPr sz="1000">
-                <a:solidFill>
-                  <a:srgbClr val="94A3B8"/>
-                </a:solidFill>
-                <a:latin typeface="Arial"/>
-              </a:defRPr>
-            </a:pPr>
-            <a:r>
-              <a:t>• Smart Contracts: ✅ Turing Complete</a:t>
-            </a:r>
-          </a:p>
-          <a:p>
-            <a:pPr>
-              <a:spcAft>
-                <a:spcPts val="600"/>
-              </a:spcAft>
-              <a:defRPr sz="1000">
-                <a:solidFill>
-                  <a:srgbClr val="94A3B8"/>
-                </a:solidFill>
-                <a:latin typeface="Arial"/>
-              </a:defRPr>
-            </a:pPr>
-            <a:r>
-              <a:t>• ZK Verification: ⚠️ Very Expensive</a:t>
-            </a:r>
-          </a:p>
-        </p:txBody>
-      </p:sp>
-      <p:sp>
-        <p:nvSpPr>
-          <p:cNvPr id="9" name="Rounded Rectangle 8"/>
+              <a:t>•  Witness data stays in local memory and is never broadcast across network.</a:t>
+            </a:r>
+          </a:p>
+        </p:txBody>
+      </p:sp>
+      <p:sp>
+        <p:nvSpPr>
+          <p:cNvPr id="12" name="Rounded Rectangle 11"/>
           <p:cNvSpPr/>
           <p:nvPr/>
         </p:nvSpPr>
         <p:spPr>
           <a:xfrm>
-            <a:off x="3429000" y="1554480"/>
-            <a:ext cx="2468880" cy="4754880"/>
+            <a:off x="3456432" y="1645920"/>
+            <a:ext cx="2542032" cy="4572000"/>
           </a:xfrm>
           <a:prstGeom prst="roundRect">
             <a:avLst/>
@@ -6446,14 +6213,93 @@
       </p:sp>
       <p:sp>
         <p:nvSpPr>
-          <p:cNvPr id="10" name="TextBox 9"/>
+          <p:cNvPr id="13" name="Rounded Rectangle 12"/>
+          <p:cNvSpPr/>
+          <p:nvPr/>
+        </p:nvSpPr>
+        <p:spPr>
+          <a:xfrm>
+            <a:off x="3685032" y="1645920"/>
+            <a:ext cx="1645920" cy="36576"/>
+          </a:xfrm>
+          <a:prstGeom prst="roundRect">
+            <a:avLst/>
+          </a:prstGeom>
+          <a:solidFill>
+            <a:srgbClr val="818CF8"/>
+          </a:solidFill>
+          <a:ln>
+            <a:noFill/>
+          </a:ln>
+        </p:spPr>
+        <p:style>
+          <a:lnRef idx="1">
+            <a:schemeClr val="accent1"/>
+          </a:lnRef>
+          <a:fillRef idx="3">
+            <a:schemeClr val="accent1"/>
+          </a:fillRef>
+          <a:effectRef idx="2">
+            <a:schemeClr val="accent1"/>
+          </a:effectRef>
+          <a:fontRef idx="minor">
+            <a:schemeClr val="lt1"/>
+          </a:fontRef>
+        </p:style>
+        <p:txBody>
+          <a:bodyPr rtlCol="0" anchor="ctr"/>
+          <a:lstStyle/>
+          <a:p>
+            <a:pPr algn="ctr"/>
+          </a:p>
+        </p:txBody>
+      </p:sp>
+      <p:sp>
+        <p:nvSpPr>
+          <p:cNvPr id="14" name="TextBox 13"/>
           <p:cNvSpPr txBox="1"/>
           <p:nvPr/>
         </p:nvSpPr>
         <p:spPr>
           <a:xfrm>
-            <a:off x="3657600" y="1719072"/>
-            <a:ext cx="2011680" cy="365760"/>
+            <a:off x="3685032" y="1828800"/>
+            <a:ext cx="2084831" cy="256032"/>
+          </a:xfrm>
+          <a:prstGeom prst="rect">
+            <a:avLst/>
+          </a:prstGeom>
+          <a:noFill/>
+        </p:spPr>
+        <p:txBody>
+          <a:bodyPr wrap="none">
+            <a:spAutoFit/>
+          </a:bodyPr>
+          <a:lstStyle/>
+          <a:p>
+            <a:pPr>
+              <a:defRPr sz="850" b="1">
+                <a:solidFill>
+                  <a:srgbClr val="818CF8"/>
+                </a:solidFill>
+                <a:latin typeface="Arial"/>
+              </a:defRPr>
+            </a:pPr>
+            <a:r>
+              <a:t>STAGE 02</a:t>
+            </a:r>
+          </a:p>
+        </p:txBody>
+      </p:sp>
+      <p:sp>
+        <p:nvSpPr>
+          <p:cNvPr id="15" name="TextBox 14"/>
+          <p:cNvSpPr txBox="1"/>
+          <p:nvPr/>
+        </p:nvSpPr>
+        <p:spPr>
+          <a:xfrm>
+            <a:off x="3685032" y="2084832"/>
+            <a:ext cx="2084831" cy="411480"/>
           </a:xfrm>
           <a:prstGeom prst="rect">
             <a:avLst/>
@@ -6469,27 +6315,27 @@
             <a:pPr>
               <a:defRPr sz="1300" b="1">
                 <a:solidFill>
-                  <a:srgbClr val="F59E0B"/>
+                  <a:srgbClr val="FFFFFF"/>
                 </a:solidFill>
                 <a:latin typeface="Arial"/>
               </a:defRPr>
             </a:pPr>
             <a:r>
-              <a:t>Tornado / Mixers</a:t>
-            </a:r>
-          </a:p>
-        </p:txBody>
-      </p:sp>
-      <p:sp>
-        <p:nvSpPr>
-          <p:cNvPr id="11" name="TextBox 10"/>
+              <a:t>Halo2 Synthesis</a:t>
+            </a:r>
+          </a:p>
+        </p:txBody>
+      </p:sp>
+      <p:sp>
+        <p:nvSpPr>
+          <p:cNvPr id="16" name="TextBox 15"/>
           <p:cNvSpPr txBox="1"/>
           <p:nvPr/>
         </p:nvSpPr>
         <p:spPr>
           <a:xfrm>
-            <a:off x="3657600" y="2121408"/>
-            <a:ext cx="2011680" cy="4069080"/>
+            <a:off x="3685032" y="2496312"/>
+            <a:ext cx="2084831" cy="3584448"/>
           </a:xfrm>
           <a:prstGeom prst="rect">
             <a:avLst/>
@@ -6504,7 +6350,7 @@
           <a:p>
             <a:pPr>
               <a:spcAft>
-                <a:spcPts val="600"/>
+                <a:spcPts val="500"/>
               </a:spcAft>
               <a:defRPr sz="1000">
                 <a:solidFill>
@@ -6514,13 +6360,13 @@
               </a:defRPr>
             </a:pPr>
             <a:r>
-              <a:t>• State Privacy: ⚠️ Obfuscation only</a:t>
+              <a:t>•  Local Docker ProofStation (:6300) runs proving key synthesis.</a:t>
             </a:r>
           </a:p>
           <a:p>
             <a:pPr>
               <a:spcAft>
-                <a:spcPts val="600"/>
+                <a:spcPts val="500"/>
               </a:spcAft>
               <a:defRPr sz="1000">
                 <a:solidFill>
@@ -6530,85 +6376,21 @@
               </a:defRPr>
             </a:pPr>
             <a:r>
-              <a:t>• Gas Cost: ❌ High</a:t>
-            </a:r>
-          </a:p>
-          <a:p>
-            <a:pPr>
-              <a:spcAft>
-                <a:spcPts val="600"/>
-              </a:spcAft>
-              <a:defRPr sz="1000">
-                <a:solidFill>
-                  <a:srgbClr val="94A3B8"/>
-                </a:solidFill>
-                <a:latin typeface="Arial"/>
-              </a:defRPr>
-            </a:pPr>
-            <a:r>
-              <a:t>• Gas KYC Link: ❌ Public funding link</a:t>
-            </a:r>
-          </a:p>
-          <a:p>
-            <a:pPr>
-              <a:spcAft>
-                <a:spcPts val="600"/>
-              </a:spcAft>
-              <a:defRPr sz="1000">
-                <a:solidFill>
-                  <a:srgbClr val="94A3B8"/>
-                </a:solidFill>
-                <a:latin typeface="Arial"/>
-              </a:defRPr>
-            </a:pPr>
-            <a:r>
-              <a:t>• Compliance: ❌ Regulatory Bans</a:t>
-            </a:r>
-          </a:p>
-          <a:p>
-            <a:pPr>
-              <a:spcAft>
-                <a:spcPts val="600"/>
-              </a:spcAft>
-              <a:defRPr sz="1000">
-                <a:solidFill>
-                  <a:srgbClr val="94A3B8"/>
-                </a:solidFill>
-                <a:latin typeface="Arial"/>
-              </a:defRPr>
-            </a:pPr>
-            <a:r>
-              <a:t>• Smart Contracts: ❌ Static Pools</a:t>
-            </a:r>
-          </a:p>
-          <a:p>
-            <a:pPr>
-              <a:spcAft>
-                <a:spcPts val="600"/>
-              </a:spcAft>
-              <a:defRPr sz="1000">
-                <a:solidFill>
-                  <a:srgbClr val="94A3B8"/>
-                </a:solidFill>
-                <a:latin typeface="Arial"/>
-              </a:defRPr>
-            </a:pPr>
-            <a:r>
-              <a:t>• ZK Verification: ⚠️ Basic Snarks</a:t>
-            </a:r>
-          </a:p>
-        </p:txBody>
-      </p:sp>
-      <p:sp>
-        <p:nvSpPr>
-          <p:cNvPr id="12" name="Rounded Rectangle 11"/>
+              <a:t>•  Generates succinct Zero-Knowledge proof transcript in seconds.</a:t>
+            </a:r>
+          </a:p>
+        </p:txBody>
+      </p:sp>
+      <p:sp>
+        <p:nvSpPr>
+          <p:cNvPr id="17" name="Rounded Rectangle 16"/>
           <p:cNvSpPr/>
           <p:nvPr/>
         </p:nvSpPr>
         <p:spPr>
           <a:xfrm>
-            <a:off x="6126480" y="1554480"/>
-            <a:ext cx="2468880" cy="4754880"/>
+            <a:off x="6181344" y="1645920"/>
+            <a:ext cx="2542032" cy="4572000"/>
           </a:xfrm>
           <a:prstGeom prst="roundRect">
             <a:avLst/>
@@ -6646,14 +6428,93 @@
       </p:sp>
       <p:sp>
         <p:nvSpPr>
-          <p:cNvPr id="13" name="TextBox 12"/>
+          <p:cNvPr id="18" name="Rounded Rectangle 17"/>
+          <p:cNvSpPr/>
+          <p:nvPr/>
+        </p:nvSpPr>
+        <p:spPr>
+          <a:xfrm>
+            <a:off x="6409944" y="1645920"/>
+            <a:ext cx="1645920" cy="36576"/>
+          </a:xfrm>
+          <a:prstGeom prst="roundRect">
+            <a:avLst/>
+          </a:prstGeom>
+          <a:solidFill>
+            <a:srgbClr val="38BDF8"/>
+          </a:solidFill>
+          <a:ln>
+            <a:noFill/>
+          </a:ln>
+        </p:spPr>
+        <p:style>
+          <a:lnRef idx="1">
+            <a:schemeClr val="accent1"/>
+          </a:lnRef>
+          <a:fillRef idx="3">
+            <a:schemeClr val="accent1"/>
+          </a:fillRef>
+          <a:effectRef idx="2">
+            <a:schemeClr val="accent1"/>
+          </a:effectRef>
+          <a:fontRef idx="minor">
+            <a:schemeClr val="lt1"/>
+          </a:fontRef>
+        </p:style>
+        <p:txBody>
+          <a:bodyPr rtlCol="0" anchor="ctr"/>
+          <a:lstStyle/>
+          <a:p>
+            <a:pPr algn="ctr"/>
+          </a:p>
+        </p:txBody>
+      </p:sp>
+      <p:sp>
+        <p:nvSpPr>
+          <p:cNvPr id="19" name="TextBox 18"/>
           <p:cNvSpPr txBox="1"/>
           <p:nvPr/>
         </p:nvSpPr>
         <p:spPr>
           <a:xfrm>
-            <a:off x="6355080" y="1719072"/>
-            <a:ext cx="2011680" cy="365760"/>
+            <a:off x="6409944" y="1828800"/>
+            <a:ext cx="2084831" cy="256032"/>
+          </a:xfrm>
+          <a:prstGeom prst="rect">
+            <a:avLst/>
+          </a:prstGeom>
+          <a:noFill/>
+        </p:spPr>
+        <p:txBody>
+          <a:bodyPr wrap="none">
+            <a:spAutoFit/>
+          </a:bodyPr>
+          <a:lstStyle/>
+          <a:p>
+            <a:pPr>
+              <a:defRPr sz="850" b="1">
+                <a:solidFill>
+                  <a:srgbClr val="38BDF8"/>
+                </a:solidFill>
+                <a:latin typeface="Arial"/>
+              </a:defRPr>
+            </a:pPr>
+            <a:r>
+              <a:t>STAGE 03</a:t>
+            </a:r>
+          </a:p>
+        </p:txBody>
+      </p:sp>
+      <p:sp>
+        <p:nvSpPr>
+          <p:cNvPr id="20" name="TextBox 19"/>
+          <p:cNvSpPr txBox="1"/>
+          <p:nvPr/>
+        </p:nvSpPr>
+        <p:spPr>
+          <a:xfrm>
+            <a:off x="6409944" y="2084832"/>
+            <a:ext cx="2084831" cy="411480"/>
           </a:xfrm>
           <a:prstGeom prst="rect">
             <a:avLst/>
@@ -6669,27 +6530,27 @@
             <a:pPr>
               <a:defRPr sz="1300" b="1">
                 <a:solidFill>
-                  <a:srgbClr val="06B6D4"/>
+                  <a:srgbClr val="FFFFFF"/>
                 </a:solidFill>
                 <a:latin typeface="Arial"/>
               </a:defRPr>
             </a:pPr>
             <a:r>
-              <a:t>Monero (XMR)</a:t>
-            </a:r>
-          </a:p>
-        </p:txBody>
-      </p:sp>
-      <p:sp>
-        <p:nvSpPr>
-          <p:cNvPr id="14" name="TextBox 13"/>
+              <a:t>Relay Balancing</a:t>
+            </a:r>
+          </a:p>
+        </p:txBody>
+      </p:sp>
+      <p:sp>
+        <p:nvSpPr>
+          <p:cNvPr id="21" name="TextBox 20"/>
           <p:cNvSpPr txBox="1"/>
           <p:nvPr/>
         </p:nvSpPr>
         <p:spPr>
           <a:xfrm>
-            <a:off x="6355080" y="2121408"/>
-            <a:ext cx="2011680" cy="4069080"/>
+            <a:off x="6409944" y="2496312"/>
+            <a:ext cx="2084831" cy="3584448"/>
           </a:xfrm>
           <a:prstGeom prst="rect">
             <a:avLst/>
@@ -6704,7 +6565,7 @@
           <a:p>
             <a:pPr>
               <a:spcAft>
-                <a:spcPts val="600"/>
+                <a:spcPts val="500"/>
               </a:spcAft>
               <a:defRPr sz="1000">
                 <a:solidFill>
@@ -6714,13 +6575,13 @@
               </a:defRPr>
             </a:pPr>
             <a:r>
-              <a:t>• State Privacy: ✅ Full Obfuscation</a:t>
+              <a:t>•  ProofStation attaches required unshielded UTXO dust collateral.</a:t>
             </a:r>
           </a:p>
           <a:p>
             <a:pPr>
               <a:spcAft>
-                <a:spcPts val="600"/>
+                <a:spcPts val="500"/>
               </a:spcAft>
               <a:defRPr sz="1000">
                 <a:solidFill>
@@ -6730,91 +6591,27 @@
               </a:defRPr>
             </a:pPr>
             <a:r>
-              <a:t>• Gas Cost: ✅ Low</a:t>
-            </a:r>
-          </a:p>
-          <a:p>
-            <a:pPr>
-              <a:spcAft>
-                <a:spcPts val="600"/>
-              </a:spcAft>
-              <a:defRPr sz="1000">
-                <a:solidFill>
-                  <a:srgbClr val="94A3B8"/>
-                </a:solidFill>
-                <a:latin typeface="Arial"/>
-              </a:defRPr>
-            </a:pPr>
-            <a:r>
-              <a:t>• Gas KYC Link: ✅ Unlinked</a:t>
-            </a:r>
-          </a:p>
-          <a:p>
-            <a:pPr>
-              <a:spcAft>
-                <a:spcPts val="600"/>
-              </a:spcAft>
-              <a:defRPr sz="1000">
-                <a:solidFill>
-                  <a:srgbClr val="94A3B8"/>
-                </a:solidFill>
-                <a:latin typeface="Arial"/>
-              </a:defRPr>
-            </a:pPr>
-            <a:r>
-              <a:t>• Compliance: ❌ Zero Auditing</a:t>
-            </a:r>
-          </a:p>
-          <a:p>
-            <a:pPr>
-              <a:spcAft>
-                <a:spcPts val="600"/>
-              </a:spcAft>
-              <a:defRPr sz="1000">
-                <a:solidFill>
-                  <a:srgbClr val="94A3B8"/>
-                </a:solidFill>
-                <a:latin typeface="Arial"/>
-              </a:defRPr>
-            </a:pPr>
-            <a:r>
-              <a:t>• Smart Contracts: ❌ No Programmability</a:t>
-            </a:r>
-          </a:p>
-          <a:p>
-            <a:pPr>
-              <a:spcAft>
-                <a:spcPts val="600"/>
-              </a:spcAft>
-              <a:defRPr sz="1000">
-                <a:solidFill>
-                  <a:srgbClr val="94A3B8"/>
-                </a:solidFill>
-                <a:latin typeface="Arial"/>
-              </a:defRPr>
-            </a:pPr>
-            <a:r>
-              <a:t>• ZK Verification: ⚠️ Ring Signatures</a:t>
-            </a:r>
-          </a:p>
-        </p:txBody>
-      </p:sp>
-      <p:sp>
-        <p:nvSpPr>
-          <p:cNvPr id="15" name="Rounded Rectangle 14"/>
+              <a:t>•  Eliminates user gas fees completely without requiring faucet tokens.</a:t>
+            </a:r>
+          </a:p>
+        </p:txBody>
+      </p:sp>
+      <p:sp>
+        <p:nvSpPr>
+          <p:cNvPr id="22" name="Rounded Rectangle 21"/>
           <p:cNvSpPr/>
           <p:nvPr/>
         </p:nvSpPr>
         <p:spPr>
           <a:xfrm>
-            <a:off x="8823960" y="1554480"/>
-            <a:ext cx="2606040" cy="4754880"/>
+            <a:off x="8906256" y="1645920"/>
+            <a:ext cx="2542032" cy="4572000"/>
           </a:xfrm>
           <a:prstGeom prst="roundRect">
             <a:avLst/>
           </a:prstGeom>
           <a:solidFill>
-            <a:srgbClr val="141923"/>
+            <a:srgbClr val="0E1117"/>
           </a:solidFill>
           <a:ln w="12700">
             <a:solidFill>
@@ -6846,14 +6643,93 @@
       </p:sp>
       <p:sp>
         <p:nvSpPr>
-          <p:cNvPr id="16" name="TextBox 15"/>
+          <p:cNvPr id="23" name="Rounded Rectangle 22"/>
+          <p:cNvSpPr/>
+          <p:nvPr/>
+        </p:nvSpPr>
+        <p:spPr>
+          <a:xfrm>
+            <a:off x="9134856" y="1645920"/>
+            <a:ext cx="1645920" cy="36576"/>
+          </a:xfrm>
+          <a:prstGeom prst="roundRect">
+            <a:avLst/>
+          </a:prstGeom>
+          <a:solidFill>
+            <a:srgbClr val="10B981"/>
+          </a:solidFill>
+          <a:ln>
+            <a:noFill/>
+          </a:ln>
+        </p:spPr>
+        <p:style>
+          <a:lnRef idx="1">
+            <a:schemeClr val="accent1"/>
+          </a:lnRef>
+          <a:fillRef idx="3">
+            <a:schemeClr val="accent1"/>
+          </a:fillRef>
+          <a:effectRef idx="2">
+            <a:schemeClr val="accent1"/>
+          </a:effectRef>
+          <a:fontRef idx="minor">
+            <a:schemeClr val="lt1"/>
+          </a:fontRef>
+        </p:style>
+        <p:txBody>
+          <a:bodyPr rtlCol="0" anchor="ctr"/>
+          <a:lstStyle/>
+          <a:p>
+            <a:pPr algn="ctr"/>
+          </a:p>
+        </p:txBody>
+      </p:sp>
+      <p:sp>
+        <p:nvSpPr>
+          <p:cNvPr id="24" name="TextBox 23"/>
           <p:cNvSpPr txBox="1"/>
           <p:nvPr/>
         </p:nvSpPr>
         <p:spPr>
           <a:xfrm>
-            <a:off x="9052560" y="1719072"/>
-            <a:ext cx="2148840" cy="365760"/>
+            <a:off x="9134856" y="1828800"/>
+            <a:ext cx="2084831" cy="256032"/>
+          </a:xfrm>
+          <a:prstGeom prst="rect">
+            <a:avLst/>
+          </a:prstGeom>
+          <a:noFill/>
+        </p:spPr>
+        <p:txBody>
+          <a:bodyPr wrap="none">
+            <a:spAutoFit/>
+          </a:bodyPr>
+          <a:lstStyle/>
+          <a:p>
+            <a:pPr>
+              <a:defRPr sz="850" b="1">
+                <a:solidFill>
+                  <a:srgbClr val="10B981"/>
+                </a:solidFill>
+                <a:latin typeface="Arial"/>
+              </a:defRPr>
+            </a:pPr>
+            <a:r>
+              <a:t>STAGE 04</a:t>
+            </a:r>
+          </a:p>
+        </p:txBody>
+      </p:sp>
+      <p:sp>
+        <p:nvSpPr>
+          <p:cNvPr id="25" name="TextBox 24"/>
+          <p:cNvSpPr txBox="1"/>
+          <p:nvPr/>
+        </p:nvSpPr>
+        <p:spPr>
+          <a:xfrm>
+            <a:off x="9134856" y="2084832"/>
+            <a:ext cx="2084831" cy="411480"/>
           </a:xfrm>
           <a:prstGeom prst="rect">
             <a:avLst/>
@@ -6869,27 +6745,27 @@
             <a:pPr>
               <a:defRPr sz="1300" b="1">
                 <a:solidFill>
-                  <a:srgbClr val="00F5A0"/>
+                  <a:srgbClr val="FFFFFF"/>
                 </a:solidFill>
                 <a:latin typeface="Arial"/>
               </a:defRPr>
             </a:pPr>
             <a:r>
-              <a:t>Midnight Vault (Ours)</a:t>
-            </a:r>
-          </a:p>
-        </p:txBody>
-      </p:sp>
-      <p:sp>
-        <p:nvSpPr>
-          <p:cNvPr id="17" name="TextBox 16"/>
+              <a:t>Ledger Finality</a:t>
+            </a:r>
+          </a:p>
+        </p:txBody>
+      </p:sp>
+      <p:sp>
+        <p:nvSpPr>
+          <p:cNvPr id="26" name="TextBox 25"/>
           <p:cNvSpPr txBox="1"/>
           <p:nvPr/>
         </p:nvSpPr>
         <p:spPr>
           <a:xfrm>
-            <a:off x="9052560" y="2121408"/>
-            <a:ext cx="2148840" cy="4069080"/>
+            <a:off x="9134856" y="2496312"/>
+            <a:ext cx="2084831" cy="3584448"/>
           </a:xfrm>
           <a:prstGeom prst="rect">
             <a:avLst/>
@@ -6904,7 +6780,7 @@
           <a:p>
             <a:pPr>
               <a:spcAft>
-                <a:spcPts val="600"/>
+                <a:spcPts val="500"/>
               </a:spcAft>
               <a:defRPr sz="1000">
                 <a:solidFill>
@@ -6914,13 +6790,13 @@
               </a:defRPr>
             </a:pPr>
             <a:r>
-              <a:t>• State Privacy: ✅ ZK Dual-State</a:t>
+              <a:t>•  Midnight Partnerchain validators verify proof validity.</a:t>
             </a:r>
           </a:p>
           <a:p>
             <a:pPr>
               <a:spcAft>
-                <a:spcPts val="600"/>
+                <a:spcPts val="500"/>
               </a:spcAft>
               <a:defRPr sz="1000">
                 <a:solidFill>
@@ -6930,71 +6806,7 @@
               </a:defRPr>
             </a:pPr>
             <a:r>
-              <a:t>• Gas Cost: ✅ 0 (Sponsored Dust)</a:t>
-            </a:r>
-          </a:p>
-          <a:p>
-            <a:pPr>
-              <a:spcAft>
-                <a:spcPts val="600"/>
-              </a:spcAft>
-              <a:defRPr sz="1000">
-                <a:solidFill>
-                  <a:srgbClr val="94A3B8"/>
-                </a:solidFill>
-                <a:latin typeface="Arial"/>
-              </a:defRPr>
-            </a:pPr>
-            <a:r>
-              <a:t>• Gas KYC Link: ✅ No Trail</a:t>
-            </a:r>
-          </a:p>
-          <a:p>
-            <a:pPr>
-              <a:spcAft>
-                <a:spcPts val="600"/>
-              </a:spcAft>
-              <a:defRPr sz="1000">
-                <a:solidFill>
-                  <a:srgbClr val="94A3B8"/>
-                </a:solidFill>
-                <a:latin typeface="Arial"/>
-              </a:defRPr>
-            </a:pPr>
-            <a:r>
-              <a:t>• Compliance: ✅ Selective Disclosure</a:t>
-            </a:r>
-          </a:p>
-          <a:p>
-            <a:pPr>
-              <a:spcAft>
-                <a:spcPts val="600"/>
-              </a:spcAft>
-              <a:defRPr sz="1000">
-                <a:solidFill>
-                  <a:srgbClr val="94A3B8"/>
-                </a:solidFill>
-                <a:latin typeface="Arial"/>
-              </a:defRPr>
-            </a:pPr>
-            <a:r>
-              <a:t>• Smart Contracts: ✅ Compact Language</a:t>
-            </a:r>
-          </a:p>
-          <a:p>
-            <a:pPr>
-              <a:spcAft>
-                <a:spcPts val="600"/>
-              </a:spcAft>
-              <a:defRPr sz="1000">
-                <a:solidFill>
-                  <a:srgbClr val="94A3B8"/>
-                </a:solidFill>
-                <a:latin typeface="Arial"/>
-              </a:defRPr>
-            </a:pPr>
-            <a:r>
-              <a:t>• ZK Verification: ✅ Local Proof Engine</a:t>
+              <a:t>•  GraphQL indexer captures state transition and updates vault liquidity live.</a:t>
             </a:r>
           </a:p>
         </p:txBody>
@@ -7069,7 +6881,7 @@
         <p:spPr>
           <a:xfrm>
             <a:off x="731520" y="365760"/>
-            <a:ext cx="10698480" cy="320040"/>
+            <a:ext cx="10698480" cy="292608"/>
           </a:xfrm>
           <a:prstGeom prst="rect">
             <a:avLst/>
@@ -7091,7 +6903,7 @@
               </a:defRPr>
             </a:pPr>
             <a:r>
-              <a:t>KNIGHT.VAULT // ZERO-KNOWLEDGE PROTOCOL DECK</a:t>
+              <a:t>04 / COMPARATIVE ANALYSIS</a:t>
             </a:r>
           </a:p>
         </p:txBody>
@@ -7105,7 +6917,7 @@
         <p:spPr>
           <a:xfrm>
             <a:off x="731520" y="658368"/>
-            <a:ext cx="10698480" cy="640080"/>
+            <a:ext cx="10698480" cy="594360"/>
           </a:xfrm>
           <a:prstGeom prst="rect">
             <a:avLst/>
@@ -7119,7 +6931,7 @@
           <a:lstStyle/>
           <a:p>
             <a:pPr>
-              <a:defRPr sz="2000" b="1">
+              <a:defRPr sz="2200" b="1">
                 <a:solidFill>
                   <a:srgbClr val="FFFFFF"/>
                 </a:solidFill>
@@ -7127,7 +6939,7 @@
               </a:defRPr>
             </a:pPr>
             <a:r>
-              <a:t>Architecture Topology: 4-Tier Distributed Pipeline</a:t>
+              <a:t>Security &amp; Privacy Benchmark Matrix</a:t>
             </a:r>
           </a:p>
         </p:txBody>
@@ -7140,8 +6952,8 @@
         </p:nvSpPr>
         <p:spPr>
           <a:xfrm>
-            <a:off x="731520" y="1353312"/>
-            <a:ext cx="10728655" cy="18288"/>
+            <a:off x="731520" y="1298448"/>
+            <a:ext cx="10728655" cy="13716"/>
           </a:xfrm>
           <a:prstGeom prst="rect">
             <a:avLst/>
@@ -7177,14 +6989,57 @@
       </p:sp>
       <p:sp>
         <p:nvSpPr>
-          <p:cNvPr id="6" name="Rounded Rectangle 5"/>
+          <p:cNvPr id="6" name="Rectangle 5"/>
           <p:cNvSpPr/>
           <p:nvPr/>
         </p:nvSpPr>
         <p:spPr>
           <a:xfrm>
-            <a:off x="731520" y="1554480"/>
-            <a:ext cx="2468880" cy="4754880"/>
+            <a:off x="731520" y="1298448"/>
+            <a:ext cx="1097280" cy="22860"/>
+          </a:xfrm>
+          <a:prstGeom prst="rect">
+            <a:avLst/>
+          </a:prstGeom>
+          <a:solidFill>
+            <a:srgbClr val="00F5A0"/>
+          </a:solidFill>
+          <a:ln>
+            <a:noFill/>
+          </a:ln>
+        </p:spPr>
+        <p:style>
+          <a:lnRef idx="1">
+            <a:schemeClr val="accent1"/>
+          </a:lnRef>
+          <a:fillRef idx="3">
+            <a:schemeClr val="accent1"/>
+          </a:fillRef>
+          <a:effectRef idx="2">
+            <a:schemeClr val="accent1"/>
+          </a:effectRef>
+          <a:fontRef idx="minor">
+            <a:schemeClr val="lt1"/>
+          </a:fontRef>
+        </p:style>
+        <p:txBody>
+          <a:bodyPr rtlCol="0" anchor="ctr"/>
+          <a:lstStyle/>
+          <a:p>
+            <a:pPr algn="ctr"/>
+          </a:p>
+        </p:txBody>
+      </p:sp>
+      <p:sp>
+        <p:nvSpPr>
+          <p:cNvPr id="7" name="Rounded Rectangle 6"/>
+          <p:cNvSpPr/>
+          <p:nvPr/>
+        </p:nvSpPr>
+        <p:spPr>
+          <a:xfrm>
+            <a:off x="731520" y="1645920"/>
+            <a:ext cx="10728655" cy="4572000"/>
           </a:xfrm>
           <a:prstGeom prst="roundRect">
             <a:avLst/>
@@ -7222,14 +7077,14 @@
       </p:sp>
       <p:sp>
         <p:nvSpPr>
-          <p:cNvPr id="7" name="TextBox 6"/>
+          <p:cNvPr id="8" name="TextBox 7"/>
           <p:cNvSpPr txBox="1"/>
           <p:nvPr/>
         </p:nvSpPr>
         <p:spPr>
           <a:xfrm>
-            <a:off x="960120" y="1719072"/>
-            <a:ext cx="2011680" cy="365760"/>
+            <a:off x="1005840" y="1828800"/>
+            <a:ext cx="10149840" cy="365760"/>
           </a:xfrm>
           <a:prstGeom prst="rect">
             <a:avLst/>
@@ -7237,165 +7092,44 @@
           <a:noFill/>
         </p:spPr>
         <p:txBody>
-          <a:bodyPr wrap="square">
+          <a:bodyPr wrap="none">
             <a:spAutoFit/>
           </a:bodyPr>
           <a:lstStyle/>
           <a:p>
             <a:pPr>
-              <a:defRPr sz="1300" b="1">
-                <a:solidFill>
-                  <a:srgbClr val="818CF8"/>
-                </a:solidFill>
-                <a:latin typeface="Arial"/>
-              </a:defRPr>
-            </a:pPr>
-            <a:r>
-              <a:t>1. Frontend Layer</a:t>
-            </a:r>
-          </a:p>
-        </p:txBody>
-      </p:sp>
-      <p:sp>
-        <p:nvSpPr>
-          <p:cNvPr id="8" name="TextBox 7"/>
-          <p:cNvSpPr txBox="1"/>
-          <p:nvPr/>
-        </p:nvSpPr>
-        <p:spPr>
-          <a:xfrm>
-            <a:off x="960120" y="2121408"/>
-            <a:ext cx="2011680" cy="4069080"/>
+              <a:defRPr sz="1000" b="1">
+                <a:solidFill>
+                  <a:srgbClr val="00F5A0"/>
+                </a:solidFill>
+                <a:latin typeface="Consolas"/>
+              </a:defRPr>
+            </a:pPr>
+            <a:r>
+              <a:t>FEATURE / CAPABILITY                TRADITIONAL PUBLIC VAULT            KNIGHT.VAULT (MIDNIGHT)</a:t>
+            </a:r>
+          </a:p>
+        </p:txBody>
+      </p:sp>
+      <p:sp>
+        <p:nvSpPr>
+          <p:cNvPr id="9" name="Rectangle 8"/>
+          <p:cNvSpPr/>
+          <p:nvPr/>
+        </p:nvSpPr>
+        <p:spPr>
+          <a:xfrm>
+            <a:off x="1005840" y="2240280"/>
+            <a:ext cx="10149840" cy="13716"/>
           </a:xfrm>
           <a:prstGeom prst="rect">
             <a:avLst/>
           </a:prstGeom>
-          <a:noFill/>
-        </p:spPr>
-        <p:txBody>
-          <a:bodyPr wrap="square">
-            <a:spAutoFit/>
-          </a:bodyPr>
-          <a:lstStyle/>
-          <a:p>
-            <a:pPr>
-              <a:spcAft>
-                <a:spcPts val="600"/>
-              </a:spcAft>
-              <a:defRPr sz="1000">
-                <a:solidFill>
-                  <a:srgbClr val="94A3B8"/>
-                </a:solidFill>
-                <a:latin typeface="Arial"/>
-              </a:defRPr>
-            </a:pPr>
-            <a:r>
-              <a:t>• React 18 + Vite SPA</a:t>
-            </a:r>
-          </a:p>
-          <a:p>
-            <a:pPr>
-              <a:spcAft>
-                <a:spcPts val="600"/>
-              </a:spcAft>
-              <a:defRPr sz="1000">
-                <a:solidFill>
-                  <a:srgbClr val="94A3B8"/>
-                </a:solidFill>
-                <a:latin typeface="Arial"/>
-              </a:defRPr>
-            </a:pPr>
-            <a:r>
-              <a:t>• 1AM / Lace Connector API</a:t>
-            </a:r>
-          </a:p>
-          <a:p>
-            <a:pPr>
-              <a:spcAft>
-                <a:spcPts val="600"/>
-              </a:spcAft>
-              <a:defRPr sz="1000">
-                <a:solidFill>
-                  <a:srgbClr val="94A3B8"/>
-                </a:solidFill>
-                <a:latin typeface="Arial"/>
-              </a:defRPr>
-            </a:pPr>
-            <a:r>
-              <a:t>• In-Memory Private State Store</a:t>
-            </a:r>
-          </a:p>
-          <a:p>
-            <a:pPr>
-              <a:spcAft>
-                <a:spcPts val="600"/>
-              </a:spcAft>
-              <a:defRPr sz="1000">
-                <a:solidFill>
-                  <a:srgbClr val="94A3B8"/>
-                </a:solidFill>
-                <a:latin typeface="Arial"/>
-              </a:defRPr>
-            </a:pPr>
-            <a:r>
-              <a:t>• WASM Ledger runtime</a:t>
-            </a:r>
-          </a:p>
-          <a:p>
-            <a:pPr>
-              <a:spcAft>
-                <a:spcPts val="600"/>
-              </a:spcAft>
-              <a:defRPr sz="1000">
-                <a:solidFill>
-                  <a:srgbClr val="94A3B8"/>
-                </a:solidFill>
-                <a:latin typeface="Arial"/>
-              </a:defRPr>
-            </a:pPr>
-            <a:r>
-              <a:t>• Interactive Progress Modal</a:t>
-            </a:r>
-          </a:p>
-          <a:p>
-            <a:pPr>
-              <a:spcAft>
-                <a:spcPts val="600"/>
-              </a:spcAft>
-              <a:defRPr sz="1000">
-                <a:solidFill>
-                  <a:srgbClr val="94A3B8"/>
-                </a:solidFill>
-                <a:latin typeface="Arial"/>
-              </a:defRPr>
-            </a:pPr>
-            <a:r>
-              <a:t>• Live ProofServer Probe</a:t>
-            </a:r>
-          </a:p>
-        </p:txBody>
-      </p:sp>
-      <p:sp>
-        <p:nvSpPr>
-          <p:cNvPr id="9" name="Rounded Rectangle 8"/>
-          <p:cNvSpPr/>
-          <p:nvPr/>
-        </p:nvSpPr>
-        <p:spPr>
-          <a:xfrm>
-            <a:off x="3429000" y="1554480"/>
-            <a:ext cx="2468880" cy="4754880"/>
-          </a:xfrm>
-          <a:prstGeom prst="roundRect">
-            <a:avLst/>
-          </a:prstGeom>
           <a:solidFill>
-            <a:srgbClr val="0E1117"/>
+            <a:srgbClr val="232A38"/>
           </a:solidFill>
-          <a:ln w="12700">
-            <a:solidFill>
-              <a:srgbClr val="232A38"/>
-            </a:solidFill>
+          <a:ln>
+            <a:noFill/>
           </a:ln>
         </p:spPr>
         <p:style>
@@ -7422,177 +7156,22 @@
       </p:sp>
       <p:sp>
         <p:nvSpPr>
-          <p:cNvPr id="10" name="TextBox 9"/>
-          <p:cNvSpPr txBox="1"/>
-          <p:nvPr/>
-        </p:nvSpPr>
-        <p:spPr>
-          <a:xfrm>
-            <a:off x="3657600" y="1719072"/>
-            <a:ext cx="2011680" cy="365760"/>
-          </a:xfrm>
-          <a:prstGeom prst="rect">
-            <a:avLst/>
-          </a:prstGeom>
-          <a:noFill/>
-        </p:spPr>
-        <p:txBody>
-          <a:bodyPr wrap="square">
-            <a:spAutoFit/>
-          </a:bodyPr>
-          <a:lstStyle/>
-          <a:p>
-            <a:pPr>
-              <a:defRPr sz="1300" b="1">
-                <a:solidFill>
-                  <a:srgbClr val="F59E0B"/>
-                </a:solidFill>
-                <a:latin typeface="Arial"/>
-              </a:defRPr>
-            </a:pPr>
-            <a:r>
-              <a:t>2. Proof Engine</a:t>
-            </a:r>
-          </a:p>
-        </p:txBody>
-      </p:sp>
-      <p:sp>
-        <p:nvSpPr>
-          <p:cNvPr id="11" name="TextBox 10"/>
-          <p:cNvSpPr txBox="1"/>
-          <p:nvPr/>
-        </p:nvSpPr>
-        <p:spPr>
-          <a:xfrm>
-            <a:off x="3657600" y="2121408"/>
-            <a:ext cx="2011680" cy="4069080"/>
-          </a:xfrm>
-          <a:prstGeom prst="rect">
-            <a:avLst/>
-          </a:prstGeom>
-          <a:noFill/>
-        </p:spPr>
-        <p:txBody>
-          <a:bodyPr wrap="square">
-            <a:spAutoFit/>
-          </a:bodyPr>
-          <a:lstStyle/>
-          <a:p>
-            <a:pPr>
-              <a:spcAft>
-                <a:spcPts val="600"/>
-              </a:spcAft>
-              <a:defRPr sz="1000">
-                <a:solidFill>
-                  <a:srgbClr val="94A3B8"/>
-                </a:solidFill>
-                <a:latin typeface="Arial"/>
-              </a:defRPr>
-            </a:pPr>
-            <a:r>
-              <a:t>• Docker on Port 6300</a:t>
-            </a:r>
-          </a:p>
-          <a:p>
-            <a:pPr>
-              <a:spcAft>
-                <a:spcPts val="600"/>
-              </a:spcAft>
-              <a:defRPr sz="1000">
-                <a:solidFill>
-                  <a:srgbClr val="94A3B8"/>
-                </a:solidFill>
-                <a:latin typeface="Arial"/>
-              </a:defRPr>
-            </a:pPr>
-            <a:r>
-              <a:t>• midnight-proof-server</a:t>
-            </a:r>
-          </a:p>
-          <a:p>
-            <a:pPr>
-              <a:spcAft>
-                <a:spcPts val="600"/>
-              </a:spcAft>
-              <a:defRPr sz="1000">
-                <a:solidFill>
-                  <a:srgbClr val="94A3B8"/>
-                </a:solidFill>
-                <a:latin typeface="Arial"/>
-              </a:defRPr>
-            </a:pPr>
-            <a:r>
-              <a:t>• Off-chain circuit evaluation</a:t>
-            </a:r>
-          </a:p>
-          <a:p>
-            <a:pPr>
-              <a:spcAft>
-                <a:spcPts val="600"/>
-              </a:spcAft>
-              <a:defRPr sz="1000">
-                <a:solidFill>
-                  <a:srgbClr val="94A3B8"/>
-                </a:solidFill>
-                <a:latin typeface="Arial"/>
-              </a:defRPr>
-            </a:pPr>
-            <a:r>
-              <a:t>• ZK-SNARK generation</a:t>
-            </a:r>
-          </a:p>
-          <a:p>
-            <a:pPr>
-              <a:spcAft>
-                <a:spcPts val="600"/>
-              </a:spcAft>
-              <a:defRPr sz="1000">
-                <a:solidFill>
-                  <a:srgbClr val="94A3B8"/>
-                </a:solidFill>
-                <a:latin typeface="Arial"/>
-              </a:defRPr>
-            </a:pPr>
-            <a:r>
-              <a:t>• No private keys transmitted</a:t>
-            </a:r>
-          </a:p>
-          <a:p>
-            <a:pPr>
-              <a:spcAft>
-                <a:spcPts val="600"/>
-              </a:spcAft>
-              <a:defRPr sz="1000">
-                <a:solidFill>
-                  <a:srgbClr val="94A3B8"/>
-                </a:solidFill>
-                <a:latin typeface="Arial"/>
-              </a:defRPr>
-            </a:pPr>
-            <a:r>
-              <a:t>• Deterministic outputs</a:t>
-            </a:r>
-          </a:p>
-        </p:txBody>
-      </p:sp>
-      <p:sp>
-        <p:nvSpPr>
-          <p:cNvPr id="12" name="Rounded Rectangle 11"/>
+          <p:cNvPr id="10" name="Rounded Rectangle 9"/>
           <p:cNvSpPr/>
           <p:nvPr/>
         </p:nvSpPr>
         <p:spPr>
           <a:xfrm>
-            <a:off x="6126480" y="1554480"/>
-            <a:ext cx="2468880" cy="4754880"/>
+            <a:off x="1005840" y="2423160"/>
+            <a:ext cx="10149840" cy="566928"/>
           </a:xfrm>
           <a:prstGeom prst="roundRect">
             <a:avLst/>
           </a:prstGeom>
           <a:solidFill>
-            <a:srgbClr val="0E1117"/>
+            <a:srgbClr val="12161E"/>
           </a:solidFill>
-          <a:ln w="12700">
+          <a:ln w="6350">
             <a:solidFill>
               <a:srgbClr val="232A38"/>
             </a:solidFill>
@@ -7622,14 +7201,14 @@
       </p:sp>
       <p:sp>
         <p:nvSpPr>
-          <p:cNvPr id="13" name="TextBox 12"/>
+          <p:cNvPr id="11" name="TextBox 10"/>
           <p:cNvSpPr txBox="1"/>
           <p:nvPr/>
         </p:nvSpPr>
         <p:spPr>
           <a:xfrm>
-            <a:off x="6355080" y="1719072"/>
-            <a:ext cx="2011680" cy="365760"/>
+            <a:off x="1143000" y="2532888"/>
+            <a:ext cx="9875520" cy="365760"/>
           </a:xfrm>
           <a:prstGeom prst="rect">
             <a:avLst/>
@@ -7637,162 +7216,43 @@
           <a:noFill/>
         </p:spPr>
         <p:txBody>
-          <a:bodyPr wrap="square">
+          <a:bodyPr wrap="none">
             <a:spAutoFit/>
           </a:bodyPr>
           <a:lstStyle/>
           <a:p>
             <a:pPr>
-              <a:defRPr sz="1300" b="1">
-                <a:solidFill>
-                  <a:srgbClr val="00F5A0"/>
-                </a:solidFill>
-                <a:latin typeface="Arial"/>
-              </a:defRPr>
-            </a:pPr>
-            <a:r>
-              <a:t>3. Sponsorship Layer</a:t>
-            </a:r>
-          </a:p>
-        </p:txBody>
-      </p:sp>
-      <p:sp>
-        <p:nvSpPr>
-          <p:cNvPr id="14" name="TextBox 13"/>
-          <p:cNvSpPr txBox="1"/>
-          <p:nvPr/>
-        </p:nvSpPr>
-        <p:spPr>
-          <a:xfrm>
-            <a:off x="6355080" y="2121408"/>
-            <a:ext cx="2011680" cy="4069080"/>
-          </a:xfrm>
-          <a:prstGeom prst="rect">
-            <a:avLst/>
-          </a:prstGeom>
-          <a:noFill/>
-        </p:spPr>
-        <p:txBody>
-          <a:bodyPr wrap="square">
-            <a:spAutoFit/>
-          </a:bodyPr>
-          <a:lstStyle/>
-          <a:p>
-            <a:pPr>
-              <a:spcAft>
-                <a:spcPts val="600"/>
-              </a:spcAft>
-              <a:defRPr sz="1000">
-                <a:solidFill>
-                  <a:srgbClr val="94A3B8"/>
-                </a:solidFill>
-                <a:latin typeface="Arial"/>
-              </a:defRPr>
-            </a:pPr>
-            <a:r>
-              <a:t>• 1AM Wallet Background Relay</a:t>
-            </a:r>
-          </a:p>
-          <a:p>
-            <a:pPr>
-              <a:spcAft>
-                <a:spcPts val="600"/>
-              </a:spcAft>
-              <a:defRPr sz="1000">
-                <a:solidFill>
-                  <a:srgbClr val="94A3B8"/>
-                </a:solidFill>
-                <a:latin typeface="Arial"/>
-              </a:defRPr>
-            </a:pPr>
-            <a:r>
-              <a:t>• ProofStation Dust Engine</a:t>
-            </a:r>
-          </a:p>
-          <a:p>
-            <a:pPr>
-              <a:spcAft>
-                <a:spcPts val="600"/>
-              </a:spcAft>
-              <a:defRPr sz="1000">
-                <a:solidFill>
-                  <a:srgbClr val="94A3B8"/>
-                </a:solidFill>
-                <a:latin typeface="Arial"/>
-              </a:defRPr>
-            </a:pPr>
-            <a:r>
-              <a:t>• balanceUnsealedTransaction</a:t>
-            </a:r>
-          </a:p>
-          <a:p>
-            <a:pPr>
-              <a:spcAft>
-                <a:spcPts val="600"/>
-              </a:spcAft>
-              <a:defRPr sz="1000">
-                <a:solidFill>
-                  <a:srgbClr val="94A3B8"/>
-                </a:solidFill>
-                <a:latin typeface="Arial"/>
-              </a:defRPr>
-            </a:pPr>
-            <a:r>
-              <a:t>• Automatic fee injection</a:t>
-            </a:r>
-          </a:p>
-          <a:p>
-            <a:pPr>
-              <a:spcAft>
-                <a:spcPts val="600"/>
-              </a:spcAft>
-              <a:defRPr sz="1000">
-                <a:solidFill>
-                  <a:srgbClr val="94A3B8"/>
-                </a:solidFill>
-                <a:latin typeface="Arial"/>
-              </a:defRPr>
-            </a:pPr>
-            <a:r>
-              <a:t>• Cryptographic TX signing</a:t>
-            </a:r>
-          </a:p>
-          <a:p>
-            <a:pPr>
-              <a:spcAft>
-                <a:spcPts val="600"/>
-              </a:spcAft>
-              <a:defRPr sz="1000">
-                <a:solidFill>
-                  <a:srgbClr val="94A3B8"/>
-                </a:solidFill>
-                <a:latin typeface="Arial"/>
-              </a:defRPr>
-            </a:pPr>
-            <a:r>
-              <a:t>• Zero-NIGHT user expense</a:t>
-            </a:r>
-          </a:p>
-        </p:txBody>
-      </p:sp>
-      <p:sp>
-        <p:nvSpPr>
-          <p:cNvPr id="15" name="Rounded Rectangle 14"/>
+              <a:defRPr sz="950">
+                <a:solidFill>
+                  <a:srgbClr val="F1F5F9"/>
+                </a:solidFill>
+                <a:latin typeface="Consolas"/>
+              </a:defRPr>
+            </a:pPr>
+            <a:r>
+              <a:t>• Owner Identity Visibility      | Publicly linkable to wallet address | ✓ Shielded via private ZK witness key</a:t>
+            </a:r>
+          </a:p>
+        </p:txBody>
+      </p:sp>
+      <p:sp>
+        <p:nvSpPr>
+          <p:cNvPr id="12" name="Rounded Rectangle 11"/>
           <p:cNvSpPr/>
           <p:nvPr/>
         </p:nvSpPr>
         <p:spPr>
           <a:xfrm>
-            <a:off x="8823960" y="1554480"/>
-            <a:ext cx="2606040" cy="4754880"/>
+            <a:off x="1005840" y="3108960"/>
+            <a:ext cx="10149840" cy="566928"/>
           </a:xfrm>
           <a:prstGeom prst="roundRect">
             <a:avLst/>
           </a:prstGeom>
           <a:solidFill>
-            <a:srgbClr val="0E1117"/>
+            <a:srgbClr val="12161E"/>
           </a:solidFill>
-          <a:ln w="12700">
+          <a:ln w="6350">
             <a:solidFill>
               <a:srgbClr val="232A38"/>
             </a:solidFill>
@@ -7822,14 +7282,14 @@
       </p:sp>
       <p:sp>
         <p:nvSpPr>
-          <p:cNvPr id="16" name="TextBox 15"/>
+          <p:cNvPr id="13" name="TextBox 12"/>
           <p:cNvSpPr txBox="1"/>
           <p:nvPr/>
         </p:nvSpPr>
         <p:spPr>
           <a:xfrm>
-            <a:off x="9052560" y="1719072"/>
-            <a:ext cx="2148840" cy="365760"/>
+            <a:off x="1143000" y="3218688"/>
+            <a:ext cx="9875520" cy="365760"/>
           </a:xfrm>
           <a:prstGeom prst="rect">
             <a:avLst/>
@@ -7837,22 +7297,148 @@
           <a:noFill/>
         </p:spPr>
         <p:txBody>
-          <a:bodyPr wrap="square">
+          <a:bodyPr wrap="none">
             <a:spAutoFit/>
           </a:bodyPr>
           <a:lstStyle/>
           <a:p>
             <a:pPr>
-              <a:defRPr sz="1300" b="1">
-                <a:solidFill>
-                  <a:srgbClr val="06B6D4"/>
-                </a:solidFill>
-                <a:latin typeface="Arial"/>
-              </a:defRPr>
-            </a:pPr>
-            <a:r>
-              <a:t>4. Midnight Node</a:t>
-            </a:r>
+              <a:defRPr sz="950">
+                <a:solidFill>
+                  <a:srgbClr val="F1F5F9"/>
+                </a:solidFill>
+                <a:latin typeface="Consolas"/>
+              </a:defRPr>
+            </a:pPr>
+            <a:r>
+              <a:t>• Payer Friction                 | Requires native gas token in every wallet | ✓ Zero-gas sponsored checkout flow</a:t>
+            </a:r>
+          </a:p>
+        </p:txBody>
+      </p:sp>
+      <p:sp>
+        <p:nvSpPr>
+          <p:cNvPr id="14" name="Rounded Rectangle 13"/>
+          <p:cNvSpPr/>
+          <p:nvPr/>
+        </p:nvSpPr>
+        <p:spPr>
+          <a:xfrm>
+            <a:off x="1005840" y="3794760"/>
+            <a:ext cx="10149840" cy="566928"/>
+          </a:xfrm>
+          <a:prstGeom prst="roundRect">
+            <a:avLst/>
+          </a:prstGeom>
+          <a:solidFill>
+            <a:srgbClr val="12161E"/>
+          </a:solidFill>
+          <a:ln w="6350">
+            <a:solidFill>
+              <a:srgbClr val="232A38"/>
+            </a:solidFill>
+          </a:ln>
+        </p:spPr>
+        <p:style>
+          <a:lnRef idx="1">
+            <a:schemeClr val="accent1"/>
+          </a:lnRef>
+          <a:fillRef idx="3">
+            <a:schemeClr val="accent1"/>
+          </a:fillRef>
+          <a:effectRef idx="2">
+            <a:schemeClr val="accent1"/>
+          </a:effectRef>
+          <a:fontRef idx="minor">
+            <a:schemeClr val="lt1"/>
+          </a:fontRef>
+        </p:style>
+        <p:txBody>
+          <a:bodyPr rtlCol="0" anchor="ctr"/>
+          <a:lstStyle/>
+          <a:p>
+            <a:pPr algn="ctr"/>
+          </a:p>
+        </p:txBody>
+      </p:sp>
+      <p:sp>
+        <p:nvSpPr>
+          <p:cNvPr id="15" name="TextBox 14"/>
+          <p:cNvSpPr txBox="1"/>
+          <p:nvPr/>
+        </p:nvSpPr>
+        <p:spPr>
+          <a:xfrm>
+            <a:off x="1143000" y="3904488"/>
+            <a:ext cx="9875520" cy="365760"/>
+          </a:xfrm>
+          <a:prstGeom prst="rect">
+            <a:avLst/>
+          </a:prstGeom>
+          <a:noFill/>
+        </p:spPr>
+        <p:txBody>
+          <a:bodyPr wrap="none">
+            <a:spAutoFit/>
+          </a:bodyPr>
+          <a:lstStyle/>
+          <a:p>
+            <a:pPr>
+              <a:defRPr sz="950">
+                <a:solidFill>
+                  <a:srgbClr val="F1F5F9"/>
+                </a:solidFill>
+                <a:latin typeface="Consolas"/>
+              </a:defRPr>
+            </a:pPr>
+            <a:r>
+              <a:t>• Auditability &amp; Compliance      | Scrapes block explorer (zero privacy) | ✓ Selective cryptographic QR receipts</a:t>
+            </a:r>
+          </a:p>
+        </p:txBody>
+      </p:sp>
+      <p:sp>
+        <p:nvSpPr>
+          <p:cNvPr id="16" name="Rounded Rectangle 15"/>
+          <p:cNvSpPr/>
+          <p:nvPr/>
+        </p:nvSpPr>
+        <p:spPr>
+          <a:xfrm>
+            <a:off x="1005840" y="4480560"/>
+            <a:ext cx="10149840" cy="566928"/>
+          </a:xfrm>
+          <a:prstGeom prst="roundRect">
+            <a:avLst/>
+          </a:prstGeom>
+          <a:solidFill>
+            <a:srgbClr val="12161E"/>
+          </a:solidFill>
+          <a:ln w="6350">
+            <a:solidFill>
+              <a:srgbClr val="232A38"/>
+            </a:solidFill>
+          </a:ln>
+        </p:spPr>
+        <p:style>
+          <a:lnRef idx="1">
+            <a:schemeClr val="accent1"/>
+          </a:lnRef>
+          <a:fillRef idx="3">
+            <a:schemeClr val="accent1"/>
+          </a:fillRef>
+          <a:effectRef idx="2">
+            <a:schemeClr val="accent1"/>
+          </a:effectRef>
+          <a:fontRef idx="minor">
+            <a:schemeClr val="lt1"/>
+          </a:fontRef>
+        </p:style>
+        <p:txBody>
+          <a:bodyPr rtlCol="0" anchor="ctr"/>
+          <a:lstStyle/>
+          <a:p>
+            <a:pPr algn="ctr"/>
           </a:p>
         </p:txBody>
       </p:sp>
@@ -7864,8 +7450,8 @@
         </p:nvSpPr>
         <p:spPr>
           <a:xfrm>
-            <a:off x="9052560" y="2121408"/>
-            <a:ext cx="2148840" cy="4069080"/>
+            <a:off x="1143000" y="4590288"/>
+            <a:ext cx="9875520" cy="365760"/>
           </a:xfrm>
           <a:prstGeom prst="rect">
             <a:avLst/>
@@ -7873,104 +7459,102 @@
           <a:noFill/>
         </p:spPr>
         <p:txBody>
-          <a:bodyPr wrap="square">
+          <a:bodyPr wrap="none">
             <a:spAutoFit/>
           </a:bodyPr>
           <a:lstStyle/>
           <a:p>
             <a:pPr>
-              <a:spcAft>
-                <a:spcPts val="600"/>
-              </a:spcAft>
-              <a:defRPr sz="1000">
-                <a:solidFill>
-                  <a:srgbClr val="94A3B8"/>
-                </a:solidFill>
-                <a:latin typeface="Arial"/>
-              </a:defRPr>
-            </a:pPr>
-            <a:r>
-              <a:t>• Preprod Partnerchain</a:t>
-            </a:r>
-          </a:p>
-          <a:p>
-            <a:pPr>
-              <a:spcAft>
-                <a:spcPts val="600"/>
-              </a:spcAft>
-              <a:defRPr sz="1000">
-                <a:solidFill>
-                  <a:srgbClr val="94A3B8"/>
-                </a:solidFill>
-                <a:latin typeface="Arial"/>
-              </a:defRPr>
-            </a:pPr>
-            <a:r>
-              <a:t>• AURA / GRANDPA Consensus</a:t>
-            </a:r>
-          </a:p>
-          <a:p>
-            <a:pPr>
-              <a:spcAft>
-                <a:spcPts val="600"/>
-              </a:spcAft>
-              <a:defRPr sz="1000">
-                <a:solidFill>
-                  <a:srgbClr val="94A3B8"/>
-                </a:solidFill>
-                <a:latin typeface="Arial"/>
-              </a:defRPr>
-            </a:pPr>
-            <a:r>
-              <a:t>• Cardano Settlement Layer</a:t>
-            </a:r>
-          </a:p>
-          <a:p>
-            <a:pPr>
-              <a:spcAft>
-                <a:spcPts val="600"/>
-              </a:spcAft>
-              <a:defRPr sz="1000">
-                <a:solidFill>
-                  <a:srgbClr val="94A3B8"/>
-                </a:solidFill>
-                <a:latin typeface="Arial"/>
-              </a:defRPr>
-            </a:pPr>
-            <a:r>
-              <a:t>• WASM Runtime Verification</a:t>
-            </a:r>
-          </a:p>
-          <a:p>
-            <a:pPr>
-              <a:spcAft>
-                <a:spcPts val="600"/>
-              </a:spcAft>
-              <a:defRPr sz="1000">
-                <a:solidFill>
-                  <a:srgbClr val="94A3B8"/>
-                </a:solidFill>
-                <a:latin typeface="Arial"/>
-              </a:defRPr>
-            </a:pPr>
-            <a:r>
-              <a:t>• GraphQL Indexer v4</a:t>
-            </a:r>
-          </a:p>
-          <a:p>
-            <a:pPr>
-              <a:spcAft>
-                <a:spcPts val="600"/>
-              </a:spcAft>
-              <a:defRPr sz="1000">
-                <a:solidFill>
-                  <a:srgbClr val="94A3B8"/>
-                </a:solidFill>
-                <a:latin typeface="Arial"/>
-              </a:defRPr>
-            </a:pPr>
-            <a:r>
-              <a:t>• Contract State Persistence</a:t>
+              <a:defRPr sz="950">
+                <a:solidFill>
+                  <a:srgbClr val="F1F5F9"/>
+                </a:solidFill>
+                <a:latin typeface="Consolas"/>
+              </a:defRPr>
+            </a:pPr>
+            <a:r>
+              <a:t>• Smart Contract Engine          | EVM Bytecode (Transparent Execution) | ✓ Compact v0.20+ (ZK Circuit Compilation)</a:t>
+            </a:r>
+          </a:p>
+        </p:txBody>
+      </p:sp>
+      <p:sp>
+        <p:nvSpPr>
+          <p:cNvPr id="18" name="Rounded Rectangle 17"/>
+          <p:cNvSpPr/>
+          <p:nvPr/>
+        </p:nvSpPr>
+        <p:spPr>
+          <a:xfrm>
+            <a:off x="1005840" y="5166360"/>
+            <a:ext cx="10149840" cy="566928"/>
+          </a:xfrm>
+          <a:prstGeom prst="roundRect">
+            <a:avLst/>
+          </a:prstGeom>
+          <a:solidFill>
+            <a:srgbClr val="12161E"/>
+          </a:solidFill>
+          <a:ln w="6350">
+            <a:solidFill>
+              <a:srgbClr val="232A38"/>
+            </a:solidFill>
+          </a:ln>
+        </p:spPr>
+        <p:style>
+          <a:lnRef idx="1">
+            <a:schemeClr val="accent1"/>
+          </a:lnRef>
+          <a:fillRef idx="3">
+            <a:schemeClr val="accent1"/>
+          </a:fillRef>
+          <a:effectRef idx="2">
+            <a:schemeClr val="accent1"/>
+          </a:effectRef>
+          <a:fontRef idx="minor">
+            <a:schemeClr val="lt1"/>
+          </a:fontRef>
+        </p:style>
+        <p:txBody>
+          <a:bodyPr rtlCol="0" anchor="ctr"/>
+          <a:lstStyle/>
+          <a:p>
+            <a:pPr algn="ctr"/>
+          </a:p>
+        </p:txBody>
+      </p:sp>
+      <p:sp>
+        <p:nvSpPr>
+          <p:cNvPr id="19" name="TextBox 18"/>
+          <p:cNvSpPr txBox="1"/>
+          <p:nvPr/>
+        </p:nvSpPr>
+        <p:spPr>
+          <a:xfrm>
+            <a:off x="1143000" y="5276088"/>
+            <a:ext cx="9875520" cy="365760"/>
+          </a:xfrm>
+          <a:prstGeom prst="rect">
+            <a:avLst/>
+          </a:prstGeom>
+          <a:noFill/>
+        </p:spPr>
+        <p:txBody>
+          <a:bodyPr wrap="none">
+            <a:spAutoFit/>
+          </a:bodyPr>
+          <a:lstStyle/>
+          <a:p>
+            <a:pPr>
+              <a:defRPr sz="950">
+                <a:solidFill>
+                  <a:srgbClr val="F1F5F9"/>
+                </a:solidFill>
+                <a:latin typeface="Consolas"/>
+              </a:defRPr>
+            </a:pPr>
+            <a:r>
+              <a:t>• Proving Architecture           | N/A (No Client Proving)            | ✓ 100% Local ProofStation (Docker :6300)</a:t>
             </a:r>
           </a:p>
         </p:txBody>
@@ -8045,7 +7629,7 @@
         <p:spPr>
           <a:xfrm>
             <a:off x="731520" y="365760"/>
-            <a:ext cx="10698480" cy="320040"/>
+            <a:ext cx="10698480" cy="292608"/>
           </a:xfrm>
           <a:prstGeom prst="rect">
             <a:avLst/>
@@ -8067,7 +7651,7 @@
               </a:defRPr>
             </a:pPr>
             <a:r>
-              <a:t>KNIGHT.VAULT // ZERO-KNOWLEDGE PROTOCOL DECK</a:t>
+              <a:t>05 / PROTOCOL FUTURE &amp; TEAM</a:t>
             </a:r>
           </a:p>
         </p:txBody>
@@ -8081,7 +7665,7 @@
         <p:spPr>
           <a:xfrm>
             <a:off x="731520" y="658368"/>
-            <a:ext cx="10698480" cy="640080"/>
+            <a:ext cx="10698480" cy="594360"/>
           </a:xfrm>
           <a:prstGeom prst="rect">
             <a:avLst/>
@@ -8095,7 +7679,7 @@
           <a:lstStyle/>
           <a:p>
             <a:pPr>
-              <a:defRPr sz="2000" b="1">
+              <a:defRPr sz="2200" b="1">
                 <a:solidFill>
                   <a:srgbClr val="FFFFFF"/>
                 </a:solidFill>
@@ -8103,7 +7687,7 @@
               </a:defRPr>
             </a:pPr>
             <a:r>
-              <a:t>Smart Contract Deep Dive: payment.compact</a:t>
+              <a:t>Production Roadmap &amp; Architect Profile</a:t>
             </a:r>
           </a:p>
         </p:txBody>
@@ -8116,8 +7700,8 @@
         </p:nvSpPr>
         <p:spPr>
           <a:xfrm>
-            <a:off x="731520" y="1353312"/>
-            <a:ext cx="10728655" cy="18288"/>
+            <a:off x="731520" y="1298448"/>
+            <a:ext cx="10728655" cy="13716"/>
           </a:xfrm>
           <a:prstGeom prst="rect">
             <a:avLst/>
@@ -8153,14 +7737,57 @@
       </p:sp>
       <p:sp>
         <p:nvSpPr>
-          <p:cNvPr id="6" name="Rounded Rectangle 5"/>
+          <p:cNvPr id="6" name="Rectangle 5"/>
           <p:cNvSpPr/>
           <p:nvPr/>
         </p:nvSpPr>
         <p:spPr>
           <a:xfrm>
-            <a:off x="731520" y="1554480"/>
-            <a:ext cx="5120640" cy="4754880"/>
+            <a:off x="731520" y="1298448"/>
+            <a:ext cx="1097280" cy="22860"/>
+          </a:xfrm>
+          <a:prstGeom prst="rect">
+            <a:avLst/>
+          </a:prstGeom>
+          <a:solidFill>
+            <a:srgbClr val="00F5A0"/>
+          </a:solidFill>
+          <a:ln>
+            <a:noFill/>
+          </a:ln>
+        </p:spPr>
+        <p:style>
+          <a:lnRef idx="1">
+            <a:schemeClr val="accent1"/>
+          </a:lnRef>
+          <a:fillRef idx="3">
+            <a:schemeClr val="accent1"/>
+          </a:fillRef>
+          <a:effectRef idx="2">
+            <a:schemeClr val="accent1"/>
+          </a:effectRef>
+          <a:fontRef idx="minor">
+            <a:schemeClr val="lt1"/>
+          </a:fontRef>
+        </p:style>
+        <p:txBody>
+          <a:bodyPr rtlCol="0" anchor="ctr"/>
+          <a:lstStyle/>
+          <a:p>
+            <a:pPr algn="ctr"/>
+          </a:p>
+        </p:txBody>
+      </p:sp>
+      <p:sp>
+        <p:nvSpPr>
+          <p:cNvPr id="7" name="Rounded Rectangle 6"/>
+          <p:cNvSpPr/>
+          <p:nvPr/>
+        </p:nvSpPr>
+        <p:spPr>
+          <a:xfrm>
+            <a:off x="731520" y="1645920"/>
+            <a:ext cx="3429000" cy="2926080"/>
           </a:xfrm>
           <a:prstGeom prst="roundRect">
             <a:avLst/>
@@ -8198,14 +7825,93 @@
       </p:sp>
       <p:sp>
         <p:nvSpPr>
-          <p:cNvPr id="7" name="TextBox 6"/>
+          <p:cNvPr id="8" name="Rounded Rectangle 7"/>
+          <p:cNvSpPr/>
+          <p:nvPr/>
+        </p:nvSpPr>
+        <p:spPr>
+          <a:xfrm>
+            <a:off x="960120" y="1645920"/>
+            <a:ext cx="1645920" cy="36576"/>
+          </a:xfrm>
+          <a:prstGeom prst="roundRect">
+            <a:avLst/>
+          </a:prstGeom>
+          <a:solidFill>
+            <a:srgbClr val="00F5A0"/>
+          </a:solidFill>
+          <a:ln>
+            <a:noFill/>
+          </a:ln>
+        </p:spPr>
+        <p:style>
+          <a:lnRef idx="1">
+            <a:schemeClr val="accent1"/>
+          </a:lnRef>
+          <a:fillRef idx="3">
+            <a:schemeClr val="accent1"/>
+          </a:fillRef>
+          <a:effectRef idx="2">
+            <a:schemeClr val="accent1"/>
+          </a:effectRef>
+          <a:fontRef idx="minor">
+            <a:schemeClr val="lt1"/>
+          </a:fontRef>
+        </p:style>
+        <p:txBody>
+          <a:bodyPr rtlCol="0" anchor="ctr"/>
+          <a:lstStyle/>
+          <a:p>
+            <a:pPr algn="ctr"/>
+          </a:p>
+        </p:txBody>
+      </p:sp>
+      <p:sp>
+        <p:nvSpPr>
+          <p:cNvPr id="9" name="TextBox 8"/>
           <p:cNvSpPr txBox="1"/>
           <p:nvPr/>
         </p:nvSpPr>
         <p:spPr>
           <a:xfrm>
-            <a:off x="960120" y="1719072"/>
-            <a:ext cx="4663440" cy="365760"/>
+            <a:off x="960120" y="1828800"/>
+            <a:ext cx="2971800" cy="256032"/>
+          </a:xfrm>
+          <a:prstGeom prst="rect">
+            <a:avLst/>
+          </a:prstGeom>
+          <a:noFill/>
+        </p:spPr>
+        <p:txBody>
+          <a:bodyPr wrap="none">
+            <a:spAutoFit/>
+          </a:bodyPr>
+          <a:lstStyle/>
+          <a:p>
+            <a:pPr>
+              <a:defRPr sz="850" b="1">
+                <a:solidFill>
+                  <a:srgbClr val="00F5A0"/>
+                </a:solidFill>
+                <a:latin typeface="Arial"/>
+              </a:defRPr>
+            </a:pPr>
+            <a:r>
+              <a:t>LIVE PRODUCTION</a:t>
+            </a:r>
+          </a:p>
+        </p:txBody>
+      </p:sp>
+      <p:sp>
+        <p:nvSpPr>
+          <p:cNvPr id="10" name="TextBox 9"/>
+          <p:cNvSpPr txBox="1"/>
+          <p:nvPr/>
+        </p:nvSpPr>
+        <p:spPr>
+          <a:xfrm>
+            <a:off x="960120" y="2084832"/>
+            <a:ext cx="2971800" cy="411480"/>
           </a:xfrm>
           <a:prstGeom prst="rect">
             <a:avLst/>
@@ -8221,27 +7927,27 @@
             <a:pPr>
               <a:defRPr sz="1300" b="1">
                 <a:solidFill>
-                  <a:srgbClr val="818CF8"/>
+                  <a:srgbClr val="FFFFFF"/>
                 </a:solidFill>
                 <a:latin typeface="Arial"/>
               </a:defRPr>
             </a:pPr>
             <a:r>
-              <a:t>Public Ledger Variables &amp; Circuits</a:t>
-            </a:r>
-          </a:p>
-        </p:txBody>
-      </p:sp>
-      <p:sp>
-        <p:nvSpPr>
-          <p:cNvPr id="8" name="TextBox 7"/>
+              <a:t>Phase 1: Preprod (Live)</a:t>
+            </a:r>
+          </a:p>
+        </p:txBody>
+      </p:sp>
+      <p:sp>
+        <p:nvSpPr>
+          <p:cNvPr id="11" name="TextBox 10"/>
           <p:cNvSpPr txBox="1"/>
           <p:nvPr/>
         </p:nvSpPr>
         <p:spPr>
           <a:xfrm>
-            <a:off x="960120" y="2121408"/>
-            <a:ext cx="4663440" cy="4069080"/>
+            <a:off x="960120" y="2496312"/>
+            <a:ext cx="2971800" cy="1938528"/>
           </a:xfrm>
           <a:prstGeom prst="rect">
             <a:avLst/>
@@ -8256,7 +7962,7 @@
           <a:p>
             <a:pPr>
               <a:spcAft>
-                <a:spcPts val="600"/>
+                <a:spcPts val="500"/>
               </a:spcAft>
               <a:defRPr sz="1000">
                 <a:solidFill>
@@ -8266,13 +7972,13 @@
               </a:defRPr>
             </a:pPr>
             <a:r>
-              <a:t>• export ledger balance: Uint&lt;128&gt;: Current on-chain liquidity available in the vault.</a:t>
+              <a:t>•  Full 1AM connector integration.</a:t>
             </a:r>
           </a:p>
           <a:p>
             <a:pPr>
               <a:spcAft>
-                <a:spcPts val="600"/>
+                <a:spcPts val="500"/>
               </a:spcAft>
               <a:defRPr sz="1000">
                 <a:solidFill>
@@ -8282,13 +7988,13 @@
               </a:defRPr>
             </a:pPr>
             <a:r>
-              <a:t>• export ledger totalDeposited &amp; totalWithdrawn: Cumulative accounting metrics.</a:t>
+              <a:t>•  Compact v0.20 contract deployed on Preprod.</a:t>
             </a:r>
           </a:p>
           <a:p>
             <a:pPr>
               <a:spcAft>
-                <a:spcPts val="600"/>
+                <a:spcPts val="500"/>
               </a:spcAft>
               <a:defRPr sz="1000">
                 <a:solidFill>
@@ -8298,13 +8004,13 @@
               </a:defRPr>
             </a:pPr>
             <a:r>
-              <a:t>• export circuit deposit(amount): Calls receiveUnshielded(default, disclose(amount)) to pull tNIGHT from caller.</a:t>
+              <a:t>•  Sponsored dust balancing engine.</a:t>
             </a:r>
           </a:p>
           <a:p>
             <a:pPr>
               <a:spcAft>
-                <a:spcPts val="600"/>
+                <a:spcPts val="500"/>
               </a:spcAft>
               <a:defRPr sz="1000">
                 <a:solidFill>
@@ -8314,21 +8020,21 @@
               </a:defRPr>
             </a:pPr>
             <a:r>
-              <a:t>• export circuit withdraw(amount, recipient): Calls sendUnshielded() to dispatch tokens to chosen address.</a:t>
-            </a:r>
-          </a:p>
-        </p:txBody>
-      </p:sp>
-      <p:sp>
-        <p:nvSpPr>
-          <p:cNvPr id="9" name="Rounded Rectangle 8"/>
+              <a:t>•  ProofStation client-side proving (:6300).</a:t>
+            </a:r>
+          </a:p>
+        </p:txBody>
+      </p:sp>
+      <p:sp>
+        <p:nvSpPr>
+          <p:cNvPr id="12" name="Rounded Rectangle 11"/>
           <p:cNvSpPr/>
           <p:nvPr/>
         </p:nvSpPr>
         <p:spPr>
           <a:xfrm>
-            <a:off x="6309360" y="1554480"/>
-            <a:ext cx="5120640" cy="4754880"/>
+            <a:off x="4370832" y="1645920"/>
+            <a:ext cx="3429000" cy="2926080"/>
           </a:xfrm>
           <a:prstGeom prst="roundRect">
             <a:avLst/>
@@ -8366,161 +8072,20 @@
       </p:sp>
       <p:sp>
         <p:nvSpPr>
-          <p:cNvPr id="10" name="TextBox 9"/>
-          <p:cNvSpPr txBox="1"/>
-          <p:nvPr/>
-        </p:nvSpPr>
-        <p:spPr>
-          <a:xfrm>
-            <a:off x="6537960" y="1719072"/>
-            <a:ext cx="4663440" cy="365760"/>
-          </a:xfrm>
-          <a:prstGeom prst="rect">
-            <a:avLst/>
-          </a:prstGeom>
-          <a:noFill/>
-        </p:spPr>
-        <p:txBody>
-          <a:bodyPr wrap="square">
-            <a:spAutoFit/>
-          </a:bodyPr>
-          <a:lstStyle/>
-          <a:p>
-            <a:pPr>
-              <a:defRPr sz="1300" b="1">
-                <a:solidFill>
-                  <a:srgbClr val="00F5A0"/>
-                </a:solidFill>
-                <a:latin typeface="Arial"/>
-              </a:defRPr>
-            </a:pPr>
-            <a:r>
-              <a:t>Private Witnesses &amp; Mathematical Proofs</a:t>
-            </a:r>
-          </a:p>
-        </p:txBody>
-      </p:sp>
-      <p:sp>
-        <p:nvSpPr>
-          <p:cNvPr id="11" name="TextBox 10"/>
-          <p:cNvSpPr txBox="1"/>
-          <p:nvPr/>
-        </p:nvSpPr>
-        <p:spPr>
-          <a:xfrm>
-            <a:off x="6537960" y="2121408"/>
-            <a:ext cx="4663440" cy="4069080"/>
-          </a:xfrm>
-          <a:prstGeom prst="rect">
-            <a:avLst/>
-          </a:prstGeom>
-          <a:noFill/>
-        </p:spPr>
-        <p:txBody>
-          <a:bodyPr wrap="square">
-            <a:spAutoFit/>
-          </a:bodyPr>
-          <a:lstStyle/>
-          <a:p>
-            <a:pPr>
-              <a:spcAft>
-                <a:spcPts val="600"/>
-              </a:spcAft>
-              <a:defRPr sz="1000">
-                <a:solidFill>
-                  <a:srgbClr val="94A3B8"/>
-                </a:solidFill>
-                <a:latin typeface="Arial"/>
-              </a:defRPr>
-            </a:pPr>
-            <a:r>
-              <a:t>• witness ownerKey(): Bytes&lt;32&gt;: Local witness function executed only inside client proof engine.</a:t>
-            </a:r>
-          </a:p>
-          <a:p>
-            <a:pPr>
-              <a:spcAft>
-                <a:spcPts val="600"/>
-              </a:spcAft>
-              <a:defRPr sz="1000">
-                <a:solidFill>
-                  <a:srgbClr val="94A3B8"/>
-                </a:solidFill>
-                <a:latin typeface="Arial"/>
-              </a:defRPr>
-            </a:pPr>
-            <a:r>
-              <a:t>• pure circuit deriveKey(sk): Computes persistentHash with domain tag 'payment:owner:v1'.</a:t>
-            </a:r>
-          </a:p>
-          <a:p>
-            <a:pPr>
-              <a:spcAft>
-                <a:spcPts val="600"/>
-              </a:spcAft>
-              <a:defRPr sz="1000">
-                <a:solidFill>
-                  <a:srgbClr val="94A3B8"/>
-                </a:solidFill>
-                <a:latin typeface="Arial"/>
-              </a:defRPr>
-            </a:pPr>
-            <a:r>
-              <a:t>• assert(deriveKey(ownerKey()) == owner): The core ZK proof constraint — verifies authorization without revealing sk.</a:t>
-            </a:r>
-          </a:p>
-          <a:p>
-            <a:pPr>
-              <a:spcAft>
-                <a:spcPts val="600"/>
-              </a:spcAft>
-              <a:defRPr sz="1000">
-                <a:solidFill>
-                  <a:srgbClr val="94A3B8"/>
-                </a:solidFill>
-                <a:latin typeface="Arial"/>
-              </a:defRPr>
-            </a:pPr>
-            <a:r>
-              <a:t>• disclose(): Explicit boundary control — guarantees private values remain unrevealed unless intended.</a:t>
-            </a:r>
-          </a:p>
-        </p:txBody>
-      </p:sp>
-    </p:spTree>
-  </p:cSld>
-  <p:clrMapOvr>
-    <a:masterClrMapping/>
-  </p:clrMapOvr>
-</p:sld>
-</file>
-
-<file path=ppt/slides/slide7.xml><?xml version="1.0" encoding="utf-8"?>
-<p:sld xmlns:a="http://schemas.openxmlformats.org/drawingml/2006/main" xmlns:p="http://schemas.openxmlformats.org/presentationml/2006/main" xmlns:r="http://schemas.openxmlformats.org/officeDocument/2006/relationships">
-  <p:cSld>
-    <p:spTree>
-      <p:nvGrpSpPr>
-        <p:cNvPr id="1" name=""/>
-        <p:cNvGrpSpPr/>
-        <p:nvPr/>
-      </p:nvGrpSpPr>
-      <p:grpSpPr/>
-      <p:sp>
-        <p:nvSpPr>
-          <p:cNvPr id="2" name="Rectangle 1"/>
+          <p:cNvPr id="13" name="Rounded Rectangle 12"/>
           <p:cNvSpPr/>
           <p:nvPr/>
         </p:nvSpPr>
         <p:spPr>
           <a:xfrm>
-            <a:off x="0" y="0"/>
-            <a:ext cx="12191695" cy="6858000"/>
-          </a:xfrm>
-          <a:prstGeom prst="rect">
+            <a:off x="4599432" y="1645920"/>
+            <a:ext cx="1645920" cy="36576"/>
+          </a:xfrm>
+          <a:prstGeom prst="roundRect">
             <a:avLst/>
           </a:prstGeom>
           <a:solidFill>
-            <a:srgbClr val="08090D"/>
+            <a:srgbClr val="818CF8"/>
           </a:solidFill>
           <a:ln>
             <a:noFill/>
@@ -8550,14 +8115,50 @@
       </p:sp>
       <p:sp>
         <p:nvSpPr>
-          <p:cNvPr id="3" name="TextBox 2"/>
+          <p:cNvPr id="14" name="TextBox 13"/>
           <p:cNvSpPr txBox="1"/>
           <p:nvPr/>
         </p:nvSpPr>
         <p:spPr>
           <a:xfrm>
-            <a:off x="731520" y="365760"/>
-            <a:ext cx="10698480" cy="320040"/>
+            <a:off x="4599432" y="1828800"/>
+            <a:ext cx="2971800" cy="256032"/>
+          </a:xfrm>
+          <a:prstGeom prst="rect">
+            <a:avLst/>
+          </a:prstGeom>
+          <a:noFill/>
+        </p:spPr>
+        <p:txBody>
+          <a:bodyPr wrap="none">
+            <a:spAutoFit/>
+          </a:bodyPr>
+          <a:lstStyle/>
+          <a:p>
+            <a:pPr>
+              <a:defRPr sz="850" b="1">
+                <a:solidFill>
+                  <a:srgbClr val="818CF8"/>
+                </a:solidFill>
+                <a:latin typeface="Arial"/>
+              </a:defRPr>
+            </a:pPr>
+            <a:r>
+              <a:t>NEXT MILESTONE</a:t>
+            </a:r>
+          </a:p>
+        </p:txBody>
+      </p:sp>
+      <p:sp>
+        <p:nvSpPr>
+          <p:cNvPr id="15" name="TextBox 14"/>
+          <p:cNvSpPr txBox="1"/>
+          <p:nvPr/>
+        </p:nvSpPr>
+        <p:spPr>
+          <a:xfrm>
+            <a:off x="4599432" y="2084832"/>
+            <a:ext cx="2971800" cy="411480"/>
           </a:xfrm>
           <a:prstGeom prst="rect">
             <a:avLst/>
@@ -8571,29 +8172,29 @@
           <a:lstStyle/>
           <a:p>
             <a:pPr>
-              <a:defRPr sz="950" b="1">
-                <a:solidFill>
-                  <a:srgbClr val="00F5A0"/>
+              <a:defRPr sz="1300" b="1">
+                <a:solidFill>
+                  <a:srgbClr val="FFFFFF"/>
                 </a:solidFill>
                 <a:latin typeface="Arial"/>
               </a:defRPr>
             </a:pPr>
             <a:r>
-              <a:t>KNIGHT.VAULT // ZERO-KNOWLEDGE PROTOCOL DECK</a:t>
-            </a:r>
-          </a:p>
-        </p:txBody>
-      </p:sp>
-      <p:sp>
-        <p:nvSpPr>
-          <p:cNvPr id="4" name="TextBox 3"/>
+              <a:t>Phase 2: Multi-Sig &amp; Vesting</a:t>
+            </a:r>
+          </a:p>
+        </p:txBody>
+      </p:sp>
+      <p:sp>
+        <p:nvSpPr>
+          <p:cNvPr id="16" name="TextBox 15"/>
           <p:cNvSpPr txBox="1"/>
           <p:nvPr/>
         </p:nvSpPr>
         <p:spPr>
           <a:xfrm>
-            <a:off x="731520" y="658368"/>
-            <a:ext cx="10698480" cy="640080"/>
+            <a:off x="4599432" y="2496312"/>
+            <a:ext cx="2971800" cy="1938528"/>
           </a:xfrm>
           <a:prstGeom prst="rect">
             <a:avLst/>
@@ -8607,72 +8208,80 @@
           <a:lstStyle/>
           <a:p>
             <a:pPr>
-              <a:defRPr sz="2000" b="1">
-                <a:solidFill>
-                  <a:srgbClr val="FFFFFF"/>
+              <a:spcAft>
+                <a:spcPts val="500"/>
+              </a:spcAft>
+              <a:defRPr sz="1000">
+                <a:solidFill>
+                  <a:srgbClr val="94A3B8"/>
                 </a:solidFill>
                 <a:latin typeface="Arial"/>
               </a:defRPr>
             </a:pPr>
             <a:r>
-              <a:t>Step-by-Step Transaction Execution Lifecycle</a:t>
-            </a:r>
-          </a:p>
-        </p:txBody>
-      </p:sp>
-      <p:sp>
-        <p:nvSpPr>
-          <p:cNvPr id="5" name="Rectangle 4"/>
+              <a:t>•  m-of-n threshold witness approval circuits.</a:t>
+            </a:r>
+          </a:p>
+          <a:p>
+            <a:pPr>
+              <a:spcAft>
+                <a:spcPts val="500"/>
+              </a:spcAft>
+              <a:defRPr sz="1000">
+                <a:solidFill>
+                  <a:srgbClr val="94A3B8"/>
+                </a:solidFill>
+                <a:latin typeface="Arial"/>
+              </a:defRPr>
+            </a:pPr>
+            <a:r>
+              <a:t>•  Time-locked payment releases.</a:t>
+            </a:r>
+          </a:p>
+          <a:p>
+            <a:pPr>
+              <a:spcAft>
+                <a:spcPts val="500"/>
+              </a:spcAft>
+              <a:defRPr sz="1000">
+                <a:solidFill>
+                  <a:srgbClr val="94A3B8"/>
+                </a:solidFill>
+                <a:latin typeface="Arial"/>
+              </a:defRPr>
+            </a:pPr>
+            <a:r>
+              <a:t>•  Regulatory viewing keys for tax &amp; compliance.</a:t>
+            </a:r>
+          </a:p>
+          <a:p>
+            <a:pPr>
+              <a:spcAft>
+                <a:spcPts val="500"/>
+              </a:spcAft>
+              <a:defRPr sz="1000">
+                <a:solidFill>
+                  <a:srgbClr val="94A3B8"/>
+                </a:solidFill>
+                <a:latin typeface="Arial"/>
+              </a:defRPr>
+            </a:pPr>
+            <a:r>
+              <a:t>•  Native Midnight mobile SDK.</a:t>
+            </a:r>
+          </a:p>
+        </p:txBody>
+      </p:sp>
+      <p:sp>
+        <p:nvSpPr>
+          <p:cNvPr id="17" name="Rounded Rectangle 16"/>
           <p:cNvSpPr/>
           <p:nvPr/>
         </p:nvSpPr>
         <p:spPr>
           <a:xfrm>
-            <a:off x="731520" y="1353312"/>
-            <a:ext cx="10728655" cy="18288"/>
-          </a:xfrm>
-          <a:prstGeom prst="rect">
-            <a:avLst/>
-          </a:prstGeom>
-          <a:solidFill>
-            <a:srgbClr val="232A38"/>
-          </a:solidFill>
-          <a:ln>
-            <a:noFill/>
-          </a:ln>
-        </p:spPr>
-        <p:style>
-          <a:lnRef idx="1">
-            <a:schemeClr val="accent1"/>
-          </a:lnRef>
-          <a:fillRef idx="3">
-            <a:schemeClr val="accent1"/>
-          </a:fillRef>
-          <a:effectRef idx="2">
-            <a:schemeClr val="accent1"/>
-          </a:effectRef>
-          <a:fontRef idx="minor">
-            <a:schemeClr val="lt1"/>
-          </a:fontRef>
-        </p:style>
-        <p:txBody>
-          <a:bodyPr rtlCol="0" anchor="ctr"/>
-          <a:lstStyle/>
-          <a:p>
-            <a:pPr algn="ctr"/>
-          </a:p>
-        </p:txBody>
-      </p:sp>
-      <p:sp>
-        <p:nvSpPr>
-          <p:cNvPr id="6" name="Rounded Rectangle 5"/>
-          <p:cNvSpPr/>
-          <p:nvPr/>
-        </p:nvSpPr>
-        <p:spPr>
-          <a:xfrm>
-            <a:off x="731520" y="1554480"/>
-            <a:ext cx="5120640" cy="2286000"/>
+            <a:off x="8028431" y="1645920"/>
+            <a:ext cx="3429000" cy="2926080"/>
           </a:xfrm>
           <a:prstGeom prst="roundRect">
             <a:avLst/>
@@ -8710,14 +8319,93 @@
       </p:sp>
       <p:sp>
         <p:nvSpPr>
-          <p:cNvPr id="7" name="TextBox 6"/>
+          <p:cNvPr id="18" name="Rounded Rectangle 17"/>
+          <p:cNvSpPr/>
+          <p:nvPr/>
+        </p:nvSpPr>
+        <p:spPr>
+          <a:xfrm>
+            <a:off x="8257031" y="1645920"/>
+            <a:ext cx="1645920" cy="36576"/>
+          </a:xfrm>
+          <a:prstGeom prst="roundRect">
+            <a:avLst/>
+          </a:prstGeom>
+          <a:solidFill>
+            <a:srgbClr val="38BDF8"/>
+          </a:solidFill>
+          <a:ln>
+            <a:noFill/>
+          </a:ln>
+        </p:spPr>
+        <p:style>
+          <a:lnRef idx="1">
+            <a:schemeClr val="accent1"/>
+          </a:lnRef>
+          <a:fillRef idx="3">
+            <a:schemeClr val="accent1"/>
+          </a:fillRef>
+          <a:effectRef idx="2">
+            <a:schemeClr val="accent1"/>
+          </a:effectRef>
+          <a:fontRef idx="minor">
+            <a:schemeClr val="lt1"/>
+          </a:fontRef>
+        </p:style>
+        <p:txBody>
+          <a:bodyPr rtlCol="0" anchor="ctr"/>
+          <a:lstStyle/>
+          <a:p>
+            <a:pPr algn="ctr"/>
+          </a:p>
+        </p:txBody>
+      </p:sp>
+      <p:sp>
+        <p:nvSpPr>
+          <p:cNvPr id="19" name="TextBox 18"/>
           <p:cNvSpPr txBox="1"/>
           <p:nvPr/>
         </p:nvSpPr>
         <p:spPr>
           <a:xfrm>
-            <a:off x="960120" y="1719072"/>
-            <a:ext cx="4663440" cy="365760"/>
+            <a:off x="8257031" y="1828800"/>
+            <a:ext cx="2971800" cy="256032"/>
+          </a:xfrm>
+          <a:prstGeom prst="rect">
+            <a:avLst/>
+          </a:prstGeom>
+          <a:noFill/>
+        </p:spPr>
+        <p:txBody>
+          <a:bodyPr wrap="none">
+            <a:spAutoFit/>
+          </a:bodyPr>
+          <a:lstStyle/>
+          <a:p>
+            <a:pPr>
+              <a:defRPr sz="850" b="1">
+                <a:solidFill>
+                  <a:srgbClr val="38BDF8"/>
+                </a:solidFill>
+                <a:latin typeface="Arial"/>
+              </a:defRPr>
+            </a:pPr>
+            <a:r>
+              <a:t>ENTERPRISE SCALE</a:t>
+            </a:r>
+          </a:p>
+        </p:txBody>
+      </p:sp>
+      <p:sp>
+        <p:nvSpPr>
+          <p:cNvPr id="20" name="TextBox 19"/>
+          <p:cNvSpPr txBox="1"/>
+          <p:nvPr/>
+        </p:nvSpPr>
+        <p:spPr>
+          <a:xfrm>
+            <a:off x="8257031" y="2084832"/>
+            <a:ext cx="2971800" cy="411480"/>
           </a:xfrm>
           <a:prstGeom prst="rect">
             <a:avLst/>
@@ -8733,27 +8421,27 @@
             <a:pPr>
               <a:defRPr sz="1300" b="1">
                 <a:solidFill>
-                  <a:srgbClr val="00F5A0"/>
+                  <a:srgbClr val="FFFFFF"/>
                 </a:solidFill>
                 <a:latin typeface="Arial"/>
               </a:defRPr>
             </a:pPr>
             <a:r>
-              <a:t>Step 1: Parameter Assembly</a:t>
-            </a:r>
-          </a:p>
-        </p:txBody>
-      </p:sp>
-      <p:sp>
-        <p:nvSpPr>
-          <p:cNvPr id="8" name="TextBox 7"/>
+              <a:t>Phase 3: Mainnet Ecosystem</a:t>
+            </a:r>
+          </a:p>
+        </p:txBody>
+      </p:sp>
+      <p:sp>
+        <p:nvSpPr>
+          <p:cNvPr id="21" name="TextBox 20"/>
           <p:cNvSpPr txBox="1"/>
           <p:nvPr/>
         </p:nvSpPr>
         <p:spPr>
           <a:xfrm>
-            <a:off x="960120" y="2121408"/>
-            <a:ext cx="4663440" cy="1600200"/>
+            <a:off x="8257031" y="2496312"/>
+            <a:ext cx="2971800" cy="1938528"/>
           </a:xfrm>
           <a:prstGeom prst="rect">
             <a:avLst/>
@@ -8768,7 +8456,7 @@
           <a:p>
             <a:pPr>
               <a:spcAft>
-                <a:spcPts val="600"/>
+                <a:spcPts val="500"/>
               </a:spcAft>
               <a:defRPr sz="1000">
                 <a:solidFill>
@@ -8778,27 +8466,75 @@
               </a:defRPr>
             </a:pPr>
             <a:r>
-              <a:t>• Browser constructs unproven transaction object. Validates token format (e.g. 50 tNIGHT = 50,000,000 Stars bigint).</a:t>
-            </a:r>
-          </a:p>
-        </p:txBody>
-      </p:sp>
-      <p:sp>
-        <p:nvSpPr>
-          <p:cNvPr id="9" name="Rounded Rectangle 8"/>
+              <a:t>•  Cardano Partnerchain bridge deployment.</a:t>
+            </a:r>
+          </a:p>
+          <a:p>
+            <a:pPr>
+              <a:spcAft>
+                <a:spcPts val="500"/>
+              </a:spcAft>
+              <a:defRPr sz="1000">
+                <a:solidFill>
+                  <a:srgbClr val="94A3B8"/>
+                </a:solidFill>
+                <a:latin typeface="Arial"/>
+              </a:defRPr>
+            </a:pPr>
+            <a:r>
+              <a:t>•  Cross-chain shielded atomic swaps.</a:t>
+            </a:r>
+          </a:p>
+          <a:p>
+            <a:pPr>
+              <a:spcAft>
+                <a:spcPts val="500"/>
+              </a:spcAft>
+              <a:defRPr sz="1000">
+                <a:solidFill>
+                  <a:srgbClr val="94A3B8"/>
+                </a:solidFill>
+                <a:latin typeface="Arial"/>
+              </a:defRPr>
+            </a:pPr>
+            <a:r>
+              <a:t>•  Decentralized merchant payment widget.</a:t>
+            </a:r>
+          </a:p>
+          <a:p>
+            <a:pPr>
+              <a:spcAft>
+                <a:spcPts val="500"/>
+              </a:spcAft>
+              <a:defRPr sz="1000">
+                <a:solidFill>
+                  <a:srgbClr val="94A3B8"/>
+                </a:solidFill>
+                <a:latin typeface="Arial"/>
+              </a:defRPr>
+            </a:pPr>
+            <a:r>
+              <a:t>•  Zero-knowledge escrow dispute resolution.</a:t>
+            </a:r>
+          </a:p>
+        </p:txBody>
+      </p:sp>
+      <p:sp>
+        <p:nvSpPr>
+          <p:cNvPr id="22" name="Rounded Rectangle 21"/>
           <p:cNvSpPr/>
           <p:nvPr/>
         </p:nvSpPr>
         <p:spPr>
           <a:xfrm>
-            <a:off x="6309360" y="1554480"/>
-            <a:ext cx="5120640" cy="2286000"/>
+            <a:off x="731520" y="4800600"/>
+            <a:ext cx="10728655" cy="1417320"/>
           </a:xfrm>
           <a:prstGeom prst="roundRect">
             <a:avLst/>
           </a:prstGeom>
           <a:solidFill>
-            <a:srgbClr val="0E1117"/>
+            <a:srgbClr val="12161E"/>
           </a:solidFill>
           <a:ln w="12700">
             <a:solidFill>
@@ -8830,14 +8566,14 @@
       </p:sp>
       <p:sp>
         <p:nvSpPr>
-          <p:cNvPr id="10" name="TextBox 9"/>
+          <p:cNvPr id="23" name="TextBox 22"/>
           <p:cNvSpPr txBox="1"/>
           <p:nvPr/>
         </p:nvSpPr>
         <p:spPr>
           <a:xfrm>
-            <a:off x="6537960" y="1719072"/>
-            <a:ext cx="4663440" cy="365760"/>
+            <a:off x="1005840" y="4937760"/>
+            <a:ext cx="10149840" cy="1097280"/>
           </a:xfrm>
           <a:prstGeom prst="rect">
             <a:avLst/>
@@ -8845,12 +8581,15 @@
           <a:noFill/>
         </p:spPr>
         <p:txBody>
-          <a:bodyPr wrap="square">
+          <a:bodyPr wrap="none">
             <a:spAutoFit/>
           </a:bodyPr>
           <a:lstStyle/>
           <a:p>
             <a:pPr>
+              <a:spcAft>
+                <a:spcPts val="400"/>
+              </a:spcAft>
               <a:defRPr sz="1300" b="1">
                 <a:solidFill>
                   <a:srgbClr val="00F5A0"/>
@@ -8859,1750 +8598,36 @@
               </a:defRPr>
             </a:pPr>
             <a:r>
-              <a:t>Step 2: On-Device ZK Proving</a:t>
-            </a:r>
-          </a:p>
-        </p:txBody>
-      </p:sp>
-      <p:sp>
-        <p:nvSpPr>
-          <p:cNvPr id="11" name="TextBox 10"/>
-          <p:cNvSpPr txBox="1"/>
-          <p:nvPr/>
-        </p:nvSpPr>
-        <p:spPr>
-          <a:xfrm>
-            <a:off x="6537960" y="2121408"/>
-            <a:ext cx="4663440" cy="1600200"/>
-          </a:xfrm>
-          <a:prstGeom prst="rect">
-            <a:avLst/>
-          </a:prstGeom>
-          <a:noFill/>
-        </p:spPr>
-        <p:txBody>
-          <a:bodyPr wrap="square">
-            <a:spAutoFit/>
-          </a:bodyPr>
-          <a:lstStyle/>
+              <a:t>KNIGHT.VAULT Protocol Architect: Kshitij Adakane</a:t>
+            </a:r>
+          </a:p>
           <a:p>
             <a:pPr>
               <a:spcAft>
-                <a:spcPts val="600"/>
+                <a:spcPts val="400"/>
               </a:spcAft>
               <a:defRPr sz="1000">
                 <a:solidFill>
+                  <a:srgbClr val="FFFFFF"/>
+                </a:solidFill>
+                <a:latin typeface="Arial"/>
+              </a:defRPr>
+            </a:pPr>
+            <a:r>
+              <a:t>Vibe Coder, Systems Builder &amp; Applied AI/ML • Automotive &amp; Embedded Systems Engineering • Applied Mathematics</a:t>
+            </a:r>
+          </a:p>
+          <a:p>
+            <a:pPr>
+              <a:defRPr sz="950">
+                <a:solidFill>
                   <a:srgbClr val="94A3B8"/>
                 </a:solidFill>
                 <a:latin typeface="Arial"/>
               </a:defRPr>
             </a:pPr>
             <a:r>
-              <a:t>• Circuits and private witness executed locally via Docker Proof Server (port 6300). Generates Groth16 proof in ~2-3s.</a:t>
-            </a:r>
-          </a:p>
-        </p:txBody>
-      </p:sp>
-      <p:sp>
-        <p:nvSpPr>
-          <p:cNvPr id="12" name="Rounded Rectangle 11"/>
-          <p:cNvSpPr/>
-          <p:nvPr/>
-        </p:nvSpPr>
-        <p:spPr>
-          <a:xfrm>
-            <a:off x="731520" y="4023360"/>
-            <a:ext cx="5120640" cy="2286000"/>
-          </a:xfrm>
-          <a:prstGeom prst="roundRect">
-            <a:avLst/>
-          </a:prstGeom>
-          <a:solidFill>
-            <a:srgbClr val="0E1117"/>
-          </a:solidFill>
-          <a:ln w="12700">
-            <a:solidFill>
-              <a:srgbClr val="232A38"/>
-            </a:solidFill>
-          </a:ln>
-        </p:spPr>
-        <p:style>
-          <a:lnRef idx="1">
-            <a:schemeClr val="accent1"/>
-          </a:lnRef>
-          <a:fillRef idx="3">
-            <a:schemeClr val="accent1"/>
-          </a:fillRef>
-          <a:effectRef idx="2">
-            <a:schemeClr val="accent1"/>
-          </a:effectRef>
-          <a:fontRef idx="minor">
-            <a:schemeClr val="lt1"/>
-          </a:fontRef>
-        </p:style>
-        <p:txBody>
-          <a:bodyPr rtlCol="0" anchor="ctr"/>
-          <a:lstStyle/>
-          <a:p>
-            <a:pPr algn="ctr"/>
-          </a:p>
-        </p:txBody>
-      </p:sp>
-      <p:sp>
-        <p:nvSpPr>
-          <p:cNvPr id="13" name="TextBox 12"/>
-          <p:cNvSpPr txBox="1"/>
-          <p:nvPr/>
-        </p:nvSpPr>
-        <p:spPr>
-          <a:xfrm>
-            <a:off x="960120" y="4187952"/>
-            <a:ext cx="4663440" cy="365760"/>
-          </a:xfrm>
-          <a:prstGeom prst="rect">
-            <a:avLst/>
-          </a:prstGeom>
-          <a:noFill/>
-        </p:spPr>
-        <p:txBody>
-          <a:bodyPr wrap="square">
-            <a:spAutoFit/>
-          </a:bodyPr>
-          <a:lstStyle/>
-          <a:p>
-            <a:pPr>
-              <a:defRPr sz="1300" b="1">
-                <a:solidFill>
-                  <a:srgbClr val="00F5A0"/>
-                </a:solidFill>
-                <a:latin typeface="Arial"/>
-              </a:defRPr>
-            </a:pPr>
-            <a:r>
-              <a:t>Step 3: Dust Fee Balancing</a:t>
-            </a:r>
-          </a:p>
-        </p:txBody>
-      </p:sp>
-      <p:sp>
-        <p:nvSpPr>
-          <p:cNvPr id="14" name="TextBox 13"/>
-          <p:cNvSpPr txBox="1"/>
-          <p:nvPr/>
-        </p:nvSpPr>
-        <p:spPr>
-          <a:xfrm>
-            <a:off x="960120" y="4590288"/>
-            <a:ext cx="4663440" cy="1600200"/>
-          </a:xfrm>
-          <a:prstGeom prst="rect">
-            <a:avLst/>
-          </a:prstGeom>
-          <a:noFill/>
-        </p:spPr>
-        <p:txBody>
-          <a:bodyPr wrap="square">
-            <a:spAutoFit/>
-          </a:bodyPr>
-          <a:lstStyle/>
-          <a:p>
-            <a:pPr>
-              <a:spcAft>
-                <a:spcPts val="600"/>
-              </a:spcAft>
-              <a:defRPr sz="1000">
-                <a:solidFill>
-                  <a:srgbClr val="94A3B8"/>
-                </a:solidFill>
-                <a:latin typeface="Arial"/>
-              </a:defRPr>
-            </a:pPr>
-            <a:r>
-              <a:t>• 1AM Wallet balanceUnsealedTransaction injects ProofStation sponsor fees. Zero gas cost deducted from user wallet.</a:t>
-            </a:r>
-          </a:p>
-        </p:txBody>
-      </p:sp>
-      <p:sp>
-        <p:nvSpPr>
-          <p:cNvPr id="15" name="Rounded Rectangle 14"/>
-          <p:cNvSpPr/>
-          <p:nvPr/>
-        </p:nvSpPr>
-        <p:spPr>
-          <a:xfrm>
-            <a:off x="6309360" y="4023360"/>
-            <a:ext cx="5120640" cy="2286000"/>
-          </a:xfrm>
-          <a:prstGeom prst="roundRect">
-            <a:avLst/>
-          </a:prstGeom>
-          <a:solidFill>
-            <a:srgbClr val="0E1117"/>
-          </a:solidFill>
-          <a:ln w="12700">
-            <a:solidFill>
-              <a:srgbClr val="232A38"/>
-            </a:solidFill>
-          </a:ln>
-        </p:spPr>
-        <p:style>
-          <a:lnRef idx="1">
-            <a:schemeClr val="accent1"/>
-          </a:lnRef>
-          <a:fillRef idx="3">
-            <a:schemeClr val="accent1"/>
-          </a:fillRef>
-          <a:effectRef idx="2">
-            <a:schemeClr val="accent1"/>
-          </a:effectRef>
-          <a:fontRef idx="minor">
-            <a:schemeClr val="lt1"/>
-          </a:fontRef>
-        </p:style>
-        <p:txBody>
-          <a:bodyPr rtlCol="0" anchor="ctr"/>
-          <a:lstStyle/>
-          <a:p>
-            <a:pPr algn="ctr"/>
-          </a:p>
-        </p:txBody>
-      </p:sp>
-      <p:sp>
-        <p:nvSpPr>
-          <p:cNvPr id="16" name="TextBox 15"/>
-          <p:cNvSpPr txBox="1"/>
-          <p:nvPr/>
-        </p:nvSpPr>
-        <p:spPr>
-          <a:xfrm>
-            <a:off x="6537960" y="4187952"/>
-            <a:ext cx="4663440" cy="365760"/>
-          </a:xfrm>
-          <a:prstGeom prst="rect">
-            <a:avLst/>
-          </a:prstGeom>
-          <a:noFill/>
-        </p:spPr>
-        <p:txBody>
-          <a:bodyPr wrap="square">
-            <a:spAutoFit/>
-          </a:bodyPr>
-          <a:lstStyle/>
-          <a:p>
-            <a:pPr>
-              <a:defRPr sz="1300" b="1">
-                <a:solidFill>
-                  <a:srgbClr val="00F5A0"/>
-                </a:solidFill>
-                <a:latin typeface="Arial"/>
-              </a:defRPr>
-            </a:pPr>
-            <a:r>
-              <a:t>Step 4: Block Inclusion &amp; Indexing</a:t>
-            </a:r>
-          </a:p>
-        </p:txBody>
-      </p:sp>
-      <p:sp>
-        <p:nvSpPr>
-          <p:cNvPr id="17" name="TextBox 16"/>
-          <p:cNvSpPr txBox="1"/>
-          <p:nvPr/>
-        </p:nvSpPr>
-        <p:spPr>
-          <a:xfrm>
-            <a:off x="6537960" y="4590288"/>
-            <a:ext cx="4663440" cy="1600200"/>
-          </a:xfrm>
-          <a:prstGeom prst="rect">
-            <a:avLst/>
-          </a:prstGeom>
-          <a:noFill/>
-        </p:spPr>
-        <p:txBody>
-          <a:bodyPr wrap="square">
-            <a:spAutoFit/>
-          </a:bodyPr>
-          <a:lstStyle/>
-          <a:p>
-            <a:pPr>
-              <a:spcAft>
-                <a:spcPts val="600"/>
-              </a:spcAft>
-              <a:defRPr sz="1000">
-                <a:solidFill>
-                  <a:srgbClr val="94A3B8"/>
-                </a:solidFill>
-                <a:latin typeface="Arial"/>
-              </a:defRPr>
-            </a:pPr>
-            <a:r>
-              <a:t>• Transaction broadcast to Midnight node. Patched GraphQL Indexer polls state update and refreshes UI.</a:t>
-            </a:r>
-          </a:p>
-        </p:txBody>
-      </p:sp>
-    </p:spTree>
-  </p:cSld>
-  <p:clrMapOvr>
-    <a:masterClrMapping/>
-  </p:clrMapOvr>
-</p:sld>
-</file>
-
-<file path=ppt/slides/slide8.xml><?xml version="1.0" encoding="utf-8"?>
-<p:sld xmlns:a="http://schemas.openxmlformats.org/drawingml/2006/main" xmlns:p="http://schemas.openxmlformats.org/presentationml/2006/main" xmlns:r="http://schemas.openxmlformats.org/officeDocument/2006/relationships">
-  <p:cSld>
-    <p:spTree>
-      <p:nvGrpSpPr>
-        <p:cNvPr id="1" name=""/>
-        <p:cNvGrpSpPr/>
-        <p:nvPr/>
-      </p:nvGrpSpPr>
-      <p:grpSpPr/>
-      <p:sp>
-        <p:nvSpPr>
-          <p:cNvPr id="2" name="Rectangle 1"/>
-          <p:cNvSpPr/>
-          <p:nvPr/>
-        </p:nvSpPr>
-        <p:spPr>
-          <a:xfrm>
-            <a:off x="0" y="0"/>
-            <a:ext cx="12191695" cy="6858000"/>
-          </a:xfrm>
-          <a:prstGeom prst="rect">
-            <a:avLst/>
-          </a:prstGeom>
-          <a:solidFill>
-            <a:srgbClr val="08090D"/>
-          </a:solidFill>
-          <a:ln>
-            <a:noFill/>
-          </a:ln>
-        </p:spPr>
-        <p:style>
-          <a:lnRef idx="1">
-            <a:schemeClr val="accent1"/>
-          </a:lnRef>
-          <a:fillRef idx="3">
-            <a:schemeClr val="accent1"/>
-          </a:fillRef>
-          <a:effectRef idx="2">
-            <a:schemeClr val="accent1"/>
-          </a:effectRef>
-          <a:fontRef idx="minor">
-            <a:schemeClr val="lt1"/>
-          </a:fontRef>
-        </p:style>
-        <p:txBody>
-          <a:bodyPr rtlCol="0" anchor="ctr"/>
-          <a:lstStyle/>
-          <a:p>
-            <a:pPr algn="ctr"/>
-          </a:p>
-        </p:txBody>
-      </p:sp>
-      <p:sp>
-        <p:nvSpPr>
-          <p:cNvPr id="3" name="TextBox 2"/>
-          <p:cNvSpPr txBox="1"/>
-          <p:nvPr/>
-        </p:nvSpPr>
-        <p:spPr>
-          <a:xfrm>
-            <a:off x="731520" y="365760"/>
-            <a:ext cx="10698480" cy="320040"/>
-          </a:xfrm>
-          <a:prstGeom prst="rect">
-            <a:avLst/>
-          </a:prstGeom>
-          <a:noFill/>
-        </p:spPr>
-        <p:txBody>
-          <a:bodyPr wrap="square">
-            <a:spAutoFit/>
-          </a:bodyPr>
-          <a:lstStyle/>
-          <a:p>
-            <a:pPr>
-              <a:defRPr sz="950" b="1">
-                <a:solidFill>
-                  <a:srgbClr val="00F5A0"/>
-                </a:solidFill>
-                <a:latin typeface="Arial"/>
-              </a:defRPr>
-            </a:pPr>
-            <a:r>
-              <a:t>KNIGHT.VAULT // ZERO-KNOWLEDGE PROTOCOL DECK</a:t>
-            </a:r>
-          </a:p>
-        </p:txBody>
-      </p:sp>
-      <p:sp>
-        <p:nvSpPr>
-          <p:cNvPr id="4" name="TextBox 3"/>
-          <p:cNvSpPr txBox="1"/>
-          <p:nvPr/>
-        </p:nvSpPr>
-        <p:spPr>
-          <a:xfrm>
-            <a:off x="731520" y="658368"/>
-            <a:ext cx="10698480" cy="640080"/>
-          </a:xfrm>
-          <a:prstGeom prst="rect">
-            <a:avLst/>
-          </a:prstGeom>
-          <a:noFill/>
-        </p:spPr>
-        <p:txBody>
-          <a:bodyPr wrap="square">
-            <a:spAutoFit/>
-          </a:bodyPr>
-          <a:lstStyle/>
-          <a:p>
-            <a:pPr>
-              <a:defRPr sz="2000" b="1">
-                <a:solidFill>
-                  <a:srgbClr val="FFFFFF"/>
-                </a:solidFill>
-                <a:latin typeface="Arial"/>
-              </a:defRPr>
-            </a:pPr>
-            <a:r>
-              <a:t>User Experience &amp; Operational Flow</a:t>
-            </a:r>
-          </a:p>
-        </p:txBody>
-      </p:sp>
-      <p:sp>
-        <p:nvSpPr>
-          <p:cNvPr id="5" name="Rectangle 4"/>
-          <p:cNvSpPr/>
-          <p:nvPr/>
-        </p:nvSpPr>
-        <p:spPr>
-          <a:xfrm>
-            <a:off x="731520" y="1353312"/>
-            <a:ext cx="10728655" cy="18288"/>
-          </a:xfrm>
-          <a:prstGeom prst="rect">
-            <a:avLst/>
-          </a:prstGeom>
-          <a:solidFill>
-            <a:srgbClr val="232A38"/>
-          </a:solidFill>
-          <a:ln>
-            <a:noFill/>
-          </a:ln>
-        </p:spPr>
-        <p:style>
-          <a:lnRef idx="1">
-            <a:schemeClr val="accent1"/>
-          </a:lnRef>
-          <a:fillRef idx="3">
-            <a:schemeClr val="accent1"/>
-          </a:fillRef>
-          <a:effectRef idx="2">
-            <a:schemeClr val="accent1"/>
-          </a:effectRef>
-          <a:fontRef idx="minor">
-            <a:schemeClr val="lt1"/>
-          </a:fontRef>
-        </p:style>
-        <p:txBody>
-          <a:bodyPr rtlCol="0" anchor="ctr"/>
-          <a:lstStyle/>
-          <a:p>
-            <a:pPr algn="ctr"/>
-          </a:p>
-        </p:txBody>
-      </p:sp>
-      <p:sp>
-        <p:nvSpPr>
-          <p:cNvPr id="6" name="Rounded Rectangle 5"/>
-          <p:cNvSpPr/>
-          <p:nvPr/>
-        </p:nvSpPr>
-        <p:spPr>
-          <a:xfrm>
-            <a:off x="731520" y="1554480"/>
-            <a:ext cx="3291840" cy="4754880"/>
-          </a:xfrm>
-          <a:prstGeom prst="roundRect">
-            <a:avLst/>
-          </a:prstGeom>
-          <a:solidFill>
-            <a:srgbClr val="0E1117"/>
-          </a:solidFill>
-          <a:ln w="12700">
-            <a:solidFill>
-              <a:srgbClr val="232A38"/>
-            </a:solidFill>
-          </a:ln>
-        </p:spPr>
-        <p:style>
-          <a:lnRef idx="1">
-            <a:schemeClr val="accent1"/>
-          </a:lnRef>
-          <a:fillRef idx="3">
-            <a:schemeClr val="accent1"/>
-          </a:fillRef>
-          <a:effectRef idx="2">
-            <a:schemeClr val="accent1"/>
-          </a:effectRef>
-          <a:fontRef idx="minor">
-            <a:schemeClr val="lt1"/>
-          </a:fontRef>
-        </p:style>
-        <p:txBody>
-          <a:bodyPr rtlCol="0" anchor="ctr"/>
-          <a:lstStyle/>
-          <a:p>
-            <a:pPr algn="ctr"/>
-          </a:p>
-        </p:txBody>
-      </p:sp>
-      <p:sp>
-        <p:nvSpPr>
-          <p:cNvPr id="7" name="TextBox 6"/>
-          <p:cNvSpPr txBox="1"/>
-          <p:nvPr/>
-        </p:nvSpPr>
-        <p:spPr>
-          <a:xfrm>
-            <a:off x="960120" y="1719072"/>
-            <a:ext cx="2834640" cy="365760"/>
-          </a:xfrm>
-          <a:prstGeom prst="rect">
-            <a:avLst/>
-          </a:prstGeom>
-          <a:noFill/>
-        </p:spPr>
-        <p:txBody>
-          <a:bodyPr wrap="square">
-            <a:spAutoFit/>
-          </a:bodyPr>
-          <a:lstStyle/>
-          <a:p>
-            <a:pPr>
-              <a:defRPr sz="1300" b="1">
-                <a:solidFill>
-                  <a:srgbClr val="818CF8"/>
-                </a:solidFill>
-                <a:latin typeface="Arial"/>
-              </a:defRPr>
-            </a:pPr>
-            <a:r>
-              <a:t>1. Connect &amp; Deploy</a:t>
-            </a:r>
-          </a:p>
-        </p:txBody>
-      </p:sp>
-      <p:sp>
-        <p:nvSpPr>
-          <p:cNvPr id="8" name="TextBox 7"/>
-          <p:cNvSpPr txBox="1"/>
-          <p:nvPr/>
-        </p:nvSpPr>
-        <p:spPr>
-          <a:xfrm>
-            <a:off x="960120" y="2121408"/>
-            <a:ext cx="2834640" cy="4069080"/>
-          </a:xfrm>
-          <a:prstGeom prst="rect">
-            <a:avLst/>
-          </a:prstGeom>
-          <a:noFill/>
-        </p:spPr>
-        <p:txBody>
-          <a:bodyPr wrap="square">
-            <a:spAutoFit/>
-          </a:bodyPr>
-          <a:lstStyle/>
-          <a:p>
-            <a:pPr>
-              <a:spcAft>
-                <a:spcPts val="600"/>
-              </a:spcAft>
-              <a:defRPr sz="1000">
-                <a:solidFill>
-                  <a:srgbClr val="94A3B8"/>
-                </a:solidFill>
-                <a:latin typeface="Arial"/>
-              </a:defRPr>
-            </a:pPr>
-            <a:r>
-              <a:t>• Click 'Connect 1AM' — auto-detects wallet in 300ms.</a:t>
-            </a:r>
-          </a:p>
-          <a:p>
-            <a:pPr>
-              <a:spcAft>
-                <a:spcPts val="600"/>
-              </a:spcAft>
-              <a:defRPr sz="1000">
-                <a:solidFill>
-                  <a:srgbClr val="94A3B8"/>
-                </a:solidFill>
-                <a:latin typeface="Arial"/>
-              </a:defRPr>
-            </a:pPr>
-            <a:r>
-              <a:t>• View live Proof Server status (green 6300 indicator).</a:t>
-            </a:r>
-          </a:p>
-          <a:p>
-            <a:pPr>
-              <a:spcAft>
-                <a:spcPts val="600"/>
-              </a:spcAft>
-              <a:defRPr sz="1000">
-                <a:solidFill>
-                  <a:srgbClr val="94A3B8"/>
-                </a:solidFill>
-                <a:latin typeface="Arial"/>
-              </a:defRPr>
-            </a:pPr>
-            <a:r>
-              <a:t>• Click 'Deploy New Vault' — generates secret key and publishes contract to Preprod in ~8 seconds.</a:t>
-            </a:r>
-          </a:p>
-          <a:p>
-            <a:pPr>
-              <a:spcAft>
-                <a:spcPts val="600"/>
-              </a:spcAft>
-              <a:defRPr sz="1000">
-                <a:solidFill>
-                  <a:srgbClr val="94A3B8"/>
-                </a:solidFill>
-                <a:latin typeface="Arial"/>
-              </a:defRPr>
-            </a:pPr>
-            <a:r>
-              <a:t>• Auto-saves active contract address in workspace session.</a:t>
-            </a:r>
-          </a:p>
-        </p:txBody>
-      </p:sp>
-      <p:sp>
-        <p:nvSpPr>
-          <p:cNvPr id="9" name="Rounded Rectangle 8"/>
-          <p:cNvSpPr/>
-          <p:nvPr/>
-        </p:nvSpPr>
-        <p:spPr>
-          <a:xfrm>
-            <a:off x="4434840" y="1554480"/>
-            <a:ext cx="3291840" cy="4754880"/>
-          </a:xfrm>
-          <a:prstGeom prst="roundRect">
-            <a:avLst/>
-          </a:prstGeom>
-          <a:solidFill>
-            <a:srgbClr val="0E1117"/>
-          </a:solidFill>
-          <a:ln w="12700">
-            <a:solidFill>
-              <a:srgbClr val="232A38"/>
-            </a:solidFill>
-          </a:ln>
-        </p:spPr>
-        <p:style>
-          <a:lnRef idx="1">
-            <a:schemeClr val="accent1"/>
-          </a:lnRef>
-          <a:fillRef idx="3">
-            <a:schemeClr val="accent1"/>
-          </a:fillRef>
-          <a:effectRef idx="2">
-            <a:schemeClr val="accent1"/>
-          </a:effectRef>
-          <a:fontRef idx="minor">
-            <a:schemeClr val="lt1"/>
-          </a:fontRef>
-        </p:style>
-        <p:txBody>
-          <a:bodyPr rtlCol="0" anchor="ctr"/>
-          <a:lstStyle/>
-          <a:p>
-            <a:pPr algn="ctr"/>
-          </a:p>
-        </p:txBody>
-      </p:sp>
-      <p:sp>
-        <p:nvSpPr>
-          <p:cNvPr id="10" name="TextBox 9"/>
-          <p:cNvSpPr txBox="1"/>
-          <p:nvPr/>
-        </p:nvSpPr>
-        <p:spPr>
-          <a:xfrm>
-            <a:off x="4663440" y="1719072"/>
-            <a:ext cx="2834640" cy="365760"/>
-          </a:xfrm>
-          <a:prstGeom prst="rect">
-            <a:avLst/>
-          </a:prstGeom>
-          <a:noFill/>
-        </p:spPr>
-        <p:txBody>
-          <a:bodyPr wrap="square">
-            <a:spAutoFit/>
-          </a:bodyPr>
-          <a:lstStyle/>
-          <a:p>
-            <a:pPr>
-              <a:defRPr sz="1300" b="1">
-                <a:solidFill>
-                  <a:srgbClr val="F59E0B"/>
-                </a:solidFill>
-                <a:latin typeface="Arial"/>
-              </a:defRPr>
-            </a:pPr>
-            <a:r>
-              <a:t>2. Fund the Vault</a:t>
-            </a:r>
-          </a:p>
-        </p:txBody>
-      </p:sp>
-      <p:sp>
-        <p:nvSpPr>
-          <p:cNvPr id="11" name="TextBox 10"/>
-          <p:cNvSpPr txBox="1"/>
-          <p:nvPr/>
-        </p:nvSpPr>
-        <p:spPr>
-          <a:xfrm>
-            <a:off x="4663440" y="2121408"/>
-            <a:ext cx="2834640" cy="4069080"/>
-          </a:xfrm>
-          <a:prstGeom prst="rect">
-            <a:avLst/>
-          </a:prstGeom>
-          <a:noFill/>
-        </p:spPr>
-        <p:txBody>
-          <a:bodyPr wrap="square">
-            <a:spAutoFit/>
-          </a:bodyPr>
-          <a:lstStyle/>
-          <a:p>
-            <a:pPr>
-              <a:spcAft>
-                <a:spcPts val="600"/>
-              </a:spcAft>
-              <a:defRPr sz="1000">
-                <a:solidFill>
-                  <a:srgbClr val="94A3B8"/>
-                </a:solidFill>
-                <a:latin typeface="Arial"/>
-              </a:defRPr>
-            </a:pPr>
-            <a:r>
-              <a:t>• Select token preset: 10, 50, 100, or custom tNIGHT.</a:t>
-            </a:r>
-          </a:p>
-          <a:p>
-            <a:pPr>
-              <a:spcAft>
-                <a:spcPts val="600"/>
-              </a:spcAft>
-              <a:defRPr sz="1000">
-                <a:solidFill>
-                  <a:srgbClr val="94A3B8"/>
-                </a:solidFill>
-                <a:latin typeface="Arial"/>
-              </a:defRPr>
-            </a:pPr>
-            <a:r>
-              <a:t>• Review transparent fee preview: 0.00 NIGHT (Sponsored).</a:t>
-            </a:r>
-          </a:p>
-          <a:p>
-            <a:pPr>
-              <a:spcAft>
-                <a:spcPts val="600"/>
-              </a:spcAft>
-              <a:defRPr sz="1000">
-                <a:solidFill>
-                  <a:srgbClr val="94A3B8"/>
-                </a:solidFill>
-                <a:latin typeface="Arial"/>
-              </a:defRPr>
-            </a:pPr>
-            <a:r>
-              <a:t>• Click 'Deposit NIGHT' — modal visually tracks Assembly ➔ Proving ➔ Balancing ➔ Finalization.</a:t>
-            </a:r>
-          </a:p>
-          <a:p>
-            <a:pPr>
-              <a:spcAft>
-                <a:spcPts val="600"/>
-              </a:spcAft>
-              <a:defRPr sz="1000">
-                <a:solidFill>
-                  <a:srgbClr val="94A3B8"/>
-                </a:solidFill>
-                <a:latin typeface="Arial"/>
-              </a:defRPr>
-            </a:pPr>
-            <a:r>
-              <a:t>• Vault balance updates in real time.</a:t>
-            </a:r>
-          </a:p>
-        </p:txBody>
-      </p:sp>
-      <p:sp>
-        <p:nvSpPr>
-          <p:cNvPr id="12" name="Rounded Rectangle 11"/>
-          <p:cNvSpPr/>
-          <p:nvPr/>
-        </p:nvSpPr>
-        <p:spPr>
-          <a:xfrm>
-            <a:off x="8138160" y="1554480"/>
-            <a:ext cx="3291840" cy="4754880"/>
-          </a:xfrm>
-          <a:prstGeom prst="roundRect">
-            <a:avLst/>
-          </a:prstGeom>
-          <a:solidFill>
-            <a:srgbClr val="0E1117"/>
-          </a:solidFill>
-          <a:ln w="12700">
-            <a:solidFill>
-              <a:srgbClr val="232A38"/>
-            </a:solidFill>
-          </a:ln>
-        </p:spPr>
-        <p:style>
-          <a:lnRef idx="1">
-            <a:schemeClr val="accent1"/>
-          </a:lnRef>
-          <a:fillRef idx="3">
-            <a:schemeClr val="accent1"/>
-          </a:fillRef>
-          <a:effectRef idx="2">
-            <a:schemeClr val="accent1"/>
-          </a:effectRef>
-          <a:fontRef idx="minor">
-            <a:schemeClr val="lt1"/>
-          </a:fontRef>
-        </p:style>
-        <p:txBody>
-          <a:bodyPr rtlCol="0" anchor="ctr"/>
-          <a:lstStyle/>
-          <a:p>
-            <a:pPr algn="ctr"/>
-          </a:p>
-        </p:txBody>
-      </p:sp>
-      <p:sp>
-        <p:nvSpPr>
-          <p:cNvPr id="13" name="TextBox 12"/>
-          <p:cNvSpPr txBox="1"/>
-          <p:nvPr/>
-        </p:nvSpPr>
-        <p:spPr>
-          <a:xfrm>
-            <a:off x="8366760" y="1719072"/>
-            <a:ext cx="2834640" cy="365760"/>
-          </a:xfrm>
-          <a:prstGeom prst="rect">
-            <a:avLst/>
-          </a:prstGeom>
-          <a:noFill/>
-        </p:spPr>
-        <p:txBody>
-          <a:bodyPr wrap="square">
-            <a:spAutoFit/>
-          </a:bodyPr>
-          <a:lstStyle/>
-          <a:p>
-            <a:pPr>
-              <a:defRPr sz="1300" b="1">
-                <a:solidFill>
-                  <a:srgbClr val="00F5A0"/>
-                </a:solidFill>
-                <a:latin typeface="Arial"/>
-              </a:defRPr>
-            </a:pPr>
-            <a:r>
-              <a:t>3. ZK Private Payout</a:t>
-            </a:r>
-          </a:p>
-        </p:txBody>
-      </p:sp>
-      <p:sp>
-        <p:nvSpPr>
-          <p:cNvPr id="14" name="TextBox 13"/>
-          <p:cNvSpPr txBox="1"/>
-          <p:nvPr/>
-        </p:nvSpPr>
-        <p:spPr>
-          <a:xfrm>
-            <a:off x="8366760" y="2121408"/>
-            <a:ext cx="2834640" cy="4069080"/>
-          </a:xfrm>
-          <a:prstGeom prst="rect">
-            <a:avLst/>
-          </a:prstGeom>
-          <a:noFill/>
-        </p:spPr>
-        <p:txBody>
-          <a:bodyPr wrap="square">
-            <a:spAutoFit/>
-          </a:bodyPr>
-          <a:lstStyle/>
-          <a:p>
-            <a:pPr>
-              <a:spcAft>
-                <a:spcPts val="600"/>
-              </a:spcAft>
-              <a:defRPr sz="1000">
-                <a:solidFill>
-                  <a:srgbClr val="94A3B8"/>
-                </a:solidFill>
-                <a:latin typeface="Arial"/>
-              </a:defRPr>
-            </a:pPr>
-            <a:r>
-              <a:t>• Specify recipient address (or choose 'Self Address').</a:t>
-            </a:r>
-          </a:p>
-          <a:p>
-            <a:pPr>
-              <a:spcAft>
-                <a:spcPts val="600"/>
-              </a:spcAft>
-              <a:defRPr sz="1000">
-                <a:solidFill>
-                  <a:srgbClr val="94A3B8"/>
-                </a:solidFill>
-                <a:latin typeface="Arial"/>
-              </a:defRPr>
-            </a:pPr>
-            <a:r>
-              <a:t>• Input withdrawal amount.</a:t>
-            </a:r>
-          </a:p>
-          <a:p>
-            <a:pPr>
-              <a:spcAft>
-                <a:spcPts val="600"/>
-              </a:spcAft>
-              <a:defRPr sz="1000">
-                <a:solidFill>
-                  <a:srgbClr val="94A3B8"/>
-                </a:solidFill>
-                <a:latin typeface="Arial"/>
-              </a:defRPr>
-            </a:pPr>
-            <a:r>
-              <a:t>• Click 'Execute Private Payout' — Proof Server proves owner witness in ZK.</a:t>
-            </a:r>
-          </a:p>
-          <a:p>
-            <a:pPr>
-              <a:spcAft>
-                <a:spcPts val="600"/>
-              </a:spcAft>
-              <a:defRPr sz="1000">
-                <a:solidFill>
-                  <a:srgbClr val="94A3B8"/>
-                </a:solidFill>
-                <a:latin typeface="Arial"/>
-              </a:defRPr>
-            </a:pPr>
-            <a:r>
-              <a:t>• Tokens transfer instantly to recipient; audit trail logs record.</a:t>
-            </a:r>
-          </a:p>
-        </p:txBody>
-      </p:sp>
-    </p:spTree>
-  </p:cSld>
-  <p:clrMapOvr>
-    <a:masterClrMapping/>
-  </p:clrMapOvr>
-</p:sld>
-</file>
-
-<file path=ppt/slides/slide9.xml><?xml version="1.0" encoding="utf-8"?>
-<p:sld xmlns:a="http://schemas.openxmlformats.org/drawingml/2006/main" xmlns:p="http://schemas.openxmlformats.org/presentationml/2006/main" xmlns:r="http://schemas.openxmlformats.org/officeDocument/2006/relationships">
-  <p:cSld>
-    <p:spTree>
-      <p:nvGrpSpPr>
-        <p:cNvPr id="1" name=""/>
-        <p:cNvGrpSpPr/>
-        <p:nvPr/>
-      </p:nvGrpSpPr>
-      <p:grpSpPr/>
-      <p:sp>
-        <p:nvSpPr>
-          <p:cNvPr id="2" name="Rectangle 1"/>
-          <p:cNvSpPr/>
-          <p:nvPr/>
-        </p:nvSpPr>
-        <p:spPr>
-          <a:xfrm>
-            <a:off x="0" y="0"/>
-            <a:ext cx="12191695" cy="6858000"/>
-          </a:xfrm>
-          <a:prstGeom prst="rect">
-            <a:avLst/>
-          </a:prstGeom>
-          <a:solidFill>
-            <a:srgbClr val="08090D"/>
-          </a:solidFill>
-          <a:ln>
-            <a:noFill/>
-          </a:ln>
-        </p:spPr>
-        <p:style>
-          <a:lnRef idx="1">
-            <a:schemeClr val="accent1"/>
-          </a:lnRef>
-          <a:fillRef idx="3">
-            <a:schemeClr val="accent1"/>
-          </a:fillRef>
-          <a:effectRef idx="2">
-            <a:schemeClr val="accent1"/>
-          </a:effectRef>
-          <a:fontRef idx="minor">
-            <a:schemeClr val="lt1"/>
-          </a:fontRef>
-        </p:style>
-        <p:txBody>
-          <a:bodyPr rtlCol="0" anchor="ctr"/>
-          <a:lstStyle/>
-          <a:p>
-            <a:pPr algn="ctr"/>
-          </a:p>
-        </p:txBody>
-      </p:sp>
-      <p:sp>
-        <p:nvSpPr>
-          <p:cNvPr id="3" name="TextBox 2"/>
-          <p:cNvSpPr txBox="1"/>
-          <p:nvPr/>
-        </p:nvSpPr>
-        <p:spPr>
-          <a:xfrm>
-            <a:off x="731520" y="365760"/>
-            <a:ext cx="10698480" cy="320040"/>
-          </a:xfrm>
-          <a:prstGeom prst="rect">
-            <a:avLst/>
-          </a:prstGeom>
-          <a:noFill/>
-        </p:spPr>
-        <p:txBody>
-          <a:bodyPr wrap="square">
-            <a:spAutoFit/>
-          </a:bodyPr>
-          <a:lstStyle/>
-          <a:p>
-            <a:pPr>
-              <a:defRPr sz="950" b="1">
-                <a:solidFill>
-                  <a:srgbClr val="00F5A0"/>
-                </a:solidFill>
-                <a:latin typeface="Arial"/>
-              </a:defRPr>
-            </a:pPr>
-            <a:r>
-              <a:t>KNIGHT.VAULT // ZERO-KNOWLEDGE PROTOCOL DECK</a:t>
-            </a:r>
-          </a:p>
-        </p:txBody>
-      </p:sp>
-      <p:sp>
-        <p:nvSpPr>
-          <p:cNvPr id="4" name="TextBox 3"/>
-          <p:cNvSpPr txBox="1"/>
-          <p:nvPr/>
-        </p:nvSpPr>
-        <p:spPr>
-          <a:xfrm>
-            <a:off x="731520" y="658368"/>
-            <a:ext cx="10698480" cy="640080"/>
-          </a:xfrm>
-          <a:prstGeom prst="rect">
-            <a:avLst/>
-          </a:prstGeom>
-          <a:noFill/>
-        </p:spPr>
-        <p:txBody>
-          <a:bodyPr wrap="square">
-            <a:spAutoFit/>
-          </a:bodyPr>
-          <a:lstStyle/>
-          <a:p>
-            <a:pPr>
-              <a:defRPr sz="2000" b="1">
-                <a:solidFill>
-                  <a:srgbClr val="FFFFFF"/>
-                </a:solidFill>
-                <a:latin typeface="Arial"/>
-              </a:defRPr>
-            </a:pPr>
-            <a:r>
-              <a:t>Market Applications: Beyond Simple Payments</a:t>
-            </a:r>
-          </a:p>
-        </p:txBody>
-      </p:sp>
-      <p:sp>
-        <p:nvSpPr>
-          <p:cNvPr id="5" name="Rectangle 4"/>
-          <p:cNvSpPr/>
-          <p:nvPr/>
-        </p:nvSpPr>
-        <p:spPr>
-          <a:xfrm>
-            <a:off x="731520" y="1353312"/>
-            <a:ext cx="10728655" cy="18288"/>
-          </a:xfrm>
-          <a:prstGeom prst="rect">
-            <a:avLst/>
-          </a:prstGeom>
-          <a:solidFill>
-            <a:srgbClr val="232A38"/>
-          </a:solidFill>
-          <a:ln>
-            <a:noFill/>
-          </a:ln>
-        </p:spPr>
-        <p:style>
-          <a:lnRef idx="1">
-            <a:schemeClr val="accent1"/>
-          </a:lnRef>
-          <a:fillRef idx="3">
-            <a:schemeClr val="accent1"/>
-          </a:fillRef>
-          <a:effectRef idx="2">
-            <a:schemeClr val="accent1"/>
-          </a:effectRef>
-          <a:fontRef idx="minor">
-            <a:schemeClr val="lt1"/>
-          </a:fontRef>
-        </p:style>
-        <p:txBody>
-          <a:bodyPr rtlCol="0" anchor="ctr"/>
-          <a:lstStyle/>
-          <a:p>
-            <a:pPr algn="ctr"/>
-          </a:p>
-        </p:txBody>
-      </p:sp>
-      <p:sp>
-        <p:nvSpPr>
-          <p:cNvPr id="6" name="Rounded Rectangle 5"/>
-          <p:cNvSpPr/>
-          <p:nvPr/>
-        </p:nvSpPr>
-        <p:spPr>
-          <a:xfrm>
-            <a:off x="731520" y="1554480"/>
-            <a:ext cx="5120640" cy="2286000"/>
-          </a:xfrm>
-          <a:prstGeom prst="roundRect">
-            <a:avLst/>
-          </a:prstGeom>
-          <a:solidFill>
-            <a:srgbClr val="0E1117"/>
-          </a:solidFill>
-          <a:ln w="12700">
-            <a:solidFill>
-              <a:srgbClr val="232A38"/>
-            </a:solidFill>
-          </a:ln>
-        </p:spPr>
-        <p:style>
-          <a:lnRef idx="1">
-            <a:schemeClr val="accent1"/>
-          </a:lnRef>
-          <a:fillRef idx="3">
-            <a:schemeClr val="accent1"/>
-          </a:fillRef>
-          <a:effectRef idx="2">
-            <a:schemeClr val="accent1"/>
-          </a:effectRef>
-          <a:fontRef idx="minor">
-            <a:schemeClr val="lt1"/>
-          </a:fontRef>
-        </p:style>
-        <p:txBody>
-          <a:bodyPr rtlCol="0" anchor="ctr"/>
-          <a:lstStyle/>
-          <a:p>
-            <a:pPr algn="ctr"/>
-          </a:p>
-        </p:txBody>
-      </p:sp>
-      <p:sp>
-        <p:nvSpPr>
-          <p:cNvPr id="7" name="TextBox 6"/>
-          <p:cNvSpPr txBox="1"/>
-          <p:nvPr/>
-        </p:nvSpPr>
-        <p:spPr>
-          <a:xfrm>
-            <a:off x="960120" y="1719072"/>
-            <a:ext cx="4663440" cy="365760"/>
-          </a:xfrm>
-          <a:prstGeom prst="rect">
-            <a:avLst/>
-          </a:prstGeom>
-          <a:noFill/>
-        </p:spPr>
-        <p:txBody>
-          <a:bodyPr wrap="square">
-            <a:spAutoFit/>
-          </a:bodyPr>
-          <a:lstStyle/>
-          <a:p>
-            <a:pPr>
-              <a:defRPr sz="1300" b="1">
-                <a:solidFill>
-                  <a:srgbClr val="818CF8"/>
-                </a:solidFill>
-                <a:latin typeface="Arial"/>
-              </a:defRPr>
-            </a:pPr>
-            <a:r>
-              <a:t>🏢 Confidential Corporate Payroll</a:t>
-            </a:r>
-          </a:p>
-        </p:txBody>
-      </p:sp>
-      <p:sp>
-        <p:nvSpPr>
-          <p:cNvPr id="8" name="TextBox 7"/>
-          <p:cNvSpPr txBox="1"/>
-          <p:nvPr/>
-        </p:nvSpPr>
-        <p:spPr>
-          <a:xfrm>
-            <a:off x="960120" y="2121408"/>
-            <a:ext cx="4663440" cy="1600200"/>
-          </a:xfrm>
-          <a:prstGeom prst="rect">
-            <a:avLst/>
-          </a:prstGeom>
-          <a:noFill/>
-        </p:spPr>
-        <p:txBody>
-          <a:bodyPr wrap="square">
-            <a:spAutoFit/>
-          </a:bodyPr>
-          <a:lstStyle/>
-          <a:p>
-            <a:pPr>
-              <a:spcAft>
-                <a:spcPts val="600"/>
-              </a:spcAft>
-              <a:defRPr sz="1000">
-                <a:solidFill>
-                  <a:srgbClr val="94A3B8"/>
-                </a:solidFill>
-                <a:latin typeface="Arial"/>
-              </a:defRPr>
-            </a:pPr>
-            <a:r>
-              <a:t>• Companies deposit aggregate payroll funds into a vault.</a:t>
-            </a:r>
-          </a:p>
-          <a:p>
-            <a:pPr>
-              <a:spcAft>
-                <a:spcPts val="600"/>
-              </a:spcAft>
-              <a:defRPr sz="1000">
-                <a:solidFill>
-                  <a:srgbClr val="94A3B8"/>
-                </a:solidFill>
-                <a:latin typeface="Arial"/>
-              </a:defRPr>
-            </a:pPr>
-            <a:r>
-              <a:t>• Employees claim salaries with ZK identity proofs.</a:t>
-            </a:r>
-          </a:p>
-          <a:p>
-            <a:pPr>
-              <a:spcAft>
-                <a:spcPts val="600"/>
-              </a:spcAft>
-              <a:defRPr sz="1000">
-                <a:solidFill>
-                  <a:srgbClr val="94A3B8"/>
-                </a:solidFill>
-                <a:latin typeface="Arial"/>
-              </a:defRPr>
-            </a:pPr>
-            <a:r>
-              <a:t>• No competitor can see employee salary amounts or team size.</a:t>
-            </a:r>
-          </a:p>
-        </p:txBody>
-      </p:sp>
-      <p:sp>
-        <p:nvSpPr>
-          <p:cNvPr id="9" name="Rounded Rectangle 8"/>
-          <p:cNvSpPr/>
-          <p:nvPr/>
-        </p:nvSpPr>
-        <p:spPr>
-          <a:xfrm>
-            <a:off x="6309360" y="1554480"/>
-            <a:ext cx="5120640" cy="2286000"/>
-          </a:xfrm>
-          <a:prstGeom prst="roundRect">
-            <a:avLst/>
-          </a:prstGeom>
-          <a:solidFill>
-            <a:srgbClr val="0E1117"/>
-          </a:solidFill>
-          <a:ln w="12700">
-            <a:solidFill>
-              <a:srgbClr val="232A38"/>
-            </a:solidFill>
-          </a:ln>
-        </p:spPr>
-        <p:style>
-          <a:lnRef idx="1">
-            <a:schemeClr val="accent1"/>
-          </a:lnRef>
-          <a:fillRef idx="3">
-            <a:schemeClr val="accent1"/>
-          </a:fillRef>
-          <a:effectRef idx="2">
-            <a:schemeClr val="accent1"/>
-          </a:effectRef>
-          <a:fontRef idx="minor">
-            <a:schemeClr val="lt1"/>
-          </a:fontRef>
-        </p:style>
-        <p:txBody>
-          <a:bodyPr rtlCol="0" anchor="ctr"/>
-          <a:lstStyle/>
-          <a:p>
-            <a:pPr algn="ctr"/>
-          </a:p>
-        </p:txBody>
-      </p:sp>
-      <p:sp>
-        <p:nvSpPr>
-          <p:cNvPr id="10" name="TextBox 9"/>
-          <p:cNvSpPr txBox="1"/>
-          <p:nvPr/>
-        </p:nvSpPr>
-        <p:spPr>
-          <a:xfrm>
-            <a:off x="6537960" y="1719072"/>
-            <a:ext cx="4663440" cy="365760"/>
-          </a:xfrm>
-          <a:prstGeom prst="rect">
-            <a:avLst/>
-          </a:prstGeom>
-          <a:noFill/>
-        </p:spPr>
-        <p:txBody>
-          <a:bodyPr wrap="square">
-            <a:spAutoFit/>
-          </a:bodyPr>
-          <a:lstStyle/>
-          <a:p>
-            <a:pPr>
-              <a:defRPr sz="1300" b="1">
-                <a:solidFill>
-                  <a:srgbClr val="F59E0B"/>
-                </a:solidFill>
-                <a:latin typeface="Arial"/>
-              </a:defRPr>
-            </a:pPr>
-            <a:r>
-              <a:t>💼 Private Supply Chain Escrow</a:t>
-            </a:r>
-          </a:p>
-        </p:txBody>
-      </p:sp>
-      <p:sp>
-        <p:nvSpPr>
-          <p:cNvPr id="11" name="TextBox 10"/>
-          <p:cNvSpPr txBox="1"/>
-          <p:nvPr/>
-        </p:nvSpPr>
-        <p:spPr>
-          <a:xfrm>
-            <a:off x="6537960" y="2121408"/>
-            <a:ext cx="4663440" cy="1600200"/>
-          </a:xfrm>
-          <a:prstGeom prst="rect">
-            <a:avLst/>
-          </a:prstGeom>
-          <a:noFill/>
-        </p:spPr>
-        <p:txBody>
-          <a:bodyPr wrap="square">
-            <a:spAutoFit/>
-          </a:bodyPr>
-          <a:lstStyle/>
-          <a:p>
-            <a:pPr>
-              <a:spcAft>
-                <a:spcPts val="600"/>
-              </a:spcAft>
-              <a:defRPr sz="1000">
-                <a:solidFill>
-                  <a:srgbClr val="94A3B8"/>
-                </a:solidFill>
-                <a:latin typeface="Arial"/>
-              </a:defRPr>
-            </a:pPr>
-            <a:r>
-              <a:t>• Buyers lock supplier purchase payments in smart vaults.</a:t>
-            </a:r>
-          </a:p>
-          <a:p>
-            <a:pPr>
-              <a:spcAft>
-                <a:spcPts val="600"/>
-              </a:spcAft>
-              <a:defRPr sz="1000">
-                <a:solidFill>
-                  <a:srgbClr val="94A3B8"/>
-                </a:solidFill>
-                <a:latin typeface="Arial"/>
-              </a:defRPr>
-            </a:pPr>
-            <a:r>
-              <a:t>• Funds release automatically upon off-chain Oracle milestone attestations.</a:t>
-            </a:r>
-          </a:p>
-          <a:p>
-            <a:pPr>
-              <a:spcAft>
-                <a:spcPts val="600"/>
-              </a:spcAft>
-              <a:defRPr sz="1000">
-                <a:solidFill>
-                  <a:srgbClr val="94A3B8"/>
-                </a:solidFill>
-                <a:latin typeface="Arial"/>
-              </a:defRPr>
-            </a:pPr>
-            <a:r>
-              <a:t>• Protects pricing terms and trade volume confidentiality.</a:t>
-            </a:r>
-          </a:p>
-        </p:txBody>
-      </p:sp>
-      <p:sp>
-        <p:nvSpPr>
-          <p:cNvPr id="12" name="Rounded Rectangle 11"/>
-          <p:cNvSpPr/>
-          <p:nvPr/>
-        </p:nvSpPr>
-        <p:spPr>
-          <a:xfrm>
-            <a:off x="731520" y="4023360"/>
-            <a:ext cx="5120640" cy="2286000"/>
-          </a:xfrm>
-          <a:prstGeom prst="roundRect">
-            <a:avLst/>
-          </a:prstGeom>
-          <a:solidFill>
-            <a:srgbClr val="0E1117"/>
-          </a:solidFill>
-          <a:ln w="12700">
-            <a:solidFill>
-              <a:srgbClr val="232A38"/>
-            </a:solidFill>
-          </a:ln>
-        </p:spPr>
-        <p:style>
-          <a:lnRef idx="1">
-            <a:schemeClr val="accent1"/>
-          </a:lnRef>
-          <a:fillRef idx="3">
-            <a:schemeClr val="accent1"/>
-          </a:fillRef>
-          <a:effectRef idx="2">
-            <a:schemeClr val="accent1"/>
-          </a:effectRef>
-          <a:fontRef idx="minor">
-            <a:schemeClr val="lt1"/>
-          </a:fontRef>
-        </p:style>
-        <p:txBody>
-          <a:bodyPr rtlCol="0" anchor="ctr"/>
-          <a:lstStyle/>
-          <a:p>
-            <a:pPr algn="ctr"/>
-          </a:p>
-        </p:txBody>
-      </p:sp>
-      <p:sp>
-        <p:nvSpPr>
-          <p:cNvPr id="13" name="TextBox 12"/>
-          <p:cNvSpPr txBox="1"/>
-          <p:nvPr/>
-        </p:nvSpPr>
-        <p:spPr>
-          <a:xfrm>
-            <a:off x="960120" y="4187952"/>
-            <a:ext cx="4663440" cy="365760"/>
-          </a:xfrm>
-          <a:prstGeom prst="rect">
-            <a:avLst/>
-          </a:prstGeom>
-          <a:noFill/>
-        </p:spPr>
-        <p:txBody>
-          <a:bodyPr wrap="square">
-            <a:spAutoFit/>
-          </a:bodyPr>
-          <a:lstStyle/>
-          <a:p>
-            <a:pPr>
-              <a:defRPr sz="1300" b="1">
-                <a:solidFill>
-                  <a:srgbClr val="00F5A0"/>
-                </a:solidFill>
-                <a:latin typeface="Arial"/>
-              </a:defRPr>
-            </a:pPr>
-            <a:r>
-              <a:t>🗳️ Private DAO Governance &amp; Grants</a:t>
-            </a:r>
-          </a:p>
-        </p:txBody>
-      </p:sp>
-      <p:sp>
-        <p:nvSpPr>
-          <p:cNvPr id="14" name="TextBox 13"/>
-          <p:cNvSpPr txBox="1"/>
-          <p:nvPr/>
-        </p:nvSpPr>
-        <p:spPr>
-          <a:xfrm>
-            <a:off x="960120" y="4590288"/>
-            <a:ext cx="4663440" cy="1600200"/>
-          </a:xfrm>
-          <a:prstGeom prst="rect">
-            <a:avLst/>
-          </a:prstGeom>
-          <a:noFill/>
-        </p:spPr>
-        <p:txBody>
-          <a:bodyPr wrap="square">
-            <a:spAutoFit/>
-          </a:bodyPr>
-          <a:lstStyle/>
-          <a:p>
-            <a:pPr>
-              <a:spcAft>
-                <a:spcPts val="600"/>
-              </a:spcAft>
-              <a:defRPr sz="1000">
-                <a:solidFill>
-                  <a:srgbClr val="94A3B8"/>
-                </a:solidFill>
-                <a:latin typeface="Arial"/>
-              </a:defRPr>
-            </a:pPr>
-            <a:r>
-              <a:t>• Disburse grant funding to open-source contributors anonymously.</a:t>
-            </a:r>
-          </a:p>
-          <a:p>
-            <a:pPr>
-              <a:spcAft>
-                <a:spcPts val="600"/>
-              </a:spcAft>
-              <a:defRPr sz="1000">
-                <a:solidFill>
-                  <a:srgbClr val="94A3B8"/>
-                </a:solidFill>
-                <a:latin typeface="Arial"/>
-              </a:defRPr>
-            </a:pPr>
-            <a:r>
-              <a:t>• Prevents targeted harassment or bribery of grant recipients.</a:t>
-            </a:r>
-          </a:p>
-          <a:p>
-            <a:pPr>
-              <a:spcAft>
-                <a:spcPts val="600"/>
-              </a:spcAft>
-              <a:defRPr sz="1000">
-                <a:solidFill>
-                  <a:srgbClr val="94A3B8"/>
-                </a:solidFill>
-                <a:latin typeface="Arial"/>
-              </a:defRPr>
-            </a:pPr>
-            <a:r>
-              <a:t>• Public verifiable treasury balance with private payouts.</a:t>
-            </a:r>
-          </a:p>
-        </p:txBody>
-      </p:sp>
-      <p:sp>
-        <p:nvSpPr>
-          <p:cNvPr id="15" name="Rounded Rectangle 14"/>
-          <p:cNvSpPr/>
-          <p:nvPr/>
-        </p:nvSpPr>
-        <p:spPr>
-          <a:xfrm>
-            <a:off x="6309360" y="4023360"/>
-            <a:ext cx="5120640" cy="2286000"/>
-          </a:xfrm>
-          <a:prstGeom prst="roundRect">
-            <a:avLst/>
-          </a:prstGeom>
-          <a:solidFill>
-            <a:srgbClr val="0E1117"/>
-          </a:solidFill>
-          <a:ln w="12700">
-            <a:solidFill>
-              <a:srgbClr val="232A38"/>
-            </a:solidFill>
-          </a:ln>
-        </p:spPr>
-        <p:style>
-          <a:lnRef idx="1">
-            <a:schemeClr val="accent1"/>
-          </a:lnRef>
-          <a:fillRef idx="3">
-            <a:schemeClr val="accent1"/>
-          </a:fillRef>
-          <a:effectRef idx="2">
-            <a:schemeClr val="accent1"/>
-          </a:effectRef>
-          <a:fontRef idx="minor">
-            <a:schemeClr val="lt1"/>
-          </a:fontRef>
-        </p:style>
-        <p:txBody>
-          <a:bodyPr rtlCol="0" anchor="ctr"/>
-          <a:lstStyle/>
-          <a:p>
-            <a:pPr algn="ctr"/>
-          </a:p>
-        </p:txBody>
-      </p:sp>
-      <p:sp>
-        <p:nvSpPr>
-          <p:cNvPr id="16" name="TextBox 15"/>
-          <p:cNvSpPr txBox="1"/>
-          <p:nvPr/>
-        </p:nvSpPr>
-        <p:spPr>
-          <a:xfrm>
-            <a:off x="6537960" y="4187952"/>
-            <a:ext cx="4663440" cy="365760"/>
-          </a:xfrm>
-          <a:prstGeom prst="rect">
-            <a:avLst/>
-          </a:prstGeom>
-          <a:noFill/>
-        </p:spPr>
-        <p:txBody>
-          <a:bodyPr wrap="square">
-            <a:spAutoFit/>
-          </a:bodyPr>
-          <a:lstStyle/>
-          <a:p>
-            <a:pPr>
-              <a:defRPr sz="1300" b="1">
-                <a:solidFill>
-                  <a:srgbClr val="06B6D4"/>
-                </a:solidFill>
-                <a:latin typeface="Arial"/>
-              </a:defRPr>
-            </a:pPr>
-            <a:r>
-              <a:t>⚖️ Regulated Institutional Settlement</a:t>
-            </a:r>
-          </a:p>
-        </p:txBody>
-      </p:sp>
-      <p:sp>
-        <p:nvSpPr>
-          <p:cNvPr id="17" name="TextBox 16"/>
-          <p:cNvSpPr txBox="1"/>
-          <p:nvPr/>
-        </p:nvSpPr>
-        <p:spPr>
-          <a:xfrm>
-            <a:off x="6537960" y="4590288"/>
-            <a:ext cx="4663440" cy="1600200"/>
-          </a:xfrm>
-          <a:prstGeom prst="rect">
-            <a:avLst/>
-          </a:prstGeom>
-          <a:noFill/>
-        </p:spPr>
-        <p:txBody>
-          <a:bodyPr wrap="square">
-            <a:spAutoFit/>
-          </a:bodyPr>
-          <a:lstStyle/>
-          <a:p>
-            <a:pPr>
-              <a:spcAft>
-                <a:spcPts val="600"/>
-              </a:spcAft>
-              <a:defRPr sz="1000">
-                <a:solidFill>
-                  <a:srgbClr val="94A3B8"/>
-                </a:solidFill>
-                <a:latin typeface="Arial"/>
-              </a:defRPr>
-            </a:pPr>
-            <a:r>
-              <a:t>• Selective disclosure allows generating auditor viewing keys on demand.</a:t>
-            </a:r>
-          </a:p>
-          <a:p>
-            <a:pPr>
-              <a:spcAft>
-                <a:spcPts val="600"/>
-              </a:spcAft>
-              <a:defRPr sz="1000">
-                <a:solidFill>
-                  <a:srgbClr val="94A3B8"/>
-                </a:solidFill>
-                <a:latin typeface="Arial"/>
-              </a:defRPr>
-            </a:pPr>
-            <a:r>
-              <a:t>• Satisfies SEC / MiCA compliance while shielding public surveillance.</a:t>
-            </a:r>
-          </a:p>
-          <a:p>
-            <a:pPr>
-              <a:spcAft>
-                <a:spcPts val="600"/>
-              </a:spcAft>
-              <a:defRPr sz="1000">
-                <a:solidFill>
-                  <a:srgbClr val="94A3B8"/>
-                </a:solidFill>
-                <a:latin typeface="Arial"/>
-              </a:defRPr>
-            </a:pPr>
-            <a:r>
-              <a:t>• The gold standard for enterprise DeFi.</a:t>
+              <a:t>Open Source Repository: https://github.com/KSHITIJadakane/KNIGHT.VAULT • Built for Midnight Network Hackathon</a:t>
             </a:r>
           </a:p>
         </p:txBody>

--- a/Midnight_Privacy_Payment_Vault_Presentation.pptx
+++ b/Midnight_Privacy_Payment_Vault_Presentation.pptx
@@ -3144,8 +3144,8 @@
         </p:nvSpPr>
         <p:spPr>
           <a:xfrm>
-            <a:off x="914400" y="1005840"/>
-            <a:ext cx="10332720" cy="320040"/>
+            <a:off x="731520" y="822960"/>
+            <a:ext cx="10728655" cy="320040"/>
           </a:xfrm>
           <a:prstGeom prst="rect">
             <a:avLst/>
@@ -3159,7 +3159,7 @@
           <a:lstStyle/>
           <a:p>
             <a:pPr>
-              <a:defRPr sz="1050" b="1">
+              <a:defRPr sz="1100" b="1">
                 <a:solidFill>
                   <a:srgbClr val="00F5A0"/>
                 </a:solidFill>
@@ -3180,8 +3180,8 @@
         </p:nvSpPr>
         <p:spPr>
           <a:xfrm>
-            <a:off x="914400" y="1325880"/>
-            <a:ext cx="10332720" cy="2011680"/>
+            <a:off x="731520" y="1188720"/>
+            <a:ext cx="10728655" cy="2011680"/>
           </a:xfrm>
           <a:prstGeom prst="rect">
             <a:avLst/>
@@ -3198,7 +3198,7 @@
               <a:spcAft>
                 <a:spcPts val="800"/>
               </a:spcAft>
-              <a:defRPr sz="4000" b="1">
+              <a:defRPr sz="4400" b="1">
                 <a:solidFill>
                   <a:srgbClr val="FFFFFF"/>
                 </a:solidFill>
@@ -3206,20 +3206,20 @@
               </a:defRPr>
             </a:pPr>
             <a:r>
-              <a:t>KNIGHT.VAULT (v0.20)</a:t>
-            </a:r>
-          </a:p>
-          <a:p>
-            <a:pPr>
-              <a:defRPr sz="1400">
-                <a:solidFill>
-                  <a:srgbClr val="94A3B8"/>
+              <a:t>KNIGHT.VAULT</a:t>
+            </a:r>
+          </a:p>
+          <a:p>
+            <a:pPr>
+              <a:defRPr sz="1500">
+                <a:solidFill>
+                  <a:srgbClr val="A0AEC0"/>
                 </a:solidFill>
                 <a:latin typeface="Arial"/>
               </a:defRPr>
             </a:pPr>
             <a:r>
-              <a:t>Institutional Zero-Knowledge Custody, Compact Smart Contracts, ProofStation 0-Gas Balancing, and Armored Privacy.</a:t>
+              <a:t>Institutional Zero-Knowledge Custody, Compact Smart Contracts, ProofStation 0-Gas Balancing, and Armored State Privacy.</a:t>
             </a:r>
           </a:p>
         </p:txBody>
@@ -3232,8 +3232,8 @@
         </p:nvSpPr>
         <p:spPr>
           <a:xfrm>
-            <a:off x="914400" y="3474720"/>
-            <a:ext cx="2450592" cy="1463040"/>
+            <a:off x="731520" y="3383280"/>
+            <a:ext cx="2542032" cy="1600200"/>
           </a:xfrm>
           <a:prstGeom prst="roundRect">
             <a:avLst/>
@@ -3277,8 +3277,8 @@
         </p:nvSpPr>
         <p:spPr>
           <a:xfrm>
-            <a:off x="1051560" y="3611880"/>
-            <a:ext cx="2176272" cy="1188720"/>
+            <a:off x="914400" y="3520440"/>
+            <a:ext cx="2176272" cy="1280160"/>
           </a:xfrm>
           <a:prstGeom prst="rect">
             <a:avLst/>
@@ -3295,9 +3295,9 @@
               <a:spcAft>
                 <a:spcPts val="400"/>
               </a:spcAft>
-              <a:defRPr sz="850" b="1">
-                <a:solidFill>
-                  <a:srgbClr val="64748B"/>
+              <a:defRPr sz="900" b="1">
+                <a:solidFill>
+                  <a:srgbClr val="6E7E96"/>
                 </a:solidFill>
                 <a:latin typeface="Arial"/>
               </a:defRPr>
@@ -3309,9 +3309,9 @@
           <a:p>
             <a:pPr>
               <a:spcAft>
-                <a:spcPts val="200"/>
+                <a:spcPts val="300"/>
               </a:spcAft>
-              <a:defRPr sz="1300" b="1">
+              <a:defRPr sz="1400" b="1">
                 <a:solidFill>
                   <a:srgbClr val="00F5A0"/>
                 </a:solidFill>
@@ -3324,15 +3324,15 @@
           </a:p>
           <a:p>
             <a:pPr>
-              <a:defRPr sz="900">
-                <a:solidFill>
-                  <a:srgbClr val="94A3B8"/>
+              <a:defRPr sz="1000">
+                <a:solidFill>
+                  <a:srgbClr val="A0AEC0"/>
                 </a:solidFill>
                 <a:latin typeface="Arial"/>
               </a:defRPr>
             </a:pPr>
             <a:r>
-              <a:t>Live Partnerchain v0.20</a:t>
+              <a:t>Live Partnerchain Network</a:t>
             </a:r>
           </a:p>
         </p:txBody>
@@ -3345,8 +3345,8 @@
         </p:nvSpPr>
         <p:spPr>
           <a:xfrm>
-            <a:off x="3566160" y="3474720"/>
-            <a:ext cx="2450592" cy="1463040"/>
+            <a:off x="3474720" y="3383280"/>
+            <a:ext cx="2542032" cy="1600200"/>
           </a:xfrm>
           <a:prstGeom prst="roundRect">
             <a:avLst/>
@@ -3390,8 +3390,8 @@
         </p:nvSpPr>
         <p:spPr>
           <a:xfrm>
-            <a:off x="3703320" y="3611880"/>
-            <a:ext cx="2176272" cy="1188720"/>
+            <a:off x="3657600" y="3520440"/>
+            <a:ext cx="2176272" cy="1280160"/>
           </a:xfrm>
           <a:prstGeom prst="rect">
             <a:avLst/>
@@ -3408,9 +3408,9 @@
               <a:spcAft>
                 <a:spcPts val="400"/>
               </a:spcAft>
-              <a:defRPr sz="850" b="1">
-                <a:solidFill>
-                  <a:srgbClr val="64748B"/>
+              <a:defRPr sz="900" b="1">
+                <a:solidFill>
+                  <a:srgbClr val="6E7E96"/>
                 </a:solidFill>
                 <a:latin typeface="Arial"/>
               </a:defRPr>
@@ -3422,9 +3422,9 @@
           <a:p>
             <a:pPr>
               <a:spcAft>
-                <a:spcPts val="200"/>
+                <a:spcPts val="300"/>
               </a:spcAft>
-              <a:defRPr sz="1300" b="1">
+              <a:defRPr sz="1400" b="1">
                 <a:solidFill>
                   <a:srgbClr val="818CF8"/>
                 </a:solidFill>
@@ -3432,14 +3432,14 @@
               </a:defRPr>
             </a:pPr>
             <a:r>
-              <a:t>Compact v0.20+</a:t>
-            </a:r>
-          </a:p>
-          <a:p>
-            <a:pPr>
-              <a:defRPr sz="900">
-                <a:solidFill>
-                  <a:srgbClr val="94A3B8"/>
+              <a:t>Compact Circuits</a:t>
+            </a:r>
+          </a:p>
+          <a:p>
+            <a:pPr>
+              <a:defRPr sz="1000">
+                <a:solidFill>
+                  <a:srgbClr val="A0AEC0"/>
                 </a:solidFill>
                 <a:latin typeface="Arial"/>
               </a:defRPr>
@@ -3458,8 +3458,8 @@
         </p:nvSpPr>
         <p:spPr>
           <a:xfrm>
-            <a:off x="6217920" y="3474720"/>
-            <a:ext cx="2450592" cy="1463040"/>
+            <a:off x="6217920" y="3383280"/>
+            <a:ext cx="2542032" cy="1600200"/>
           </a:xfrm>
           <a:prstGeom prst="roundRect">
             <a:avLst/>
@@ -3503,8 +3503,8 @@
         </p:nvSpPr>
         <p:spPr>
           <a:xfrm>
-            <a:off x="6355080" y="3611880"/>
-            <a:ext cx="2176272" cy="1188720"/>
+            <a:off x="6400800" y="3520440"/>
+            <a:ext cx="2176272" cy="1280160"/>
           </a:xfrm>
           <a:prstGeom prst="rect">
             <a:avLst/>
@@ -3521,9 +3521,9 @@
               <a:spcAft>
                 <a:spcPts val="400"/>
               </a:spcAft>
-              <a:defRPr sz="850" b="1">
-                <a:solidFill>
-                  <a:srgbClr val="64748B"/>
+              <a:defRPr sz="900" b="1">
+                <a:solidFill>
+                  <a:srgbClr val="6E7E96"/>
                 </a:solidFill>
                 <a:latin typeface="Arial"/>
               </a:defRPr>
@@ -3535,9 +3535,9 @@
           <a:p>
             <a:pPr>
               <a:spcAft>
-                <a:spcPts val="200"/>
+                <a:spcPts val="300"/>
               </a:spcAft>
-              <a:defRPr sz="1300" b="1">
+              <a:defRPr sz="1400" b="1">
                 <a:solidFill>
                   <a:srgbClr val="38BDF8"/>
                 </a:solidFill>
@@ -3550,9 +3550,9 @@
           </a:p>
           <a:p>
             <a:pPr>
-              <a:defRPr sz="900">
-                <a:solidFill>
-                  <a:srgbClr val="94A3B8"/>
+              <a:defRPr sz="1000">
+                <a:solidFill>
+                  <a:srgbClr val="A0AEC0"/>
                 </a:solidFill>
                 <a:latin typeface="Arial"/>
               </a:defRPr>
@@ -3571,8 +3571,8 @@
         </p:nvSpPr>
         <p:spPr>
           <a:xfrm>
-            <a:off x="8869680" y="3474720"/>
-            <a:ext cx="2450592" cy="1463040"/>
+            <a:off x="8961120" y="3383280"/>
+            <a:ext cx="2542032" cy="1600200"/>
           </a:xfrm>
           <a:prstGeom prst="roundRect">
             <a:avLst/>
@@ -3616,8 +3616,8 @@
         </p:nvSpPr>
         <p:spPr>
           <a:xfrm>
-            <a:off x="9006840" y="3611880"/>
-            <a:ext cx="2176272" cy="1188720"/>
+            <a:off x="9144000" y="3520440"/>
+            <a:ext cx="2176272" cy="1280160"/>
           </a:xfrm>
           <a:prstGeom prst="rect">
             <a:avLst/>
@@ -3634,9 +3634,9 @@
               <a:spcAft>
                 <a:spcPts val="400"/>
               </a:spcAft>
-              <a:defRPr sz="850" b="1">
-                <a:solidFill>
-                  <a:srgbClr val="64748B"/>
+              <a:defRPr sz="900" b="1">
+                <a:solidFill>
+                  <a:srgbClr val="6E7E96"/>
                 </a:solidFill>
                 <a:latin typeface="Arial"/>
               </a:defRPr>
@@ -3648,9 +3648,9 @@
           <a:p>
             <a:pPr>
               <a:spcAft>
-                <a:spcPts val="200"/>
+                <a:spcPts val="300"/>
               </a:spcAft>
-              <a:defRPr sz="1300" b="1">
+              <a:defRPr sz="1400" b="1">
                 <a:solidFill>
                   <a:srgbClr val="10B981"/>
                 </a:solidFill>
@@ -3663,9 +3663,9 @@
           </a:p>
           <a:p>
             <a:pPr>
-              <a:defRPr sz="900">
-                <a:solidFill>
-                  <a:srgbClr val="94A3B8"/>
+              <a:defRPr sz="1000">
+                <a:solidFill>
+                  <a:srgbClr val="A0AEC0"/>
                 </a:solidFill>
                 <a:latin typeface="Arial"/>
               </a:defRPr>
@@ -3684,8 +3684,8 @@
         </p:nvSpPr>
         <p:spPr>
           <a:xfrm>
-            <a:off x="914400" y="5166360"/>
-            <a:ext cx="10362895" cy="1097280"/>
+            <a:off x="731520" y="5166360"/>
+            <a:ext cx="10728655" cy="1188720"/>
           </a:xfrm>
           <a:prstGeom prst="roundRect">
             <a:avLst/>
@@ -3729,8 +3729,8 @@
         </p:nvSpPr>
         <p:spPr>
           <a:xfrm>
-            <a:off x="1143000" y="5257800"/>
-            <a:ext cx="9875520" cy="868680"/>
+            <a:off x="1005840" y="5257800"/>
+            <a:ext cx="10241280" cy="960120"/>
           </a:xfrm>
           <a:prstGeom prst="rect">
             <a:avLst/>
@@ -3745,9 +3745,9 @@
           <a:p>
             <a:pPr>
               <a:spcAft>
-                <a:spcPts val="300"/>
+                <a:spcPts val="400"/>
               </a:spcAft>
-              <a:defRPr sz="1100" b="1">
+              <a:defRPr sz="1200" b="1">
                 <a:solidFill>
                   <a:srgbClr val="00F5A0"/>
                 </a:solidFill>
@@ -3760,15 +3760,15 @@
           </a:p>
           <a:p>
             <a:pPr>
-              <a:defRPr sz="950">
-                <a:solidFill>
-                  <a:srgbClr val="94A3B8"/>
+              <a:defRPr sz="1050">
+                <a:solidFill>
+                  <a:srgbClr val="A0AEC0"/>
                 </a:solidFill>
                 <a:latin typeface="Arial"/>
               </a:defRPr>
             </a:pPr>
             <a:r>
-              <a:t>Stack: Compact Circuits • Halo2 Proofs • Midnight.js SDK • 1AM Wallet • React 18 • Vite • Tailwind Kinetic UI</a:t>
+              <a:t>Stack: Compact Smart Contracts • Halo2 Proofs • Midnight.js SDK • 1AM Wallet • React 18 • Vite • Tailwind Kinetic UI</a:t>
             </a:r>
           </a:p>
         </p:txBody>
@@ -3843,7 +3843,7 @@
         <p:spPr>
           <a:xfrm>
             <a:off x="731520" y="365760"/>
-            <a:ext cx="10698480" cy="292608"/>
+            <a:ext cx="10698480" cy="320040"/>
           </a:xfrm>
           <a:prstGeom prst="rect">
             <a:avLst/>
@@ -3857,7 +3857,7 @@
           <a:lstStyle/>
           <a:p>
             <a:pPr>
-              <a:defRPr sz="950" b="1">
+              <a:defRPr sz="1000" b="1">
                 <a:solidFill>
                   <a:srgbClr val="00F5A0"/>
                 </a:solidFill>
@@ -3879,7 +3879,7 @@
         <p:spPr>
           <a:xfrm>
             <a:off x="731520" y="658368"/>
-            <a:ext cx="10698480" cy="594360"/>
+            <a:ext cx="10698480" cy="640080"/>
           </a:xfrm>
           <a:prstGeom prst="rect">
             <a:avLst/>
@@ -3893,7 +3893,7 @@
           <a:lstStyle/>
           <a:p>
             <a:pPr>
-              <a:defRPr sz="2200" b="1">
+              <a:defRPr sz="2400" b="1">
                 <a:solidFill>
                   <a:srgbClr val="FFFFFF"/>
                 </a:solidFill>
@@ -3914,8 +3914,8 @@
         </p:nvSpPr>
         <p:spPr>
           <a:xfrm>
-            <a:off x="731520" y="1298448"/>
-            <a:ext cx="10728655" cy="13716"/>
+            <a:off x="731520" y="1325880"/>
+            <a:ext cx="10728655" cy="16459"/>
           </a:xfrm>
           <a:prstGeom prst="rect">
             <a:avLst/>
@@ -3957,8 +3957,8 @@
         </p:nvSpPr>
         <p:spPr>
           <a:xfrm>
-            <a:off x="731520" y="1298448"/>
-            <a:ext cx="1097280" cy="22860"/>
+            <a:off x="731520" y="1325880"/>
+            <a:ext cx="1371600" cy="27432"/>
           </a:xfrm>
           <a:prstGeom prst="rect">
             <a:avLst/>
@@ -4000,8 +4000,8 @@
         </p:nvSpPr>
         <p:spPr>
           <a:xfrm>
-            <a:off x="731520" y="1645920"/>
-            <a:ext cx="5212080" cy="4572000"/>
+            <a:off x="731520" y="1600200"/>
+            <a:ext cx="5257800" cy="4754880"/>
           </a:xfrm>
           <a:prstGeom prst="roundRect">
             <a:avLst/>
@@ -4045,8 +4045,8 @@
         </p:nvSpPr>
         <p:spPr>
           <a:xfrm>
-            <a:off x="960120" y="1645920"/>
-            <a:ext cx="1645920" cy="36576"/>
+            <a:off x="1005840" y="1600200"/>
+            <a:ext cx="2011680" cy="41148"/>
           </a:xfrm>
           <a:prstGeom prst="roundRect">
             <a:avLst/>
@@ -4088,8 +4088,8 @@
         </p:nvSpPr>
         <p:spPr>
           <a:xfrm>
-            <a:off x="960120" y="1828800"/>
-            <a:ext cx="4754880" cy="256032"/>
+            <a:off x="1005840" y="1801368"/>
+            <a:ext cx="4709160" cy="274320"/>
           </a:xfrm>
           <a:prstGeom prst="rect">
             <a:avLst/>
@@ -4103,7 +4103,7 @@
           <a:lstStyle/>
           <a:p>
             <a:pPr>
-              <a:defRPr sz="850" b="1">
+              <a:defRPr sz="900" b="1">
                 <a:solidFill>
                   <a:srgbClr val="F43F5E"/>
                 </a:solidFill>
@@ -4124,8 +4124,8 @@
         </p:nvSpPr>
         <p:spPr>
           <a:xfrm>
-            <a:off x="960120" y="2084832"/>
-            <a:ext cx="4754880" cy="411480"/>
+            <a:off x="1005840" y="2075688"/>
+            <a:ext cx="4709160" cy="457200"/>
           </a:xfrm>
           <a:prstGeom prst="rect">
             <a:avLst/>
@@ -4139,7 +4139,7 @@
           <a:lstStyle/>
           <a:p>
             <a:pPr>
-              <a:defRPr sz="1300" b="1">
+              <a:defRPr sz="1500" b="1">
                 <a:solidFill>
                   <a:srgbClr val="FFFFFF"/>
                 </a:solidFill>
@@ -4160,8 +4160,8 @@
         </p:nvSpPr>
         <p:spPr>
           <a:xfrm>
-            <a:off x="960120" y="2496312"/>
-            <a:ext cx="4754880" cy="3584448"/>
+            <a:off x="1005840" y="2551176"/>
+            <a:ext cx="4709160" cy="3666744"/>
           </a:xfrm>
           <a:prstGeom prst="rect">
             <a:avLst/>
@@ -4176,11 +4176,11 @@
           <a:p>
             <a:pPr>
               <a:spcAft>
-                <a:spcPts val="500"/>
+                <a:spcPts val="1200"/>
               </a:spcAft>
-              <a:defRPr sz="1000">
-                <a:solidFill>
-                  <a:srgbClr val="94A3B8"/>
+              <a:defRPr sz="1200">
+                <a:solidFill>
+                  <a:srgbClr val="A0AEC0"/>
                 </a:solidFill>
                 <a:latin typeface="Arial"/>
               </a:defRPr>
@@ -4192,27 +4192,27 @@
           <a:p>
             <a:pPr>
               <a:spcAft>
-                <a:spcPts val="500"/>
+                <a:spcPts val="1200"/>
               </a:spcAft>
-              <a:defRPr sz="1000">
-                <a:solidFill>
-                  <a:srgbClr val="94A3B8"/>
+              <a:defRPr sz="1200">
+                <a:solidFill>
+                  <a:srgbClr val="A0AEC0"/>
                 </a:solidFill>
                 <a:latin typeface="Arial"/>
               </a:defRPr>
             </a:pPr>
             <a:r>
-              <a:t>•  Gas-Trail De-Anonymization: Purchasing native gas tokens creates an irreversible KYC link to every on-chain activity.</a:t>
+              <a:t>•  Gas-Trail De-Anonymization: Purchasing native gas tokens creates an irreversible KYC link to every on-chain move.</a:t>
             </a:r>
           </a:p>
           <a:p>
             <a:pPr>
               <a:spcAft>
-                <a:spcPts val="500"/>
+                <a:spcPts val="1200"/>
               </a:spcAft>
-              <a:defRPr sz="1000">
-                <a:solidFill>
-                  <a:srgbClr val="94A3B8"/>
+              <a:defRPr sz="1200">
+                <a:solidFill>
+                  <a:srgbClr val="A0AEC0"/>
                 </a:solidFill>
                 <a:latin typeface="Arial"/>
               </a:defRPr>
@@ -4224,17 +4224,17 @@
           <a:p>
             <a:pPr>
               <a:spcAft>
-                <a:spcPts val="500"/>
+                <a:spcPts val="1200"/>
               </a:spcAft>
-              <a:defRPr sz="1000">
-                <a:solidFill>
-                  <a:srgbClr val="94A3B8"/>
+              <a:defRPr sz="1200">
+                <a:solidFill>
+                  <a:srgbClr val="A0AEC0"/>
                 </a:solidFill>
                 <a:latin typeface="Arial"/>
               </a:defRPr>
             </a:pPr>
             <a:r>
-              <a:t>•  Enterprise Blockade: Fortune 500 companies cannot execute business settlements on public blockchains without leaking corporate secrets.</a:t>
+              <a:t>•  Enterprise Blockade: Global enterprises cannot execute confidential settlements on public blockchains without leaking corporate data.</a:t>
             </a:r>
           </a:p>
         </p:txBody>
@@ -4247,8 +4247,8 @@
         </p:nvSpPr>
         <p:spPr>
           <a:xfrm>
-            <a:off x="6248095" y="1645920"/>
-            <a:ext cx="5212080" cy="4572000"/>
+            <a:off x="6199632" y="1600200"/>
+            <a:ext cx="5257800" cy="4754880"/>
           </a:xfrm>
           <a:prstGeom prst="roundRect">
             <a:avLst/>
@@ -4292,8 +4292,8 @@
         </p:nvSpPr>
         <p:spPr>
           <a:xfrm>
-            <a:off x="6476695" y="1645920"/>
-            <a:ext cx="1645920" cy="36576"/>
+            <a:off x="6473952" y="1600200"/>
+            <a:ext cx="2011680" cy="41148"/>
           </a:xfrm>
           <a:prstGeom prst="roundRect">
             <a:avLst/>
@@ -4335,8 +4335,8 @@
         </p:nvSpPr>
         <p:spPr>
           <a:xfrm>
-            <a:off x="6476695" y="1828800"/>
-            <a:ext cx="4754880" cy="256032"/>
+            <a:off x="6473952" y="1801368"/>
+            <a:ext cx="4709160" cy="274320"/>
           </a:xfrm>
           <a:prstGeom prst="rect">
             <a:avLst/>
@@ -4350,7 +4350,7 @@
           <a:lstStyle/>
           <a:p>
             <a:pPr>
-              <a:defRPr sz="850" b="1">
+              <a:defRPr sz="900" b="1">
                 <a:solidFill>
                   <a:srgbClr val="00F5A0"/>
                 </a:solidFill>
@@ -4371,8 +4371,8 @@
         </p:nvSpPr>
         <p:spPr>
           <a:xfrm>
-            <a:off x="6476695" y="2084832"/>
-            <a:ext cx="4754880" cy="411480"/>
+            <a:off x="6473952" y="2075688"/>
+            <a:ext cx="4709160" cy="457200"/>
           </a:xfrm>
           <a:prstGeom prst="rect">
             <a:avLst/>
@@ -4386,7 +4386,7 @@
           <a:lstStyle/>
           <a:p>
             <a:pPr>
-              <a:defRPr sz="1300" b="1">
+              <a:defRPr sz="1500" b="1">
                 <a:solidFill>
                   <a:srgbClr val="FFFFFF"/>
                 </a:solidFill>
@@ -4407,8 +4407,8 @@
         </p:nvSpPr>
         <p:spPr>
           <a:xfrm>
-            <a:off x="6476695" y="2496312"/>
-            <a:ext cx="4754880" cy="3584448"/>
+            <a:off x="6473952" y="2551176"/>
+            <a:ext cx="4709160" cy="3666744"/>
           </a:xfrm>
           <a:prstGeom prst="rect">
             <a:avLst/>
@@ -4423,11 +4423,11 @@
           <a:p>
             <a:pPr>
               <a:spcAft>
-                <a:spcPts val="500"/>
+                <a:spcPts val="1200"/>
               </a:spcAft>
-              <a:defRPr sz="1000">
-                <a:solidFill>
-                  <a:srgbClr val="94A3B8"/>
+              <a:defRPr sz="1200">
+                <a:solidFill>
+                  <a:srgbClr val="A0AEC0"/>
                 </a:solidFill>
                 <a:latin typeface="Arial"/>
               </a:defRPr>
@@ -4439,11 +4439,11 @@
           <a:p>
             <a:pPr>
               <a:spcAft>
-                <a:spcPts val="500"/>
+                <a:spcPts val="1200"/>
               </a:spcAft>
-              <a:defRPr sz="1000">
-                <a:solidFill>
-                  <a:srgbClr val="94A3B8"/>
+              <a:defRPr sz="1200">
+                <a:solidFill>
+                  <a:srgbClr val="A0AEC0"/>
                 </a:solidFill>
                 <a:latin typeface="Arial"/>
               </a:defRPr>
@@ -4455,27 +4455,27 @@
           <a:p>
             <a:pPr>
               <a:spcAft>
-                <a:spcPts val="500"/>
+                <a:spcPts val="1200"/>
               </a:spcAft>
-              <a:defRPr sz="1000">
-                <a:solidFill>
-                  <a:srgbClr val="94A3B8"/>
+              <a:defRPr sz="1200">
+                <a:solidFill>
+                  <a:srgbClr val="A0AEC0"/>
                 </a:solidFill>
                 <a:latin typeface="Arial"/>
               </a:defRPr>
             </a:pPr>
             <a:r>
-              <a:t>•  Deterministic Ledger Accounting: Public counters track verified settlement totals while protecting individual transactor identities.</a:t>
+              <a:t>•  Deterministic Ledger Accounting: Public counters track verified settlement totals while protecting transactor identities.</a:t>
             </a:r>
           </a:p>
           <a:p>
             <a:pPr>
               <a:spcAft>
-                <a:spcPts val="500"/>
+                <a:spcPts val="1200"/>
               </a:spcAft>
-              <a:defRPr sz="1000">
-                <a:solidFill>
-                  <a:srgbClr val="94A3B8"/>
+              <a:defRPr sz="1200">
+                <a:solidFill>
+                  <a:srgbClr val="A0AEC0"/>
                 </a:solidFill>
                 <a:latin typeface="Arial"/>
               </a:defRPr>
@@ -4556,7 +4556,7 @@
         <p:spPr>
           <a:xfrm>
             <a:off x="731520" y="365760"/>
-            <a:ext cx="10698480" cy="292608"/>
+            <a:ext cx="10698480" cy="320040"/>
           </a:xfrm>
           <a:prstGeom prst="rect">
             <a:avLst/>
@@ -4570,7 +4570,7 @@
           <a:lstStyle/>
           <a:p>
             <a:pPr>
-              <a:defRPr sz="950" b="1">
+              <a:defRPr sz="1000" b="1">
                 <a:solidFill>
                   <a:srgbClr val="00F5A0"/>
                 </a:solidFill>
@@ -4592,7 +4592,7 @@
         <p:spPr>
           <a:xfrm>
             <a:off x="731520" y="658368"/>
-            <a:ext cx="10698480" cy="594360"/>
+            <a:ext cx="10698480" cy="640080"/>
           </a:xfrm>
           <a:prstGeom prst="rect">
             <a:avLst/>
@@ -4606,7 +4606,7 @@
           <a:lstStyle/>
           <a:p>
             <a:pPr>
-              <a:defRPr sz="2200" b="1">
+              <a:defRPr sz="2400" b="1">
                 <a:solidFill>
                   <a:srgbClr val="FFFFFF"/>
                 </a:solidFill>
@@ -4614,7 +4614,7 @@
               </a:defRPr>
             </a:pPr>
             <a:r>
-              <a:t>Compact v0.20 Smart Contract Architecture</a:t>
+              <a:t>Compact Smart Contract Architecture</a:t>
             </a:r>
           </a:p>
         </p:txBody>
@@ -4627,8 +4627,8 @@
         </p:nvSpPr>
         <p:spPr>
           <a:xfrm>
-            <a:off x="731520" y="1298448"/>
-            <a:ext cx="10728655" cy="13716"/>
+            <a:off x="731520" y="1325880"/>
+            <a:ext cx="10728655" cy="16459"/>
           </a:xfrm>
           <a:prstGeom prst="rect">
             <a:avLst/>
@@ -4670,8 +4670,8 @@
         </p:nvSpPr>
         <p:spPr>
           <a:xfrm>
-            <a:off x="731520" y="1298448"/>
-            <a:ext cx="1097280" cy="22860"/>
+            <a:off x="731520" y="1325880"/>
+            <a:ext cx="1371600" cy="27432"/>
           </a:xfrm>
           <a:prstGeom prst="rect">
             <a:avLst/>
@@ -4713,8 +4713,8 @@
         </p:nvSpPr>
         <p:spPr>
           <a:xfrm>
-            <a:off x="731520" y="1645920"/>
-            <a:ext cx="6217920" cy="4572000"/>
+            <a:off x="731520" y="1600200"/>
+            <a:ext cx="6217920" cy="4754880"/>
           </a:xfrm>
           <a:prstGeom prst="roundRect">
             <a:avLst/>
@@ -4758,8 +4758,8 @@
         </p:nvSpPr>
         <p:spPr>
           <a:xfrm>
-            <a:off x="914400" y="1783080"/>
-            <a:ext cx="5852160" cy="4297680"/>
+            <a:off x="914400" y="1737360"/>
+            <a:ext cx="5852160" cy="4434840"/>
           </a:xfrm>
           <a:prstGeom prst="rect">
             <a:avLst/>
@@ -4774,25 +4774,25 @@
           <a:p>
             <a:pPr>
               <a:spcAft>
-                <a:spcPts val="150"/>
+                <a:spcPts val="200"/>
               </a:spcAft>
-              <a:defRPr sz="850">
-                <a:solidFill>
-                  <a:srgbClr val="64748B"/>
+              <a:defRPr sz="950">
+                <a:solidFill>
+                  <a:srgbClr val="6E7E96"/>
                 </a:solidFill>
                 <a:latin typeface="Consolas"/>
               </a:defRPr>
             </a:pPr>
             <a:r>
-              <a:t>// payment.compact (Midnight Network stdlib v0.20)</a:t>
+              <a:t>// payment.compact (Midnight Network stdlib)</a:t>
             </a:r>
           </a:p>
           <a:p>
             <a:pPr>
               <a:spcAft>
-                <a:spcPts val="150"/>
+                <a:spcPts val="200"/>
               </a:spcAft>
-              <a:defRPr sz="850">
+              <a:defRPr sz="950">
                 <a:solidFill>
                   <a:srgbClr val="FFFFFF"/>
                 </a:solidFill>
@@ -4806,9 +4806,9 @@
           <a:p>
             <a:pPr>
               <a:spcAft>
-                <a:spcPts val="150"/>
+                <a:spcPts val="200"/>
               </a:spcAft>
-              <a:defRPr sz="850">
+              <a:defRPr sz="950">
                 <a:solidFill>
                   <a:srgbClr val="00F5A0"/>
                 </a:solidFill>
@@ -4822,9 +4822,9 @@
           <a:p>
             <a:pPr>
               <a:spcAft>
-                <a:spcPts val="150"/>
+                <a:spcPts val="200"/>
               </a:spcAft>
-              <a:defRPr sz="850">
+              <a:defRPr sz="950">
                 <a:solidFill>
                   <a:srgbClr val="00F5A0"/>
                 </a:solidFill>
@@ -4838,9 +4838,9 @@
           <a:p>
             <a:pPr>
               <a:spcAft>
-                <a:spcPts val="150"/>
+                <a:spcPts val="200"/>
               </a:spcAft>
-              <a:defRPr sz="850">
+              <a:defRPr sz="950">
                 <a:solidFill>
                   <a:srgbClr val="00F5A0"/>
                 </a:solidFill>
@@ -4854,9 +4854,9 @@
           <a:p>
             <a:pPr>
               <a:spcAft>
-                <a:spcPts val="150"/>
+                <a:spcPts val="200"/>
               </a:spcAft>
-              <a:defRPr sz="850">
+              <a:defRPr sz="950">
                 <a:solidFill>
                   <a:srgbClr val="FFFFFF"/>
                 </a:solidFill>
@@ -4867,11 +4867,11 @@
           <a:p>
             <a:pPr>
               <a:spcAft>
-                <a:spcPts val="150"/>
+                <a:spcPts val="200"/>
               </a:spcAft>
-              <a:defRPr sz="850">
-                <a:solidFill>
-                  <a:srgbClr val="64748B"/>
+              <a:defRPr sz="950">
+                <a:solidFill>
+                  <a:srgbClr val="6E7E96"/>
                 </a:solidFill>
                 <a:latin typeface="Consolas"/>
               </a:defRPr>
@@ -4883,9 +4883,9 @@
           <a:p>
             <a:pPr>
               <a:spcAft>
-                <a:spcPts val="150"/>
+                <a:spcPts val="200"/>
               </a:spcAft>
-              <a:defRPr sz="850">
+              <a:defRPr sz="950">
                 <a:solidFill>
                   <a:srgbClr val="38BDF8"/>
                 </a:solidFill>
@@ -4899,9 +4899,9 @@
           <a:p>
             <a:pPr>
               <a:spcAft>
-                <a:spcPts val="150"/>
+                <a:spcPts val="200"/>
               </a:spcAft>
-              <a:defRPr sz="850">
+              <a:defRPr sz="950">
                 <a:solidFill>
                   <a:srgbClr val="F1F5F9"/>
                 </a:solidFill>
@@ -4915,9 +4915,9 @@
           <a:p>
             <a:pPr>
               <a:spcAft>
-                <a:spcPts val="150"/>
+                <a:spcPts val="200"/>
               </a:spcAft>
-              <a:defRPr sz="850">
+              <a:defRPr sz="950">
                 <a:solidFill>
                   <a:srgbClr val="F1F5F9"/>
                 </a:solidFill>
@@ -4931,9 +4931,9 @@
           <a:p>
             <a:pPr>
               <a:spcAft>
-                <a:spcPts val="150"/>
+                <a:spcPts val="200"/>
               </a:spcAft>
-              <a:defRPr sz="850">
+              <a:defRPr sz="950">
                 <a:solidFill>
                   <a:srgbClr val="38BDF8"/>
                 </a:solidFill>
@@ -4947,9 +4947,9 @@
           <a:p>
             <a:pPr>
               <a:spcAft>
-                <a:spcPts val="150"/>
+                <a:spcPts val="200"/>
               </a:spcAft>
-              <a:defRPr sz="850">
+              <a:defRPr sz="950">
                 <a:solidFill>
                   <a:srgbClr val="FFFFFF"/>
                 </a:solidFill>
@@ -4960,11 +4960,11 @@
           <a:p>
             <a:pPr>
               <a:spcAft>
-                <a:spcPts val="150"/>
+                <a:spcPts val="200"/>
               </a:spcAft>
-              <a:defRPr sz="850">
-                <a:solidFill>
-                  <a:srgbClr val="64748B"/>
+              <a:defRPr sz="950">
+                <a:solidFill>
+                  <a:srgbClr val="6E7E96"/>
                 </a:solidFill>
                 <a:latin typeface="Consolas"/>
               </a:defRPr>
@@ -4976,9 +4976,9 @@
           <a:p>
             <a:pPr>
               <a:spcAft>
-                <a:spcPts val="150"/>
+                <a:spcPts val="200"/>
               </a:spcAft>
-              <a:defRPr sz="850">
+              <a:defRPr sz="950">
                 <a:solidFill>
                   <a:srgbClr val="818CF8"/>
                 </a:solidFill>
@@ -4992,9 +4992,9 @@
           <a:p>
             <a:pPr>
               <a:spcAft>
-                <a:spcPts val="150"/>
+                <a:spcPts val="200"/>
               </a:spcAft>
-              <a:defRPr sz="850">
+              <a:defRPr sz="950">
                 <a:solidFill>
                   <a:srgbClr val="00F5A0"/>
                 </a:solidFill>
@@ -5008,9 +5008,9 @@
           <a:p>
             <a:pPr>
               <a:spcAft>
-                <a:spcPts val="150"/>
+                <a:spcPts val="200"/>
               </a:spcAft>
-              <a:defRPr sz="850">
+              <a:defRPr sz="950">
                 <a:solidFill>
                   <a:srgbClr val="00F5A0"/>
                 </a:solidFill>
@@ -5024,9 +5024,9 @@
           <a:p>
             <a:pPr>
               <a:spcAft>
-                <a:spcPts val="150"/>
+                <a:spcPts val="200"/>
               </a:spcAft>
-              <a:defRPr sz="850">
+              <a:defRPr sz="950">
                 <a:solidFill>
                   <a:srgbClr val="F1F5F9"/>
                 </a:solidFill>
@@ -5040,9 +5040,9 @@
           <a:p>
             <a:pPr>
               <a:spcAft>
-                <a:spcPts val="150"/>
+                <a:spcPts val="200"/>
               </a:spcAft>
-              <a:defRPr sz="850">
+              <a:defRPr sz="950">
                 <a:solidFill>
                   <a:srgbClr val="F1F5F9"/>
                 </a:solidFill>
@@ -5056,9 +5056,9 @@
           <a:p>
             <a:pPr>
               <a:spcAft>
-                <a:spcPts val="150"/>
+                <a:spcPts val="200"/>
               </a:spcAft>
-              <a:defRPr sz="850">
+              <a:defRPr sz="950">
                 <a:solidFill>
                   <a:srgbClr val="818CF8"/>
                 </a:solidFill>
@@ -5072,9 +5072,9 @@
           <a:p>
             <a:pPr>
               <a:spcAft>
-                <a:spcPts val="150"/>
+                <a:spcPts val="200"/>
               </a:spcAft>
-              <a:defRPr sz="850">
+              <a:defRPr sz="950">
                 <a:solidFill>
                   <a:srgbClr val="FFFFFF"/>
                 </a:solidFill>
@@ -5095,8 +5095,8 @@
         </p:nvSpPr>
         <p:spPr>
           <a:xfrm>
-            <a:off x="7132320" y="1645920"/>
-            <a:ext cx="4327855" cy="1417320"/>
+            <a:off x="7132320" y="1600200"/>
+            <a:ext cx="4327855" cy="1481328"/>
           </a:xfrm>
           <a:prstGeom prst="roundRect">
             <a:avLst/>
@@ -5140,8 +5140,8 @@
         </p:nvSpPr>
         <p:spPr>
           <a:xfrm>
-            <a:off x="7360920" y="1645920"/>
-            <a:ext cx="1645920" cy="36576"/>
+            <a:off x="7406640" y="1600200"/>
+            <a:ext cx="2011680" cy="41148"/>
           </a:xfrm>
           <a:prstGeom prst="roundRect">
             <a:avLst/>
@@ -5183,8 +5183,8 @@
         </p:nvSpPr>
         <p:spPr>
           <a:xfrm>
-            <a:off x="7360920" y="1828800"/>
-            <a:ext cx="3870655" cy="256032"/>
+            <a:off x="7406640" y="1801368"/>
+            <a:ext cx="3779215" cy="274320"/>
           </a:xfrm>
           <a:prstGeom prst="rect">
             <a:avLst/>
@@ -5198,7 +5198,7 @@
           <a:lstStyle/>
           <a:p>
             <a:pPr>
-              <a:defRPr sz="850" b="1">
+              <a:defRPr sz="900" b="1">
                 <a:solidFill>
                   <a:srgbClr val="38BDF8"/>
                 </a:solidFill>
@@ -5219,8 +5219,8 @@
         </p:nvSpPr>
         <p:spPr>
           <a:xfrm>
-            <a:off x="7360920" y="2084832"/>
-            <a:ext cx="3870655" cy="411480"/>
+            <a:off x="7406640" y="2075688"/>
+            <a:ext cx="3779215" cy="457200"/>
           </a:xfrm>
           <a:prstGeom prst="rect">
             <a:avLst/>
@@ -5234,7 +5234,7 @@
           <a:lstStyle/>
           <a:p>
             <a:pPr>
-              <a:defRPr sz="1300" b="1">
+              <a:defRPr sz="1500" b="1">
                 <a:solidFill>
                   <a:srgbClr val="FFFFFF"/>
                 </a:solidFill>
@@ -5255,8 +5255,8 @@
         </p:nvSpPr>
         <p:spPr>
           <a:xfrm>
-            <a:off x="7360920" y="2496312"/>
-            <a:ext cx="3870655" cy="429768"/>
+            <a:off x="7406640" y="2551176"/>
+            <a:ext cx="3779215" cy="393192"/>
           </a:xfrm>
           <a:prstGeom prst="rect">
             <a:avLst/>
@@ -5271,11 +5271,11 @@
           <a:p>
             <a:pPr>
               <a:spcAft>
-                <a:spcPts val="500"/>
+                <a:spcPts val="400"/>
               </a:spcAft>
-              <a:defRPr sz="1000">
-                <a:solidFill>
-                  <a:srgbClr val="94A3B8"/>
+              <a:defRPr sz="1050">
+                <a:solidFill>
+                  <a:srgbClr val="A0AEC0"/>
                 </a:solidFill>
                 <a:latin typeface="Arial"/>
               </a:defRPr>
@@ -5287,11 +5287,11 @@
           <a:p>
             <a:pPr>
               <a:spcAft>
-                <a:spcPts val="500"/>
+                <a:spcPts val="400"/>
               </a:spcAft>
-              <a:defRPr sz="1000">
-                <a:solidFill>
-                  <a:srgbClr val="94A3B8"/>
+              <a:defRPr sz="1050">
+                <a:solidFill>
+                  <a:srgbClr val="A0AEC0"/>
                 </a:solidFill>
                 <a:latin typeface="Arial"/>
               </a:defRPr>
@@ -5310,8 +5310,8 @@
         </p:nvSpPr>
         <p:spPr>
           <a:xfrm>
-            <a:off x="7132320" y="3218688"/>
-            <a:ext cx="4327855" cy="1417320"/>
+            <a:off x="7132320" y="3236976"/>
+            <a:ext cx="4327855" cy="1481328"/>
           </a:xfrm>
           <a:prstGeom prst="roundRect">
             <a:avLst/>
@@ -5355,8 +5355,8 @@
         </p:nvSpPr>
         <p:spPr>
           <a:xfrm>
-            <a:off x="7360920" y="3218688"/>
-            <a:ext cx="1645920" cy="36576"/>
+            <a:off x="7406640" y="3236976"/>
+            <a:ext cx="2011680" cy="41148"/>
           </a:xfrm>
           <a:prstGeom prst="roundRect">
             <a:avLst/>
@@ -5398,8 +5398,8 @@
         </p:nvSpPr>
         <p:spPr>
           <a:xfrm>
-            <a:off x="7360920" y="3401568"/>
-            <a:ext cx="3870655" cy="256032"/>
+            <a:off x="7406640" y="3438144"/>
+            <a:ext cx="3779215" cy="274320"/>
           </a:xfrm>
           <a:prstGeom prst="rect">
             <a:avLst/>
@@ -5413,7 +5413,7 @@
           <a:lstStyle/>
           <a:p>
             <a:pPr>
-              <a:defRPr sz="850" b="1">
+              <a:defRPr sz="900" b="1">
                 <a:solidFill>
                   <a:srgbClr val="818CF8"/>
                 </a:solidFill>
@@ -5434,8 +5434,8 @@
         </p:nvSpPr>
         <p:spPr>
           <a:xfrm>
-            <a:off x="7360920" y="3657600"/>
-            <a:ext cx="3870655" cy="411480"/>
+            <a:off x="7406640" y="3712464"/>
+            <a:ext cx="3779215" cy="457200"/>
           </a:xfrm>
           <a:prstGeom prst="rect">
             <a:avLst/>
@@ -5449,7 +5449,7 @@
           <a:lstStyle/>
           <a:p>
             <a:pPr>
-              <a:defRPr sz="1300" b="1">
+              <a:defRPr sz="1500" b="1">
                 <a:solidFill>
                   <a:srgbClr val="FFFFFF"/>
                 </a:solidFill>
@@ -5470,8 +5470,8 @@
         </p:nvSpPr>
         <p:spPr>
           <a:xfrm>
-            <a:off x="7360920" y="4069080"/>
-            <a:ext cx="3870655" cy="429768"/>
+            <a:off x="7406640" y="4187952"/>
+            <a:ext cx="3779215" cy="393192"/>
           </a:xfrm>
           <a:prstGeom prst="rect">
             <a:avLst/>
@@ -5486,11 +5486,11 @@
           <a:p>
             <a:pPr>
               <a:spcAft>
-                <a:spcPts val="500"/>
+                <a:spcPts val="400"/>
               </a:spcAft>
-              <a:defRPr sz="1000">
-                <a:solidFill>
-                  <a:srgbClr val="94A3B8"/>
+              <a:defRPr sz="1050">
+                <a:solidFill>
+                  <a:srgbClr val="A0AEC0"/>
                 </a:solidFill>
                 <a:latin typeface="Arial"/>
               </a:defRPr>
@@ -5502,11 +5502,11 @@
           <a:p>
             <a:pPr>
               <a:spcAft>
-                <a:spcPts val="500"/>
+                <a:spcPts val="400"/>
               </a:spcAft>
-              <a:defRPr sz="1000">
-                <a:solidFill>
-                  <a:srgbClr val="94A3B8"/>
+              <a:defRPr sz="1050">
+                <a:solidFill>
+                  <a:srgbClr val="A0AEC0"/>
                 </a:solidFill>
                 <a:latin typeface="Arial"/>
               </a:defRPr>
@@ -5525,8 +5525,8 @@
         </p:nvSpPr>
         <p:spPr>
           <a:xfrm>
-            <a:off x="7132320" y="4800600"/>
-            <a:ext cx="4327855" cy="1417320"/>
+            <a:off x="7132320" y="4873752"/>
+            <a:ext cx="4327855" cy="1481328"/>
           </a:xfrm>
           <a:prstGeom prst="roundRect">
             <a:avLst/>
@@ -5570,8 +5570,8 @@
         </p:nvSpPr>
         <p:spPr>
           <a:xfrm>
-            <a:off x="7360920" y="4800600"/>
-            <a:ext cx="1645920" cy="36576"/>
+            <a:off x="7406640" y="4873752"/>
+            <a:ext cx="2011680" cy="41148"/>
           </a:xfrm>
           <a:prstGeom prst="roundRect">
             <a:avLst/>
@@ -5613,8 +5613,8 @@
         </p:nvSpPr>
         <p:spPr>
           <a:xfrm>
-            <a:off x="7360920" y="4983480"/>
-            <a:ext cx="3870655" cy="256032"/>
+            <a:off x="7406640" y="5074920"/>
+            <a:ext cx="3779215" cy="274320"/>
           </a:xfrm>
           <a:prstGeom prst="rect">
             <a:avLst/>
@@ -5628,7 +5628,7 @@
           <a:lstStyle/>
           <a:p>
             <a:pPr>
-              <a:defRPr sz="850" b="1">
+              <a:defRPr sz="900" b="1">
                 <a:solidFill>
                   <a:srgbClr val="00F5A0"/>
                 </a:solidFill>
@@ -5649,8 +5649,8 @@
         </p:nvSpPr>
         <p:spPr>
           <a:xfrm>
-            <a:off x="7360920" y="5239512"/>
-            <a:ext cx="3870655" cy="411480"/>
+            <a:off x="7406640" y="5349240"/>
+            <a:ext cx="3779215" cy="457200"/>
           </a:xfrm>
           <a:prstGeom prst="rect">
             <a:avLst/>
@@ -5664,7 +5664,7 @@
           <a:lstStyle/>
           <a:p>
             <a:pPr>
-              <a:defRPr sz="1300" b="1">
+              <a:defRPr sz="1500" b="1">
                 <a:solidFill>
                   <a:srgbClr val="FFFFFF"/>
                 </a:solidFill>
@@ -5685,8 +5685,8 @@
         </p:nvSpPr>
         <p:spPr>
           <a:xfrm>
-            <a:off x="7360920" y="5650992"/>
-            <a:ext cx="3870655" cy="429768"/>
+            <a:off x="7406640" y="5824728"/>
+            <a:ext cx="3779215" cy="393192"/>
           </a:xfrm>
           <a:prstGeom prst="rect">
             <a:avLst/>
@@ -5701,11 +5701,11 @@
           <a:p>
             <a:pPr>
               <a:spcAft>
-                <a:spcPts val="500"/>
+                <a:spcPts val="400"/>
               </a:spcAft>
-              <a:defRPr sz="1000">
-                <a:solidFill>
-                  <a:srgbClr val="94A3B8"/>
+              <a:defRPr sz="1050">
+                <a:solidFill>
+                  <a:srgbClr val="A0AEC0"/>
                 </a:solidFill>
                 <a:latin typeface="Arial"/>
               </a:defRPr>
@@ -5717,11 +5717,11 @@
           <a:p>
             <a:pPr>
               <a:spcAft>
-                <a:spcPts val="500"/>
+                <a:spcPts val="400"/>
               </a:spcAft>
-              <a:defRPr sz="1000">
-                <a:solidFill>
-                  <a:srgbClr val="94A3B8"/>
+              <a:defRPr sz="1050">
+                <a:solidFill>
+                  <a:srgbClr val="A0AEC0"/>
                 </a:solidFill>
                 <a:latin typeface="Arial"/>
               </a:defRPr>
@@ -5802,7 +5802,7 @@
         <p:spPr>
           <a:xfrm>
             <a:off x="731520" y="365760"/>
-            <a:ext cx="10698480" cy="292608"/>
+            <a:ext cx="10698480" cy="320040"/>
           </a:xfrm>
           <a:prstGeom prst="rect">
             <a:avLst/>
@@ -5816,7 +5816,7 @@
           <a:lstStyle/>
           <a:p>
             <a:pPr>
-              <a:defRPr sz="950" b="1">
+              <a:defRPr sz="1000" b="1">
                 <a:solidFill>
                   <a:srgbClr val="00F5A0"/>
                 </a:solidFill>
@@ -5838,7 +5838,7 @@
         <p:spPr>
           <a:xfrm>
             <a:off x="731520" y="658368"/>
-            <a:ext cx="10698480" cy="594360"/>
+            <a:ext cx="10698480" cy="640080"/>
           </a:xfrm>
           <a:prstGeom prst="rect">
             <a:avLst/>
@@ -5852,7 +5852,7 @@
           <a:lstStyle/>
           <a:p>
             <a:pPr>
-              <a:defRPr sz="2200" b="1">
+              <a:defRPr sz="2400" b="1">
                 <a:solidFill>
                   <a:srgbClr val="FFFFFF"/>
                 </a:solidFill>
@@ -5873,8 +5873,8 @@
         </p:nvSpPr>
         <p:spPr>
           <a:xfrm>
-            <a:off x="731520" y="1298448"/>
-            <a:ext cx="10728655" cy="13716"/>
+            <a:off x="731520" y="1325880"/>
+            <a:ext cx="10728655" cy="16459"/>
           </a:xfrm>
           <a:prstGeom prst="rect">
             <a:avLst/>
@@ -5916,8 +5916,8 @@
         </p:nvSpPr>
         <p:spPr>
           <a:xfrm>
-            <a:off x="731520" y="1298448"/>
-            <a:ext cx="1097280" cy="22860"/>
+            <a:off x="731520" y="1325880"/>
+            <a:ext cx="1371600" cy="27432"/>
           </a:xfrm>
           <a:prstGeom prst="rect">
             <a:avLst/>
@@ -5959,8 +5959,8 @@
         </p:nvSpPr>
         <p:spPr>
           <a:xfrm>
-            <a:off x="731520" y="1645920"/>
-            <a:ext cx="2542032" cy="4572000"/>
+            <a:off x="731520" y="1600200"/>
+            <a:ext cx="2542032" cy="4754880"/>
           </a:xfrm>
           <a:prstGeom prst="roundRect">
             <a:avLst/>
@@ -6004,8 +6004,8 @@
         </p:nvSpPr>
         <p:spPr>
           <a:xfrm>
-            <a:off x="960120" y="1645920"/>
-            <a:ext cx="1645920" cy="36576"/>
+            <a:off x="1005840" y="1600200"/>
+            <a:ext cx="1993391" cy="41148"/>
           </a:xfrm>
           <a:prstGeom prst="roundRect">
             <a:avLst/>
@@ -6047,8 +6047,8 @@
         </p:nvSpPr>
         <p:spPr>
           <a:xfrm>
-            <a:off x="960120" y="1828800"/>
-            <a:ext cx="2084831" cy="256032"/>
+            <a:off x="1005840" y="1801368"/>
+            <a:ext cx="1993391" cy="274320"/>
           </a:xfrm>
           <a:prstGeom prst="rect">
             <a:avLst/>
@@ -6062,7 +6062,7 @@
           <a:lstStyle/>
           <a:p>
             <a:pPr>
-              <a:defRPr sz="850" b="1">
+              <a:defRPr sz="900" b="1">
                 <a:solidFill>
                   <a:srgbClr val="00F5A0"/>
                 </a:solidFill>
@@ -6083,8 +6083,8 @@
         </p:nvSpPr>
         <p:spPr>
           <a:xfrm>
-            <a:off x="960120" y="2084832"/>
-            <a:ext cx="2084831" cy="411480"/>
+            <a:off x="1005840" y="2075688"/>
+            <a:ext cx="1993391" cy="457200"/>
           </a:xfrm>
           <a:prstGeom prst="rect">
             <a:avLst/>
@@ -6098,7 +6098,7 @@
           <a:lstStyle/>
           <a:p>
             <a:pPr>
-              <a:defRPr sz="1300" b="1">
+              <a:defRPr sz="1500" b="1">
                 <a:solidFill>
                   <a:srgbClr val="FFFFFF"/>
                 </a:solidFill>
@@ -6119,8 +6119,8 @@
         </p:nvSpPr>
         <p:spPr>
           <a:xfrm>
-            <a:off x="960120" y="2496312"/>
-            <a:ext cx="2084831" cy="3584448"/>
+            <a:off x="1005840" y="2551176"/>
+            <a:ext cx="1993391" cy="3666744"/>
           </a:xfrm>
           <a:prstGeom prst="rect">
             <a:avLst/>
@@ -6135,11 +6135,11 @@
           <a:p>
             <a:pPr>
               <a:spcAft>
-                <a:spcPts val="500"/>
+                <a:spcPts val="1000"/>
               </a:spcAft>
-              <a:defRPr sz="1000">
-                <a:solidFill>
-                  <a:srgbClr val="94A3B8"/>
+              <a:defRPr sz="1150">
+                <a:solidFill>
+                  <a:srgbClr val="A0AEC0"/>
                 </a:solidFill>
                 <a:latin typeface="Arial"/>
               </a:defRPr>
@@ -6151,11 +6151,11 @@
           <a:p>
             <a:pPr>
               <a:spcAft>
-                <a:spcPts val="500"/>
+                <a:spcPts val="1000"/>
               </a:spcAft>
-              <a:defRPr sz="1000">
-                <a:solidFill>
-                  <a:srgbClr val="94A3B8"/>
+              <a:defRPr sz="1150">
+                <a:solidFill>
+                  <a:srgbClr val="A0AEC0"/>
                 </a:solidFill>
                 <a:latin typeface="Arial"/>
               </a:defRPr>
@@ -6174,8 +6174,8 @@
         </p:nvSpPr>
         <p:spPr>
           <a:xfrm>
-            <a:off x="3456432" y="1645920"/>
-            <a:ext cx="2542032" cy="4572000"/>
+            <a:off x="3456432" y="1600200"/>
+            <a:ext cx="2542032" cy="4754880"/>
           </a:xfrm>
           <a:prstGeom prst="roundRect">
             <a:avLst/>
@@ -6219,8 +6219,8 @@
         </p:nvSpPr>
         <p:spPr>
           <a:xfrm>
-            <a:off x="3685032" y="1645920"/>
-            <a:ext cx="1645920" cy="36576"/>
+            <a:off x="3730752" y="1600200"/>
+            <a:ext cx="1993391" cy="41148"/>
           </a:xfrm>
           <a:prstGeom prst="roundRect">
             <a:avLst/>
@@ -6262,8 +6262,8 @@
         </p:nvSpPr>
         <p:spPr>
           <a:xfrm>
-            <a:off x="3685032" y="1828800"/>
-            <a:ext cx="2084831" cy="256032"/>
+            <a:off x="3730752" y="1801368"/>
+            <a:ext cx="1993391" cy="274320"/>
           </a:xfrm>
           <a:prstGeom prst="rect">
             <a:avLst/>
@@ -6277,7 +6277,7 @@
           <a:lstStyle/>
           <a:p>
             <a:pPr>
-              <a:defRPr sz="850" b="1">
+              <a:defRPr sz="900" b="1">
                 <a:solidFill>
                   <a:srgbClr val="818CF8"/>
                 </a:solidFill>
@@ -6298,8 +6298,8 @@
         </p:nvSpPr>
         <p:spPr>
           <a:xfrm>
-            <a:off x="3685032" y="2084832"/>
-            <a:ext cx="2084831" cy="411480"/>
+            <a:off x="3730752" y="2075688"/>
+            <a:ext cx="1993391" cy="457200"/>
           </a:xfrm>
           <a:prstGeom prst="rect">
             <a:avLst/>
@@ -6313,7 +6313,7 @@
           <a:lstStyle/>
           <a:p>
             <a:pPr>
-              <a:defRPr sz="1300" b="1">
+              <a:defRPr sz="1500" b="1">
                 <a:solidFill>
                   <a:srgbClr val="FFFFFF"/>
                 </a:solidFill>
@@ -6334,8 +6334,8 @@
         </p:nvSpPr>
         <p:spPr>
           <a:xfrm>
-            <a:off x="3685032" y="2496312"/>
-            <a:ext cx="2084831" cy="3584448"/>
+            <a:off x="3730752" y="2551176"/>
+            <a:ext cx="1993391" cy="3666744"/>
           </a:xfrm>
           <a:prstGeom prst="rect">
             <a:avLst/>
@@ -6350,11 +6350,11 @@
           <a:p>
             <a:pPr>
               <a:spcAft>
-                <a:spcPts val="500"/>
+                <a:spcPts val="1000"/>
               </a:spcAft>
-              <a:defRPr sz="1000">
-                <a:solidFill>
-                  <a:srgbClr val="94A3B8"/>
+              <a:defRPr sz="1150">
+                <a:solidFill>
+                  <a:srgbClr val="A0AEC0"/>
                 </a:solidFill>
                 <a:latin typeface="Arial"/>
               </a:defRPr>
@@ -6366,11 +6366,11 @@
           <a:p>
             <a:pPr>
               <a:spcAft>
-                <a:spcPts val="500"/>
+                <a:spcPts val="1000"/>
               </a:spcAft>
-              <a:defRPr sz="1000">
-                <a:solidFill>
-                  <a:srgbClr val="94A3B8"/>
+              <a:defRPr sz="1150">
+                <a:solidFill>
+                  <a:srgbClr val="A0AEC0"/>
                 </a:solidFill>
                 <a:latin typeface="Arial"/>
               </a:defRPr>
@@ -6389,8 +6389,8 @@
         </p:nvSpPr>
         <p:spPr>
           <a:xfrm>
-            <a:off x="6181344" y="1645920"/>
-            <a:ext cx="2542032" cy="4572000"/>
+            <a:off x="6181344" y="1600200"/>
+            <a:ext cx="2542032" cy="4754880"/>
           </a:xfrm>
           <a:prstGeom prst="roundRect">
             <a:avLst/>
@@ -6434,8 +6434,8 @@
         </p:nvSpPr>
         <p:spPr>
           <a:xfrm>
-            <a:off x="6409944" y="1645920"/>
-            <a:ext cx="1645920" cy="36576"/>
+            <a:off x="6455664" y="1600200"/>
+            <a:ext cx="1993391" cy="41148"/>
           </a:xfrm>
           <a:prstGeom prst="roundRect">
             <a:avLst/>
@@ -6477,8 +6477,8 @@
         </p:nvSpPr>
         <p:spPr>
           <a:xfrm>
-            <a:off x="6409944" y="1828800"/>
-            <a:ext cx="2084831" cy="256032"/>
+            <a:off x="6455664" y="1801368"/>
+            <a:ext cx="1993391" cy="274320"/>
           </a:xfrm>
           <a:prstGeom prst="rect">
             <a:avLst/>
@@ -6492,7 +6492,7 @@
           <a:lstStyle/>
           <a:p>
             <a:pPr>
-              <a:defRPr sz="850" b="1">
+              <a:defRPr sz="900" b="1">
                 <a:solidFill>
                   <a:srgbClr val="38BDF8"/>
                 </a:solidFill>
@@ -6513,8 +6513,8 @@
         </p:nvSpPr>
         <p:spPr>
           <a:xfrm>
-            <a:off x="6409944" y="2084832"/>
-            <a:ext cx="2084831" cy="411480"/>
+            <a:off x="6455664" y="2075688"/>
+            <a:ext cx="1993391" cy="457200"/>
           </a:xfrm>
           <a:prstGeom prst="rect">
             <a:avLst/>
@@ -6528,7 +6528,7 @@
           <a:lstStyle/>
           <a:p>
             <a:pPr>
-              <a:defRPr sz="1300" b="1">
+              <a:defRPr sz="1500" b="1">
                 <a:solidFill>
                   <a:srgbClr val="FFFFFF"/>
                 </a:solidFill>
@@ -6549,8 +6549,8 @@
         </p:nvSpPr>
         <p:spPr>
           <a:xfrm>
-            <a:off x="6409944" y="2496312"/>
-            <a:ext cx="2084831" cy="3584448"/>
+            <a:off x="6455664" y="2551176"/>
+            <a:ext cx="1993391" cy="3666744"/>
           </a:xfrm>
           <a:prstGeom prst="rect">
             <a:avLst/>
@@ -6565,11 +6565,11 @@
           <a:p>
             <a:pPr>
               <a:spcAft>
-                <a:spcPts val="500"/>
+                <a:spcPts val="1000"/>
               </a:spcAft>
-              <a:defRPr sz="1000">
-                <a:solidFill>
-                  <a:srgbClr val="94A3B8"/>
+              <a:defRPr sz="1150">
+                <a:solidFill>
+                  <a:srgbClr val="A0AEC0"/>
                 </a:solidFill>
                 <a:latin typeface="Arial"/>
               </a:defRPr>
@@ -6581,11 +6581,11 @@
           <a:p>
             <a:pPr>
               <a:spcAft>
-                <a:spcPts val="500"/>
+                <a:spcPts val="1000"/>
               </a:spcAft>
-              <a:defRPr sz="1000">
-                <a:solidFill>
-                  <a:srgbClr val="94A3B8"/>
+              <a:defRPr sz="1150">
+                <a:solidFill>
+                  <a:srgbClr val="A0AEC0"/>
                 </a:solidFill>
                 <a:latin typeface="Arial"/>
               </a:defRPr>
@@ -6604,8 +6604,8 @@
         </p:nvSpPr>
         <p:spPr>
           <a:xfrm>
-            <a:off x="8906256" y="1645920"/>
-            <a:ext cx="2542032" cy="4572000"/>
+            <a:off x="8906256" y="1600200"/>
+            <a:ext cx="2542032" cy="4754880"/>
           </a:xfrm>
           <a:prstGeom prst="roundRect">
             <a:avLst/>
@@ -6649,8 +6649,8 @@
         </p:nvSpPr>
         <p:spPr>
           <a:xfrm>
-            <a:off x="9134856" y="1645920"/>
-            <a:ext cx="1645920" cy="36576"/>
+            <a:off x="9180576" y="1600200"/>
+            <a:ext cx="1993391" cy="41148"/>
           </a:xfrm>
           <a:prstGeom prst="roundRect">
             <a:avLst/>
@@ -6692,8 +6692,8 @@
         </p:nvSpPr>
         <p:spPr>
           <a:xfrm>
-            <a:off x="9134856" y="1828800"/>
-            <a:ext cx="2084831" cy="256032"/>
+            <a:off x="9180576" y="1801368"/>
+            <a:ext cx="1993391" cy="274320"/>
           </a:xfrm>
           <a:prstGeom prst="rect">
             <a:avLst/>
@@ -6707,7 +6707,7 @@
           <a:lstStyle/>
           <a:p>
             <a:pPr>
-              <a:defRPr sz="850" b="1">
+              <a:defRPr sz="900" b="1">
                 <a:solidFill>
                   <a:srgbClr val="10B981"/>
                 </a:solidFill>
@@ -6728,8 +6728,8 @@
         </p:nvSpPr>
         <p:spPr>
           <a:xfrm>
-            <a:off x="9134856" y="2084832"/>
-            <a:ext cx="2084831" cy="411480"/>
+            <a:off x="9180576" y="2075688"/>
+            <a:ext cx="1993391" cy="457200"/>
           </a:xfrm>
           <a:prstGeom prst="rect">
             <a:avLst/>
@@ -6743,7 +6743,7 @@
           <a:lstStyle/>
           <a:p>
             <a:pPr>
-              <a:defRPr sz="1300" b="1">
+              <a:defRPr sz="1500" b="1">
                 <a:solidFill>
                   <a:srgbClr val="FFFFFF"/>
                 </a:solidFill>
@@ -6764,8 +6764,8 @@
         </p:nvSpPr>
         <p:spPr>
           <a:xfrm>
-            <a:off x="9134856" y="2496312"/>
-            <a:ext cx="2084831" cy="3584448"/>
+            <a:off x="9180576" y="2551176"/>
+            <a:ext cx="1993391" cy="3666744"/>
           </a:xfrm>
           <a:prstGeom prst="rect">
             <a:avLst/>
@@ -6780,11 +6780,11 @@
           <a:p>
             <a:pPr>
               <a:spcAft>
-                <a:spcPts val="500"/>
+                <a:spcPts val="1000"/>
               </a:spcAft>
-              <a:defRPr sz="1000">
-                <a:solidFill>
-                  <a:srgbClr val="94A3B8"/>
+              <a:defRPr sz="1150">
+                <a:solidFill>
+                  <a:srgbClr val="A0AEC0"/>
                 </a:solidFill>
                 <a:latin typeface="Arial"/>
               </a:defRPr>
@@ -6796,11 +6796,11 @@
           <a:p>
             <a:pPr>
               <a:spcAft>
-                <a:spcPts val="500"/>
+                <a:spcPts val="1000"/>
               </a:spcAft>
-              <a:defRPr sz="1000">
-                <a:solidFill>
-                  <a:srgbClr val="94A3B8"/>
+              <a:defRPr sz="1150">
+                <a:solidFill>
+                  <a:srgbClr val="A0AEC0"/>
                 </a:solidFill>
                 <a:latin typeface="Arial"/>
               </a:defRPr>
@@ -6881,7 +6881,7 @@
         <p:spPr>
           <a:xfrm>
             <a:off x="731520" y="365760"/>
-            <a:ext cx="10698480" cy="292608"/>
+            <a:ext cx="10698480" cy="320040"/>
           </a:xfrm>
           <a:prstGeom prst="rect">
             <a:avLst/>
@@ -6895,7 +6895,7 @@
           <a:lstStyle/>
           <a:p>
             <a:pPr>
-              <a:defRPr sz="950" b="1">
+              <a:defRPr sz="1000" b="1">
                 <a:solidFill>
                   <a:srgbClr val="00F5A0"/>
                 </a:solidFill>
@@ -6917,7 +6917,7 @@
         <p:spPr>
           <a:xfrm>
             <a:off x="731520" y="658368"/>
-            <a:ext cx="10698480" cy="594360"/>
+            <a:ext cx="10698480" cy="640080"/>
           </a:xfrm>
           <a:prstGeom prst="rect">
             <a:avLst/>
@@ -6931,7 +6931,7 @@
           <a:lstStyle/>
           <a:p>
             <a:pPr>
-              <a:defRPr sz="2200" b="1">
+              <a:defRPr sz="2400" b="1">
                 <a:solidFill>
                   <a:srgbClr val="FFFFFF"/>
                 </a:solidFill>
@@ -6952,8 +6952,8 @@
         </p:nvSpPr>
         <p:spPr>
           <a:xfrm>
-            <a:off x="731520" y="1298448"/>
-            <a:ext cx="10728655" cy="13716"/>
+            <a:off x="731520" y="1325880"/>
+            <a:ext cx="10728655" cy="16459"/>
           </a:xfrm>
           <a:prstGeom prst="rect">
             <a:avLst/>
@@ -6995,8 +6995,8 @@
         </p:nvSpPr>
         <p:spPr>
           <a:xfrm>
-            <a:off x="731520" y="1298448"/>
-            <a:ext cx="1097280" cy="22860"/>
+            <a:off x="731520" y="1325880"/>
+            <a:ext cx="1371600" cy="27432"/>
           </a:xfrm>
           <a:prstGeom prst="rect">
             <a:avLst/>
@@ -7038,8 +7038,8 @@
         </p:nvSpPr>
         <p:spPr>
           <a:xfrm>
-            <a:off x="731520" y="1645920"/>
-            <a:ext cx="10728655" cy="4572000"/>
+            <a:off x="731520" y="1600200"/>
+            <a:ext cx="10728655" cy="4754880"/>
           </a:xfrm>
           <a:prstGeom prst="roundRect">
             <a:avLst/>
@@ -7083,7 +7083,7 @@
         </p:nvSpPr>
         <p:spPr>
           <a:xfrm>
-            <a:off x="1005840" y="1828800"/>
+            <a:off x="1005840" y="1783080"/>
             <a:ext cx="10149840" cy="365760"/>
           </a:xfrm>
           <a:prstGeom prst="rect">
@@ -7098,7 +7098,7 @@
           <a:lstStyle/>
           <a:p>
             <a:pPr>
-              <a:defRPr sz="1000" b="1">
+              <a:defRPr sz="1100" b="1">
                 <a:solidFill>
                   <a:srgbClr val="00F5A0"/>
                 </a:solidFill>
@@ -7106,7 +7106,7 @@
               </a:defRPr>
             </a:pPr>
             <a:r>
-              <a:t>FEATURE / CAPABILITY                TRADITIONAL PUBLIC VAULT            KNIGHT.VAULT (MIDNIGHT)</a:t>
+              <a:t>FEATURE / CAPABILITY             TRADITIONAL PUBLIC VAULT           KNIGHT.VAULT (MIDNIGHT)</a:t>
             </a:r>
           </a:p>
         </p:txBody>
@@ -7163,7 +7163,7 @@
         <p:spPr>
           <a:xfrm>
             <a:off x="1005840" y="2423160"/>
-            <a:ext cx="10149840" cy="566928"/>
+            <a:ext cx="10149840" cy="621792"/>
           </a:xfrm>
           <a:prstGeom prst="roundRect">
             <a:avLst/>
@@ -7207,8 +7207,8 @@
         </p:nvSpPr>
         <p:spPr>
           <a:xfrm>
-            <a:off x="1143000" y="2532888"/>
-            <a:ext cx="9875520" cy="365760"/>
+            <a:off x="1143000" y="2551176"/>
+            <a:ext cx="9875520" cy="411480"/>
           </a:xfrm>
           <a:prstGeom prst="rect">
             <a:avLst/>
@@ -7222,7 +7222,7 @@
           <a:lstStyle/>
           <a:p>
             <a:pPr>
-              <a:defRPr sz="950">
+              <a:defRPr sz="1000">
                 <a:solidFill>
                   <a:srgbClr val="F1F5F9"/>
                 </a:solidFill>
@@ -7230,7 +7230,7 @@
               </a:defRPr>
             </a:pPr>
             <a:r>
-              <a:t>• Owner Identity Visibility      | Publicly linkable to wallet address | ✓ Shielded via private ZK witness key</a:t>
+              <a:t>• Owner Identity Visibility    | Publicly linkable to wallet address | ✓ Shielded via private ZK witness key</a:t>
             </a:r>
           </a:p>
         </p:txBody>
@@ -7243,8 +7243,8 @@
         </p:nvSpPr>
         <p:spPr>
           <a:xfrm>
-            <a:off x="1005840" y="3108960"/>
-            <a:ext cx="10149840" cy="566928"/>
+            <a:off x="1005840" y="3154680"/>
+            <a:ext cx="10149840" cy="621792"/>
           </a:xfrm>
           <a:prstGeom prst="roundRect">
             <a:avLst/>
@@ -7288,8 +7288,8 @@
         </p:nvSpPr>
         <p:spPr>
           <a:xfrm>
-            <a:off x="1143000" y="3218688"/>
-            <a:ext cx="9875520" cy="365760"/>
+            <a:off x="1143000" y="3282696"/>
+            <a:ext cx="9875520" cy="411480"/>
           </a:xfrm>
           <a:prstGeom prst="rect">
             <a:avLst/>
@@ -7303,7 +7303,7 @@
           <a:lstStyle/>
           <a:p>
             <a:pPr>
-              <a:defRPr sz="950">
+              <a:defRPr sz="1000">
                 <a:solidFill>
                   <a:srgbClr val="F1F5F9"/>
                 </a:solidFill>
@@ -7311,7 +7311,7 @@
               </a:defRPr>
             </a:pPr>
             <a:r>
-              <a:t>• Payer Friction                 | Requires native gas token in every wallet | ✓ Zero-gas sponsored checkout flow</a:t>
+              <a:t>• Payer Friction               | Requires native gas token in every wallet | ✓ Zero-gas sponsored checkout flow</a:t>
             </a:r>
           </a:p>
         </p:txBody>
@@ -7324,8 +7324,8 @@
         </p:nvSpPr>
         <p:spPr>
           <a:xfrm>
-            <a:off x="1005840" y="3794760"/>
-            <a:ext cx="10149840" cy="566928"/>
+            <a:off x="1005840" y="3886200"/>
+            <a:ext cx="10149840" cy="621792"/>
           </a:xfrm>
           <a:prstGeom prst="roundRect">
             <a:avLst/>
@@ -7369,8 +7369,8 @@
         </p:nvSpPr>
         <p:spPr>
           <a:xfrm>
-            <a:off x="1143000" y="3904488"/>
-            <a:ext cx="9875520" cy="365760"/>
+            <a:off x="1143000" y="4014215"/>
+            <a:ext cx="9875520" cy="411480"/>
           </a:xfrm>
           <a:prstGeom prst="rect">
             <a:avLst/>
@@ -7384,7 +7384,7 @@
           <a:lstStyle/>
           <a:p>
             <a:pPr>
-              <a:defRPr sz="950">
+              <a:defRPr sz="1000">
                 <a:solidFill>
                   <a:srgbClr val="F1F5F9"/>
                 </a:solidFill>
@@ -7392,7 +7392,7 @@
               </a:defRPr>
             </a:pPr>
             <a:r>
-              <a:t>• Auditability &amp; Compliance      | Scrapes block explorer (zero privacy) | ✓ Selective cryptographic QR receipts</a:t>
+              <a:t>• Auditability &amp; Compliance    | Scrapes block explorer (zero privacy) | ✓ Selective cryptographic QR receipts</a:t>
             </a:r>
           </a:p>
         </p:txBody>
@@ -7405,8 +7405,8 @@
         </p:nvSpPr>
         <p:spPr>
           <a:xfrm>
-            <a:off x="1005840" y="4480560"/>
-            <a:ext cx="10149840" cy="566928"/>
+            <a:off x="1005840" y="4617720"/>
+            <a:ext cx="10149840" cy="621792"/>
           </a:xfrm>
           <a:prstGeom prst="roundRect">
             <a:avLst/>
@@ -7450,8 +7450,8 @@
         </p:nvSpPr>
         <p:spPr>
           <a:xfrm>
-            <a:off x="1143000" y="4590288"/>
-            <a:ext cx="9875520" cy="365760"/>
+            <a:off x="1143000" y="4745736"/>
+            <a:ext cx="9875520" cy="411480"/>
           </a:xfrm>
           <a:prstGeom prst="rect">
             <a:avLst/>
@@ -7465,7 +7465,7 @@
           <a:lstStyle/>
           <a:p>
             <a:pPr>
-              <a:defRPr sz="950">
+              <a:defRPr sz="1000">
                 <a:solidFill>
                   <a:srgbClr val="F1F5F9"/>
                 </a:solidFill>
@@ -7473,7 +7473,7 @@
               </a:defRPr>
             </a:pPr>
             <a:r>
-              <a:t>• Smart Contract Engine          | EVM Bytecode (Transparent Execution) | ✓ Compact v0.20+ (ZK Circuit Compilation)</a:t>
+              <a:t>• Smart Contract Engine        | EVM Bytecode (Transparent Execution) | ✓ Compact Circuits (ZK Proof Compilation)</a:t>
             </a:r>
           </a:p>
         </p:txBody>
@@ -7486,8 +7486,8 @@
         </p:nvSpPr>
         <p:spPr>
           <a:xfrm>
-            <a:off x="1005840" y="5166360"/>
-            <a:ext cx="10149840" cy="566928"/>
+            <a:off x="1005840" y="5349240"/>
+            <a:ext cx="10149840" cy="621792"/>
           </a:xfrm>
           <a:prstGeom prst="roundRect">
             <a:avLst/>
@@ -7531,8 +7531,8 @@
         </p:nvSpPr>
         <p:spPr>
           <a:xfrm>
-            <a:off x="1143000" y="5276088"/>
-            <a:ext cx="9875520" cy="365760"/>
+            <a:off x="1143000" y="5477255"/>
+            <a:ext cx="9875520" cy="411480"/>
           </a:xfrm>
           <a:prstGeom prst="rect">
             <a:avLst/>
@@ -7546,7 +7546,7 @@
           <a:lstStyle/>
           <a:p>
             <a:pPr>
-              <a:defRPr sz="950">
+              <a:defRPr sz="1000">
                 <a:solidFill>
                   <a:srgbClr val="F1F5F9"/>
                 </a:solidFill>
@@ -7554,7 +7554,7 @@
               </a:defRPr>
             </a:pPr>
             <a:r>
-              <a:t>• Proving Architecture           | N/A (No Client Proving)            | ✓ 100% Local ProofStation (Docker :6300)</a:t>
+              <a:t>• Proving Architecture         | N/A (No Client Proving)           | ✓ 100% Local ProofStation (Docker :6300)</a:t>
             </a:r>
           </a:p>
         </p:txBody>
@@ -7629,7 +7629,7 @@
         <p:spPr>
           <a:xfrm>
             <a:off x="731520" y="365760"/>
-            <a:ext cx="10698480" cy="292608"/>
+            <a:ext cx="10698480" cy="320040"/>
           </a:xfrm>
           <a:prstGeom prst="rect">
             <a:avLst/>
@@ -7643,7 +7643,7 @@
           <a:lstStyle/>
           <a:p>
             <a:pPr>
-              <a:defRPr sz="950" b="1">
+              <a:defRPr sz="1000" b="1">
                 <a:solidFill>
                   <a:srgbClr val="00F5A0"/>
                 </a:solidFill>
@@ -7665,7 +7665,7 @@
         <p:spPr>
           <a:xfrm>
             <a:off x="731520" y="658368"/>
-            <a:ext cx="10698480" cy="594360"/>
+            <a:ext cx="10698480" cy="640080"/>
           </a:xfrm>
           <a:prstGeom prst="rect">
             <a:avLst/>
@@ -7679,7 +7679,7 @@
           <a:lstStyle/>
           <a:p>
             <a:pPr>
-              <a:defRPr sz="2200" b="1">
+              <a:defRPr sz="2400" b="1">
                 <a:solidFill>
                   <a:srgbClr val="FFFFFF"/>
                 </a:solidFill>
@@ -7700,8 +7700,8 @@
         </p:nvSpPr>
         <p:spPr>
           <a:xfrm>
-            <a:off x="731520" y="1298448"/>
-            <a:ext cx="10728655" cy="13716"/>
+            <a:off x="731520" y="1325880"/>
+            <a:ext cx="10728655" cy="16459"/>
           </a:xfrm>
           <a:prstGeom prst="rect">
             <a:avLst/>
@@ -7743,8 +7743,8 @@
         </p:nvSpPr>
         <p:spPr>
           <a:xfrm>
-            <a:off x="731520" y="1298448"/>
-            <a:ext cx="1097280" cy="22860"/>
+            <a:off x="731520" y="1325880"/>
+            <a:ext cx="1371600" cy="27432"/>
           </a:xfrm>
           <a:prstGeom prst="rect">
             <a:avLst/>
@@ -7786,8 +7786,8 @@
         </p:nvSpPr>
         <p:spPr>
           <a:xfrm>
-            <a:off x="731520" y="1645920"/>
-            <a:ext cx="3429000" cy="2926080"/>
+            <a:off x="731520" y="1600200"/>
+            <a:ext cx="3429000" cy="3108960"/>
           </a:xfrm>
           <a:prstGeom prst="roundRect">
             <a:avLst/>
@@ -7831,8 +7831,8 @@
         </p:nvSpPr>
         <p:spPr>
           <a:xfrm>
-            <a:off x="960120" y="1645920"/>
-            <a:ext cx="1645920" cy="36576"/>
+            <a:off x="1005840" y="1600200"/>
+            <a:ext cx="2011680" cy="41148"/>
           </a:xfrm>
           <a:prstGeom prst="roundRect">
             <a:avLst/>
@@ -7874,8 +7874,8 @@
         </p:nvSpPr>
         <p:spPr>
           <a:xfrm>
-            <a:off x="960120" y="1828800"/>
-            <a:ext cx="2971800" cy="256032"/>
+            <a:off x="1005840" y="1801368"/>
+            <a:ext cx="2880360" cy="274320"/>
           </a:xfrm>
           <a:prstGeom prst="rect">
             <a:avLst/>
@@ -7889,7 +7889,7 @@
           <a:lstStyle/>
           <a:p>
             <a:pPr>
-              <a:defRPr sz="850" b="1">
+              <a:defRPr sz="900" b="1">
                 <a:solidFill>
                   <a:srgbClr val="00F5A0"/>
                 </a:solidFill>
@@ -7910,8 +7910,8 @@
         </p:nvSpPr>
         <p:spPr>
           <a:xfrm>
-            <a:off x="960120" y="2084832"/>
-            <a:ext cx="2971800" cy="411480"/>
+            <a:off x="1005840" y="2075688"/>
+            <a:ext cx="2880360" cy="457200"/>
           </a:xfrm>
           <a:prstGeom prst="rect">
             <a:avLst/>
@@ -7925,7 +7925,7 @@
           <a:lstStyle/>
           <a:p>
             <a:pPr>
-              <a:defRPr sz="1300" b="1">
+              <a:defRPr sz="1500" b="1">
                 <a:solidFill>
                   <a:srgbClr val="FFFFFF"/>
                 </a:solidFill>
@@ -7946,8 +7946,8 @@
         </p:nvSpPr>
         <p:spPr>
           <a:xfrm>
-            <a:off x="960120" y="2496312"/>
-            <a:ext cx="2971800" cy="1938528"/>
+            <a:off x="1005840" y="2551176"/>
+            <a:ext cx="2880360" cy="2020824"/>
           </a:xfrm>
           <a:prstGeom prst="rect">
             <a:avLst/>
@@ -7962,11 +7962,11 @@
           <a:p>
             <a:pPr>
               <a:spcAft>
-                <a:spcPts val="500"/>
+                <a:spcPts val="800"/>
               </a:spcAft>
-              <a:defRPr sz="1000">
-                <a:solidFill>
-                  <a:srgbClr val="94A3B8"/>
+              <a:defRPr sz="1150">
+                <a:solidFill>
+                  <a:srgbClr val="A0AEC0"/>
                 </a:solidFill>
                 <a:latin typeface="Arial"/>
               </a:defRPr>
@@ -7978,27 +7978,27 @@
           <a:p>
             <a:pPr>
               <a:spcAft>
-                <a:spcPts val="500"/>
+                <a:spcPts val="800"/>
               </a:spcAft>
-              <a:defRPr sz="1000">
-                <a:solidFill>
-                  <a:srgbClr val="94A3B8"/>
+              <a:defRPr sz="1150">
+                <a:solidFill>
+                  <a:srgbClr val="A0AEC0"/>
                 </a:solidFill>
                 <a:latin typeface="Arial"/>
               </a:defRPr>
             </a:pPr>
             <a:r>
-              <a:t>•  Compact v0.20 contract deployed on Preprod.</a:t>
+              <a:t>•  Compact smart contracts on Preprod.</a:t>
             </a:r>
           </a:p>
           <a:p>
             <a:pPr>
               <a:spcAft>
-                <a:spcPts val="500"/>
+                <a:spcPts val="800"/>
               </a:spcAft>
-              <a:defRPr sz="1000">
-                <a:solidFill>
-                  <a:srgbClr val="94A3B8"/>
+              <a:defRPr sz="1150">
+                <a:solidFill>
+                  <a:srgbClr val="A0AEC0"/>
                 </a:solidFill>
                 <a:latin typeface="Arial"/>
               </a:defRPr>
@@ -8010,11 +8010,11 @@
           <a:p>
             <a:pPr>
               <a:spcAft>
-                <a:spcPts val="500"/>
+                <a:spcPts val="800"/>
               </a:spcAft>
-              <a:defRPr sz="1000">
-                <a:solidFill>
-                  <a:srgbClr val="94A3B8"/>
+              <a:defRPr sz="1150">
+                <a:solidFill>
+                  <a:srgbClr val="A0AEC0"/>
                 </a:solidFill>
                 <a:latin typeface="Arial"/>
               </a:defRPr>
@@ -8033,8 +8033,8 @@
         </p:nvSpPr>
         <p:spPr>
           <a:xfrm>
-            <a:off x="4370832" y="1645920"/>
-            <a:ext cx="3429000" cy="2926080"/>
+            <a:off x="4370832" y="1600200"/>
+            <a:ext cx="3429000" cy="3108960"/>
           </a:xfrm>
           <a:prstGeom prst="roundRect">
             <a:avLst/>
@@ -8078,8 +8078,8 @@
         </p:nvSpPr>
         <p:spPr>
           <a:xfrm>
-            <a:off x="4599432" y="1645920"/>
-            <a:ext cx="1645920" cy="36576"/>
+            <a:off x="4645152" y="1600200"/>
+            <a:ext cx="2011680" cy="41148"/>
           </a:xfrm>
           <a:prstGeom prst="roundRect">
             <a:avLst/>
@@ -8121,8 +8121,8 @@
         </p:nvSpPr>
         <p:spPr>
           <a:xfrm>
-            <a:off x="4599432" y="1828800"/>
-            <a:ext cx="2971800" cy="256032"/>
+            <a:off x="4645152" y="1801368"/>
+            <a:ext cx="2880360" cy="274320"/>
           </a:xfrm>
           <a:prstGeom prst="rect">
             <a:avLst/>
@@ -8136,7 +8136,7 @@
           <a:lstStyle/>
           <a:p>
             <a:pPr>
-              <a:defRPr sz="850" b="1">
+              <a:defRPr sz="900" b="1">
                 <a:solidFill>
                   <a:srgbClr val="818CF8"/>
                 </a:solidFill>
@@ -8157,8 +8157,8 @@
         </p:nvSpPr>
         <p:spPr>
           <a:xfrm>
-            <a:off x="4599432" y="2084832"/>
-            <a:ext cx="2971800" cy="411480"/>
+            <a:off x="4645152" y="2075688"/>
+            <a:ext cx="2880360" cy="457200"/>
           </a:xfrm>
           <a:prstGeom prst="rect">
             <a:avLst/>
@@ -8172,7 +8172,7 @@
           <a:lstStyle/>
           <a:p>
             <a:pPr>
-              <a:defRPr sz="1300" b="1">
+              <a:defRPr sz="1500" b="1">
                 <a:solidFill>
                   <a:srgbClr val="FFFFFF"/>
                 </a:solidFill>
@@ -8193,8 +8193,8 @@
         </p:nvSpPr>
         <p:spPr>
           <a:xfrm>
-            <a:off x="4599432" y="2496312"/>
-            <a:ext cx="2971800" cy="1938528"/>
+            <a:off x="4645152" y="2551176"/>
+            <a:ext cx="2880360" cy="2020824"/>
           </a:xfrm>
           <a:prstGeom prst="rect">
             <a:avLst/>
@@ -8209,11 +8209,11 @@
           <a:p>
             <a:pPr>
               <a:spcAft>
-                <a:spcPts val="500"/>
+                <a:spcPts val="800"/>
               </a:spcAft>
-              <a:defRPr sz="1000">
-                <a:solidFill>
-                  <a:srgbClr val="94A3B8"/>
+              <a:defRPr sz="1150">
+                <a:solidFill>
+                  <a:srgbClr val="A0AEC0"/>
                 </a:solidFill>
                 <a:latin typeface="Arial"/>
               </a:defRPr>
@@ -8225,11 +8225,11 @@
           <a:p>
             <a:pPr>
               <a:spcAft>
-                <a:spcPts val="500"/>
+                <a:spcPts val="800"/>
               </a:spcAft>
-              <a:defRPr sz="1000">
-                <a:solidFill>
-                  <a:srgbClr val="94A3B8"/>
+              <a:defRPr sz="1150">
+                <a:solidFill>
+                  <a:srgbClr val="A0AEC0"/>
                 </a:solidFill>
                 <a:latin typeface="Arial"/>
               </a:defRPr>
@@ -8241,11 +8241,11 @@
           <a:p>
             <a:pPr>
               <a:spcAft>
-                <a:spcPts val="500"/>
+                <a:spcPts val="800"/>
               </a:spcAft>
-              <a:defRPr sz="1000">
-                <a:solidFill>
-                  <a:srgbClr val="94A3B8"/>
+              <a:defRPr sz="1150">
+                <a:solidFill>
+                  <a:srgbClr val="A0AEC0"/>
                 </a:solidFill>
                 <a:latin typeface="Arial"/>
               </a:defRPr>
@@ -8257,11 +8257,11 @@
           <a:p>
             <a:pPr>
               <a:spcAft>
-                <a:spcPts val="500"/>
+                <a:spcPts val="800"/>
               </a:spcAft>
-              <a:defRPr sz="1000">
-                <a:solidFill>
-                  <a:srgbClr val="94A3B8"/>
+              <a:defRPr sz="1150">
+                <a:solidFill>
+                  <a:srgbClr val="A0AEC0"/>
                 </a:solidFill>
                 <a:latin typeface="Arial"/>
               </a:defRPr>
@@ -8280,8 +8280,8 @@
         </p:nvSpPr>
         <p:spPr>
           <a:xfrm>
-            <a:off x="8028431" y="1645920"/>
-            <a:ext cx="3429000" cy="2926080"/>
+            <a:off x="8028431" y="1600200"/>
+            <a:ext cx="3429000" cy="3108960"/>
           </a:xfrm>
           <a:prstGeom prst="roundRect">
             <a:avLst/>
@@ -8325,8 +8325,8 @@
         </p:nvSpPr>
         <p:spPr>
           <a:xfrm>
-            <a:off x="8257031" y="1645920"/>
-            <a:ext cx="1645920" cy="36576"/>
+            <a:off x="8302752" y="1600200"/>
+            <a:ext cx="2011680" cy="41148"/>
           </a:xfrm>
           <a:prstGeom prst="roundRect">
             <a:avLst/>
@@ -8368,8 +8368,8 @@
         </p:nvSpPr>
         <p:spPr>
           <a:xfrm>
-            <a:off x="8257031" y="1828800"/>
-            <a:ext cx="2971800" cy="256032"/>
+            <a:off x="8302752" y="1801368"/>
+            <a:ext cx="2880360" cy="274320"/>
           </a:xfrm>
           <a:prstGeom prst="rect">
             <a:avLst/>
@@ -8383,7 +8383,7 @@
           <a:lstStyle/>
           <a:p>
             <a:pPr>
-              <a:defRPr sz="850" b="1">
+              <a:defRPr sz="900" b="1">
                 <a:solidFill>
                   <a:srgbClr val="38BDF8"/>
                 </a:solidFill>
@@ -8404,8 +8404,8 @@
         </p:nvSpPr>
         <p:spPr>
           <a:xfrm>
-            <a:off x="8257031" y="2084832"/>
-            <a:ext cx="2971800" cy="411480"/>
+            <a:off x="8302752" y="2075688"/>
+            <a:ext cx="2880360" cy="457200"/>
           </a:xfrm>
           <a:prstGeom prst="rect">
             <a:avLst/>
@@ -8419,7 +8419,7 @@
           <a:lstStyle/>
           <a:p>
             <a:pPr>
-              <a:defRPr sz="1300" b="1">
+              <a:defRPr sz="1500" b="1">
                 <a:solidFill>
                   <a:srgbClr val="FFFFFF"/>
                 </a:solidFill>
@@ -8440,8 +8440,8 @@
         </p:nvSpPr>
         <p:spPr>
           <a:xfrm>
-            <a:off x="8257031" y="2496312"/>
-            <a:ext cx="2971800" cy="1938528"/>
+            <a:off x="8302752" y="2551176"/>
+            <a:ext cx="2880360" cy="2020824"/>
           </a:xfrm>
           <a:prstGeom prst="rect">
             <a:avLst/>
@@ -8456,11 +8456,11 @@
           <a:p>
             <a:pPr>
               <a:spcAft>
-                <a:spcPts val="500"/>
+                <a:spcPts val="800"/>
               </a:spcAft>
-              <a:defRPr sz="1000">
-                <a:solidFill>
-                  <a:srgbClr val="94A3B8"/>
+              <a:defRPr sz="1150">
+                <a:solidFill>
+                  <a:srgbClr val="A0AEC0"/>
                 </a:solidFill>
                 <a:latin typeface="Arial"/>
               </a:defRPr>
@@ -8472,11 +8472,11 @@
           <a:p>
             <a:pPr>
               <a:spcAft>
-                <a:spcPts val="500"/>
+                <a:spcPts val="800"/>
               </a:spcAft>
-              <a:defRPr sz="1000">
-                <a:solidFill>
-                  <a:srgbClr val="94A3B8"/>
+              <a:defRPr sz="1150">
+                <a:solidFill>
+                  <a:srgbClr val="A0AEC0"/>
                 </a:solidFill>
                 <a:latin typeface="Arial"/>
               </a:defRPr>
@@ -8488,11 +8488,11 @@
           <a:p>
             <a:pPr>
               <a:spcAft>
-                <a:spcPts val="500"/>
+                <a:spcPts val="800"/>
               </a:spcAft>
-              <a:defRPr sz="1000">
-                <a:solidFill>
-                  <a:srgbClr val="94A3B8"/>
+              <a:defRPr sz="1150">
+                <a:solidFill>
+                  <a:srgbClr val="A0AEC0"/>
                 </a:solidFill>
                 <a:latin typeface="Arial"/>
               </a:defRPr>
@@ -8504,11 +8504,11 @@
           <a:p>
             <a:pPr>
               <a:spcAft>
-                <a:spcPts val="500"/>
+                <a:spcPts val="800"/>
               </a:spcAft>
-              <a:defRPr sz="1000">
-                <a:solidFill>
-                  <a:srgbClr val="94A3B8"/>
+              <a:defRPr sz="1150">
+                <a:solidFill>
+                  <a:srgbClr val="A0AEC0"/>
                 </a:solidFill>
                 <a:latin typeface="Arial"/>
               </a:defRPr>
@@ -8527,8 +8527,8 @@
         </p:nvSpPr>
         <p:spPr>
           <a:xfrm>
-            <a:off x="731520" y="4800600"/>
-            <a:ext cx="10728655" cy="1417320"/>
+            <a:off x="731520" y="4892040"/>
+            <a:ext cx="10728655" cy="1463040"/>
           </a:xfrm>
           <a:prstGeom prst="roundRect">
             <a:avLst/>
@@ -8572,8 +8572,8 @@
         </p:nvSpPr>
         <p:spPr>
           <a:xfrm>
-            <a:off x="1005840" y="4937760"/>
-            <a:ext cx="10149840" cy="1097280"/>
+            <a:off x="1005840" y="5029200"/>
+            <a:ext cx="10149840" cy="1188720"/>
           </a:xfrm>
           <a:prstGeom prst="rect">
             <a:avLst/>
@@ -8590,7 +8590,7 @@
               <a:spcAft>
                 <a:spcPts val="400"/>
               </a:spcAft>
-              <a:defRPr sz="1300" b="1">
+              <a:defRPr sz="1400" b="1">
                 <a:solidFill>
                   <a:srgbClr val="00F5A0"/>
                 </a:solidFill>
@@ -8606,22 +8606,22 @@
               <a:spcAft>
                 <a:spcPts val="400"/>
               </a:spcAft>
+              <a:defRPr sz="1100">
+                <a:solidFill>
+                  <a:srgbClr val="FFFFFF"/>
+                </a:solidFill>
+                <a:latin typeface="Arial"/>
+              </a:defRPr>
+            </a:pPr>
+            <a:r>
+              <a:t>Vibe Coder, Systems Builder &amp; Applied AI/ML • Automotive &amp; Embedded Systems Engineering • Applied Mathematics</a:t>
+            </a:r>
+          </a:p>
+          <a:p>
+            <a:pPr>
               <a:defRPr sz="1000">
                 <a:solidFill>
-                  <a:srgbClr val="FFFFFF"/>
-                </a:solidFill>
-                <a:latin typeface="Arial"/>
-              </a:defRPr>
-            </a:pPr>
-            <a:r>
-              <a:t>Vibe Coder, Systems Builder &amp; Applied AI/ML • Automotive &amp; Embedded Systems Engineering • Applied Mathematics</a:t>
-            </a:r>
-          </a:p>
-          <a:p>
-            <a:pPr>
-              <a:defRPr sz="950">
-                <a:solidFill>
-                  <a:srgbClr val="94A3B8"/>
+                  <a:srgbClr val="A0AEC0"/>
                 </a:solidFill>
                 <a:latin typeface="Arial"/>
               </a:defRPr>
